--- a/docs/BenchmarkingService.pptx
+++ b/docs/BenchmarkingService.pptx
@@ -4146,7 +4146,7 @@
                 </a:solidFill>
                 <a:latin typeface="Calibri"/>
               </a:rPr>
-              <a:t>MLflow per-service; S3 shared</a:t>
+              <a:t>MLflow with Service; S3 in the cloud</a:t>
             </a:r>
           </a:p>
           <a:p>
@@ -4158,7 +4158,7 @@
                 </a:solidFill>
                 <a:latin typeface="Calibri"/>
               </a:rPr>
-              <a:t>Service emits + reads its own MLflow traces; S3 is the cross-service analytics sink.</a:t>
+              <a:t>MLflow is co-located with the Service (per-service traces it emits + reads), not in the workload cluster; S3 is an external cloud service — the shared cross-service sink.</a:t>
             </a:r>
           </a:p>
         </p:txBody>
@@ -4253,8 +4253,8 @@
         </p:nvSpPr>
         <p:spPr>
           <a:xfrm>
-            <a:off x="365760" y="1371600"/>
-            <a:ext cx="2148840" cy="1051560"/>
+            <a:off x="365760" y="1188720"/>
+            <a:ext cx="2560320" cy="777240"/>
           </a:xfrm>
           <a:prstGeom prst="roundRect">
             <a:avLst/>
@@ -4320,8 +4320,8 @@
         </p:nvSpPr>
         <p:spPr>
           <a:xfrm>
-            <a:off x="365760" y="3017520"/>
-            <a:ext cx="2560320" cy="2148840"/>
+            <a:off x="365760" y="2240280"/>
+            <a:ext cx="2560320" cy="1691640"/>
           </a:xfrm>
           <a:prstGeom prst="roundRect">
             <a:avLst/>
@@ -4413,18 +4413,6 @@
               <a:t>• deploy / run / report</a:t>
             </a:r>
           </a:p>
-          <a:p>
-            <a:pPr algn="l" lvl="1"/>
-            <a:r>
-              <a:rPr sz="1000" b="0" i="0">
-                <a:solidFill>
-                  <a:srgbClr val="FFFFFF"/>
-                </a:solidFill>
-                <a:latin typeface="Calibri"/>
-              </a:rPr>
-              <a:t>• MLflow emit+read · S3 export</a:t>
-            </a:r>
-          </a:p>
         </p:txBody>
       </p:sp>
       <p:sp>
@@ -4435,8 +4423,142 @@
         </p:nvSpPr>
         <p:spPr>
           <a:xfrm>
+            <a:off x="365760" y="4343400"/>
+            <a:ext cx="1234440" cy="868680"/>
+          </a:xfrm>
+          <a:prstGeom prst="roundRect">
+            <a:avLst/>
+          </a:prstGeom>
+          <a:solidFill>
+            <a:srgbClr val="6B6B6B"/>
+          </a:solidFill>
+          <a:ln w="12700">
+            <a:solidFill>
+              <a:srgbClr val="E87A1E"/>
+            </a:solidFill>
+          </a:ln>
+          <a:effectLst/>
+        </p:spPr>
+        <p:style>
+          <a:lnRef idx="1">
+            <a:schemeClr val="accent1"/>
+          </a:lnRef>
+          <a:fillRef idx="3">
+            <a:schemeClr val="accent1"/>
+          </a:fillRef>
+          <a:effectRef idx="2">
+            <a:schemeClr val="accent1"/>
+          </a:effectRef>
+          <a:fontRef idx="minor">
+            <a:schemeClr val="lt1"/>
+          </a:fontRef>
+        </p:style>
+        <p:txBody>
+          <a:bodyPr rtlCol="0" anchor="ctr" wrap="square" tIns="25400" bIns="25400"/>
+          <a:lstStyle/>
+          <a:p>
+            <a:pPr algn="ctr"/>
+            <a:r>
+              <a:rPr sz="1300" b="1" i="0">
+                <a:solidFill>
+                  <a:srgbClr val="FFFFFF"/>
+                </a:solidFill>
+                <a:latin typeface="Calibri"/>
+              </a:rPr>
+              <a:t>S3</a:t>
+            </a:r>
+          </a:p>
+          <a:p>
+            <a:pPr algn="ctr"/>
+            <a:r>
+              <a:rPr sz="1000" b="0" i="0">
+                <a:solidFill>
+                  <a:srgbClr val="EEEFF1"/>
+                </a:solidFill>
+                <a:latin typeface="Calibri"/>
+              </a:rPr>
+              <a:t>cloud (external)</a:t>
+            </a:r>
+          </a:p>
+        </p:txBody>
+      </p:sp>
+      <p:sp>
+        <p:nvSpPr>
+          <p:cNvPr id="6" name="Rounded Rectangle 5"/>
+          <p:cNvSpPr/>
+          <p:nvPr/>
+        </p:nvSpPr>
+        <p:spPr>
+          <a:xfrm>
+            <a:off x="1691640" y="4343400"/>
+            <a:ext cx="1234440" cy="868680"/>
+          </a:xfrm>
+          <a:prstGeom prst="roundRect">
+            <a:avLst/>
+          </a:prstGeom>
+          <a:solidFill>
+            <a:srgbClr val="6B6B6B"/>
+          </a:solidFill>
+          <a:ln w="12700">
+            <a:solidFill>
+              <a:srgbClr val="6B6B6B"/>
+            </a:solidFill>
+          </a:ln>
+          <a:effectLst/>
+        </p:spPr>
+        <p:style>
+          <a:lnRef idx="1">
+            <a:schemeClr val="accent1"/>
+          </a:lnRef>
+          <a:fillRef idx="3">
+            <a:schemeClr val="accent1"/>
+          </a:fillRef>
+          <a:effectRef idx="2">
+            <a:schemeClr val="accent1"/>
+          </a:effectRef>
+          <a:fontRef idx="minor">
+            <a:schemeClr val="lt1"/>
+          </a:fontRef>
+        </p:style>
+        <p:txBody>
+          <a:bodyPr rtlCol="0" anchor="ctr" wrap="square" tIns="25400" bIns="25400"/>
+          <a:lstStyle/>
+          <a:p>
+            <a:pPr algn="ctr"/>
+            <a:r>
+              <a:rPr sz="1300" b="1" i="0">
+                <a:solidFill>
+                  <a:srgbClr val="FFFFFF"/>
+                </a:solidFill>
+                <a:latin typeface="Calibri"/>
+              </a:rPr>
+              <a:t>MLflow</a:t>
+            </a:r>
+          </a:p>
+          <a:p>
+            <a:pPr algn="ctr"/>
+            <a:r>
+              <a:rPr sz="1000" b="0" i="0">
+                <a:solidFill>
+                  <a:srgbClr val="EEEFF1"/>
+                </a:solidFill>
+                <a:latin typeface="Calibri"/>
+              </a:rPr>
+              <a:t>same cluster as Service</a:t>
+            </a:r>
+          </a:p>
+        </p:txBody>
+      </p:sp>
+      <p:sp>
+        <p:nvSpPr>
+          <p:cNvPr id="7" name="Rounded Rectangle 6"/>
+          <p:cNvSpPr/>
+          <p:nvPr/>
+        </p:nvSpPr>
+        <p:spPr>
+          <a:xfrm>
             <a:off x="3904488" y="1298448"/>
-            <a:ext cx="8001000" cy="4160520"/>
+            <a:ext cx="8001000" cy="3977639"/>
           </a:xfrm>
           <a:prstGeom prst="roundRect">
             <a:avLst/>
@@ -4473,14 +4595,14 @@
       </p:sp>
       <p:sp>
         <p:nvSpPr>
-          <p:cNvPr id="6" name="Rounded Rectangle 5"/>
+          <p:cNvPr id="8" name="Rounded Rectangle 7"/>
           <p:cNvSpPr/>
           <p:nvPr/>
         </p:nvSpPr>
         <p:spPr>
           <a:xfrm>
             <a:off x="3803904" y="1197864"/>
-            <a:ext cx="8001000" cy="4160520"/>
+            <a:ext cx="8001000" cy="3977639"/>
           </a:xfrm>
           <a:prstGeom prst="roundRect">
             <a:avLst/>
@@ -4517,14 +4639,14 @@
       </p:sp>
       <p:sp>
         <p:nvSpPr>
-          <p:cNvPr id="7" name="Rounded Rectangle 6"/>
+          <p:cNvPr id="9" name="Rounded Rectangle 8"/>
           <p:cNvSpPr/>
           <p:nvPr/>
         </p:nvSpPr>
         <p:spPr>
           <a:xfrm>
             <a:off x="3703320" y="1097280"/>
-            <a:ext cx="8001000" cy="4160520"/>
+            <a:ext cx="8001000" cy="3977639"/>
           </a:xfrm>
           <a:prstGeom prst="roundRect">
             <a:avLst/>
@@ -4564,7 +4686,7 @@
       </p:sp>
       <p:sp>
         <p:nvSpPr>
-          <p:cNvPr id="8" name="TextBox 7"/>
+          <p:cNvPr id="10" name="TextBox 9"/>
           <p:cNvSpPr txBox="1"/>
           <p:nvPr/>
         </p:nvSpPr>
@@ -4603,7 +4725,7 @@
       </p:sp>
       <p:sp>
         <p:nvSpPr>
-          <p:cNvPr id="9" name="Rounded Rectangle 8"/>
+          <p:cNvPr id="11" name="Rounded Rectangle 10"/>
           <p:cNvSpPr/>
           <p:nvPr/>
         </p:nvSpPr>
@@ -4670,7 +4792,7 @@
       </p:sp>
       <p:sp>
         <p:nvSpPr>
-          <p:cNvPr id="10" name="Rounded Rectangle 9"/>
+          <p:cNvPr id="12" name="Rounded Rectangle 11"/>
           <p:cNvSpPr/>
           <p:nvPr/>
         </p:nvSpPr>
@@ -4737,74 +4859,7 @@
       </p:sp>
       <p:sp>
         <p:nvSpPr>
-          <p:cNvPr id="11" name="Rounded Rectangle 10"/>
-          <p:cNvSpPr/>
-          <p:nvPr/>
-        </p:nvSpPr>
-        <p:spPr>
-          <a:xfrm>
-            <a:off x="3977639" y="4114800"/>
-            <a:ext cx="2331720" cy="868680"/>
-          </a:xfrm>
-          <a:prstGeom prst="roundRect">
-            <a:avLst/>
-          </a:prstGeom>
-          <a:solidFill>
-            <a:srgbClr val="6B6B6B"/>
-          </a:solidFill>
-          <a:ln w="12700">
-            <a:solidFill>
-              <a:srgbClr val="6B6B6B"/>
-            </a:solidFill>
-          </a:ln>
-          <a:effectLst/>
-        </p:spPr>
-        <p:style>
-          <a:lnRef idx="1">
-            <a:schemeClr val="accent1"/>
-          </a:lnRef>
-          <a:fillRef idx="3">
-            <a:schemeClr val="accent1"/>
-          </a:fillRef>
-          <a:effectRef idx="2">
-            <a:schemeClr val="accent1"/>
-          </a:effectRef>
-          <a:fontRef idx="minor">
-            <a:schemeClr val="lt1"/>
-          </a:fontRef>
-        </p:style>
-        <p:txBody>
-          <a:bodyPr rtlCol="0" anchor="ctr" wrap="square" tIns="25400" bIns="25400"/>
-          <a:lstStyle/>
-          <a:p>
-            <a:pPr algn="ctr"/>
-            <a:r>
-              <a:rPr sz="1300" b="1" i="0">
-                <a:solidFill>
-                  <a:srgbClr val="FFFFFF"/>
-                </a:solidFill>
-                <a:latin typeface="Calibri"/>
-              </a:rPr>
-              <a:t>MLflow</a:t>
-            </a:r>
-          </a:p>
-          <a:p>
-            <a:pPr algn="ctr"/>
-            <a:r>
-              <a:rPr sz="1000" b="0" i="0">
-                <a:solidFill>
-                  <a:srgbClr val="EEEFF1"/>
-                </a:solidFill>
-                <a:latin typeface="Calibri"/>
-              </a:rPr>
-              <a:t>traces (per-service)</a:t>
-            </a:r>
-          </a:p>
-        </p:txBody>
-      </p:sp>
-      <p:sp>
-        <p:nvSpPr>
-          <p:cNvPr id="12" name="Rounded Rectangle 11"/>
+          <p:cNvPr id="13" name="Rounded Rectangle 12"/>
           <p:cNvSpPr/>
           <p:nvPr/>
         </p:nvSpPr>
@@ -4850,7 +4905,7 @@
       </p:sp>
       <p:sp>
         <p:nvSpPr>
-          <p:cNvPr id="13" name="TextBox 12"/>
+          <p:cNvPr id="14" name="TextBox 13"/>
           <p:cNvSpPr txBox="1"/>
           <p:nvPr/>
         </p:nvSpPr>
@@ -4889,7 +4944,7 @@
       </p:sp>
       <p:sp>
         <p:nvSpPr>
-          <p:cNvPr id="14" name="Rounded Rectangle 13"/>
+          <p:cNvPr id="15" name="Rounded Rectangle 14"/>
           <p:cNvSpPr/>
           <p:nvPr/>
         </p:nvSpPr>
@@ -4956,7 +5011,7 @@
       </p:sp>
       <p:sp>
         <p:nvSpPr>
-          <p:cNvPr id="15" name="Rounded Rectangle 14"/>
+          <p:cNvPr id="16" name="Rounded Rectangle 15"/>
           <p:cNvSpPr/>
           <p:nvPr/>
         </p:nvSpPr>
@@ -5023,24 +5078,24 @@
       </p:sp>
       <p:sp>
         <p:nvSpPr>
-          <p:cNvPr id="16" name="Rounded Rectangle 15"/>
+          <p:cNvPr id="17" name="Rounded Rectangle 16"/>
           <p:cNvSpPr/>
           <p:nvPr/>
         </p:nvSpPr>
         <p:spPr>
           <a:xfrm>
-            <a:off x="8366760" y="4114800"/>
-            <a:ext cx="3154680" cy="868680"/>
+            <a:off x="6126480" y="4114800"/>
+            <a:ext cx="2468880" cy="713232"/>
           </a:xfrm>
           <a:prstGeom prst="roundRect">
             <a:avLst/>
           </a:prstGeom>
           <a:solidFill>
-            <a:srgbClr val="6B6B6B"/>
+            <a:srgbClr val="3D6E70"/>
           </a:solidFill>
           <a:ln w="12700">
             <a:solidFill>
-              <a:srgbClr val="E87A1E"/>
+              <a:srgbClr val="3D6E70"/>
             </a:solidFill>
           </a:ln>
           <a:effectLst/>
@@ -5065,39 +5120,39 @@
           <a:p>
             <a:pPr algn="ctr"/>
             <a:r>
-              <a:rPr sz="1300" b="1" i="0">
+              <a:rPr sz="1250" b="1" i="0">
                 <a:solidFill>
                   <a:srgbClr val="FFFFFF"/>
                 </a:solidFill>
                 <a:latin typeface="Calibri"/>
               </a:rPr>
-              <a:t>S3</a:t>
+              <a:t>OTEL collector</a:t>
             </a:r>
           </a:p>
           <a:p>
             <a:pPr algn="ctr"/>
             <a:r>
-              <a:rPr sz="1000" b="0" i="0">
-                <a:solidFill>
-                  <a:srgbClr val="EEEFF1"/>
-                </a:solidFill>
-                <a:latin typeface="Calibri"/>
-              </a:rPr>
-              <a:t>shared cross-service sink</a:t>
+              <a:rPr sz="950" b="0" i="0">
+                <a:solidFill>
+                  <a:srgbClr val="E4F0F0"/>
+                </a:solidFill>
+                <a:latin typeface="Calibri"/>
+              </a:rPr>
+              <a:t>forwards agent spans → MLflow</a:t>
             </a:r>
           </a:p>
         </p:txBody>
       </p:sp>
       <p:cxnSp>
         <p:nvCxnSpPr>
-          <p:cNvPr id="17" name="Connector 16"/>
+          <p:cNvPr id="18" name="Connector 17"/>
           <p:cNvCxnSpPr/>
           <p:nvPr/>
         </p:nvCxnSpPr>
         <p:spPr>
           <a:xfrm>
-            <a:off x="2532888" y="1783080"/>
-            <a:ext cx="1444751" cy="320040"/>
+            <a:off x="2926080" y="1554480"/>
+            <a:ext cx="1051559" cy="502920"/>
           </a:xfrm>
           <a:prstGeom prst="line">
             <a:avLst/>
@@ -5127,13 +5182,13 @@
       </p:cxnSp>
       <p:sp>
         <p:nvSpPr>
-          <p:cNvPr id="18" name="Oval 17"/>
+          <p:cNvPr id="19" name="Oval 18"/>
           <p:cNvSpPr/>
           <p:nvPr/>
         </p:nvSpPr>
         <p:spPr>
           <a:xfrm>
-            <a:off x="3127248" y="1728216"/>
+            <a:off x="3282696" y="1664208"/>
             <a:ext cx="237744" cy="237744"/>
           </a:xfrm>
           <a:prstGeom prst="ellipse">
@@ -5164,7 +5219,7 @@
           </a:fontRef>
         </p:style>
         <p:txBody>
-          <a:bodyPr rtlCol="0" anchor="ctr"/>
+          <a:bodyPr rtlCol="0" anchor="ctr" wrap="none" lIns="0" rIns="0" tIns="0" bIns="0"/>
           <a:lstStyle/>
           <a:p>
             <a:pPr algn="ctr"/>
@@ -5182,14 +5237,14 @@
       </p:sp>
       <p:cxnSp>
         <p:nvCxnSpPr>
-          <p:cNvPr id="19" name="Connector 18"/>
+          <p:cNvPr id="20" name="Connector 19"/>
           <p:cNvCxnSpPr/>
           <p:nvPr/>
         </p:nvCxnSpPr>
         <p:spPr>
           <a:xfrm>
-            <a:off x="1417320" y="2423160"/>
-            <a:ext cx="137160" cy="594360"/>
+            <a:off x="1645920" y="1965960"/>
+            <a:ext cx="0" cy="274320"/>
           </a:xfrm>
           <a:prstGeom prst="line">
             <a:avLst/>
@@ -5219,13 +5274,13 @@
       </p:cxnSp>
       <p:sp>
         <p:nvSpPr>
-          <p:cNvPr id="20" name="Oval 19"/>
+          <p:cNvPr id="21" name="Oval 20"/>
           <p:cNvSpPr/>
           <p:nvPr/>
         </p:nvSpPr>
         <p:spPr>
           <a:xfrm>
-            <a:off x="1115568" y="2606040"/>
+            <a:off x="1755647" y="1984248"/>
             <a:ext cx="237744" cy="237744"/>
           </a:xfrm>
           <a:prstGeom prst="ellipse">
@@ -5256,7 +5311,7 @@
           </a:fontRef>
         </p:style>
         <p:txBody>
-          <a:bodyPr rtlCol="0" anchor="ctr"/>
+          <a:bodyPr rtlCol="0" anchor="ctr" wrap="none" lIns="0" rIns="0" tIns="0" bIns="0"/>
           <a:lstStyle/>
           <a:p>
             <a:pPr algn="ctr"/>
@@ -5274,14 +5329,14 @@
       </p:sp>
       <p:cxnSp>
         <p:nvCxnSpPr>
-          <p:cNvPr id="21" name="Connector 20"/>
+          <p:cNvPr id="22" name="Connector 21"/>
           <p:cNvCxnSpPr/>
           <p:nvPr/>
         </p:nvCxnSpPr>
         <p:spPr>
           <a:xfrm flipV="1">
-            <a:off x="2926080" y="2423160"/>
-            <a:ext cx="1051559" cy="1005840"/>
+            <a:off x="2926080" y="2377440"/>
+            <a:ext cx="1051559" cy="137160"/>
           </a:xfrm>
           <a:prstGeom prst="line">
             <a:avLst/>
@@ -5311,13 +5366,13 @@
       </p:cxnSp>
       <p:sp>
         <p:nvSpPr>
-          <p:cNvPr id="22" name="Oval 21"/>
+          <p:cNvPr id="23" name="Oval 22"/>
           <p:cNvSpPr/>
           <p:nvPr/>
         </p:nvSpPr>
         <p:spPr>
           <a:xfrm>
-            <a:off x="3447288" y="2715768"/>
+            <a:off x="3337560" y="2313432"/>
             <a:ext cx="237744" cy="237744"/>
           </a:xfrm>
           <a:prstGeom prst="ellipse">
@@ -5348,7 +5403,7 @@
           </a:fontRef>
         </p:style>
         <p:txBody>
-          <a:bodyPr rtlCol="0" anchor="ctr"/>
+          <a:bodyPr rtlCol="0" anchor="ctr" wrap="none" lIns="0" rIns="0" tIns="0" bIns="0"/>
           <a:lstStyle/>
           <a:p>
             <a:pPr algn="ctr"/>
@@ -5366,14 +5421,14 @@
       </p:sp>
       <p:cxnSp>
         <p:nvCxnSpPr>
-          <p:cNvPr id="23" name="Connector 22"/>
+          <p:cNvPr id="24" name="Connector 23"/>
           <p:cNvCxnSpPr/>
           <p:nvPr/>
         </p:nvCxnSpPr>
         <p:spPr>
-          <a:xfrm flipV="1">
-            <a:off x="2926080" y="3474720"/>
-            <a:ext cx="1051559" cy="365760"/>
+          <a:xfrm>
+            <a:off x="2926080" y="3246120"/>
+            <a:ext cx="1051559" cy="91440"/>
           </a:xfrm>
           <a:prstGeom prst="line">
             <a:avLst/>
@@ -5403,13 +5458,13 @@
       </p:cxnSp>
       <p:sp>
         <p:nvSpPr>
-          <p:cNvPr id="24" name="Oval 23"/>
+          <p:cNvPr id="25" name="Oval 24"/>
           <p:cNvSpPr/>
           <p:nvPr/>
         </p:nvSpPr>
         <p:spPr>
           <a:xfrm>
-            <a:off x="3401568" y="3447288"/>
+            <a:off x="3337560" y="3154680"/>
             <a:ext cx="237744" cy="237744"/>
           </a:xfrm>
           <a:prstGeom prst="ellipse">
@@ -5440,7 +5495,7 @@
           </a:fontRef>
         </p:style>
         <p:txBody>
-          <a:bodyPr rtlCol="0" anchor="ctr"/>
+          <a:bodyPr rtlCol="0" anchor="ctr" wrap="none" lIns="0" rIns="0" tIns="0" bIns="0"/>
           <a:lstStyle/>
           <a:p>
             <a:pPr algn="ctr"/>
@@ -5458,7 +5513,7 @@
       </p:sp>
       <p:cxnSp>
         <p:nvCxnSpPr>
-          <p:cNvPr id="25" name="Connector 24"/>
+          <p:cNvPr id="26" name="Connector 25"/>
           <p:cNvCxnSpPr/>
           <p:nvPr/>
         </p:nvCxnSpPr>
@@ -5495,7 +5550,7 @@
       </p:cxnSp>
       <p:sp>
         <p:nvSpPr>
-          <p:cNvPr id="26" name="Oval 25"/>
+          <p:cNvPr id="27" name="Oval 26"/>
           <p:cNvSpPr/>
           <p:nvPr/>
         </p:nvSpPr>
@@ -5532,7 +5587,7 @@
           </a:fontRef>
         </p:style>
         <p:txBody>
-          <a:bodyPr rtlCol="0" anchor="ctr"/>
+          <a:bodyPr rtlCol="0" anchor="ctr" wrap="none" lIns="0" rIns="0" tIns="0" bIns="0"/>
           <a:lstStyle/>
           <a:p>
             <a:pPr algn="ctr"/>
@@ -5550,14 +5605,14 @@
       </p:sp>
       <p:cxnSp>
         <p:nvCxnSpPr>
-          <p:cNvPr id="27" name="Connector 26"/>
+          <p:cNvPr id="28" name="Connector 27"/>
           <p:cNvCxnSpPr/>
           <p:nvPr/>
         </p:nvCxnSpPr>
         <p:spPr>
           <a:xfrm flipV="1">
             <a:off x="2926080" y="3383280"/>
-            <a:ext cx="5623560" cy="1051560"/>
+            <a:ext cx="5440680" cy="365759"/>
           </a:xfrm>
           <a:prstGeom prst="line">
             <a:avLst/>
@@ -5587,13 +5642,13 @@
       </p:cxnSp>
       <p:sp>
         <p:nvSpPr>
-          <p:cNvPr id="28" name="Oval 27"/>
+          <p:cNvPr id="29" name="Oval 28"/>
           <p:cNvSpPr/>
           <p:nvPr/>
         </p:nvSpPr>
         <p:spPr>
           <a:xfrm>
-            <a:off x="5641848" y="3758184"/>
+            <a:off x="6922008" y="3355848"/>
             <a:ext cx="237744" cy="237744"/>
           </a:xfrm>
           <a:prstGeom prst="ellipse">
@@ -5624,7 +5679,7 @@
           </a:fontRef>
         </p:style>
         <p:txBody>
-          <a:bodyPr rtlCol="0" anchor="ctr"/>
+          <a:bodyPr rtlCol="0" anchor="ctr" wrap="none" lIns="0" rIns="0" tIns="0" bIns="0"/>
           <a:lstStyle/>
           <a:p>
             <a:pPr algn="ctr"/>
@@ -5642,14 +5697,14 @@
       </p:sp>
       <p:cxnSp>
         <p:nvCxnSpPr>
-          <p:cNvPr id="29" name="Connector 28"/>
+          <p:cNvPr id="30" name="Connector 29"/>
           <p:cNvCxnSpPr/>
           <p:nvPr/>
         </p:nvCxnSpPr>
         <p:spPr>
-          <a:xfrm flipV="1">
-            <a:off x="2926080" y="4526280"/>
-            <a:ext cx="1051559" cy="274320"/>
+          <a:xfrm>
+            <a:off x="1965960" y="3931920"/>
+            <a:ext cx="0" cy="411480"/>
           </a:xfrm>
           <a:prstGeom prst="line">
             <a:avLst/>
@@ -5679,13 +5734,13 @@
       </p:cxnSp>
       <p:sp>
         <p:nvSpPr>
-          <p:cNvPr id="30" name="Oval 29"/>
+          <p:cNvPr id="31" name="Oval 30"/>
           <p:cNvSpPr/>
           <p:nvPr/>
         </p:nvSpPr>
         <p:spPr>
           <a:xfrm>
-            <a:off x="3447288" y="4498848"/>
+            <a:off x="1847088" y="4014215"/>
             <a:ext cx="237744" cy="237744"/>
           </a:xfrm>
           <a:prstGeom prst="ellipse">
@@ -5716,7 +5771,7 @@
           </a:fontRef>
         </p:style>
         <p:txBody>
-          <a:bodyPr rtlCol="0" anchor="ctr"/>
+          <a:bodyPr rtlCol="0" anchor="ctr" wrap="none" lIns="0" rIns="0" tIns="0" bIns="0"/>
           <a:lstStyle/>
           <a:p>
             <a:pPr algn="ctr"/>
@@ -5734,21 +5789,21 @@
       </p:sp>
       <p:cxnSp>
         <p:nvCxnSpPr>
-          <p:cNvPr id="31" name="Connector 30"/>
+          <p:cNvPr id="32" name="Connector 31"/>
           <p:cNvCxnSpPr/>
           <p:nvPr/>
         </p:nvCxnSpPr>
         <p:spPr>
-          <a:xfrm flipV="1">
-            <a:off x="2926080" y="4526280"/>
-            <a:ext cx="5440680" cy="502920"/>
+          <a:xfrm flipH="1">
+            <a:off x="8275320" y="3794760"/>
+            <a:ext cx="411480" cy="320040"/>
           </a:xfrm>
           <a:prstGeom prst="line">
             <a:avLst/>
           </a:prstGeom>
           <a:ln w="25400">
             <a:solidFill>
-              <a:srgbClr val="E87A1E"/>
+              <a:srgbClr val="3D6E70"/>
             </a:solidFill>
             <a:tailEnd type="triangle" w="med" len="med"/>
           </a:ln>
@@ -5769,15 +5824,53 @@
           </a:fontRef>
         </p:style>
       </p:cxnSp>
-      <p:sp>
-        <p:nvSpPr>
-          <p:cNvPr id="32" name="Oval 31"/>
+      <p:cxnSp>
+        <p:nvCxnSpPr>
+          <p:cNvPr id="33" name="Connector 32"/>
+          <p:cNvCxnSpPr/>
+          <p:nvPr/>
+        </p:nvCxnSpPr>
+        <p:spPr>
+          <a:xfrm flipH="1">
+            <a:off x="2926080" y="4498848"/>
+            <a:ext cx="3200400" cy="182880"/>
+          </a:xfrm>
+          <a:prstGeom prst="line">
+            <a:avLst/>
+          </a:prstGeom>
+          <a:ln w="25400">
+            <a:solidFill>
+              <a:srgbClr val="6B6B6B"/>
+            </a:solidFill>
+            <a:tailEnd type="triangle" w="med" len="med"/>
+            <a:prstDash val="dash"/>
+          </a:ln>
+          <a:effectLst/>
+        </p:spPr>
+        <p:style>
+          <a:lnRef idx="2">
+            <a:schemeClr val="accent1"/>
+          </a:lnRef>
+          <a:fillRef idx="0">
+            <a:schemeClr val="accent1"/>
+          </a:fillRef>
+          <a:effectRef idx="1">
+            <a:schemeClr val="accent1"/>
+          </a:effectRef>
+          <a:fontRef idx="minor">
+            <a:schemeClr val="tx1"/>
+          </a:fontRef>
+        </p:style>
+      </p:cxnSp>
+      <p:sp>
+        <p:nvSpPr>
+          <p:cNvPr id="34" name="Oval 33"/>
           <p:cNvSpPr/>
           <p:nvPr/>
         </p:nvSpPr>
         <p:spPr>
           <a:xfrm>
-            <a:off x="5641848" y="4636008"/>
+            <a:off x="4178808" y="4453128"/>
             <a:ext cx="237744" cy="237744"/>
           </a:xfrm>
           <a:prstGeom prst="ellipse">
@@ -5808,7 +5901,7 @@
           </a:fontRef>
         </p:style>
         <p:txBody>
-          <a:bodyPr rtlCol="0" anchor="ctr"/>
+          <a:bodyPr rtlCol="0" anchor="ctr" wrap="none" lIns="0" rIns="0" tIns="0" bIns="0"/>
           <a:lstStyle/>
           <a:p>
             <a:pPr algn="ctr"/>
@@ -5824,9 +5917,193 @@
           </a:p>
         </p:txBody>
       </p:sp>
-      <p:sp>
-        <p:nvSpPr>
-          <p:cNvPr id="33" name="Rounded Rectangle 32"/>
+      <p:cxnSp>
+        <p:nvCxnSpPr>
+          <p:cNvPr id="35" name="Connector 34"/>
+          <p:cNvCxnSpPr/>
+          <p:nvPr/>
+        </p:nvCxnSpPr>
+        <p:spPr>
+          <a:xfrm flipV="1">
+            <a:off x="2651760" y="3931920"/>
+            <a:ext cx="0" cy="411480"/>
+          </a:xfrm>
+          <a:prstGeom prst="line">
+            <a:avLst/>
+          </a:prstGeom>
+          <a:ln w="25400">
+            <a:solidFill>
+              <a:srgbClr val="6B6B6B"/>
+            </a:solidFill>
+            <a:tailEnd type="triangle" w="med" len="med"/>
+          </a:ln>
+          <a:effectLst/>
+        </p:spPr>
+        <p:style>
+          <a:lnRef idx="2">
+            <a:schemeClr val="accent1"/>
+          </a:lnRef>
+          <a:fillRef idx="0">
+            <a:schemeClr val="accent1"/>
+          </a:fillRef>
+          <a:effectRef idx="1">
+            <a:schemeClr val="accent1"/>
+          </a:effectRef>
+          <a:fontRef idx="minor">
+            <a:schemeClr val="tx1"/>
+          </a:fontRef>
+        </p:style>
+      </p:cxnSp>
+      <p:sp>
+        <p:nvSpPr>
+          <p:cNvPr id="36" name="Oval 35"/>
+          <p:cNvSpPr/>
+          <p:nvPr/>
+        </p:nvSpPr>
+        <p:spPr>
+          <a:xfrm>
+            <a:off x="2532888" y="4014215"/>
+            <a:ext cx="237744" cy="237744"/>
+          </a:xfrm>
+          <a:prstGeom prst="ellipse">
+            <a:avLst/>
+          </a:prstGeom>
+          <a:solidFill>
+            <a:srgbClr val="E87A1E"/>
+          </a:solidFill>
+          <a:ln w="12700">
+            <a:solidFill>
+              <a:srgbClr val="FFFFFF"/>
+            </a:solidFill>
+          </a:ln>
+          <a:effectLst/>
+        </p:spPr>
+        <p:style>
+          <a:lnRef idx="1">
+            <a:schemeClr val="accent1"/>
+          </a:lnRef>
+          <a:fillRef idx="3">
+            <a:schemeClr val="accent1"/>
+          </a:fillRef>
+          <a:effectRef idx="2">
+            <a:schemeClr val="accent1"/>
+          </a:effectRef>
+          <a:fontRef idx="minor">
+            <a:schemeClr val="lt1"/>
+          </a:fontRef>
+        </p:style>
+        <p:txBody>
+          <a:bodyPr rtlCol="0" anchor="ctr" wrap="none" lIns="0" rIns="0" tIns="0" bIns="0"/>
+          <a:lstStyle/>
+          <a:p>
+            <a:pPr algn="ctr"/>
+            <a:r>
+              <a:rPr sz="1050" b="1" i="0">
+                <a:solidFill>
+                  <a:srgbClr val="FFFFFF"/>
+                </a:solidFill>
+                <a:latin typeface="Calibri"/>
+              </a:rPr>
+              <a:t>9</a:t>
+            </a:r>
+          </a:p>
+        </p:txBody>
+      </p:sp>
+      <p:cxnSp>
+        <p:nvCxnSpPr>
+          <p:cNvPr id="37" name="Connector 36"/>
+          <p:cNvCxnSpPr/>
+          <p:nvPr/>
+        </p:nvCxnSpPr>
+        <p:spPr>
+          <a:xfrm>
+            <a:off x="1005840" y="3931920"/>
+            <a:ext cx="0" cy="411480"/>
+          </a:xfrm>
+          <a:prstGeom prst="line">
+            <a:avLst/>
+          </a:prstGeom>
+          <a:ln w="25400">
+            <a:solidFill>
+              <a:srgbClr val="E87A1E"/>
+            </a:solidFill>
+            <a:tailEnd type="triangle" w="med" len="med"/>
+          </a:ln>
+          <a:effectLst/>
+        </p:spPr>
+        <p:style>
+          <a:lnRef idx="2">
+            <a:schemeClr val="accent1"/>
+          </a:lnRef>
+          <a:fillRef idx="0">
+            <a:schemeClr val="accent1"/>
+          </a:fillRef>
+          <a:effectRef idx="1">
+            <a:schemeClr val="accent1"/>
+          </a:effectRef>
+          <a:fontRef idx="minor">
+            <a:schemeClr val="tx1"/>
+          </a:fontRef>
+        </p:style>
+      </p:cxnSp>
+      <p:sp>
+        <p:nvSpPr>
+          <p:cNvPr id="38" name="Oval 37"/>
+          <p:cNvSpPr/>
+          <p:nvPr/>
+        </p:nvSpPr>
+        <p:spPr>
+          <a:xfrm>
+            <a:off x="649224" y="3977639"/>
+            <a:ext cx="310896" cy="310896"/>
+          </a:xfrm>
+          <a:prstGeom prst="ellipse">
+            <a:avLst/>
+          </a:prstGeom>
+          <a:solidFill>
+            <a:srgbClr val="E87A1E"/>
+          </a:solidFill>
+          <a:ln w="12700">
+            <a:solidFill>
+              <a:srgbClr val="FFFFFF"/>
+            </a:solidFill>
+          </a:ln>
+          <a:effectLst/>
+        </p:spPr>
+        <p:style>
+          <a:lnRef idx="1">
+            <a:schemeClr val="accent1"/>
+          </a:lnRef>
+          <a:fillRef idx="3">
+            <a:schemeClr val="accent1"/>
+          </a:fillRef>
+          <a:effectRef idx="2">
+            <a:schemeClr val="accent1"/>
+          </a:effectRef>
+          <a:fontRef idx="minor">
+            <a:schemeClr val="lt1"/>
+          </a:fontRef>
+        </p:style>
+        <p:txBody>
+          <a:bodyPr rtlCol="0" anchor="ctr" wrap="none" lIns="0" rIns="0" tIns="0" bIns="0"/>
+          <a:lstStyle/>
+          <a:p>
+            <a:pPr algn="ctr"/>
+            <a:r>
+              <a:rPr sz="1050" b="1" i="0">
+                <a:solidFill>
+                  <a:srgbClr val="FFFFFF"/>
+                </a:solidFill>
+                <a:latin typeface="Calibri"/>
+              </a:rPr>
+              <a:t>10</a:t>
+            </a:r>
+          </a:p>
+        </p:txBody>
+      </p:sp>
+      <p:sp>
+        <p:nvSpPr>
+          <p:cNvPr id="39" name="Rounded Rectangle 38"/>
           <p:cNvSpPr/>
           <p:nvPr/>
         </p:nvSpPr>
@@ -5872,7 +6149,7 @@
       </p:sp>
       <p:sp>
         <p:nvSpPr>
-          <p:cNvPr id="34" name="TextBox 33"/>
+          <p:cNvPr id="40" name="TextBox 39"/>
           <p:cNvSpPr txBox="1"/>
           <p:nvPr/>
         </p:nvSpPr>
@@ -5971,29 +6248,6 @@
               <a:t>4  Service → Rossoctl: deploy / list agents + tools</a:t>
             </a:r>
           </a:p>
-        </p:txBody>
-      </p:sp>
-      <p:sp>
-        <p:nvSpPr>
-          <p:cNvPr id="35" name="TextBox 34"/>
-          <p:cNvSpPr txBox="1"/>
-          <p:nvPr/>
-        </p:nvSpPr>
-        <p:spPr>
-          <a:xfrm>
-            <a:off x="6126480" y="5468112"/>
-            <a:ext cx="5486400" cy="1188720"/>
-          </a:xfrm>
-          <a:prstGeom prst="rect">
-            <a:avLst/>
-          </a:prstGeom>
-          <a:noFill/>
-        </p:spPr>
-        <p:txBody>
-          <a:bodyPr wrap="square">
-            <a:spAutoFit/>
-          </a:bodyPr>
-          <a:lstStyle/>
           <a:p>
             <a:pPr>
               <a:spcAft>
@@ -6010,6 +6264,29 @@
               <a:t>5  Rossoctl creates the MCP tool + A2A agent in-cluster</a:t>
             </a:r>
           </a:p>
+        </p:txBody>
+      </p:sp>
+      <p:sp>
+        <p:nvSpPr>
+          <p:cNvPr id="41" name="TextBox 40"/>
+          <p:cNvSpPr txBox="1"/>
+          <p:nvPr/>
+        </p:nvSpPr>
+        <p:spPr>
+          <a:xfrm>
+            <a:off x="6126480" y="5468112"/>
+            <a:ext cx="5486400" cy="1188720"/>
+          </a:xfrm>
+          <a:prstGeom prst="rect">
+            <a:avLst/>
+          </a:prstGeom>
+          <a:noFill/>
+        </p:spPr>
+        <p:txBody>
+          <a:bodyPr wrap="square">
+            <a:spAutoFit/>
+          </a:bodyPr>
+          <a:lstStyle/>
           <a:p>
             <a:pPr>
               <a:spcAft>
@@ -6039,7 +6316,7 @@
                 </a:solidFill>
                 <a:latin typeface="Calibri"/>
               </a:rPr>
-              <a:t>7  Service emits + reads Agent.Session traces (MLflow)</a:t>
+              <a:t>7  Service emits the Agent.Session trace → MLflow (first)</a:t>
             </a:r>
           </a:p>
           <a:p>
@@ -6055,7 +6332,7 @@
                 </a:solidFill>
                 <a:latin typeface="Calibri"/>
               </a:rPr>
-              <a:t>8  Service exports run.json / report.ndjson /</a:t>
+              <a:t>8  A2A agent → OTEL collector → MLflow (optional; off by default)</a:t>
             </a:r>
           </a:p>
           <a:p>
@@ -6071,7 +6348,23 @@
                 </a:solidFill>
                 <a:latin typeface="Calibri"/>
               </a:rPr>
-              <a:t>      report.parquet (S3)</a:t>
+              <a:t>9  Service reads back Agent.Session traces (MLflow)</a:t>
+            </a:r>
+          </a:p>
+          <a:p>
+            <a:pPr>
+              <a:spcAft>
+                <a:spcPts val="100"/>
+              </a:spcAft>
+            </a:pPr>
+            <a:r>
+              <a:rPr sz="1050" b="0" i="0">
+                <a:solidFill>
+                  <a:srgbClr val="1F2A37"/>
+                </a:solidFill>
+                <a:latin typeface="Calibri"/>
+              </a:rPr>
+              <a:t>10  Service exports run.json / report.* (S3)</a:t>
             </a:r>
           </a:p>
         </p:txBody>

--- a/docs/BenchmarkingService.pptx
+++ b/docs/BenchmarkingService.pptx
@@ -11,6 +11,7 @@
     <p:sldId id="259" r:id="rId10"/>
     <p:sldId id="260" r:id="rId11"/>
     <p:sldId id="261" r:id="rId12"/>
+    <p:sldId id="262" r:id="rId13"/>
   </p:sldIdLst>
   <p:sldSz cx="12192000" cy="6858000" type="screen4x3"/>
   <p:notesSz cx="6858000" cy="9144000"/>
@@ -4557,14 +4558,14 @@
         </p:nvSpPr>
         <p:spPr>
           <a:xfrm>
-            <a:off x="3904488" y="1298448"/>
+            <a:off x="3849624" y="1243584"/>
             <a:ext cx="8001000" cy="3977639"/>
           </a:xfrm>
           <a:prstGeom prst="roundRect">
             <a:avLst/>
           </a:prstGeom>
           <a:solidFill>
-            <a:srgbClr val="DDDDDD"/>
+            <a:srgbClr val="F0F1F3"/>
           </a:solidFill>
           <a:ln>
             <a:noFill/>
@@ -4601,14 +4602,14 @@
         </p:nvSpPr>
         <p:spPr>
           <a:xfrm>
-            <a:off x="3803904" y="1197864"/>
+            <a:off x="3776472" y="1170432"/>
             <a:ext cx="8001000" cy="3977639"/>
           </a:xfrm>
           <a:prstGeom prst="roundRect">
             <a:avLst/>
           </a:prstGeom>
           <a:solidFill>
-            <a:srgbClr val="CBCBCB"/>
+            <a:srgbClr val="E3E5E8"/>
           </a:solidFill>
           <a:ln>
             <a:noFill/>
@@ -5084,8 +5085,8 @@
         </p:nvSpPr>
         <p:spPr>
           <a:xfrm>
-            <a:off x="6126480" y="4114800"/>
-            <a:ext cx="2468880" cy="713232"/>
+            <a:off x="6126480" y="4315968"/>
+            <a:ext cx="2468880" cy="640080"/>
           </a:xfrm>
           <a:prstGeom prst="roundRect">
             <a:avLst/>
@@ -5519,8 +5520,8 @@
         </p:nvCxnSpPr>
         <p:spPr>
           <a:xfrm flipV="1">
-            <a:off x="6309360" y="2651760"/>
-            <a:ext cx="2057400" cy="502920"/>
+            <a:off x="6309360" y="2944368"/>
+            <a:ext cx="2057400" cy="301752"/>
           </a:xfrm>
           <a:prstGeom prst="line">
             <a:avLst/>
@@ -5556,7 +5557,7 @@
         </p:nvSpPr>
         <p:spPr>
           <a:xfrm>
-            <a:off x="7196328" y="2715768"/>
+            <a:off x="6784848" y="3040380"/>
             <a:ext cx="237744" cy="237744"/>
           </a:xfrm>
           <a:prstGeom prst="ellipse">
@@ -5611,8 +5612,80 @@
         </p:nvCxnSpPr>
         <p:spPr>
           <a:xfrm flipV="1">
-            <a:off x="2926080" y="3383280"/>
-            <a:ext cx="5440680" cy="365759"/>
+            <a:off x="2926080" y="2807208"/>
+            <a:ext cx="0" cy="896112"/>
+          </a:xfrm>
+          <a:prstGeom prst="line">
+            <a:avLst/>
+          </a:prstGeom>
+          <a:ln w="25400">
+            <a:solidFill>
+              <a:srgbClr val="3D6E70"/>
+            </a:solidFill>
+          </a:ln>
+          <a:effectLst/>
+        </p:spPr>
+        <p:style>
+          <a:lnRef idx="2">
+            <a:schemeClr val="accent1"/>
+          </a:lnRef>
+          <a:fillRef idx="0">
+            <a:schemeClr val="accent1"/>
+          </a:fillRef>
+          <a:effectRef idx="1">
+            <a:schemeClr val="accent1"/>
+          </a:effectRef>
+          <a:fontRef idx="minor">
+            <a:schemeClr val="tx1"/>
+          </a:fontRef>
+        </p:style>
+      </p:cxnSp>
+      <p:cxnSp>
+        <p:nvCxnSpPr>
+          <p:cNvPr id="29" name="Connector 28"/>
+          <p:cNvCxnSpPr/>
+          <p:nvPr/>
+        </p:nvCxnSpPr>
+        <p:spPr>
+          <a:xfrm>
+            <a:off x="2926080" y="2807208"/>
+            <a:ext cx="3383280" cy="0"/>
+          </a:xfrm>
+          <a:prstGeom prst="line">
+            <a:avLst/>
+          </a:prstGeom>
+          <a:ln w="25400">
+            <a:solidFill>
+              <a:srgbClr val="3D6E70"/>
+            </a:solidFill>
+          </a:ln>
+          <a:effectLst/>
+        </p:spPr>
+        <p:style>
+          <a:lnRef idx="2">
+            <a:schemeClr val="accent1"/>
+          </a:lnRef>
+          <a:fillRef idx="0">
+            <a:schemeClr val="accent1"/>
+          </a:fillRef>
+          <a:effectRef idx="1">
+            <a:schemeClr val="accent1"/>
+          </a:effectRef>
+          <a:fontRef idx="minor">
+            <a:schemeClr val="tx1"/>
+          </a:fontRef>
+        </p:style>
+      </p:cxnSp>
+      <p:cxnSp>
+        <p:nvCxnSpPr>
+          <p:cNvPr id="30" name="Connector 29"/>
+          <p:cNvCxnSpPr/>
+          <p:nvPr/>
+        </p:nvCxnSpPr>
+        <p:spPr>
+          <a:xfrm>
+            <a:off x="6309360" y="2807208"/>
+            <a:ext cx="2057400" cy="256032"/>
           </a:xfrm>
           <a:prstGeom prst="line">
             <a:avLst/>
@@ -5642,13 +5715,13 @@
       </p:cxnSp>
       <p:sp>
         <p:nvSpPr>
-          <p:cNvPr id="29" name="Oval 28"/>
+          <p:cNvPr id="31" name="Oval 30"/>
           <p:cNvSpPr/>
           <p:nvPr/>
         </p:nvSpPr>
         <p:spPr>
           <a:xfrm>
-            <a:off x="6922008" y="3355848"/>
+            <a:off x="4498848" y="2688336"/>
             <a:ext cx="237744" cy="237744"/>
           </a:xfrm>
           <a:prstGeom prst="ellipse">
@@ -5697,7 +5770,7 @@
       </p:sp>
       <p:cxnSp>
         <p:nvCxnSpPr>
-          <p:cNvPr id="30" name="Connector 29"/>
+          <p:cNvPr id="32" name="Connector 31"/>
           <p:cNvCxnSpPr/>
           <p:nvPr/>
         </p:nvCxnSpPr>
@@ -5734,7 +5807,7 @@
       </p:cxnSp>
       <p:sp>
         <p:nvSpPr>
-          <p:cNvPr id="31" name="Oval 30"/>
+          <p:cNvPr id="33" name="Oval 32"/>
           <p:cNvSpPr/>
           <p:nvPr/>
         </p:nvSpPr>
@@ -5789,14 +5862,14 @@
       </p:sp>
       <p:cxnSp>
         <p:nvCxnSpPr>
-          <p:cNvPr id="32" name="Connector 31"/>
+          <p:cNvPr id="34" name="Connector 33"/>
           <p:cNvCxnSpPr/>
           <p:nvPr/>
         </p:nvCxnSpPr>
         <p:spPr>
           <a:xfrm flipH="1">
-            <a:off x="8275320" y="3794760"/>
-            <a:ext cx="411480" cy="320040"/>
+            <a:off x="8412480" y="3794760"/>
+            <a:ext cx="320040" cy="521208"/>
           </a:xfrm>
           <a:prstGeom prst="line">
             <a:avLst/>
@@ -5806,6 +5879,7 @@
               <a:srgbClr val="3D6E70"/>
             </a:solidFill>
             <a:tailEnd type="triangle" w="med" len="med"/>
+            <a:prstDash val="dash"/>
           </a:ln>
           <a:effectLst/>
         </p:spPr>
@@ -5824,54 +5898,16 @@
           </a:fontRef>
         </p:style>
       </p:cxnSp>
-      <p:cxnSp>
-        <p:nvCxnSpPr>
-          <p:cNvPr id="33" name="Connector 32"/>
-          <p:cNvCxnSpPr/>
-          <p:nvPr/>
-        </p:nvCxnSpPr>
-        <p:spPr>
-          <a:xfrm flipH="1">
-            <a:off x="2926080" y="4498848"/>
-            <a:ext cx="3200400" cy="182880"/>
-          </a:xfrm>
-          <a:prstGeom prst="line">
-            <a:avLst/>
-          </a:prstGeom>
-          <a:ln w="25400">
-            <a:solidFill>
-              <a:srgbClr val="6B6B6B"/>
-            </a:solidFill>
-            <a:tailEnd type="triangle" w="med" len="med"/>
-            <a:prstDash val="dash"/>
-          </a:ln>
-          <a:effectLst/>
-        </p:spPr>
-        <p:style>
-          <a:lnRef idx="2">
-            <a:schemeClr val="accent1"/>
-          </a:lnRef>
-          <a:fillRef idx="0">
-            <a:schemeClr val="accent1"/>
-          </a:fillRef>
-          <a:effectRef idx="1">
-            <a:schemeClr val="accent1"/>
-          </a:effectRef>
-          <a:fontRef idx="minor">
-            <a:schemeClr val="tx1"/>
-          </a:fontRef>
-        </p:style>
-      </p:cxnSp>
-      <p:sp>
-        <p:nvSpPr>
-          <p:cNvPr id="34" name="Oval 33"/>
+      <p:sp>
+        <p:nvSpPr>
+          <p:cNvPr id="35" name="Oval 34"/>
           <p:cNvSpPr/>
           <p:nvPr/>
         </p:nvSpPr>
         <p:spPr>
           <a:xfrm>
-            <a:off x="4178808" y="4453128"/>
-            <a:ext cx="237744" cy="237744"/>
+            <a:off x="8348472" y="3968496"/>
+            <a:ext cx="310896" cy="310896"/>
           </a:xfrm>
           <a:prstGeom prst="ellipse">
             <a:avLst/>
@@ -5912,21 +5948,21 @@
                 </a:solidFill>
                 <a:latin typeface="Calibri"/>
               </a:rPr>
-              <a:t>8</a:t>
+              <a:t>8a</a:t>
             </a:r>
           </a:p>
         </p:txBody>
       </p:sp>
       <p:cxnSp>
         <p:nvCxnSpPr>
-          <p:cNvPr id="35" name="Connector 34"/>
+          <p:cNvPr id="36" name="Connector 35"/>
           <p:cNvCxnSpPr/>
           <p:nvPr/>
         </p:nvCxnSpPr>
         <p:spPr>
-          <a:xfrm flipV="1">
-            <a:off x="2651760" y="3931920"/>
-            <a:ext cx="0" cy="411480"/>
+          <a:xfrm flipH="1">
+            <a:off x="2926080" y="4636008"/>
+            <a:ext cx="3200400" cy="155448"/>
           </a:xfrm>
           <a:prstGeom prst="line">
             <a:avLst/>
@@ -5936,6 +5972,7 @@
               <a:srgbClr val="6B6B6B"/>
             </a:solidFill>
             <a:tailEnd type="triangle" w="med" len="med"/>
+            <a:prstDash val="dash"/>
           </a:ln>
           <a:effectLst/>
         </p:spPr>
@@ -5956,14 +5993,14 @@
       </p:cxnSp>
       <p:sp>
         <p:nvSpPr>
-          <p:cNvPr id="36" name="Oval 35"/>
+          <p:cNvPr id="37" name="Oval 36"/>
           <p:cNvSpPr/>
           <p:nvPr/>
         </p:nvSpPr>
         <p:spPr>
           <a:xfrm>
-            <a:off x="2532888" y="4014215"/>
-            <a:ext cx="237744" cy="237744"/>
+            <a:off x="4370832" y="4562856"/>
+            <a:ext cx="310896" cy="310896"/>
           </a:xfrm>
           <a:prstGeom prst="ellipse">
             <a:avLst/>
@@ -6004,20 +6041,20 @@
                 </a:solidFill>
                 <a:latin typeface="Calibri"/>
               </a:rPr>
-              <a:t>9</a:t>
+              <a:t>8b</a:t>
             </a:r>
           </a:p>
         </p:txBody>
       </p:sp>
       <p:cxnSp>
         <p:nvCxnSpPr>
-          <p:cNvPr id="37" name="Connector 36"/>
+          <p:cNvPr id="38" name="Connector 37"/>
           <p:cNvCxnSpPr/>
           <p:nvPr/>
         </p:nvCxnSpPr>
         <p:spPr>
-          <a:xfrm>
-            <a:off x="1005840" y="3931920"/>
+          <a:xfrm flipV="1">
+            <a:off x="2651760" y="3931920"/>
             <a:ext cx="0" cy="411480"/>
           </a:xfrm>
           <a:prstGeom prst="line">
@@ -6025,7 +6062,7 @@
           </a:prstGeom>
           <a:ln w="25400">
             <a:solidFill>
-              <a:srgbClr val="E87A1E"/>
+              <a:srgbClr val="6B6B6B"/>
             </a:solidFill>
             <a:tailEnd type="triangle" w="med" len="med"/>
           </a:ln>
@@ -6048,14 +6085,14 @@
       </p:cxnSp>
       <p:sp>
         <p:nvSpPr>
-          <p:cNvPr id="38" name="Oval 37"/>
+          <p:cNvPr id="39" name="Oval 38"/>
           <p:cNvSpPr/>
           <p:nvPr/>
         </p:nvSpPr>
         <p:spPr>
           <a:xfrm>
-            <a:off x="649224" y="3977639"/>
-            <a:ext cx="310896" cy="310896"/>
+            <a:off x="2532888" y="4014215"/>
+            <a:ext cx="237744" cy="237744"/>
           </a:xfrm>
           <a:prstGeom prst="ellipse">
             <a:avLst/>
@@ -6096,6 +6133,98 @@
                 </a:solidFill>
                 <a:latin typeface="Calibri"/>
               </a:rPr>
+              <a:t>9</a:t>
+            </a:r>
+          </a:p>
+        </p:txBody>
+      </p:sp>
+      <p:cxnSp>
+        <p:nvCxnSpPr>
+          <p:cNvPr id="40" name="Connector 39"/>
+          <p:cNvCxnSpPr/>
+          <p:nvPr/>
+        </p:nvCxnSpPr>
+        <p:spPr>
+          <a:xfrm>
+            <a:off x="1005840" y="3931920"/>
+            <a:ext cx="0" cy="411480"/>
+          </a:xfrm>
+          <a:prstGeom prst="line">
+            <a:avLst/>
+          </a:prstGeom>
+          <a:ln w="25400">
+            <a:solidFill>
+              <a:srgbClr val="E87A1E"/>
+            </a:solidFill>
+            <a:tailEnd type="triangle" w="med" len="med"/>
+          </a:ln>
+          <a:effectLst/>
+        </p:spPr>
+        <p:style>
+          <a:lnRef idx="2">
+            <a:schemeClr val="accent1"/>
+          </a:lnRef>
+          <a:fillRef idx="0">
+            <a:schemeClr val="accent1"/>
+          </a:fillRef>
+          <a:effectRef idx="1">
+            <a:schemeClr val="accent1"/>
+          </a:effectRef>
+          <a:fontRef idx="minor">
+            <a:schemeClr val="tx1"/>
+          </a:fontRef>
+        </p:style>
+      </p:cxnSp>
+      <p:sp>
+        <p:nvSpPr>
+          <p:cNvPr id="41" name="Oval 40"/>
+          <p:cNvSpPr/>
+          <p:nvPr/>
+        </p:nvSpPr>
+        <p:spPr>
+          <a:xfrm>
+            <a:off x="649224" y="3977639"/>
+            <a:ext cx="310896" cy="310896"/>
+          </a:xfrm>
+          <a:prstGeom prst="ellipse">
+            <a:avLst/>
+          </a:prstGeom>
+          <a:solidFill>
+            <a:srgbClr val="E87A1E"/>
+          </a:solidFill>
+          <a:ln w="12700">
+            <a:solidFill>
+              <a:srgbClr val="FFFFFF"/>
+            </a:solidFill>
+          </a:ln>
+          <a:effectLst/>
+        </p:spPr>
+        <p:style>
+          <a:lnRef idx="1">
+            <a:schemeClr val="accent1"/>
+          </a:lnRef>
+          <a:fillRef idx="3">
+            <a:schemeClr val="accent1"/>
+          </a:fillRef>
+          <a:effectRef idx="2">
+            <a:schemeClr val="accent1"/>
+          </a:effectRef>
+          <a:fontRef idx="minor">
+            <a:schemeClr val="lt1"/>
+          </a:fontRef>
+        </p:style>
+        <p:txBody>
+          <a:bodyPr rtlCol="0" anchor="ctr" wrap="none" lIns="0" rIns="0" tIns="0" bIns="0"/>
+          <a:lstStyle/>
+          <a:p>
+            <a:pPr algn="ctr"/>
+            <a:r>
+              <a:rPr sz="1050" b="1" i="0">
+                <a:solidFill>
+                  <a:srgbClr val="FFFFFF"/>
+                </a:solidFill>
+                <a:latin typeface="Calibri"/>
+              </a:rPr>
               <a:t>10</a:t>
             </a:r>
           </a:p>
@@ -6103,14 +6232,14 @@
       </p:sp>
       <p:sp>
         <p:nvSpPr>
-          <p:cNvPr id="39" name="Rounded Rectangle 38"/>
+          <p:cNvPr id="42" name="Rounded Rectangle 41"/>
           <p:cNvSpPr/>
           <p:nvPr/>
         </p:nvSpPr>
         <p:spPr>
           <a:xfrm>
-            <a:off x="365760" y="5394960"/>
-            <a:ext cx="11430000" cy="1325880"/>
+            <a:off x="365760" y="5303520"/>
+            <a:ext cx="11430000" cy="1234440"/>
           </a:xfrm>
           <a:prstGeom prst="roundRect">
             <a:avLst/>
@@ -6149,14 +6278,14 @@
       </p:sp>
       <p:sp>
         <p:nvSpPr>
-          <p:cNvPr id="40" name="TextBox 39"/>
+          <p:cNvPr id="43" name="TextBox 42"/>
           <p:cNvSpPr txBox="1"/>
           <p:nvPr/>
         </p:nvSpPr>
         <p:spPr>
           <a:xfrm>
-            <a:off x="548640" y="5468112"/>
-            <a:ext cx="5486400" cy="1188720"/>
+            <a:off x="548640" y="5376672"/>
+            <a:ext cx="5486400" cy="1115568"/>
           </a:xfrm>
           <a:prstGeom prst="rect">
             <a:avLst/>
@@ -6268,14 +6397,14 @@
       </p:sp>
       <p:sp>
         <p:nvSpPr>
-          <p:cNvPr id="41" name="TextBox 40"/>
+          <p:cNvPr id="44" name="TextBox 43"/>
           <p:cNvSpPr txBox="1"/>
           <p:nvPr/>
         </p:nvSpPr>
         <p:spPr>
           <a:xfrm>
-            <a:off x="6126480" y="5468112"/>
-            <a:ext cx="5486400" cy="1188720"/>
+            <a:off x="6126480" y="5376672"/>
+            <a:ext cx="5486400" cy="1115568"/>
           </a:xfrm>
           <a:prstGeom prst="rect">
             <a:avLst/>
@@ -6332,7 +6461,23 @@
                 </a:solidFill>
                 <a:latin typeface="Calibri"/>
               </a:rPr>
-              <a:t>8  A2A agent → OTEL collector → MLflow (optional; off by default)</a:t>
+              <a:t>8a A2A agent → OTEL collector   ·   8b collector → MLflow</a:t>
+            </a:r>
+          </a:p>
+          <a:p>
+            <a:pPr>
+              <a:spcAft>
+                <a:spcPts val="100"/>
+              </a:spcAft>
+            </a:pPr>
+            <a:r>
+              <a:rPr sz="1050" b="0" i="0">
+                <a:solidFill>
+                  <a:srgbClr val="1F2A37"/>
+                </a:solidFill>
+                <a:latin typeface="Calibri"/>
+              </a:rPr>
+              <a:t>      (optional workload spans — off by default)</a:t>
             </a:r>
           </a:p>
           <a:p>
@@ -6435,7 +6580,7 @@
                 </a:solidFill>
                 <a:latin typeface="Calibri"/>
               </a:rPr>
-              <a:t>The Two-Token Auth Model</a:t>
+              <a:t>Architecture with Workload Specific Components</a:t>
             </a:r>
           </a:p>
           <a:p>
@@ -6446,31 +6591,31 @@
                 </a:solidFill>
                 <a:latin typeface="Calibri"/>
               </a:rPr>
-              <a:t>Why the caller's token is never forwarded upstream</a:t>
-            </a:r>
-          </a:p>
-        </p:txBody>
-      </p:sp>
-      <p:sp>
-        <p:nvSpPr>
-          <p:cNvPr id="3" name="Rectangle 2"/>
+              <a:t>Inside the Benchmark Workload — what every benchmark has, and what only some of them add</a:t>
+            </a:r>
+          </a:p>
+        </p:txBody>
+      </p:sp>
+      <p:sp>
+        <p:nvSpPr>
+          <p:cNvPr id="3" name="Rounded Rectangle 2"/>
           <p:cNvSpPr/>
           <p:nvPr/>
         </p:nvSpPr>
         <p:spPr>
           <a:xfrm>
-            <a:off x="457200" y="1280160"/>
-            <a:ext cx="5394960" cy="457200"/>
-          </a:xfrm>
-          <a:prstGeom prst="rect">
+            <a:off x="411480" y="1097280"/>
+            <a:ext cx="11338560" cy="548640"/>
+          </a:xfrm>
+          <a:prstGeom prst="roundRect">
             <a:avLst/>
           </a:prstGeom>
           <a:solidFill>
-            <a:srgbClr val="5B8C5A"/>
+            <a:srgbClr val="6B6B6B"/>
           </a:solidFill>
           <a:ln w="12700">
             <a:solidFill>
-              <a:srgbClr val="5B8C5A"/>
+              <a:srgbClr val="6B6B6B"/>
             </a:solidFill>
           </a:ln>
           <a:effectLst/>
@@ -6495,164 +6640,97 @@
           <a:p>
             <a:pPr algn="ctr"/>
             <a:r>
-              <a:rPr sz="1500" b="1" i="0">
+              <a:rPr sz="1250" b="1" i="0">
                 <a:solidFill>
                   <a:srgbClr val="FFFFFF"/>
                 </a:solidFill>
                 <a:latin typeface="Calibri"/>
               </a:rPr>
-              <a:t>Caller JWT  (inbound)</a:t>
-            </a:r>
-          </a:p>
-        </p:txBody>
-      </p:sp>
-      <p:sp>
-        <p:nvSpPr>
-          <p:cNvPr id="4" name="TextBox 3"/>
-          <p:cNvSpPr txBox="1"/>
-          <p:nvPr/>
-        </p:nvSpPr>
-        <p:spPr>
-          <a:xfrm>
-            <a:off x="548640" y="1828800"/>
-            <a:ext cx="5303520" cy="3291840"/>
-          </a:xfrm>
-          <a:prstGeom prst="rect">
-            <a:avLst/>
-          </a:prstGeom>
-          <a:noFill/>
-        </p:spPr>
-        <p:txBody>
-          <a:bodyPr wrap="square" anchor="t">
-            <a:spAutoFit/>
-          </a:bodyPr>
-          <a:lstStyle/>
-          <a:p>
-            <a:pPr algn="l">
-              <a:spcAft>
-                <a:spcPts val="300"/>
-              </a:spcAft>
-            </a:pPr>
-            <a:r>
-              <a:rPr sz="1350" b="0" i="0">
-                <a:solidFill>
-                  <a:srgbClr val="1F2A37"/>
-                </a:solidFill>
-                <a:latin typeface="Calibri"/>
-              </a:rPr>
-              <a:t>Presented by the client as Authorization: Bearer.</a:t>
-            </a:r>
-          </a:p>
-          <a:p>
-            <a:pPr algn="l" lvl="1">
-              <a:spcAft>
-                <a:spcPts val="300"/>
-              </a:spcAft>
-            </a:pPr>
-            <a:r>
-              <a:rPr sz="1300" b="0" i="0">
-                <a:solidFill>
-                  <a:srgbClr val="1F2A37"/>
-                </a:solidFill>
-                <a:latin typeface="Calibri"/>
-              </a:rPr>
-              <a:t>• Used ONLY to attribute (preferred_username) and route (iss → instance)</a:t>
-            </a:r>
-          </a:p>
-          <a:p>
-            <a:pPr algn="l" lvl="1">
-              <a:spcAft>
-                <a:spcPts val="300"/>
-              </a:spcAft>
-            </a:pPr>
-            <a:r>
-              <a:rPr sz="1300" b="0" i="0">
-                <a:solidFill>
-                  <a:srgbClr val="1F2A37"/>
-                </a:solidFill>
-                <a:latin typeface="Calibri"/>
-              </a:rPr>
-              <a:t>• Signature validated via the issuer's JWKS</a:t>
-            </a:r>
-          </a:p>
-          <a:p>
-            <a:pPr algn="l" lvl="1">
-              <a:spcAft>
-                <a:spcPts val="300"/>
-              </a:spcAft>
-            </a:pPr>
-            <a:r>
-              <a:rPr sz="1300" b="0" i="0">
-                <a:solidFill>
-                  <a:srgbClr val="1F2A37"/>
-                </a:solidFill>
-                <a:latin typeface="Calibri"/>
-              </a:rPr>
-              <a:t>• aud / exp deliberately lenient in the dev/ops context</a:t>
-            </a:r>
-          </a:p>
-          <a:p>
-            <a:pPr algn="l" lvl="1">
-              <a:spcAft>
-                <a:spcPts val="300"/>
-              </a:spcAft>
-            </a:pPr>
-            <a:r>
-              <a:rPr sz="1300" b="1" i="0">
-                <a:solidFill>
-                  <a:srgbClr val="B55A2E"/>
-                </a:solidFill>
-                <a:latin typeface="Calibri"/>
-              </a:rPr>
-              <a:t>• NEVER forwarded to Rossoctl</a:t>
-            </a:r>
-          </a:p>
-          <a:p>
-            <a:pPr algn="l">
-              <a:spcAft>
-                <a:spcPts val="300"/>
-              </a:spcAft>
-            </a:pPr>
-            <a:r>
-              <a:rPr sz="1350" b="1" i="0">
-                <a:solidFill>
-                  <a:srgbClr val="5B8C5A"/>
-                </a:solidFill>
-                <a:latin typeface="Calibri"/>
-              </a:rPr>
-              <a:t>benchmarker is special:</a:t>
-            </a:r>
-          </a:p>
-          <a:p>
-            <a:pPr algn="l" lvl="1">
-              <a:spcAft>
-                <a:spcPts val="300"/>
-              </a:spcAft>
-            </a:pPr>
-            <a:r>
-              <a:rPr sz="1300" b="0" i="0">
-                <a:solidFill>
-                  <a:srgbClr val="1F2A37"/>
-                </a:solidFill>
-                <a:latin typeface="Calibri"/>
-              </a:rPr>
-              <a:t>• A caller JWT with preferred_username == benchmarker authorizes config ops (GET/PUT /config)</a:t>
-            </a:r>
-          </a:p>
-        </p:txBody>
-      </p:sp>
-      <p:sp>
-        <p:nvSpPr>
-          <p:cNvPr id="5" name="Rectangle 4"/>
+              <a:t>shared LLM gateway   ·   ete-litellm / litemaas   (external)</a:t>
+            </a:r>
+          </a:p>
+        </p:txBody>
+      </p:sp>
+      <p:sp>
+        <p:nvSpPr>
+          <p:cNvPr id="4" name="Rounded Rectangle 3"/>
           <p:cNvSpPr/>
           <p:nvPr/>
         </p:nvSpPr>
         <p:spPr>
           <a:xfrm>
-            <a:off x="6309360" y="1280160"/>
-            <a:ext cx="5394960" cy="457200"/>
-          </a:xfrm>
-          <a:prstGeom prst="rect">
+            <a:off x="411480" y="2148840"/>
+            <a:ext cx="1920240" cy="685800"/>
+          </a:xfrm>
+          <a:prstGeom prst="roundRect">
+            <a:avLst/>
+          </a:prstGeom>
+          <a:solidFill>
+            <a:srgbClr val="B55A2E"/>
+          </a:solidFill>
+          <a:ln w="22225">
+            <a:solidFill>
+              <a:srgbClr val="FFFFFF"/>
+            </a:solidFill>
+            <a:prstDash val="dash"/>
+          </a:ln>
+          <a:effectLst/>
+        </p:spPr>
+        <p:style>
+          <a:lnRef idx="1">
+            <a:schemeClr val="accent1"/>
+          </a:lnRef>
+          <a:fillRef idx="3">
+            <a:schemeClr val="accent1"/>
+          </a:fillRef>
+          <a:effectRef idx="2">
+            <a:schemeClr val="accent1"/>
+          </a:effectRef>
+          <a:fontRef idx="minor">
+            <a:schemeClr val="lt1"/>
+          </a:fontRef>
+        </p:style>
+        <p:txBody>
+          <a:bodyPr rtlCol="0" anchor="ctr" wrap="square" tIns="25400" bIns="25400"/>
+          <a:lstStyle/>
+          <a:p>
+            <a:pPr algn="ctr"/>
+            <a:r>
+              <a:rPr sz="1150" b="1" i="0">
+                <a:solidFill>
+                  <a:srgbClr val="FFFFFF"/>
+                </a:solidFill>
+                <a:latin typeface="Calibri"/>
+              </a:rPr>
+              <a:t>IBAC judge</a:t>
+            </a:r>
+          </a:p>
+          <a:p>
+            <a:pPr algn="ctr"/>
+            <a:r>
+              <a:rPr sz="850" b="0" i="0">
+                <a:solidFill>
+                  <a:srgbClr val="FBEEE4"/>
+                </a:solidFill>
+                <a:latin typeface="Calibri"/>
+              </a:rPr>
+              <a:t>an LLM call</a:t>
+            </a:r>
+          </a:p>
+        </p:txBody>
+      </p:sp>
+      <p:sp>
+        <p:nvSpPr>
+          <p:cNvPr id="5" name="Rounded Rectangle 4"/>
+          <p:cNvSpPr/>
+          <p:nvPr/>
+        </p:nvSpPr>
+        <p:spPr>
+          <a:xfrm>
+            <a:off x="411480" y="3063240"/>
+            <a:ext cx="1920240" cy="777240"/>
+          </a:xfrm>
+          <a:prstGeom prst="roundRect">
             <a:avLst/>
           </a:prstGeom>
           <a:solidFill>
@@ -6685,27 +6763,74 @@
           <a:p>
             <a:pPr algn="ctr"/>
             <a:r>
-              <a:rPr sz="1500" b="1" i="0">
+              <a:rPr sz="1100" b="1" i="0">
                 <a:solidFill>
                   <a:srgbClr val="FFFFFF"/>
                 </a:solidFill>
                 <a:latin typeface="Calibri"/>
               </a:rPr>
-              <a:t>Service token  (outbound)</a:t>
-            </a:r>
-          </a:p>
-        </p:txBody>
-      </p:sp>
-      <p:sp>
-        <p:nvSpPr>
-          <p:cNvPr id="6" name="TextBox 5"/>
+              <a:t>Benchmarking Service</a:t>
+            </a:r>
+          </a:p>
+        </p:txBody>
+      </p:sp>
+      <p:sp>
+        <p:nvSpPr>
+          <p:cNvPr id="6" name="Rounded Rectangle 5"/>
+          <p:cNvSpPr/>
+          <p:nvPr/>
+        </p:nvSpPr>
+        <p:spPr>
+          <a:xfrm>
+            <a:off x="2487168" y="1783080"/>
+            <a:ext cx="9262872" cy="3017520"/>
+          </a:xfrm>
+          <a:prstGeom prst="roundRect">
+            <a:avLst/>
+          </a:prstGeom>
+          <a:solidFill>
+            <a:srgbClr val="FBFCFD"/>
+          </a:solidFill>
+          <a:ln w="19050">
+            <a:solidFill>
+              <a:srgbClr val="1B3A5C"/>
+            </a:solidFill>
+            <a:prstDash val="dash"/>
+          </a:ln>
+          <a:effectLst/>
+        </p:spPr>
+        <p:style>
+          <a:lnRef idx="1">
+            <a:schemeClr val="accent1"/>
+          </a:lnRef>
+          <a:fillRef idx="3">
+            <a:schemeClr val="accent1"/>
+          </a:fillRef>
+          <a:effectRef idx="2">
+            <a:schemeClr val="accent1"/>
+          </a:effectRef>
+          <a:fontRef idx="minor">
+            <a:schemeClr val="lt1"/>
+          </a:fontRef>
+        </p:style>
+        <p:txBody>
+          <a:bodyPr rtlCol="0" anchor="ctr"/>
+          <a:lstStyle/>
+          <a:p>
+            <a:pPr algn="ctr"/>
+          </a:p>
+        </p:txBody>
+      </p:sp>
+      <p:sp>
+        <p:nvSpPr>
+          <p:cNvPr id="7" name="TextBox 6"/>
           <p:cNvSpPr txBox="1"/>
           <p:nvPr/>
         </p:nvSpPr>
         <p:spPr>
           <a:xfrm>
-            <a:off x="6400800" y="1828800"/>
-            <a:ext cx="5303520" cy="3291840"/>
+            <a:off x="2651760" y="4553712"/>
+            <a:ext cx="8869680" cy="201168"/>
           </a:xfrm>
           <a:prstGeom prst="rect">
             <a:avLst/>
@@ -6724,63 +6849,84 @@
               </a:spcAft>
             </a:pPr>
             <a:r>
-              <a:rPr sz="1350" b="0" i="0">
-                <a:solidFill>
-                  <a:srgbClr val="1F2A37"/>
-                </a:solidFill>
-                <a:latin typeface="Calibri"/>
-              </a:rPr>
-              <a:t>Minted by the Service per request via ROPC (password grant) using the instance's benchmarker credential.</a:t>
-            </a:r>
-          </a:p>
-          <a:p>
-            <a:pPr algn="l" lvl="1">
-              <a:spcAft>
-                <a:spcPts val="300"/>
-              </a:spcAft>
-            </a:pPr>
-            <a:r>
-              <a:rPr sz="1300" b="0" i="0">
-                <a:solidFill>
-                  <a:srgbClr val="1F2A37"/>
-                </a:solidFill>
-                <a:latin typeface="Calibri"/>
-              </a:rPr>
-              <a:t>• Always fresh → no expiry handling</a:t>
-            </a:r>
-          </a:p>
-          <a:p>
-            <a:pPr algn="l" lvl="1">
-              <a:spcAft>
-                <a:spcPts val="300"/>
-              </a:spcAft>
-            </a:pPr>
-            <a:r>
-              <a:rPr sz="1300" b="0" i="0">
-                <a:solidFill>
-                  <a:srgbClr val="1F2A37"/>
-                </a:solidFill>
-                <a:latin typeface="Calibri"/>
-              </a:rPr>
-              <a:t>• Presented to Rossoctl for all cluster-facing ops</a:t>
-            </a:r>
-          </a:p>
-          <a:p>
-            <a:pPr algn="l" lvl="1">
-              <a:spcAft>
-                <a:spcPts val="300"/>
-              </a:spcAft>
-            </a:pPr>
-            <a:r>
-              <a:rPr sz="1300" b="1" i="0">
-                <a:solidFill>
-                  <a:srgbClr val="2E6FB5"/>
-                </a:solidFill>
-                <a:latin typeface="Calibri"/>
-              </a:rPr>
-              <a:t>• The Service acts under its OWN identity, not the caller's</a:t>
-            </a:r>
-          </a:p>
+              <a:rPr sz="1100" b="1" i="0">
+                <a:solidFill>
+                  <a:srgbClr val="1B3A5C"/>
+                </a:solidFill>
+                <a:latin typeface="Calibri"/>
+              </a:rPr>
+              <a:t>Benchmark Workload — one per benchmark, namespace team1</a:t>
+            </a:r>
+          </a:p>
+        </p:txBody>
+      </p:sp>
+      <p:sp>
+        <p:nvSpPr>
+          <p:cNvPr id="8" name="Rounded Rectangle 7"/>
+          <p:cNvSpPr/>
+          <p:nvPr/>
+        </p:nvSpPr>
+        <p:spPr>
+          <a:xfrm>
+            <a:off x="2743200" y="2103120"/>
+            <a:ext cx="4160520" cy="2194560"/>
+          </a:xfrm>
+          <a:prstGeom prst="roundRect">
+            <a:avLst/>
+          </a:prstGeom>
+          <a:solidFill>
+            <a:srgbClr val="E4F0F0"/>
+          </a:solidFill>
+          <a:ln w="15875">
+            <a:solidFill>
+              <a:srgbClr val="3D6E70"/>
+            </a:solidFill>
+          </a:ln>
+          <a:effectLst/>
+        </p:spPr>
+        <p:style>
+          <a:lnRef idx="1">
+            <a:schemeClr val="accent1"/>
+          </a:lnRef>
+          <a:fillRef idx="3">
+            <a:schemeClr val="accent1"/>
+          </a:fillRef>
+          <a:effectRef idx="2">
+            <a:schemeClr val="accent1"/>
+          </a:effectRef>
+          <a:fontRef idx="minor">
+            <a:schemeClr val="lt1"/>
+          </a:fontRef>
+        </p:style>
+        <p:txBody>
+          <a:bodyPr rtlCol="0" anchor="ctr"/>
+          <a:lstStyle/>
+          <a:p>
+            <a:pPr algn="ctr"/>
+          </a:p>
+        </p:txBody>
+      </p:sp>
+      <p:sp>
+        <p:nvSpPr>
+          <p:cNvPr id="9" name="TextBox 8"/>
+          <p:cNvSpPr txBox="1"/>
+          <p:nvPr/>
+        </p:nvSpPr>
+        <p:spPr>
+          <a:xfrm>
+            <a:off x="2852928" y="2121408"/>
+            <a:ext cx="3931920" cy="219456"/>
+          </a:xfrm>
+          <a:prstGeom prst="rect">
+            <a:avLst/>
+          </a:prstGeom>
+          <a:noFill/>
+        </p:spPr>
+        <p:txBody>
+          <a:bodyPr wrap="square" anchor="t">
+            <a:spAutoFit/>
+          </a:bodyPr>
+          <a:lstStyle/>
           <a:p>
             <a:pPr algn="l">
               <a:spcAft>
@@ -6788,51 +6934,479 @@
               </a:spcAft>
             </a:pPr>
             <a:r>
-              <a:rPr sz="1350" b="1" i="0">
-                <a:solidFill>
-                  <a:srgbClr val="2E6FB5"/>
-                </a:solidFill>
-                <a:latin typeface="Calibri"/>
-              </a:rPr>
-              <a:t>Backchannel split (iss ≠ dialed host):</a:t>
-            </a:r>
-          </a:p>
-          <a:p>
-            <a:pPr algn="l" lvl="1">
+              <a:rPr sz="1100" b="1" i="0">
+                <a:solidFill>
+                  <a:srgbClr val="3D6E70"/>
+                </a:solidFill>
+                <a:latin typeface="Calibri"/>
+              </a:rPr>
+              <a:t>A2A agent pod</a:t>
+            </a:r>
+          </a:p>
+        </p:txBody>
+      </p:sp>
+      <p:sp>
+        <p:nvSpPr>
+          <p:cNvPr id="10" name="Rounded Rectangle 9"/>
+          <p:cNvSpPr/>
+          <p:nvPr/>
+        </p:nvSpPr>
+        <p:spPr>
+          <a:xfrm>
+            <a:off x="2852928" y="2359152"/>
+            <a:ext cx="3941063" cy="731520"/>
+          </a:xfrm>
+          <a:prstGeom prst="roundRect">
+            <a:avLst/>
+          </a:prstGeom>
+          <a:solidFill>
+            <a:srgbClr val="3D6E70"/>
+          </a:solidFill>
+          <a:ln w="12700">
+            <a:solidFill>
+              <a:srgbClr val="3D6E70"/>
+            </a:solidFill>
+          </a:ln>
+          <a:effectLst/>
+        </p:spPr>
+        <p:style>
+          <a:lnRef idx="1">
+            <a:schemeClr val="accent1"/>
+          </a:lnRef>
+          <a:fillRef idx="3">
+            <a:schemeClr val="accent1"/>
+          </a:fillRef>
+          <a:effectRef idx="2">
+            <a:schemeClr val="accent1"/>
+          </a:effectRef>
+          <a:fontRef idx="minor">
+            <a:schemeClr val="lt1"/>
+          </a:fontRef>
+        </p:style>
+        <p:txBody>
+          <a:bodyPr rtlCol="0" anchor="ctr" wrap="square" tIns="25400" bIns="25400"/>
+          <a:lstStyle/>
+          <a:p>
+            <a:pPr algn="ctr"/>
+            <a:r>
+              <a:rPr sz="1200" b="1" i="0">
+                <a:solidFill>
+                  <a:srgbClr val="FFFFFF"/>
+                </a:solidFill>
+                <a:latin typeface="Calibri"/>
+              </a:rPr>
+              <a:t>agent container</a:t>
+            </a:r>
+          </a:p>
+          <a:p>
+            <a:pPr algn="ctr"/>
+            <a:r>
+              <a:rPr sz="900" b="0" i="0">
+                <a:solidFill>
+                  <a:srgbClr val="E4F0F0"/>
+                </a:solidFill>
+                <a:latin typeface="Calibri"/>
+              </a:rPr>
+              <a:t>exgentic-a2a-tool_calling-&lt;b&gt;  ·  the LLM loop</a:t>
+            </a:r>
+          </a:p>
+        </p:txBody>
+      </p:sp>
+      <p:sp>
+        <p:nvSpPr>
+          <p:cNvPr id="11" name="Rounded Rectangle 10"/>
+          <p:cNvSpPr/>
+          <p:nvPr/>
+        </p:nvSpPr>
+        <p:spPr>
+          <a:xfrm>
+            <a:off x="2852928" y="3383280"/>
+            <a:ext cx="3941063" cy="731520"/>
+          </a:xfrm>
+          <a:prstGeom prst="roundRect">
+            <a:avLst/>
+          </a:prstGeom>
+          <a:solidFill>
+            <a:srgbClr val="8E44AD"/>
+          </a:solidFill>
+          <a:ln w="22225">
+            <a:solidFill>
+              <a:srgbClr val="FFFFFF"/>
+            </a:solidFill>
+            <a:prstDash val="dash"/>
+          </a:ln>
+          <a:effectLst/>
+        </p:spPr>
+        <p:style>
+          <a:lnRef idx="1">
+            <a:schemeClr val="accent1"/>
+          </a:lnRef>
+          <a:fillRef idx="3">
+            <a:schemeClr val="accent1"/>
+          </a:fillRef>
+          <a:effectRef idx="2">
+            <a:schemeClr val="accent1"/>
+          </a:effectRef>
+          <a:fontRef idx="minor">
+            <a:schemeClr val="lt1"/>
+          </a:fontRef>
+        </p:style>
+        <p:txBody>
+          <a:bodyPr rtlCol="0" anchor="ctr" wrap="square" tIns="25400" bIns="25400"/>
+          <a:lstStyle/>
+          <a:p>
+            <a:pPr algn="ctr"/>
+            <a:r>
+              <a:rPr sz="1200" b="1" i="0">
+                <a:solidFill>
+                  <a:srgbClr val="FFFFFF"/>
+                </a:solidFill>
+                <a:latin typeface="Calibri"/>
+              </a:rPr>
+              <a:t>AuthBridge sidecar</a:t>
+            </a:r>
+          </a:p>
+          <a:p>
+            <a:pPr algn="ctr"/>
+            <a:r>
+              <a:rPr sz="900" b="0" i="0">
+                <a:solidFill>
+                  <a:srgbClr val="F1E8F6"/>
+                </a:solidFill>
+                <a:latin typeface="Calibri"/>
+              </a:rPr>
+              <a:t>proxy  ·  only with --plugin-preset</a:t>
+            </a:r>
+          </a:p>
+        </p:txBody>
+      </p:sp>
+      <p:sp>
+        <p:nvSpPr>
+          <p:cNvPr id="12" name="Rounded Rectangle 11"/>
+          <p:cNvSpPr/>
+          <p:nvPr/>
+        </p:nvSpPr>
+        <p:spPr>
+          <a:xfrm>
+            <a:off x="7498079" y="2103120"/>
+            <a:ext cx="4114800" cy="2194560"/>
+          </a:xfrm>
+          <a:prstGeom prst="roundRect">
+            <a:avLst/>
+          </a:prstGeom>
+          <a:solidFill>
+            <a:srgbClr val="E4F0F0"/>
+          </a:solidFill>
+          <a:ln w="15875">
+            <a:solidFill>
+              <a:srgbClr val="3D6E70"/>
+            </a:solidFill>
+          </a:ln>
+          <a:effectLst/>
+        </p:spPr>
+        <p:style>
+          <a:lnRef idx="1">
+            <a:schemeClr val="accent1"/>
+          </a:lnRef>
+          <a:fillRef idx="3">
+            <a:schemeClr val="accent1"/>
+          </a:fillRef>
+          <a:effectRef idx="2">
+            <a:schemeClr val="accent1"/>
+          </a:effectRef>
+          <a:fontRef idx="minor">
+            <a:schemeClr val="lt1"/>
+          </a:fontRef>
+        </p:style>
+        <p:txBody>
+          <a:bodyPr rtlCol="0" anchor="ctr"/>
+          <a:lstStyle/>
+          <a:p>
+            <a:pPr algn="ctr"/>
+          </a:p>
+        </p:txBody>
+      </p:sp>
+      <p:sp>
+        <p:nvSpPr>
+          <p:cNvPr id="13" name="TextBox 12"/>
+          <p:cNvSpPr txBox="1"/>
+          <p:nvPr/>
+        </p:nvSpPr>
+        <p:spPr>
+          <a:xfrm>
+            <a:off x="7607808" y="2121408"/>
+            <a:ext cx="3840480" cy="219456"/>
+          </a:xfrm>
+          <a:prstGeom prst="rect">
+            <a:avLst/>
+          </a:prstGeom>
+          <a:noFill/>
+        </p:spPr>
+        <p:txBody>
+          <a:bodyPr wrap="square" anchor="t">
+            <a:spAutoFit/>
+          </a:bodyPr>
+          <a:lstStyle/>
+          <a:p>
+            <a:pPr algn="l">
               <a:spcAft>
                 <a:spcPts val="300"/>
               </a:spcAft>
             </a:pPr>
             <a:r>
-              <a:rPr sz="1300" b="0" i="0">
-                <a:solidFill>
-                  <a:srgbClr val="1F2A37"/>
-                </a:solidFill>
-                <a:latin typeface="Calibri"/>
-              </a:rPr>
-              <a:t>• When the iss host is unreachable (in-cluster kind), JWKS + token come from a configured backchannel URL; iss is matched, never dialed</a:t>
-            </a:r>
-          </a:p>
-        </p:txBody>
-      </p:sp>
-      <p:sp>
-        <p:nvSpPr>
-          <p:cNvPr id="7" name="Rounded Rectangle 6"/>
+              <a:rPr sz="1100" b="1" i="0">
+                <a:solidFill>
+                  <a:srgbClr val="3D6E70"/>
+                </a:solidFill>
+                <a:latin typeface="Calibri"/>
+              </a:rPr>
+              <a:t>MCP tool pod</a:t>
+            </a:r>
+          </a:p>
+        </p:txBody>
+      </p:sp>
+      <p:sp>
+        <p:nvSpPr>
+          <p:cNvPr id="14" name="Rounded Rectangle 13"/>
           <p:cNvSpPr/>
           <p:nvPr/>
         </p:nvSpPr>
         <p:spPr>
           <a:xfrm>
-            <a:off x="1463040" y="5212080"/>
-            <a:ext cx="9235440" cy="1005840"/>
+            <a:off x="7607808" y="2359152"/>
+            <a:ext cx="3895344" cy="731520"/>
           </a:xfrm>
           <a:prstGeom prst="roundRect">
             <a:avLst/>
           </a:prstGeom>
           <a:solidFill>
-            <a:srgbClr val="E8F1FB"/>
+            <a:srgbClr val="3D6E70"/>
+          </a:solidFill>
+          <a:ln w="22225">
+            <a:solidFill>
+              <a:srgbClr val="FFFFFF"/>
+            </a:solidFill>
+            <a:prstDash val="dash"/>
+          </a:ln>
+          <a:effectLst/>
+        </p:spPr>
+        <p:style>
+          <a:lnRef idx="1">
+            <a:schemeClr val="accent1"/>
+          </a:lnRef>
+          <a:fillRef idx="3">
+            <a:schemeClr val="accent1"/>
+          </a:fillRef>
+          <a:effectRef idx="2">
+            <a:schemeClr val="accent1"/>
+          </a:effectRef>
+          <a:fontRef idx="minor">
+            <a:schemeClr val="lt1"/>
+          </a:fontRef>
+        </p:style>
+        <p:txBody>
+          <a:bodyPr rtlCol="0" anchor="ctr" wrap="square" tIns="25400" bIns="25400"/>
+          <a:lstStyle/>
+          <a:p>
+            <a:pPr algn="ctr"/>
+            <a:r>
+              <a:rPr sz="1200" b="1" i="0">
+                <a:solidFill>
+                  <a:srgbClr val="FFFFFF"/>
+                </a:solidFill>
+                <a:latin typeface="Calibri"/>
+              </a:rPr>
+              <a:t>user simulator LLM</a:t>
+            </a:r>
+          </a:p>
+          <a:p>
+            <a:pPr algn="ctr"/>
+            <a:r>
+              <a:rPr sz="900" b="0" i="0">
+                <a:solidFill>
+                  <a:srgbClr val="E4F0F0"/>
+                </a:solidFill>
+                <a:latin typeface="Calibri"/>
+              </a:rPr>
+              <a:t>tau2 only  ·  plays the customer</a:t>
+            </a:r>
+          </a:p>
+        </p:txBody>
+      </p:sp>
+      <p:sp>
+        <p:nvSpPr>
+          <p:cNvPr id="15" name="Rounded Rectangle 14"/>
+          <p:cNvSpPr/>
+          <p:nvPr/>
+        </p:nvSpPr>
+        <p:spPr>
+          <a:xfrm>
+            <a:off x="7607808" y="3383280"/>
+            <a:ext cx="3895344" cy="731520"/>
+          </a:xfrm>
+          <a:prstGeom prst="roundRect">
+            <a:avLst/>
+          </a:prstGeom>
+          <a:solidFill>
+            <a:srgbClr val="3D6E70"/>
           </a:solidFill>
           <a:ln w="12700">
+            <a:solidFill>
+              <a:srgbClr val="3D6E70"/>
+            </a:solidFill>
+          </a:ln>
+          <a:effectLst/>
+        </p:spPr>
+        <p:style>
+          <a:lnRef idx="1">
+            <a:schemeClr val="accent1"/>
+          </a:lnRef>
+          <a:fillRef idx="3">
+            <a:schemeClr val="accent1"/>
+          </a:fillRef>
+          <a:effectRef idx="2">
+            <a:schemeClr val="accent1"/>
+          </a:effectRef>
+          <a:fontRef idx="minor">
+            <a:schemeClr val="lt1"/>
+          </a:fontRef>
+        </p:style>
+        <p:txBody>
+          <a:bodyPr rtlCol="0" anchor="ctr" wrap="square" tIns="25400" bIns="25400"/>
+          <a:lstStyle/>
+          <a:p>
+            <a:pPr algn="ctr"/>
+            <a:r>
+              <a:rPr sz="1200" b="1" i="0">
+                <a:solidFill>
+                  <a:srgbClr val="FFFFFF"/>
+                </a:solidFill>
+                <a:latin typeface="Calibri"/>
+              </a:rPr>
+              <a:t>MCP server</a:t>
+            </a:r>
+          </a:p>
+          <a:p>
+            <a:pPr algn="ctr"/>
+            <a:r>
+              <a:rPr sz="900" b="0" i="0">
+                <a:solidFill>
+                  <a:srgbClr val="E4F0F0"/>
+                </a:solidFill>
+                <a:latin typeface="Calibri"/>
+              </a:rPr>
+              <a:t>exgentic-mcp-&lt;benchmark&gt;  ·  tasks + evaluation</a:t>
+            </a:r>
+          </a:p>
+        </p:txBody>
+      </p:sp>
+      <p:cxnSp>
+        <p:nvCxnSpPr>
+          <p:cNvPr id="16" name="Connector 15"/>
+          <p:cNvCxnSpPr/>
+          <p:nvPr/>
+        </p:nvCxnSpPr>
+        <p:spPr>
+          <a:xfrm flipV="1">
+            <a:off x="2331720" y="2852928"/>
+            <a:ext cx="521208" cy="274320"/>
+          </a:xfrm>
+          <a:prstGeom prst="line">
+            <a:avLst/>
+          </a:prstGeom>
+          <a:ln w="25400">
+            <a:solidFill>
+              <a:srgbClr val="2E6FB5"/>
+            </a:solidFill>
+            <a:tailEnd type="triangle" w="med" len="med"/>
+          </a:ln>
+          <a:effectLst/>
+        </p:spPr>
+        <p:style>
+          <a:lnRef idx="2">
+            <a:schemeClr val="accent1"/>
+          </a:lnRef>
+          <a:fillRef idx="0">
+            <a:schemeClr val="accent1"/>
+          </a:fillRef>
+          <a:effectRef idx="1">
+            <a:schemeClr val="accent1"/>
+          </a:effectRef>
+          <a:fontRef idx="minor">
+            <a:schemeClr val="tx1"/>
+          </a:fontRef>
+        </p:style>
+      </p:cxnSp>
+      <p:sp>
+        <p:nvSpPr>
+          <p:cNvPr id="17" name="Oval 16"/>
+          <p:cNvSpPr/>
+          <p:nvPr/>
+        </p:nvSpPr>
+        <p:spPr>
+          <a:xfrm>
+            <a:off x="2478024" y="2871216"/>
+            <a:ext cx="237744" cy="237744"/>
+          </a:xfrm>
+          <a:prstGeom prst="ellipse">
+            <a:avLst/>
+          </a:prstGeom>
+          <a:solidFill>
+            <a:srgbClr val="E87A1E"/>
+          </a:solidFill>
+          <a:ln w="12700">
+            <a:solidFill>
+              <a:srgbClr val="FFFFFF"/>
+            </a:solidFill>
+          </a:ln>
+          <a:effectLst/>
+        </p:spPr>
+        <p:style>
+          <a:lnRef idx="1">
+            <a:schemeClr val="accent1"/>
+          </a:lnRef>
+          <a:fillRef idx="3">
+            <a:schemeClr val="accent1"/>
+          </a:fillRef>
+          <a:effectRef idx="2">
+            <a:schemeClr val="accent1"/>
+          </a:effectRef>
+          <a:fontRef idx="minor">
+            <a:schemeClr val="lt1"/>
+          </a:fontRef>
+        </p:style>
+        <p:txBody>
+          <a:bodyPr rtlCol="0" anchor="ctr" wrap="none" lIns="0" rIns="0" tIns="0" bIns="0"/>
+          <a:lstStyle/>
+          <a:p>
+            <a:pPr algn="ctr"/>
+            <a:r>
+              <a:rPr sz="1050" b="1" i="0">
+                <a:solidFill>
+                  <a:srgbClr val="FFFFFF"/>
+                </a:solidFill>
+                <a:latin typeface="Calibri"/>
+              </a:rPr>
+              <a:t>1</a:t>
+            </a:r>
+          </a:p>
+        </p:txBody>
+      </p:sp>
+      <p:cxnSp>
+        <p:nvCxnSpPr>
+          <p:cNvPr id="18" name="Connector 17"/>
+          <p:cNvCxnSpPr/>
+          <p:nvPr/>
+        </p:nvCxnSpPr>
+        <p:spPr>
+          <a:xfrm>
+            <a:off x="2414016" y="3840480"/>
+            <a:ext cx="0" cy="566928"/>
+          </a:xfrm>
+          <a:prstGeom prst="line">
+            <a:avLst/>
+          </a:prstGeom>
+          <a:ln w="25400">
             <a:solidFill>
               <a:srgbClr val="2E6FB5"/>
             </a:solidFill>
@@ -6840,6 +7414,118 @@
           <a:effectLst/>
         </p:spPr>
         <p:style>
+          <a:lnRef idx="2">
+            <a:schemeClr val="accent1"/>
+          </a:lnRef>
+          <a:fillRef idx="0">
+            <a:schemeClr val="accent1"/>
+          </a:fillRef>
+          <a:effectRef idx="1">
+            <a:schemeClr val="accent1"/>
+          </a:effectRef>
+          <a:fontRef idx="minor">
+            <a:schemeClr val="tx1"/>
+          </a:fontRef>
+        </p:style>
+      </p:cxnSp>
+      <p:cxnSp>
+        <p:nvCxnSpPr>
+          <p:cNvPr id="19" name="Connector 18"/>
+          <p:cNvCxnSpPr/>
+          <p:nvPr/>
+        </p:nvCxnSpPr>
+        <p:spPr>
+          <a:xfrm>
+            <a:off x="2414016" y="4407408"/>
+            <a:ext cx="5907024" cy="0"/>
+          </a:xfrm>
+          <a:prstGeom prst="line">
+            <a:avLst/>
+          </a:prstGeom>
+          <a:ln w="25400">
+            <a:solidFill>
+              <a:srgbClr val="2E6FB5"/>
+            </a:solidFill>
+          </a:ln>
+          <a:effectLst/>
+        </p:spPr>
+        <p:style>
+          <a:lnRef idx="2">
+            <a:schemeClr val="accent1"/>
+          </a:lnRef>
+          <a:fillRef idx="0">
+            <a:schemeClr val="accent1"/>
+          </a:fillRef>
+          <a:effectRef idx="1">
+            <a:schemeClr val="accent1"/>
+          </a:effectRef>
+          <a:fontRef idx="minor">
+            <a:schemeClr val="tx1"/>
+          </a:fontRef>
+        </p:style>
+      </p:cxnSp>
+      <p:cxnSp>
+        <p:nvCxnSpPr>
+          <p:cNvPr id="20" name="Connector 19"/>
+          <p:cNvCxnSpPr/>
+          <p:nvPr/>
+        </p:nvCxnSpPr>
+        <p:spPr>
+          <a:xfrm flipV="1">
+            <a:off x="8321040" y="4114800"/>
+            <a:ext cx="0" cy="292608"/>
+          </a:xfrm>
+          <a:prstGeom prst="line">
+            <a:avLst/>
+          </a:prstGeom>
+          <a:ln w="25400">
+            <a:solidFill>
+              <a:srgbClr val="2E6FB5"/>
+            </a:solidFill>
+            <a:tailEnd type="triangle" w="med" len="med"/>
+          </a:ln>
+          <a:effectLst/>
+        </p:spPr>
+        <p:style>
+          <a:lnRef idx="2">
+            <a:schemeClr val="accent1"/>
+          </a:lnRef>
+          <a:fillRef idx="0">
+            <a:schemeClr val="accent1"/>
+          </a:fillRef>
+          <a:effectRef idx="1">
+            <a:schemeClr val="accent1"/>
+          </a:effectRef>
+          <a:fontRef idx="minor">
+            <a:schemeClr val="tx1"/>
+          </a:fontRef>
+        </p:style>
+      </p:cxnSp>
+      <p:sp>
+        <p:nvSpPr>
+          <p:cNvPr id="21" name="Oval 20"/>
+          <p:cNvSpPr/>
+          <p:nvPr/>
+        </p:nvSpPr>
+        <p:spPr>
+          <a:xfrm>
+            <a:off x="5367528" y="4288536"/>
+            <a:ext cx="237744" cy="237744"/>
+          </a:xfrm>
+          <a:prstGeom prst="ellipse">
+            <a:avLst/>
+          </a:prstGeom>
+          <a:solidFill>
+            <a:srgbClr val="E87A1E"/>
+          </a:solidFill>
+          <a:ln w="12700">
+            <a:solidFill>
+              <a:srgbClr val="FFFFFF"/>
+            </a:solidFill>
+          </a:ln>
+          <a:effectLst/>
+        </p:spPr>
+        <p:style>
           <a:lnRef idx="1">
             <a:schemeClr val="accent1"/>
           </a:lnRef>
@@ -6854,18 +7540,1681 @@
           </a:fontRef>
         </p:style>
         <p:txBody>
-          <a:bodyPr rtlCol="0" anchor="ctr" wrap="square" tIns="25400" bIns="25400"/>
+          <a:bodyPr rtlCol="0" anchor="ctr" wrap="none" lIns="0" rIns="0" tIns="0" bIns="0"/>
           <a:lstStyle/>
           <a:p>
             <a:pPr algn="ctr"/>
             <a:r>
-              <a:rPr sz="1350" b="1" i="0">
+              <a:rPr sz="1050" b="1" i="0">
+                <a:solidFill>
+                  <a:srgbClr val="FFFFFF"/>
+                </a:solidFill>
+                <a:latin typeface="Calibri"/>
+              </a:rPr>
+              <a:t>2</a:t>
+            </a:r>
+          </a:p>
+        </p:txBody>
+      </p:sp>
+      <p:cxnSp>
+        <p:nvCxnSpPr>
+          <p:cNvPr id="22" name="Connector 21"/>
+          <p:cNvCxnSpPr/>
+          <p:nvPr/>
+        </p:nvCxnSpPr>
+        <p:spPr>
+          <a:xfrm flipV="1">
+            <a:off x="4800600" y="1645920"/>
+            <a:ext cx="0" cy="713232"/>
+          </a:xfrm>
+          <a:prstGeom prst="line">
+            <a:avLst/>
+          </a:prstGeom>
+          <a:ln w="25400">
+            <a:solidFill>
+              <a:srgbClr val="E87A1E"/>
+            </a:solidFill>
+            <a:tailEnd type="triangle" w="med" len="med"/>
+          </a:ln>
+          <a:effectLst/>
+        </p:spPr>
+        <p:style>
+          <a:lnRef idx="2">
+            <a:schemeClr val="accent1"/>
+          </a:lnRef>
+          <a:fillRef idx="0">
+            <a:schemeClr val="accent1"/>
+          </a:fillRef>
+          <a:effectRef idx="1">
+            <a:schemeClr val="accent1"/>
+          </a:effectRef>
+          <a:fontRef idx="minor">
+            <a:schemeClr val="tx1"/>
+          </a:fontRef>
+        </p:style>
+      </p:cxnSp>
+      <p:sp>
+        <p:nvSpPr>
+          <p:cNvPr id="23" name="Oval 22"/>
+          <p:cNvSpPr/>
+          <p:nvPr/>
+        </p:nvSpPr>
+        <p:spPr>
+          <a:xfrm>
+            <a:off x="4681728" y="1828800"/>
+            <a:ext cx="237744" cy="237744"/>
+          </a:xfrm>
+          <a:prstGeom prst="ellipse">
+            <a:avLst/>
+          </a:prstGeom>
+          <a:solidFill>
+            <a:srgbClr val="E87A1E"/>
+          </a:solidFill>
+          <a:ln w="12700">
+            <a:solidFill>
+              <a:srgbClr val="FFFFFF"/>
+            </a:solidFill>
+          </a:ln>
+          <a:effectLst/>
+        </p:spPr>
+        <p:style>
+          <a:lnRef idx="1">
+            <a:schemeClr val="accent1"/>
+          </a:lnRef>
+          <a:fillRef idx="3">
+            <a:schemeClr val="accent1"/>
+          </a:fillRef>
+          <a:effectRef idx="2">
+            <a:schemeClr val="accent1"/>
+          </a:effectRef>
+          <a:fontRef idx="minor">
+            <a:schemeClr val="lt1"/>
+          </a:fontRef>
+        </p:style>
+        <p:txBody>
+          <a:bodyPr rtlCol="0" anchor="ctr" wrap="none" lIns="0" rIns="0" tIns="0" bIns="0"/>
+          <a:lstStyle/>
+          <a:p>
+            <a:pPr algn="ctr"/>
+            <a:r>
+              <a:rPr sz="1050" b="1" i="0">
+                <a:solidFill>
+                  <a:srgbClr val="FFFFFF"/>
+                </a:solidFill>
+                <a:latin typeface="Calibri"/>
+              </a:rPr>
+              <a:t>3</a:t>
+            </a:r>
+          </a:p>
+        </p:txBody>
+      </p:sp>
+      <p:cxnSp>
+        <p:nvCxnSpPr>
+          <p:cNvPr id="24" name="Connector 23"/>
+          <p:cNvCxnSpPr/>
+          <p:nvPr/>
+        </p:nvCxnSpPr>
+        <p:spPr>
+          <a:xfrm flipV="1">
+            <a:off x="9555480" y="1645920"/>
+            <a:ext cx="0" cy="713232"/>
+          </a:xfrm>
+          <a:prstGeom prst="line">
+            <a:avLst/>
+          </a:prstGeom>
+          <a:ln w="25400">
+            <a:solidFill>
+              <a:srgbClr val="E87A1E"/>
+            </a:solidFill>
+            <a:tailEnd type="triangle" w="med" len="med"/>
+          </a:ln>
+          <a:effectLst/>
+        </p:spPr>
+        <p:style>
+          <a:lnRef idx="2">
+            <a:schemeClr val="accent1"/>
+          </a:lnRef>
+          <a:fillRef idx="0">
+            <a:schemeClr val="accent1"/>
+          </a:fillRef>
+          <a:effectRef idx="1">
+            <a:schemeClr val="accent1"/>
+          </a:effectRef>
+          <a:fontRef idx="minor">
+            <a:schemeClr val="tx1"/>
+          </a:fontRef>
+        </p:style>
+      </p:cxnSp>
+      <p:sp>
+        <p:nvSpPr>
+          <p:cNvPr id="25" name="Oval 24"/>
+          <p:cNvSpPr/>
+          <p:nvPr/>
+        </p:nvSpPr>
+        <p:spPr>
+          <a:xfrm>
+            <a:off x="9436608" y="1828800"/>
+            <a:ext cx="237744" cy="237744"/>
+          </a:xfrm>
+          <a:prstGeom prst="ellipse">
+            <a:avLst/>
+          </a:prstGeom>
+          <a:solidFill>
+            <a:srgbClr val="E87A1E"/>
+          </a:solidFill>
+          <a:ln w="12700">
+            <a:solidFill>
+              <a:srgbClr val="FFFFFF"/>
+            </a:solidFill>
+          </a:ln>
+          <a:effectLst/>
+        </p:spPr>
+        <p:style>
+          <a:lnRef idx="1">
+            <a:schemeClr val="accent1"/>
+          </a:lnRef>
+          <a:fillRef idx="3">
+            <a:schemeClr val="accent1"/>
+          </a:fillRef>
+          <a:effectRef idx="2">
+            <a:schemeClr val="accent1"/>
+          </a:effectRef>
+          <a:fontRef idx="minor">
+            <a:schemeClr val="lt1"/>
+          </a:fontRef>
+        </p:style>
+        <p:txBody>
+          <a:bodyPr rtlCol="0" anchor="ctr" wrap="none" lIns="0" rIns="0" tIns="0" bIns="0"/>
+          <a:lstStyle/>
+          <a:p>
+            <a:pPr algn="ctr"/>
+            <a:r>
+              <a:rPr sz="1050" b="1" i="0">
+                <a:solidFill>
+                  <a:srgbClr val="FFFFFF"/>
+                </a:solidFill>
+                <a:latin typeface="Calibri"/>
+              </a:rPr>
+              <a:t>4</a:t>
+            </a:r>
+          </a:p>
+        </p:txBody>
+      </p:sp>
+      <p:cxnSp>
+        <p:nvCxnSpPr>
+          <p:cNvPr id="26" name="Connector 25"/>
+          <p:cNvCxnSpPr/>
+          <p:nvPr/>
+        </p:nvCxnSpPr>
+        <p:spPr>
+          <a:xfrm>
+            <a:off x="4800600" y="3090672"/>
+            <a:ext cx="0" cy="292608"/>
+          </a:xfrm>
+          <a:prstGeom prst="line">
+            <a:avLst/>
+          </a:prstGeom>
+          <a:ln w="25400">
+            <a:solidFill>
+              <a:srgbClr val="8E44AD"/>
+            </a:solidFill>
+            <a:tailEnd type="triangle" w="med" len="med"/>
+          </a:ln>
+          <a:effectLst/>
+        </p:spPr>
+        <p:style>
+          <a:lnRef idx="2">
+            <a:schemeClr val="accent1"/>
+          </a:lnRef>
+          <a:fillRef idx="0">
+            <a:schemeClr val="accent1"/>
+          </a:fillRef>
+          <a:effectRef idx="1">
+            <a:schemeClr val="accent1"/>
+          </a:effectRef>
+          <a:fontRef idx="minor">
+            <a:schemeClr val="tx1"/>
+          </a:fontRef>
+        </p:style>
+      </p:cxnSp>
+      <p:sp>
+        <p:nvSpPr>
+          <p:cNvPr id="27" name="Oval 26"/>
+          <p:cNvSpPr/>
+          <p:nvPr/>
+        </p:nvSpPr>
+        <p:spPr>
+          <a:xfrm>
+            <a:off x="4681728" y="3118104"/>
+            <a:ext cx="237744" cy="237744"/>
+          </a:xfrm>
+          <a:prstGeom prst="ellipse">
+            <a:avLst/>
+          </a:prstGeom>
+          <a:solidFill>
+            <a:srgbClr val="E87A1E"/>
+          </a:solidFill>
+          <a:ln w="12700">
+            <a:solidFill>
+              <a:srgbClr val="FFFFFF"/>
+            </a:solidFill>
+          </a:ln>
+          <a:effectLst/>
+        </p:spPr>
+        <p:style>
+          <a:lnRef idx="1">
+            <a:schemeClr val="accent1"/>
+          </a:lnRef>
+          <a:fillRef idx="3">
+            <a:schemeClr val="accent1"/>
+          </a:fillRef>
+          <a:effectRef idx="2">
+            <a:schemeClr val="accent1"/>
+          </a:effectRef>
+          <a:fontRef idx="minor">
+            <a:schemeClr val="lt1"/>
+          </a:fontRef>
+        </p:style>
+        <p:txBody>
+          <a:bodyPr rtlCol="0" anchor="ctr" wrap="none" lIns="0" rIns="0" tIns="0" bIns="0"/>
+          <a:lstStyle/>
+          <a:p>
+            <a:pPr algn="ctr"/>
+            <a:r>
+              <a:rPr sz="1050" b="1" i="0">
+                <a:solidFill>
+                  <a:srgbClr val="FFFFFF"/>
+                </a:solidFill>
+                <a:latin typeface="Calibri"/>
+              </a:rPr>
+              <a:t>5</a:t>
+            </a:r>
+          </a:p>
+        </p:txBody>
+      </p:sp>
+      <p:cxnSp>
+        <p:nvCxnSpPr>
+          <p:cNvPr id="28" name="Connector 27"/>
+          <p:cNvCxnSpPr/>
+          <p:nvPr/>
+        </p:nvCxnSpPr>
+        <p:spPr>
+          <a:xfrm>
+            <a:off x="6793992" y="3749039"/>
+            <a:ext cx="813816" cy="0"/>
+          </a:xfrm>
+          <a:prstGeom prst="line">
+            <a:avLst/>
+          </a:prstGeom>
+          <a:ln w="25400">
+            <a:solidFill>
+              <a:srgbClr val="8E44AD"/>
+            </a:solidFill>
+            <a:tailEnd type="triangle" w="med" len="med"/>
+          </a:ln>
+          <a:effectLst/>
+        </p:spPr>
+        <p:style>
+          <a:lnRef idx="2">
+            <a:schemeClr val="accent1"/>
+          </a:lnRef>
+          <a:fillRef idx="0">
+            <a:schemeClr val="accent1"/>
+          </a:fillRef>
+          <a:effectRef idx="1">
+            <a:schemeClr val="accent1"/>
+          </a:effectRef>
+          <a:fontRef idx="minor">
+            <a:schemeClr val="tx1"/>
+          </a:fontRef>
+        </p:style>
+      </p:cxnSp>
+      <p:sp>
+        <p:nvSpPr>
+          <p:cNvPr id="29" name="Oval 28"/>
+          <p:cNvSpPr/>
+          <p:nvPr/>
+        </p:nvSpPr>
+        <p:spPr>
+          <a:xfrm>
+            <a:off x="7086600" y="3630167"/>
+            <a:ext cx="237744" cy="237744"/>
+          </a:xfrm>
+          <a:prstGeom prst="ellipse">
+            <a:avLst/>
+          </a:prstGeom>
+          <a:solidFill>
+            <a:srgbClr val="E87A1E"/>
+          </a:solidFill>
+          <a:ln w="12700">
+            <a:solidFill>
+              <a:srgbClr val="FFFFFF"/>
+            </a:solidFill>
+          </a:ln>
+          <a:effectLst/>
+        </p:spPr>
+        <p:style>
+          <a:lnRef idx="1">
+            <a:schemeClr val="accent1"/>
+          </a:lnRef>
+          <a:fillRef idx="3">
+            <a:schemeClr val="accent1"/>
+          </a:fillRef>
+          <a:effectRef idx="2">
+            <a:schemeClr val="accent1"/>
+          </a:effectRef>
+          <a:fontRef idx="minor">
+            <a:schemeClr val="lt1"/>
+          </a:fontRef>
+        </p:style>
+        <p:txBody>
+          <a:bodyPr rtlCol="0" anchor="ctr" wrap="none" lIns="0" rIns="0" tIns="0" bIns="0"/>
+          <a:lstStyle/>
+          <a:p>
+            <a:pPr algn="ctr"/>
+            <a:r>
+              <a:rPr sz="1050" b="1" i="0">
+                <a:solidFill>
+                  <a:srgbClr val="FFFFFF"/>
+                </a:solidFill>
+                <a:latin typeface="Calibri"/>
+              </a:rPr>
+              <a:t>6</a:t>
+            </a:r>
+          </a:p>
+        </p:txBody>
+      </p:sp>
+      <p:cxnSp>
+        <p:nvCxnSpPr>
+          <p:cNvPr id="30" name="Connector 29"/>
+          <p:cNvCxnSpPr/>
+          <p:nvPr/>
+        </p:nvCxnSpPr>
+        <p:spPr>
+          <a:xfrm flipH="1" flipV="1">
+            <a:off x="2331720" y="2697480"/>
+            <a:ext cx="521208" cy="914400"/>
+          </a:xfrm>
+          <a:prstGeom prst="line">
+            <a:avLst/>
+          </a:prstGeom>
+          <a:ln w="25400">
+            <a:solidFill>
+              <a:srgbClr val="B55A2E"/>
+            </a:solidFill>
+            <a:tailEnd type="triangle" w="med" len="med"/>
+          </a:ln>
+          <a:effectLst/>
+        </p:spPr>
+        <p:style>
+          <a:lnRef idx="2">
+            <a:schemeClr val="accent1"/>
+          </a:lnRef>
+          <a:fillRef idx="0">
+            <a:schemeClr val="accent1"/>
+          </a:fillRef>
+          <a:effectRef idx="1">
+            <a:schemeClr val="accent1"/>
+          </a:effectRef>
+          <a:fontRef idx="minor">
+            <a:schemeClr val="tx1"/>
+          </a:fontRef>
+        </p:style>
+      </p:cxnSp>
+      <p:sp>
+        <p:nvSpPr>
+          <p:cNvPr id="31" name="Oval 30"/>
+          <p:cNvSpPr/>
+          <p:nvPr/>
+        </p:nvSpPr>
+        <p:spPr>
+          <a:xfrm>
+            <a:off x="2578608" y="3200400"/>
+            <a:ext cx="237744" cy="237744"/>
+          </a:xfrm>
+          <a:prstGeom prst="ellipse">
+            <a:avLst/>
+          </a:prstGeom>
+          <a:solidFill>
+            <a:srgbClr val="E87A1E"/>
+          </a:solidFill>
+          <a:ln w="12700">
+            <a:solidFill>
+              <a:srgbClr val="FFFFFF"/>
+            </a:solidFill>
+          </a:ln>
+          <a:effectLst/>
+        </p:spPr>
+        <p:style>
+          <a:lnRef idx="1">
+            <a:schemeClr val="accent1"/>
+          </a:lnRef>
+          <a:fillRef idx="3">
+            <a:schemeClr val="accent1"/>
+          </a:fillRef>
+          <a:effectRef idx="2">
+            <a:schemeClr val="accent1"/>
+          </a:effectRef>
+          <a:fontRef idx="minor">
+            <a:schemeClr val="lt1"/>
+          </a:fontRef>
+        </p:style>
+        <p:txBody>
+          <a:bodyPr rtlCol="0" anchor="ctr" wrap="none" lIns="0" rIns="0" tIns="0" bIns="0"/>
+          <a:lstStyle/>
+          <a:p>
+            <a:pPr algn="ctr"/>
+            <a:r>
+              <a:rPr sz="1050" b="1" i="0">
+                <a:solidFill>
+                  <a:srgbClr val="FFFFFF"/>
+                </a:solidFill>
+                <a:latin typeface="Calibri"/>
+              </a:rPr>
+              <a:t>7</a:t>
+            </a:r>
+          </a:p>
+        </p:txBody>
+      </p:sp>
+      <p:cxnSp>
+        <p:nvCxnSpPr>
+          <p:cNvPr id="32" name="Connector 31"/>
+          <p:cNvCxnSpPr/>
+          <p:nvPr/>
+        </p:nvCxnSpPr>
+        <p:spPr>
+          <a:xfrm flipV="1">
+            <a:off x="1371600" y="1645920"/>
+            <a:ext cx="0" cy="502920"/>
+          </a:xfrm>
+          <a:prstGeom prst="line">
+            <a:avLst/>
+          </a:prstGeom>
+          <a:ln w="25400">
+            <a:solidFill>
+              <a:srgbClr val="B55A2E"/>
+            </a:solidFill>
+            <a:tailEnd type="triangle" w="med" len="med"/>
+            <a:prstDash val="dash"/>
+          </a:ln>
+          <a:effectLst/>
+        </p:spPr>
+        <p:style>
+          <a:lnRef idx="2">
+            <a:schemeClr val="accent1"/>
+          </a:lnRef>
+          <a:fillRef idx="0">
+            <a:schemeClr val="accent1"/>
+          </a:fillRef>
+          <a:effectRef idx="1">
+            <a:schemeClr val="accent1"/>
+          </a:effectRef>
+          <a:fontRef idx="minor">
+            <a:schemeClr val="tx1"/>
+          </a:fontRef>
+        </p:style>
+      </p:cxnSp>
+      <p:sp>
+        <p:nvSpPr>
+          <p:cNvPr id="33" name="Oval 32"/>
+          <p:cNvSpPr/>
+          <p:nvPr/>
+        </p:nvSpPr>
+        <p:spPr>
+          <a:xfrm>
+            <a:off x="1252728" y="1783080"/>
+            <a:ext cx="237744" cy="237744"/>
+          </a:xfrm>
+          <a:prstGeom prst="ellipse">
+            <a:avLst/>
+          </a:prstGeom>
+          <a:solidFill>
+            <a:srgbClr val="E87A1E"/>
+          </a:solidFill>
+          <a:ln w="12700">
+            <a:solidFill>
+              <a:srgbClr val="FFFFFF"/>
+            </a:solidFill>
+          </a:ln>
+          <a:effectLst/>
+        </p:spPr>
+        <p:style>
+          <a:lnRef idx="1">
+            <a:schemeClr val="accent1"/>
+          </a:lnRef>
+          <a:fillRef idx="3">
+            <a:schemeClr val="accent1"/>
+          </a:fillRef>
+          <a:effectRef idx="2">
+            <a:schemeClr val="accent1"/>
+          </a:effectRef>
+          <a:fontRef idx="minor">
+            <a:schemeClr val="lt1"/>
+          </a:fontRef>
+        </p:style>
+        <p:txBody>
+          <a:bodyPr rtlCol="0" anchor="ctr" wrap="none" lIns="0" rIns="0" tIns="0" bIns="0"/>
+          <a:lstStyle/>
+          <a:p>
+            <a:pPr algn="ctr"/>
+            <a:r>
+              <a:rPr sz="1050" b="1" i="0">
+                <a:solidFill>
+                  <a:srgbClr val="FFFFFF"/>
+                </a:solidFill>
+                <a:latin typeface="Calibri"/>
+              </a:rPr>
+              <a:t>8</a:t>
+            </a:r>
+          </a:p>
+        </p:txBody>
+      </p:sp>
+      <p:sp>
+        <p:nvSpPr>
+          <p:cNvPr id="34" name="Rounded Rectangle 33"/>
+          <p:cNvSpPr/>
+          <p:nvPr/>
+        </p:nvSpPr>
+        <p:spPr>
+          <a:xfrm>
+            <a:off x="411480" y="4937760"/>
+            <a:ext cx="6720840" cy="1719072"/>
+          </a:xfrm>
+          <a:prstGeom prst="roundRect">
+            <a:avLst/>
+          </a:prstGeom>
+          <a:solidFill>
+            <a:srgbClr val="F4F6F8"/>
+          </a:solidFill>
+          <a:ln>
+            <a:solidFill>
+              <a:srgbClr val="C7CED6"/>
+            </a:solidFill>
+          </a:ln>
+          <a:effectLst/>
+        </p:spPr>
+        <p:style>
+          <a:lnRef idx="1">
+            <a:schemeClr val="accent1"/>
+          </a:lnRef>
+          <a:fillRef idx="3">
+            <a:schemeClr val="accent1"/>
+          </a:fillRef>
+          <a:effectRef idx="2">
+            <a:schemeClr val="accent1"/>
+          </a:effectRef>
+          <a:fontRef idx="minor">
+            <a:schemeClr val="lt1"/>
+          </a:fontRef>
+        </p:style>
+        <p:txBody>
+          <a:bodyPr rtlCol="0" anchor="ctr"/>
+          <a:lstStyle/>
+          <a:p>
+            <a:pPr algn="ctr"/>
+          </a:p>
+        </p:txBody>
+      </p:sp>
+      <p:sp>
+        <p:nvSpPr>
+          <p:cNvPr id="35" name="TextBox 34"/>
+          <p:cNvSpPr txBox="1"/>
+          <p:nvPr/>
+        </p:nvSpPr>
+        <p:spPr>
+          <a:xfrm>
+            <a:off x="566928" y="4992624"/>
+            <a:ext cx="6400800" cy="256032"/>
+          </a:xfrm>
+          <a:prstGeom prst="rect">
+            <a:avLst/>
+          </a:prstGeom>
+          <a:noFill/>
+        </p:spPr>
+        <p:txBody>
+          <a:bodyPr wrap="square" anchor="t">
+            <a:spAutoFit/>
+          </a:bodyPr>
+          <a:lstStyle/>
+          <a:p>
+            <a:pPr algn="l">
+              <a:spcAft>
+                <a:spcPts val="300"/>
+              </a:spcAft>
+            </a:pPr>
+            <a:r>
+              <a:rPr sz="1150" b="1" i="0">
+                <a:solidFill>
+                  <a:srgbClr val="1B3A5C"/>
+                </a:solidFill>
+                <a:latin typeface="Calibri"/>
+              </a:rPr>
+              <a:t>Which components a benchmark actually gets</a:t>
+            </a:r>
+          </a:p>
+        </p:txBody>
+      </p:sp>
+      <p:sp>
+        <p:nvSpPr>
+          <p:cNvPr id="36" name="TextBox 35"/>
+          <p:cNvSpPr txBox="1"/>
+          <p:nvPr/>
+        </p:nvSpPr>
+        <p:spPr>
+          <a:xfrm>
+            <a:off x="566928" y="5303520"/>
+            <a:ext cx="1051560" cy="256032"/>
+          </a:xfrm>
+          <a:prstGeom prst="rect">
+            <a:avLst/>
+          </a:prstGeom>
+          <a:noFill/>
+        </p:spPr>
+        <p:txBody>
+          <a:bodyPr wrap="square" anchor="t">
+            <a:spAutoFit/>
+          </a:bodyPr>
+          <a:lstStyle/>
+          <a:p>
+            <a:pPr algn="l">
+              <a:spcAft>
+                <a:spcPts val="300"/>
+              </a:spcAft>
+            </a:pPr>
+            <a:r>
+              <a:rPr sz="1000" b="1" i="0">
+                <a:solidFill>
+                  <a:srgbClr val="1B3A5C"/>
+                </a:solidFill>
+                <a:latin typeface="Calibri"/>
+              </a:rPr>
+              <a:t>benchmark</a:t>
+            </a:r>
+          </a:p>
+        </p:txBody>
+      </p:sp>
+      <p:sp>
+        <p:nvSpPr>
+          <p:cNvPr id="37" name="TextBox 36"/>
+          <p:cNvSpPr txBox="1"/>
+          <p:nvPr/>
+        </p:nvSpPr>
+        <p:spPr>
+          <a:xfrm>
+            <a:off x="1645920" y="5303520"/>
+            <a:ext cx="2286000" cy="256032"/>
+          </a:xfrm>
+          <a:prstGeom prst="rect">
+            <a:avLst/>
+          </a:prstGeom>
+          <a:noFill/>
+        </p:spPr>
+        <p:txBody>
+          <a:bodyPr wrap="square" anchor="t">
+            <a:spAutoFit/>
+          </a:bodyPr>
+          <a:lstStyle/>
+          <a:p>
+            <a:pPr algn="l">
+              <a:spcAft>
+                <a:spcPts val="300"/>
+              </a:spcAft>
+            </a:pPr>
+            <a:r>
+              <a:rPr sz="1000" b="1" i="0">
+                <a:solidFill>
+                  <a:srgbClr val="1B3A5C"/>
+                </a:solidFill>
+                <a:latin typeface="Calibri"/>
+              </a:rPr>
+              <a:t>MCP tool image</a:t>
+            </a:r>
+          </a:p>
+        </p:txBody>
+      </p:sp>
+      <p:sp>
+        <p:nvSpPr>
+          <p:cNvPr id="38" name="TextBox 37"/>
+          <p:cNvSpPr txBox="1"/>
+          <p:nvPr/>
+        </p:nvSpPr>
+        <p:spPr>
+          <a:xfrm>
+            <a:off x="3977639" y="5303520"/>
+            <a:ext cx="1965960" cy="256032"/>
+          </a:xfrm>
+          <a:prstGeom prst="rect">
+            <a:avLst/>
+          </a:prstGeom>
+          <a:noFill/>
+        </p:spPr>
+        <p:txBody>
+          <a:bodyPr wrap="square" anchor="t">
+            <a:spAutoFit/>
+          </a:bodyPr>
+          <a:lstStyle/>
+          <a:p>
+            <a:pPr algn="l">
+              <a:spcAft>
+                <a:spcPts val="300"/>
+              </a:spcAft>
+            </a:pPr>
+            <a:r>
+              <a:rPr sz="1000" b="1" i="0">
+                <a:solidFill>
+                  <a:srgbClr val="1B3A5C"/>
+                </a:solidFill>
+                <a:latin typeface="Calibri"/>
+              </a:rPr>
+              <a:t>LLMs per task</a:t>
+            </a:r>
+          </a:p>
+        </p:txBody>
+      </p:sp>
+      <p:sp>
+        <p:nvSpPr>
+          <p:cNvPr id="39" name="TextBox 38"/>
+          <p:cNvSpPr txBox="1"/>
+          <p:nvPr/>
+        </p:nvSpPr>
+        <p:spPr>
+          <a:xfrm>
+            <a:off x="5989320" y="5303520"/>
+            <a:ext cx="1051560" cy="256032"/>
+          </a:xfrm>
+          <a:prstGeom prst="rect">
+            <a:avLst/>
+          </a:prstGeom>
+          <a:noFill/>
+        </p:spPr>
+        <p:txBody>
+          <a:bodyPr wrap="square" anchor="t">
+            <a:spAutoFit/>
+          </a:bodyPr>
+          <a:lstStyle/>
+          <a:p>
+            <a:pPr algn="l">
+              <a:spcAft>
+                <a:spcPts val="300"/>
+              </a:spcAft>
+            </a:pPr>
+            <a:r>
+              <a:rPr sz="1000" b="1" i="0">
+                <a:solidFill>
+                  <a:srgbClr val="1B3A5C"/>
+                </a:solidFill>
+                <a:latin typeface="Calibri"/>
+              </a:rPr>
+              <a:t>tool calls</a:t>
+            </a:r>
+          </a:p>
+        </p:txBody>
+      </p:sp>
+      <p:sp>
+        <p:nvSpPr>
+          <p:cNvPr id="40" name="TextBox 39"/>
+          <p:cNvSpPr txBox="1"/>
+          <p:nvPr/>
+        </p:nvSpPr>
+        <p:spPr>
+          <a:xfrm>
+            <a:off x="566928" y="5550408"/>
+            <a:ext cx="1051560" cy="256032"/>
+          </a:xfrm>
+          <a:prstGeom prst="rect">
+            <a:avLst/>
+          </a:prstGeom>
+          <a:noFill/>
+        </p:spPr>
+        <p:txBody>
+          <a:bodyPr wrap="square" anchor="t">
+            <a:spAutoFit/>
+          </a:bodyPr>
+          <a:lstStyle/>
+          <a:p>
+            <a:pPr algn="l">
+              <a:spcAft>
+                <a:spcPts val="300"/>
+              </a:spcAft>
+            </a:pPr>
+            <a:r>
+              <a:rPr sz="1000" b="0" i="0">
                 <a:solidFill>
                   <a:srgbClr val="1F2A37"/>
                 </a:solidFill>
                 <a:latin typeface="Calibri"/>
               </a:rPr>
-              <a:t>Implication:  at the Rossoctl / cluster layer every action appears as the Service's identity — so per-user attribution &amp; audit live in the Service, keyed on (iss, preferred_username).</a:t>
+              <a:t>gsm8k</a:t>
+            </a:r>
+          </a:p>
+        </p:txBody>
+      </p:sp>
+      <p:sp>
+        <p:nvSpPr>
+          <p:cNvPr id="41" name="TextBox 40"/>
+          <p:cNvSpPr txBox="1"/>
+          <p:nvPr/>
+        </p:nvSpPr>
+        <p:spPr>
+          <a:xfrm>
+            <a:off x="1645920" y="5550408"/>
+            <a:ext cx="2286000" cy="256032"/>
+          </a:xfrm>
+          <a:prstGeom prst="rect">
+            <a:avLst/>
+          </a:prstGeom>
+          <a:noFill/>
+        </p:spPr>
+        <p:txBody>
+          <a:bodyPr wrap="square" anchor="t">
+            <a:spAutoFit/>
+          </a:bodyPr>
+          <a:lstStyle/>
+          <a:p>
+            <a:pPr algn="l">
+              <a:spcAft>
+                <a:spcPts val="300"/>
+              </a:spcAft>
+            </a:pPr>
+            <a:r>
+              <a:rPr sz="1000" b="0" i="0">
+                <a:solidFill>
+                  <a:srgbClr val="1F2A37"/>
+                </a:solidFill>
+                <a:latin typeface="Calibri"/>
+              </a:rPr>
+              <a:t>exgentic-mcp-gsm8k</a:t>
+            </a:r>
+          </a:p>
+        </p:txBody>
+      </p:sp>
+      <p:sp>
+        <p:nvSpPr>
+          <p:cNvPr id="42" name="TextBox 41"/>
+          <p:cNvSpPr txBox="1"/>
+          <p:nvPr/>
+        </p:nvSpPr>
+        <p:spPr>
+          <a:xfrm>
+            <a:off x="3977639" y="5550408"/>
+            <a:ext cx="1965960" cy="256032"/>
+          </a:xfrm>
+          <a:prstGeom prst="rect">
+            <a:avLst/>
+          </a:prstGeom>
+          <a:noFill/>
+        </p:spPr>
+        <p:txBody>
+          <a:bodyPr wrap="square" anchor="t">
+            <a:spAutoFit/>
+          </a:bodyPr>
+          <a:lstStyle/>
+          <a:p>
+            <a:pPr algn="l">
+              <a:spcAft>
+                <a:spcPts val="300"/>
+              </a:spcAft>
+            </a:pPr>
+            <a:r>
+              <a:rPr sz="1000" b="0" i="0">
+                <a:solidFill>
+                  <a:srgbClr val="1F2A37"/>
+                </a:solidFill>
+                <a:latin typeface="Calibri"/>
+              </a:rPr>
+              <a:t>1  (agent)</a:t>
+            </a:r>
+          </a:p>
+        </p:txBody>
+      </p:sp>
+      <p:sp>
+        <p:nvSpPr>
+          <p:cNvPr id="43" name="TextBox 42"/>
+          <p:cNvSpPr txBox="1"/>
+          <p:nvPr/>
+        </p:nvSpPr>
+        <p:spPr>
+          <a:xfrm>
+            <a:off x="5989320" y="5550408"/>
+            <a:ext cx="1051560" cy="256032"/>
+          </a:xfrm>
+          <a:prstGeom prst="rect">
+            <a:avLst/>
+          </a:prstGeom>
+          <a:noFill/>
+        </p:spPr>
+        <p:txBody>
+          <a:bodyPr wrap="square" anchor="t">
+            <a:spAutoFit/>
+          </a:bodyPr>
+          <a:lstStyle/>
+          <a:p>
+            <a:pPr algn="l">
+              <a:spcAft>
+                <a:spcPts val="300"/>
+              </a:spcAft>
+            </a:pPr>
+            <a:r>
+              <a:rPr sz="1000" b="0" i="0">
+                <a:solidFill>
+                  <a:srgbClr val="1F2A37"/>
+                </a:solidFill>
+                <a:latin typeface="Calibri"/>
+              </a:rPr>
+              <a:t>~1</a:t>
+            </a:r>
+          </a:p>
+        </p:txBody>
+      </p:sp>
+      <p:sp>
+        <p:nvSpPr>
+          <p:cNvPr id="44" name="TextBox 43"/>
+          <p:cNvSpPr txBox="1"/>
+          <p:nvPr/>
+        </p:nvSpPr>
+        <p:spPr>
+          <a:xfrm>
+            <a:off x="566928" y="5797296"/>
+            <a:ext cx="1051560" cy="256032"/>
+          </a:xfrm>
+          <a:prstGeom prst="rect">
+            <a:avLst/>
+          </a:prstGeom>
+          <a:noFill/>
+        </p:spPr>
+        <p:txBody>
+          <a:bodyPr wrap="square" anchor="t">
+            <a:spAutoFit/>
+          </a:bodyPr>
+          <a:lstStyle/>
+          <a:p>
+            <a:pPr algn="l">
+              <a:spcAft>
+                <a:spcPts val="300"/>
+              </a:spcAft>
+            </a:pPr>
+            <a:r>
+              <a:rPr sz="1000" b="0" i="0">
+                <a:solidFill>
+                  <a:srgbClr val="1F2A37"/>
+                </a:solidFill>
+                <a:latin typeface="Calibri"/>
+              </a:rPr>
+              <a:t>tau2</a:t>
+            </a:r>
+          </a:p>
+        </p:txBody>
+      </p:sp>
+      <p:sp>
+        <p:nvSpPr>
+          <p:cNvPr id="45" name="TextBox 44"/>
+          <p:cNvSpPr txBox="1"/>
+          <p:nvPr/>
+        </p:nvSpPr>
+        <p:spPr>
+          <a:xfrm>
+            <a:off x="1645920" y="5797296"/>
+            <a:ext cx="2286000" cy="256032"/>
+          </a:xfrm>
+          <a:prstGeom prst="rect">
+            <a:avLst/>
+          </a:prstGeom>
+          <a:noFill/>
+        </p:spPr>
+        <p:txBody>
+          <a:bodyPr wrap="square" anchor="t">
+            <a:spAutoFit/>
+          </a:bodyPr>
+          <a:lstStyle/>
+          <a:p>
+            <a:pPr algn="l">
+              <a:spcAft>
+                <a:spcPts val="300"/>
+              </a:spcAft>
+            </a:pPr>
+            <a:r>
+              <a:rPr sz="1000" b="0" i="0">
+                <a:solidFill>
+                  <a:srgbClr val="1F2A37"/>
+                </a:solidFill>
+                <a:latin typeface="Calibri"/>
+              </a:rPr>
+              <a:t>exgentic-mcp-tau2</a:t>
+            </a:r>
+          </a:p>
+        </p:txBody>
+      </p:sp>
+      <p:sp>
+        <p:nvSpPr>
+          <p:cNvPr id="46" name="TextBox 45"/>
+          <p:cNvSpPr txBox="1"/>
+          <p:nvPr/>
+        </p:nvSpPr>
+        <p:spPr>
+          <a:xfrm>
+            <a:off x="3977639" y="5797296"/>
+            <a:ext cx="1965960" cy="256032"/>
+          </a:xfrm>
+          <a:prstGeom prst="rect">
+            <a:avLst/>
+          </a:prstGeom>
+          <a:noFill/>
+        </p:spPr>
+        <p:txBody>
+          <a:bodyPr wrap="square" anchor="t">
+            <a:spAutoFit/>
+          </a:bodyPr>
+          <a:lstStyle/>
+          <a:p>
+            <a:pPr algn="l">
+              <a:spcAft>
+                <a:spcPts val="300"/>
+              </a:spcAft>
+            </a:pPr>
+            <a:r>
+              <a:rPr sz="1000" b="0" i="0">
+                <a:solidFill>
+                  <a:srgbClr val="1F2A37"/>
+                </a:solidFill>
+                <a:latin typeface="Calibri"/>
+              </a:rPr>
+              <a:t>2  (+ user simulator)</a:t>
+            </a:r>
+          </a:p>
+        </p:txBody>
+      </p:sp>
+      <p:sp>
+        <p:nvSpPr>
+          <p:cNvPr id="47" name="TextBox 46"/>
+          <p:cNvSpPr txBox="1"/>
+          <p:nvPr/>
+        </p:nvSpPr>
+        <p:spPr>
+          <a:xfrm>
+            <a:off x="5989320" y="5797296"/>
+            <a:ext cx="1051560" cy="256032"/>
+          </a:xfrm>
+          <a:prstGeom prst="rect">
+            <a:avLst/>
+          </a:prstGeom>
+          <a:noFill/>
+        </p:spPr>
+        <p:txBody>
+          <a:bodyPr wrap="square" anchor="t">
+            <a:spAutoFit/>
+          </a:bodyPr>
+          <a:lstStyle/>
+          <a:p>
+            <a:pPr algn="l">
+              <a:spcAft>
+                <a:spcPts val="300"/>
+              </a:spcAft>
+            </a:pPr>
+            <a:r>
+              <a:rPr sz="1000" b="0" i="0">
+                <a:solidFill>
+                  <a:srgbClr val="1F2A37"/>
+                </a:solidFill>
+                <a:latin typeface="Calibri"/>
+              </a:rPr>
+              <a:t>~11</a:t>
+            </a:r>
+          </a:p>
+        </p:txBody>
+      </p:sp>
+      <p:sp>
+        <p:nvSpPr>
+          <p:cNvPr id="48" name="TextBox 47"/>
+          <p:cNvSpPr txBox="1"/>
+          <p:nvPr/>
+        </p:nvSpPr>
+        <p:spPr>
+          <a:xfrm>
+            <a:off x="566928" y="6044184"/>
+            <a:ext cx="1051560" cy="256032"/>
+          </a:xfrm>
+          <a:prstGeom prst="rect">
+            <a:avLst/>
+          </a:prstGeom>
+          <a:noFill/>
+        </p:spPr>
+        <p:txBody>
+          <a:bodyPr wrap="square" anchor="t">
+            <a:spAutoFit/>
+          </a:bodyPr>
+          <a:lstStyle/>
+          <a:p>
+            <a:pPr algn="l">
+              <a:spcAft>
+                <a:spcPts val="300"/>
+              </a:spcAft>
+            </a:pPr>
+            <a:r>
+              <a:rPr sz="1000" b="0" i="0">
+                <a:solidFill>
+                  <a:srgbClr val="1F2A37"/>
+                </a:solidFill>
+                <a:latin typeface="Calibri"/>
+              </a:rPr>
+              <a:t>appworld</a:t>
+            </a:r>
+          </a:p>
+        </p:txBody>
+      </p:sp>
+      <p:sp>
+        <p:nvSpPr>
+          <p:cNvPr id="49" name="TextBox 48"/>
+          <p:cNvSpPr txBox="1"/>
+          <p:nvPr/>
+        </p:nvSpPr>
+        <p:spPr>
+          <a:xfrm>
+            <a:off x="1645920" y="6044184"/>
+            <a:ext cx="2286000" cy="256032"/>
+          </a:xfrm>
+          <a:prstGeom prst="rect">
+            <a:avLst/>
+          </a:prstGeom>
+          <a:noFill/>
+        </p:spPr>
+        <p:txBody>
+          <a:bodyPr wrap="square" anchor="t">
+            <a:spAutoFit/>
+          </a:bodyPr>
+          <a:lstStyle/>
+          <a:p>
+            <a:pPr algn="l">
+              <a:spcAft>
+                <a:spcPts val="300"/>
+              </a:spcAft>
+            </a:pPr>
+            <a:r>
+              <a:rPr sz="1000" b="0" i="0">
+                <a:solidFill>
+                  <a:srgbClr val="1F2A37"/>
+                </a:solidFill>
+                <a:latin typeface="Calibri"/>
+              </a:rPr>
+              <a:t>exgentic-mcp-appworld</a:t>
+            </a:r>
+          </a:p>
+        </p:txBody>
+      </p:sp>
+      <p:sp>
+        <p:nvSpPr>
+          <p:cNvPr id="50" name="TextBox 49"/>
+          <p:cNvSpPr txBox="1"/>
+          <p:nvPr/>
+        </p:nvSpPr>
+        <p:spPr>
+          <a:xfrm>
+            <a:off x="3977639" y="6044184"/>
+            <a:ext cx="1965960" cy="256032"/>
+          </a:xfrm>
+          <a:prstGeom prst="rect">
+            <a:avLst/>
+          </a:prstGeom>
+          <a:noFill/>
+        </p:spPr>
+        <p:txBody>
+          <a:bodyPr wrap="square" anchor="t">
+            <a:spAutoFit/>
+          </a:bodyPr>
+          <a:lstStyle/>
+          <a:p>
+            <a:pPr algn="l">
+              <a:spcAft>
+                <a:spcPts val="300"/>
+              </a:spcAft>
+            </a:pPr>
+            <a:r>
+              <a:rPr sz="1000" b="0" i="0">
+                <a:solidFill>
+                  <a:srgbClr val="1F2A37"/>
+                </a:solidFill>
+                <a:latin typeface="Calibri"/>
+              </a:rPr>
+              <a:t>1  (agent)</a:t>
+            </a:r>
+          </a:p>
+        </p:txBody>
+      </p:sp>
+      <p:sp>
+        <p:nvSpPr>
+          <p:cNvPr id="51" name="TextBox 50"/>
+          <p:cNvSpPr txBox="1"/>
+          <p:nvPr/>
+        </p:nvSpPr>
+        <p:spPr>
+          <a:xfrm>
+            <a:off x="5989320" y="6044184"/>
+            <a:ext cx="1051560" cy="256032"/>
+          </a:xfrm>
+          <a:prstGeom prst="rect">
+            <a:avLst/>
+          </a:prstGeom>
+          <a:noFill/>
+        </p:spPr>
+        <p:txBody>
+          <a:bodyPr wrap="square" anchor="t">
+            <a:spAutoFit/>
+          </a:bodyPr>
+          <a:lstStyle/>
+          <a:p>
+            <a:pPr algn="l">
+              <a:spcAft>
+                <a:spcPts val="300"/>
+              </a:spcAft>
+            </a:pPr>
+            <a:r>
+              <a:rPr sz="1000" b="0" i="0">
+                <a:solidFill>
+                  <a:srgbClr val="1F2A37"/>
+                </a:solidFill>
+                <a:latin typeface="Calibri"/>
+              </a:rPr>
+              <a:t>~13</a:t>
+            </a:r>
+          </a:p>
+        </p:txBody>
+      </p:sp>
+      <p:sp>
+        <p:nvSpPr>
+          <p:cNvPr id="52" name="TextBox 51"/>
+          <p:cNvSpPr txBox="1"/>
+          <p:nvPr/>
+        </p:nvSpPr>
+        <p:spPr>
+          <a:xfrm>
+            <a:off x="566928" y="6291072"/>
+            <a:ext cx="1051560" cy="256032"/>
+          </a:xfrm>
+          <a:prstGeom prst="rect">
+            <a:avLst/>
+          </a:prstGeom>
+          <a:noFill/>
+        </p:spPr>
+        <p:txBody>
+          <a:bodyPr wrap="square" anchor="t">
+            <a:spAutoFit/>
+          </a:bodyPr>
+          <a:lstStyle/>
+          <a:p>
+            <a:pPr algn="l">
+              <a:spcAft>
+                <a:spcPts val="300"/>
+              </a:spcAft>
+            </a:pPr>
+            <a:r>
+              <a:rPr sz="1000" b="0" i="0">
+                <a:solidFill>
+                  <a:srgbClr val="1F2A37"/>
+                </a:solidFill>
+                <a:latin typeface="Calibri"/>
+              </a:rPr>
+              <a:t>+ any preset</a:t>
+            </a:r>
+          </a:p>
+        </p:txBody>
+      </p:sp>
+      <p:sp>
+        <p:nvSpPr>
+          <p:cNvPr id="53" name="TextBox 52"/>
+          <p:cNvSpPr txBox="1"/>
+          <p:nvPr/>
+        </p:nvSpPr>
+        <p:spPr>
+          <a:xfrm>
+            <a:off x="1645920" y="6291072"/>
+            <a:ext cx="2286000" cy="256032"/>
+          </a:xfrm>
+          <a:prstGeom prst="rect">
+            <a:avLst/>
+          </a:prstGeom>
+          <a:noFill/>
+        </p:spPr>
+        <p:txBody>
+          <a:bodyPr wrap="square" anchor="t">
+            <a:spAutoFit/>
+          </a:bodyPr>
+          <a:lstStyle/>
+          <a:p>
+            <a:pPr algn="l">
+              <a:spcAft>
+                <a:spcPts val="300"/>
+              </a:spcAft>
+            </a:pPr>
+            <a:r>
+              <a:rPr sz="1000" b="0" i="0">
+                <a:solidFill>
+                  <a:srgbClr val="1F2A37"/>
+                </a:solidFill>
+                <a:latin typeface="Calibri"/>
+              </a:rPr>
+              <a:t>unchanged</a:t>
+            </a:r>
+          </a:p>
+        </p:txBody>
+      </p:sp>
+      <p:sp>
+        <p:nvSpPr>
+          <p:cNvPr id="54" name="TextBox 53"/>
+          <p:cNvSpPr txBox="1"/>
+          <p:nvPr/>
+        </p:nvSpPr>
+        <p:spPr>
+          <a:xfrm>
+            <a:off x="3977639" y="6291072"/>
+            <a:ext cx="1965960" cy="256032"/>
+          </a:xfrm>
+          <a:prstGeom prst="rect">
+            <a:avLst/>
+          </a:prstGeom>
+          <a:noFill/>
+        </p:spPr>
+        <p:txBody>
+          <a:bodyPr wrap="square" anchor="t">
+            <a:spAutoFit/>
+          </a:bodyPr>
+          <a:lstStyle/>
+          <a:p>
+            <a:pPr algn="l">
+              <a:spcAft>
+                <a:spcPts val="300"/>
+              </a:spcAft>
+            </a:pPr>
+            <a:r>
+              <a:rPr sz="1000" b="0" i="0">
+                <a:solidFill>
+                  <a:srgbClr val="1F2A37"/>
+                </a:solidFill>
+                <a:latin typeface="Calibri"/>
+              </a:rPr>
+              <a:t>+1 judge per action</a:t>
+            </a:r>
+          </a:p>
+        </p:txBody>
+      </p:sp>
+      <p:sp>
+        <p:nvSpPr>
+          <p:cNvPr id="55" name="TextBox 54"/>
+          <p:cNvSpPr txBox="1"/>
+          <p:nvPr/>
+        </p:nvSpPr>
+        <p:spPr>
+          <a:xfrm>
+            <a:off x="5989320" y="6291072"/>
+            <a:ext cx="1051560" cy="256032"/>
+          </a:xfrm>
+          <a:prstGeom prst="rect">
+            <a:avLst/>
+          </a:prstGeom>
+          <a:noFill/>
+        </p:spPr>
+        <p:txBody>
+          <a:bodyPr wrap="square" anchor="t">
+            <a:spAutoFit/>
+          </a:bodyPr>
+          <a:lstStyle/>
+          <a:p>
+            <a:pPr algn="l">
+              <a:spcAft>
+                <a:spcPts val="300"/>
+              </a:spcAft>
+            </a:pPr>
+            <a:r>
+              <a:rPr sz="1000" b="0" i="0">
+                <a:solidFill>
+                  <a:srgbClr val="1F2A37"/>
+                </a:solidFill>
+                <a:latin typeface="Calibri"/>
+              </a:rPr>
+              <a:t>—</a:t>
+            </a:r>
+          </a:p>
+        </p:txBody>
+      </p:sp>
+      <p:sp>
+        <p:nvSpPr>
+          <p:cNvPr id="56" name="Rounded Rectangle 55"/>
+          <p:cNvSpPr/>
+          <p:nvPr/>
+        </p:nvSpPr>
+        <p:spPr>
+          <a:xfrm>
+            <a:off x="7360920" y="4937760"/>
+            <a:ext cx="4389120" cy="1719072"/>
+          </a:xfrm>
+          <a:prstGeom prst="roundRect">
+            <a:avLst/>
+          </a:prstGeom>
+          <a:solidFill>
+            <a:srgbClr val="F4F6F8"/>
+          </a:solidFill>
+          <a:ln>
+            <a:solidFill>
+              <a:srgbClr val="C7CED6"/>
+            </a:solidFill>
+          </a:ln>
+          <a:effectLst/>
+        </p:spPr>
+        <p:style>
+          <a:lnRef idx="1">
+            <a:schemeClr val="accent1"/>
+          </a:lnRef>
+          <a:fillRef idx="3">
+            <a:schemeClr val="accent1"/>
+          </a:fillRef>
+          <a:effectRef idx="2">
+            <a:schemeClr val="accent1"/>
+          </a:effectRef>
+          <a:fontRef idx="minor">
+            <a:schemeClr val="lt1"/>
+          </a:fontRef>
+        </p:style>
+        <p:txBody>
+          <a:bodyPr rtlCol="0" anchor="ctr"/>
+          <a:lstStyle/>
+          <a:p>
+            <a:pPr algn="ctr"/>
+          </a:p>
+        </p:txBody>
+      </p:sp>
+      <p:sp>
+        <p:nvSpPr>
+          <p:cNvPr id="57" name="TextBox 56"/>
+          <p:cNvSpPr txBox="1"/>
+          <p:nvPr/>
+        </p:nvSpPr>
+        <p:spPr>
+          <a:xfrm>
+            <a:off x="7516368" y="4992624"/>
+            <a:ext cx="4114800" cy="1645920"/>
+          </a:xfrm>
+          <a:prstGeom prst="rect">
+            <a:avLst/>
+          </a:prstGeom>
+          <a:noFill/>
+        </p:spPr>
+        <p:txBody>
+          <a:bodyPr wrap="square">
+            <a:spAutoFit/>
+          </a:bodyPr>
+          <a:lstStyle/>
+          <a:p>
+            <a:pPr>
+              <a:spcAft>
+                <a:spcPts val="0"/>
+              </a:spcAft>
+            </a:pPr>
+            <a:r>
+              <a:rPr sz="950" b="0" i="0">
+                <a:solidFill>
+                  <a:srgbClr val="1F2A37"/>
+                </a:solidFill>
+                <a:latin typeface="Calibri"/>
+              </a:rPr>
+              <a:t>1  Service → agent:  send_prompt, once per task</a:t>
+            </a:r>
+          </a:p>
+          <a:p>
+            <a:pPr>
+              <a:spcAft>
+                <a:spcPts val="0"/>
+              </a:spcAft>
+            </a:pPr>
+            <a:r>
+              <a:rPr sz="950" b="0" i="0">
+                <a:solidFill>
+                  <a:srgbClr val="1F2A37"/>
+                </a:solidFill>
+                <a:latin typeface="Calibri"/>
+              </a:rPr>
+              <a:t>2  Service → MCP server:  list_tasks, create_session,</a:t>
+            </a:r>
+          </a:p>
+          <a:p>
+            <a:pPr>
+              <a:spcAft>
+                <a:spcPts val="0"/>
+              </a:spcAft>
+            </a:pPr>
+            <a:r>
+              <a:rPr sz="950" b="0" i="0">
+                <a:solidFill>
+                  <a:srgbClr val="1F2A37"/>
+                </a:solidFill>
+                <a:latin typeface="Calibri"/>
+              </a:rPr>
+              <a:t>      evaluate_session, delete_session  (the verdict)</a:t>
+            </a:r>
+          </a:p>
+          <a:p>
+            <a:pPr>
+              <a:spcAft>
+                <a:spcPts val="0"/>
+              </a:spcAft>
+            </a:pPr>
+            <a:r>
+              <a:rPr sz="950" b="0" i="0">
+                <a:solidFill>
+                  <a:srgbClr val="1F2A37"/>
+                </a:solidFill>
+                <a:latin typeface="Calibri"/>
+              </a:rPr>
+              <a:t>3  agent → gateway:  1 probe + N real chat calls</a:t>
+            </a:r>
+          </a:p>
+          <a:p>
+            <a:pPr>
+              <a:spcAft>
+                <a:spcPts val="0"/>
+              </a:spcAft>
+            </a:pPr>
+            <a:r>
+              <a:rPr sz="950" b="0" i="0">
+                <a:solidFill>
+                  <a:srgbClr val="1F2A37"/>
+                </a:solidFill>
+                <a:latin typeface="Calibri"/>
+              </a:rPr>
+              <a:t>4  tau2 only:  the user simulator is a 2nd LLM</a:t>
+            </a:r>
+          </a:p>
+          <a:p>
+            <a:pPr>
+              <a:spcAft>
+                <a:spcPts val="0"/>
+              </a:spcAft>
+            </a:pPr>
+            <a:r>
+              <a:rPr sz="950" b="0" i="0">
+                <a:solidFill>
+                  <a:srgbClr val="1F2A37"/>
+                </a:solidFill>
+                <a:latin typeface="Calibri"/>
+              </a:rPr>
+              <a:t>5  with a preset:  the agent's MCP calls go via the sidecar</a:t>
+            </a:r>
+          </a:p>
+          <a:p>
+            <a:pPr>
+              <a:spcAft>
+                <a:spcPts val="0"/>
+              </a:spcAft>
+            </a:pPr>
+            <a:r>
+              <a:rPr sz="950" b="0" i="0">
+                <a:solidFill>
+                  <a:srgbClr val="1F2A37"/>
+                </a:solidFill>
+                <a:latin typeface="Calibri"/>
+              </a:rPr>
+              <a:t>6  sidecar → MCP server, once authorized</a:t>
+            </a:r>
+          </a:p>
+          <a:p>
+            <a:pPr>
+              <a:spcAft>
+                <a:spcPts val="0"/>
+              </a:spcAft>
+            </a:pPr>
+            <a:r>
+              <a:rPr sz="950" b="0" i="0">
+                <a:solidFill>
+                  <a:srgbClr val="1F2A37"/>
+                </a:solidFill>
+                <a:latin typeface="Calibri"/>
+              </a:rPr>
+              <a:t>7  sidecar → judge, per isAction call</a:t>
+            </a:r>
+          </a:p>
+          <a:p>
+            <a:pPr>
+              <a:spcAft>
+                <a:spcPts val="0"/>
+              </a:spcAft>
+            </a:pPr>
+            <a:r>
+              <a:rPr sz="950" b="0" i="0">
+                <a:solidFill>
+                  <a:srgbClr val="1F2A37"/>
+                </a:solidFill>
+                <a:latin typeface="Calibri"/>
+              </a:rPr>
+              <a:t>8  the judge is itself an LLM call</a:t>
+            </a:r>
+          </a:p>
+          <a:p>
+            <a:pPr>
+              <a:spcAft>
+                <a:spcPts val="0"/>
+              </a:spcAft>
+            </a:pPr>
+            <a:r>
+              <a:rPr sz="950" b="0" i="0">
+                <a:solidFill>
+                  <a:srgbClr val="1F2A37"/>
+                </a:solidFill>
+                <a:latin typeface="Calibri"/>
+              </a:rPr>
+              <a:t>Dashed outline = present only in some configurations.</a:t>
+            </a:r>
+          </a:p>
+          <a:p>
+            <a:pPr>
+              <a:spcAft>
+                <a:spcPts val="0"/>
+              </a:spcAft>
+            </a:pPr>
+            <a:r>
+              <a:rPr sz="950" b="0" i="0">
+                <a:solidFill>
+                  <a:srgbClr val="1F2A37"/>
+                </a:solidFill>
+                <a:latin typeface="Calibri"/>
+              </a:rPr>
+              <a:t>No preset: 5 + 6 become one direct agent → MCP call.</a:t>
             </a:r>
           </a:p>
         </p:txBody>
@@ -6936,6 +9285,507 @@
                 </a:solidFill>
                 <a:latin typeface="Calibri"/>
               </a:rPr>
+              <a:t>The Two-Token Auth Model</a:t>
+            </a:r>
+          </a:p>
+          <a:p>
+            <a:r>
+              <a:rPr sz="1400" b="0" i="0">
+                <a:solidFill>
+                  <a:srgbClr val="C9D9EC"/>
+                </a:solidFill>
+                <a:latin typeface="Calibri"/>
+              </a:rPr>
+              <a:t>Why the caller's token is never forwarded upstream</a:t>
+            </a:r>
+          </a:p>
+        </p:txBody>
+      </p:sp>
+      <p:sp>
+        <p:nvSpPr>
+          <p:cNvPr id="3" name="Rectangle 2"/>
+          <p:cNvSpPr/>
+          <p:nvPr/>
+        </p:nvSpPr>
+        <p:spPr>
+          <a:xfrm>
+            <a:off x="457200" y="1280160"/>
+            <a:ext cx="5394960" cy="457200"/>
+          </a:xfrm>
+          <a:prstGeom prst="rect">
+            <a:avLst/>
+          </a:prstGeom>
+          <a:solidFill>
+            <a:srgbClr val="5B8C5A"/>
+          </a:solidFill>
+          <a:ln w="12700">
+            <a:solidFill>
+              <a:srgbClr val="5B8C5A"/>
+            </a:solidFill>
+          </a:ln>
+          <a:effectLst/>
+        </p:spPr>
+        <p:style>
+          <a:lnRef idx="1">
+            <a:schemeClr val="accent1"/>
+          </a:lnRef>
+          <a:fillRef idx="3">
+            <a:schemeClr val="accent1"/>
+          </a:fillRef>
+          <a:effectRef idx="2">
+            <a:schemeClr val="accent1"/>
+          </a:effectRef>
+          <a:fontRef idx="minor">
+            <a:schemeClr val="lt1"/>
+          </a:fontRef>
+        </p:style>
+        <p:txBody>
+          <a:bodyPr rtlCol="0" anchor="ctr" wrap="square" tIns="25400" bIns="25400"/>
+          <a:lstStyle/>
+          <a:p>
+            <a:pPr algn="ctr"/>
+            <a:r>
+              <a:rPr sz="1500" b="1" i="0">
+                <a:solidFill>
+                  <a:srgbClr val="FFFFFF"/>
+                </a:solidFill>
+                <a:latin typeface="Calibri"/>
+              </a:rPr>
+              <a:t>Caller JWT  (inbound)</a:t>
+            </a:r>
+          </a:p>
+        </p:txBody>
+      </p:sp>
+      <p:sp>
+        <p:nvSpPr>
+          <p:cNvPr id="4" name="TextBox 3"/>
+          <p:cNvSpPr txBox="1"/>
+          <p:nvPr/>
+        </p:nvSpPr>
+        <p:spPr>
+          <a:xfrm>
+            <a:off x="548640" y="1828800"/>
+            <a:ext cx="5303520" cy="3291840"/>
+          </a:xfrm>
+          <a:prstGeom prst="rect">
+            <a:avLst/>
+          </a:prstGeom>
+          <a:noFill/>
+        </p:spPr>
+        <p:txBody>
+          <a:bodyPr wrap="square" anchor="t">
+            <a:spAutoFit/>
+          </a:bodyPr>
+          <a:lstStyle/>
+          <a:p>
+            <a:pPr algn="l">
+              <a:spcAft>
+                <a:spcPts val="300"/>
+              </a:spcAft>
+            </a:pPr>
+            <a:r>
+              <a:rPr sz="1350" b="0" i="0">
+                <a:solidFill>
+                  <a:srgbClr val="1F2A37"/>
+                </a:solidFill>
+                <a:latin typeface="Calibri"/>
+              </a:rPr>
+              <a:t>Presented by the client as Authorization: Bearer.</a:t>
+            </a:r>
+          </a:p>
+          <a:p>
+            <a:pPr algn="l" lvl="1">
+              <a:spcAft>
+                <a:spcPts val="300"/>
+              </a:spcAft>
+            </a:pPr>
+            <a:r>
+              <a:rPr sz="1300" b="0" i="0">
+                <a:solidFill>
+                  <a:srgbClr val="1F2A37"/>
+                </a:solidFill>
+                <a:latin typeface="Calibri"/>
+              </a:rPr>
+              <a:t>• Used ONLY to attribute (preferred_username) and route (iss → instance)</a:t>
+            </a:r>
+          </a:p>
+          <a:p>
+            <a:pPr algn="l" lvl="1">
+              <a:spcAft>
+                <a:spcPts val="300"/>
+              </a:spcAft>
+            </a:pPr>
+            <a:r>
+              <a:rPr sz="1300" b="0" i="0">
+                <a:solidFill>
+                  <a:srgbClr val="1F2A37"/>
+                </a:solidFill>
+                <a:latin typeface="Calibri"/>
+              </a:rPr>
+              <a:t>• Signature validated via the issuer's JWKS</a:t>
+            </a:r>
+          </a:p>
+          <a:p>
+            <a:pPr algn="l" lvl="1">
+              <a:spcAft>
+                <a:spcPts val="300"/>
+              </a:spcAft>
+            </a:pPr>
+            <a:r>
+              <a:rPr sz="1300" b="0" i="0">
+                <a:solidFill>
+                  <a:srgbClr val="1F2A37"/>
+                </a:solidFill>
+                <a:latin typeface="Calibri"/>
+              </a:rPr>
+              <a:t>• aud / exp deliberately lenient in the dev/ops context</a:t>
+            </a:r>
+          </a:p>
+          <a:p>
+            <a:pPr algn="l" lvl="1">
+              <a:spcAft>
+                <a:spcPts val="300"/>
+              </a:spcAft>
+            </a:pPr>
+            <a:r>
+              <a:rPr sz="1300" b="1" i="0">
+                <a:solidFill>
+                  <a:srgbClr val="B55A2E"/>
+                </a:solidFill>
+                <a:latin typeface="Calibri"/>
+              </a:rPr>
+              <a:t>• NEVER forwarded to Rossoctl</a:t>
+            </a:r>
+          </a:p>
+          <a:p>
+            <a:pPr algn="l">
+              <a:spcAft>
+                <a:spcPts val="300"/>
+              </a:spcAft>
+            </a:pPr>
+            <a:r>
+              <a:rPr sz="1350" b="1" i="0">
+                <a:solidFill>
+                  <a:srgbClr val="5B8C5A"/>
+                </a:solidFill>
+                <a:latin typeface="Calibri"/>
+              </a:rPr>
+              <a:t>benchmarker is special:</a:t>
+            </a:r>
+          </a:p>
+          <a:p>
+            <a:pPr algn="l" lvl="1">
+              <a:spcAft>
+                <a:spcPts val="300"/>
+              </a:spcAft>
+            </a:pPr>
+            <a:r>
+              <a:rPr sz="1300" b="0" i="0">
+                <a:solidFill>
+                  <a:srgbClr val="1F2A37"/>
+                </a:solidFill>
+                <a:latin typeface="Calibri"/>
+              </a:rPr>
+              <a:t>• A caller JWT with preferred_username == benchmarker authorizes config ops (GET/PUT /config)</a:t>
+            </a:r>
+          </a:p>
+        </p:txBody>
+      </p:sp>
+      <p:sp>
+        <p:nvSpPr>
+          <p:cNvPr id="5" name="Rectangle 4"/>
+          <p:cNvSpPr/>
+          <p:nvPr/>
+        </p:nvSpPr>
+        <p:spPr>
+          <a:xfrm>
+            <a:off x="6309360" y="1280160"/>
+            <a:ext cx="5394960" cy="457200"/>
+          </a:xfrm>
+          <a:prstGeom prst="rect">
+            <a:avLst/>
+          </a:prstGeom>
+          <a:solidFill>
+            <a:srgbClr val="2E6FB5"/>
+          </a:solidFill>
+          <a:ln w="12700">
+            <a:solidFill>
+              <a:srgbClr val="2E6FB5"/>
+            </a:solidFill>
+          </a:ln>
+          <a:effectLst/>
+        </p:spPr>
+        <p:style>
+          <a:lnRef idx="1">
+            <a:schemeClr val="accent1"/>
+          </a:lnRef>
+          <a:fillRef idx="3">
+            <a:schemeClr val="accent1"/>
+          </a:fillRef>
+          <a:effectRef idx="2">
+            <a:schemeClr val="accent1"/>
+          </a:effectRef>
+          <a:fontRef idx="minor">
+            <a:schemeClr val="lt1"/>
+          </a:fontRef>
+        </p:style>
+        <p:txBody>
+          <a:bodyPr rtlCol="0" anchor="ctr" wrap="square" tIns="25400" bIns="25400"/>
+          <a:lstStyle/>
+          <a:p>
+            <a:pPr algn="ctr"/>
+            <a:r>
+              <a:rPr sz="1500" b="1" i="0">
+                <a:solidFill>
+                  <a:srgbClr val="FFFFFF"/>
+                </a:solidFill>
+                <a:latin typeface="Calibri"/>
+              </a:rPr>
+              <a:t>Service token  (outbound)</a:t>
+            </a:r>
+          </a:p>
+        </p:txBody>
+      </p:sp>
+      <p:sp>
+        <p:nvSpPr>
+          <p:cNvPr id="6" name="TextBox 5"/>
+          <p:cNvSpPr txBox="1"/>
+          <p:nvPr/>
+        </p:nvSpPr>
+        <p:spPr>
+          <a:xfrm>
+            <a:off x="6400800" y="1828800"/>
+            <a:ext cx="5303520" cy="3291840"/>
+          </a:xfrm>
+          <a:prstGeom prst="rect">
+            <a:avLst/>
+          </a:prstGeom>
+          <a:noFill/>
+        </p:spPr>
+        <p:txBody>
+          <a:bodyPr wrap="square" anchor="t">
+            <a:spAutoFit/>
+          </a:bodyPr>
+          <a:lstStyle/>
+          <a:p>
+            <a:pPr algn="l">
+              <a:spcAft>
+                <a:spcPts val="300"/>
+              </a:spcAft>
+            </a:pPr>
+            <a:r>
+              <a:rPr sz="1350" b="0" i="0">
+                <a:solidFill>
+                  <a:srgbClr val="1F2A37"/>
+                </a:solidFill>
+                <a:latin typeface="Calibri"/>
+              </a:rPr>
+              <a:t>Minted by the Service per request via ROPC (password grant) using the instance's benchmarker credential.</a:t>
+            </a:r>
+          </a:p>
+          <a:p>
+            <a:pPr algn="l" lvl="1">
+              <a:spcAft>
+                <a:spcPts val="300"/>
+              </a:spcAft>
+            </a:pPr>
+            <a:r>
+              <a:rPr sz="1300" b="0" i="0">
+                <a:solidFill>
+                  <a:srgbClr val="1F2A37"/>
+                </a:solidFill>
+                <a:latin typeface="Calibri"/>
+              </a:rPr>
+              <a:t>• Always fresh → no expiry handling</a:t>
+            </a:r>
+          </a:p>
+          <a:p>
+            <a:pPr algn="l" lvl="1">
+              <a:spcAft>
+                <a:spcPts val="300"/>
+              </a:spcAft>
+            </a:pPr>
+            <a:r>
+              <a:rPr sz="1300" b="0" i="0">
+                <a:solidFill>
+                  <a:srgbClr val="1F2A37"/>
+                </a:solidFill>
+                <a:latin typeface="Calibri"/>
+              </a:rPr>
+              <a:t>• Presented to Rossoctl for all cluster-facing ops</a:t>
+            </a:r>
+          </a:p>
+          <a:p>
+            <a:pPr algn="l" lvl="1">
+              <a:spcAft>
+                <a:spcPts val="300"/>
+              </a:spcAft>
+            </a:pPr>
+            <a:r>
+              <a:rPr sz="1300" b="1" i="0">
+                <a:solidFill>
+                  <a:srgbClr val="2E6FB5"/>
+                </a:solidFill>
+                <a:latin typeface="Calibri"/>
+              </a:rPr>
+              <a:t>• The Service acts under its OWN identity, not the caller's</a:t>
+            </a:r>
+          </a:p>
+          <a:p>
+            <a:pPr algn="l">
+              <a:spcAft>
+                <a:spcPts val="300"/>
+              </a:spcAft>
+            </a:pPr>
+            <a:r>
+              <a:rPr sz="1350" b="1" i="0">
+                <a:solidFill>
+                  <a:srgbClr val="2E6FB5"/>
+                </a:solidFill>
+                <a:latin typeface="Calibri"/>
+              </a:rPr>
+              <a:t>Backchannel split (iss ≠ dialed host):</a:t>
+            </a:r>
+          </a:p>
+          <a:p>
+            <a:pPr algn="l" lvl="1">
+              <a:spcAft>
+                <a:spcPts val="300"/>
+              </a:spcAft>
+            </a:pPr>
+            <a:r>
+              <a:rPr sz="1300" b="0" i="0">
+                <a:solidFill>
+                  <a:srgbClr val="1F2A37"/>
+                </a:solidFill>
+                <a:latin typeface="Calibri"/>
+              </a:rPr>
+              <a:t>• When the iss host is unreachable (in-cluster kind), JWKS + token come from a configured backchannel URL; iss is matched, never dialed</a:t>
+            </a:r>
+          </a:p>
+        </p:txBody>
+      </p:sp>
+      <p:sp>
+        <p:nvSpPr>
+          <p:cNvPr id="7" name="Rounded Rectangle 6"/>
+          <p:cNvSpPr/>
+          <p:nvPr/>
+        </p:nvSpPr>
+        <p:spPr>
+          <a:xfrm>
+            <a:off x="1463040" y="5212080"/>
+            <a:ext cx="9235440" cy="1005840"/>
+          </a:xfrm>
+          <a:prstGeom prst="roundRect">
+            <a:avLst/>
+          </a:prstGeom>
+          <a:solidFill>
+            <a:srgbClr val="E8F1FB"/>
+          </a:solidFill>
+          <a:ln w="12700">
+            <a:solidFill>
+              <a:srgbClr val="2E6FB5"/>
+            </a:solidFill>
+          </a:ln>
+          <a:effectLst/>
+        </p:spPr>
+        <p:style>
+          <a:lnRef idx="1">
+            <a:schemeClr val="accent1"/>
+          </a:lnRef>
+          <a:fillRef idx="3">
+            <a:schemeClr val="accent1"/>
+          </a:fillRef>
+          <a:effectRef idx="2">
+            <a:schemeClr val="accent1"/>
+          </a:effectRef>
+          <a:fontRef idx="minor">
+            <a:schemeClr val="lt1"/>
+          </a:fontRef>
+        </p:style>
+        <p:txBody>
+          <a:bodyPr rtlCol="0" anchor="ctr" wrap="square" tIns="25400" bIns="25400"/>
+          <a:lstStyle/>
+          <a:p>
+            <a:pPr algn="ctr"/>
+            <a:r>
+              <a:rPr sz="1350" b="1" i="0">
+                <a:solidFill>
+                  <a:srgbClr val="1F2A37"/>
+                </a:solidFill>
+                <a:latin typeface="Calibri"/>
+              </a:rPr>
+              <a:t>Implication:  at the Rossoctl / cluster layer every action appears as the Service's identity — so per-user attribution &amp; audit live in the Service, keyed on (iss, preferred_username).</a:t>
+            </a:r>
+          </a:p>
+        </p:txBody>
+      </p:sp>
+    </p:spTree>
+  </p:cSld>
+  <p:clrMapOvr>
+    <a:masterClrMapping/>
+  </p:clrMapOvr>
+</p:sld>
+</file>
+
+<file path=ppt/slides/slide6.xml><?xml version="1.0" encoding="utf-8"?>
+<p:sld xmlns:a="http://schemas.openxmlformats.org/drawingml/2006/main" xmlns:p="http://schemas.openxmlformats.org/presentationml/2006/main" xmlns:r="http://schemas.openxmlformats.org/officeDocument/2006/relationships">
+  <p:cSld>
+    <p:spTree>
+      <p:nvGrpSpPr>
+        <p:cNvPr id="1" name=""/>
+        <p:cNvGrpSpPr/>
+        <p:nvPr/>
+      </p:nvGrpSpPr>
+      <p:grpSpPr/>
+      <p:sp>
+        <p:nvSpPr>
+          <p:cNvPr id="2" name="Rectangle 1"/>
+          <p:cNvSpPr/>
+          <p:nvPr/>
+        </p:nvSpPr>
+        <p:spPr>
+          <a:xfrm>
+            <a:off x="0" y="0"/>
+            <a:ext cx="12192000" cy="950000"/>
+          </a:xfrm>
+          <a:prstGeom prst="rect">
+            <a:avLst/>
+          </a:prstGeom>
+          <a:solidFill>
+            <a:srgbClr val="1B3A5C"/>
+          </a:solidFill>
+          <a:ln>
+            <a:noFill/>
+          </a:ln>
+          <a:effectLst/>
+        </p:spPr>
+        <p:style>
+          <a:lnRef idx="1">
+            <a:schemeClr val="accent1"/>
+          </a:lnRef>
+          <a:fillRef idx="3">
+            <a:schemeClr val="accent1"/>
+          </a:fillRef>
+          <a:effectRef idx="2">
+            <a:schemeClr val="accent1"/>
+          </a:effectRef>
+          <a:fontRef idx="minor">
+            <a:schemeClr val="lt1"/>
+          </a:fontRef>
+        </p:style>
+        <p:txBody>
+          <a:bodyPr rtlCol="0" anchor="ctr" lIns="355600"/>
+          <a:lstStyle/>
+          <a:p>
+            <a:pPr algn="ctr"/>
+            <a:r>
+              <a:rPr sz="2600" b="1" i="0">
+                <a:solidFill>
+                  <a:srgbClr val="FFFFFF"/>
+                </a:solidFill>
+                <a:latin typeface="Calibri"/>
+              </a:rPr>
               <a:t>Benchmark Catalog &amp; Run Lifecycle</a:t>
             </a:r>
           </a:p>
@@ -7829,7 +10679,7 @@
                 </a:solidFill>
                 <a:latin typeface="Calibri"/>
               </a:rPr>
-              <a:t>run.json · report.ndjson · report.parquet</a:t>
+              <a:t>run.json · report.* · token_report.* · span_report.* · manifest.json</a:t>
             </a:r>
           </a:p>
         </p:txBody>
@@ -7879,7 +10729,7 @@
 </p:sld>
 </file>
 
-<file path=ppt/slides/slide6.xml><?xml version="1.0" encoding="utf-8"?>
+<file path=ppt/slides/slide7.xml><?xml version="1.0" encoding="utf-8"?>
 <p:sld xmlns:a="http://schemas.openxmlformats.org/drawingml/2006/main" xmlns:p="http://schemas.openxmlformats.org/presentationml/2006/main" xmlns:r="http://schemas.openxmlformats.org/officeDocument/2006/relationships">
   <p:cSld>
     <p:spTree>

--- a/docs/BenchmarkingService.pptx
+++ b/docs/BenchmarkingService.pptx
@@ -3310,7 +3310,7 @@
                 </a:solidFill>
                 <a:latin typeface="Calibri"/>
               </a:rPr>
-              <a:t>across multiple cluster-specific Rossoctl / Kagenti instances.</a:t>
+              <a:t>across multiple cluster-specific Rossoctl instances.</a:t>
             </a:r>
           </a:p>
         </p:txBody>
@@ -3597,13 +3597,45 @@
               </a:spcAft>
             </a:pPr>
             <a:r>
-              <a:rPr sz="1350" b="0" i="0">
+              <a:rPr sz="1300" b="0" i="0">
                 <a:solidFill>
                   <a:srgbClr val="1F2A37"/>
                 </a:solidFill>
                 <a:latin typeface="Calibri"/>
               </a:rPr>
-              <a:t>• gsm8k (single-turn) · tau2 (multi-turn, server-side simulator) · appworld</a:t>
+              <a:t>• gsm8k — single-turn: one prompt in, one answer out, no dialogue partner</a:t>
+            </a:r>
+          </a:p>
+          <a:p>
+            <a:pPr algn="l" lvl="1">
+              <a:spcAft>
+                <a:spcPts val="300"/>
+              </a:spcAft>
+            </a:pPr>
+            <a:r>
+              <a:rPr sz="1300" b="0" i="0">
+                <a:solidFill>
+                  <a:srgbClr val="1F2A37"/>
+                </a:solidFill>
+                <a:latin typeface="Calibri"/>
+              </a:rPr>
+              <a:t>• tau2 — multi-turn: a server-side user simulator LLM plays the customer</a:t>
+            </a:r>
+          </a:p>
+          <a:p>
+            <a:pPr algn="l" lvl="1">
+              <a:spcAft>
+                <a:spcPts val="300"/>
+              </a:spcAft>
+            </a:pPr>
+            <a:r>
+              <a:rPr sz="1300" b="0" i="0">
+                <a:solidFill>
+                  <a:srgbClr val="1F2A37"/>
+                </a:solidFill>
+                <a:latin typeface="Calibri"/>
+              </a:rPr>
+              <a:t>• appworld — long-horizon: many API calls across simulated apps</a:t>
             </a:r>
           </a:p>
           <a:p>
@@ -4080,7 +4112,7 @@
                 </a:solidFill>
                 <a:latin typeface="Calibri"/>
               </a:rPr>
-              <a:t>Enact only what HTTP allows</a:t>
+              <a:t>Enact only what the API allows</a:t>
             </a:r>
           </a:p>
           <a:p>
@@ -4092,7 +4124,7 @@
                 </a:solidFill>
                 <a:latin typeface="Calibri"/>
               </a:rPr>
-              <a:t>Deploy/run/report/export; workload Secrets + AuthBridge layer-3 are out-of-band → prechecked/rejected, never silently ignored.</a:t>
+              <a:t>Deploy/run/report/export — now including AuthBridge plugin presets (layer-3). Only workload Secrets remain out-of-band: prechecked and reported (424), never silently ignored.</a:t>
             </a:r>
           </a:p>
         </p:txBody>
@@ -5085,7 +5117,7 @@
         </p:nvSpPr>
         <p:spPr>
           <a:xfrm>
-            <a:off x="6126480" y="4315968"/>
+            <a:off x="5623560" y="4315968"/>
             <a:ext cx="2468880" cy="640080"/>
           </a:xfrm>
           <a:prstGeom prst="roundRect">
@@ -5868,8 +5900,8 @@
         </p:nvCxnSpPr>
         <p:spPr>
           <a:xfrm flipH="1">
-            <a:off x="8412480" y="3794760"/>
-            <a:ext cx="320040" cy="521208"/>
+            <a:off x="7955279" y="3794760"/>
+            <a:ext cx="777241" cy="521208"/>
           </a:xfrm>
           <a:prstGeom prst="line">
             <a:avLst/>
@@ -5906,7 +5938,7 @@
         </p:nvSpPr>
         <p:spPr>
           <a:xfrm>
-            <a:off x="8348472" y="3968496"/>
+            <a:off x="8119872" y="3941064"/>
             <a:ext cx="310896" cy="310896"/>
           </a:xfrm>
           <a:prstGeom prst="ellipse">
@@ -5962,7 +5994,7 @@
         <p:spPr>
           <a:xfrm flipH="1">
             <a:off x="2926080" y="4636008"/>
-            <a:ext cx="3200400" cy="155448"/>
+            <a:ext cx="2697480" cy="155448"/>
           </a:xfrm>
           <a:prstGeom prst="line">
             <a:avLst/>
@@ -5999,7 +6031,7 @@
         </p:nvSpPr>
         <p:spPr>
           <a:xfrm>
-            <a:off x="4370832" y="4562856"/>
+            <a:off x="4096512" y="4558284"/>
             <a:ext cx="310896" cy="310896"/>
           </a:xfrm>
           <a:prstGeom prst="ellipse">
@@ -6300,7 +6332,7 @@
           <a:p>
             <a:pPr>
               <a:spcAft>
-                <a:spcPts val="100"/>
+                <a:spcPts val="0"/>
               </a:spcAft>
             </a:pPr>
             <a:r>
@@ -6316,7 +6348,7 @@
           <a:p>
             <a:pPr>
               <a:spcAft>
-                <a:spcPts val="100"/>
+                <a:spcPts val="0"/>
               </a:spcAft>
             </a:pPr>
             <a:r>
@@ -6332,7 +6364,7 @@
           <a:p>
             <a:pPr>
               <a:spcAft>
-                <a:spcPts val="100"/>
+                <a:spcPts val="0"/>
               </a:spcAft>
             </a:pPr>
             <a:r>
@@ -6348,7 +6380,7 @@
           <a:p>
             <a:pPr>
               <a:spcAft>
-                <a:spcPts val="100"/>
+                <a:spcPts val="0"/>
               </a:spcAft>
             </a:pPr>
             <a:r>
@@ -6364,7 +6396,7 @@
           <a:p>
             <a:pPr>
               <a:spcAft>
-                <a:spcPts val="100"/>
+                <a:spcPts val="0"/>
               </a:spcAft>
             </a:pPr>
             <a:r>
@@ -6380,7 +6412,7 @@
           <a:p>
             <a:pPr>
               <a:spcAft>
-                <a:spcPts val="100"/>
+                <a:spcPts val="0"/>
               </a:spcAft>
             </a:pPr>
             <a:r>
@@ -6419,7 +6451,7 @@
           <a:p>
             <a:pPr>
               <a:spcAft>
-                <a:spcPts val="100"/>
+                <a:spcPts val="0"/>
               </a:spcAft>
             </a:pPr>
             <a:r>
@@ -6429,13 +6461,13 @@
                 </a:solidFill>
                 <a:latin typeface="Calibri"/>
               </a:rPr>
-              <a:t>6  Service runs benchmark sessions directly (MCP / A2A)</a:t>
+              <a:t>6  Service drives the MCP session + the A2A call itself;</a:t>
             </a:r>
           </a:p>
           <a:p>
             <a:pPr>
               <a:spcAft>
-                <a:spcPts val="100"/>
+                <a:spcPts val="0"/>
               </a:spcAft>
             </a:pPr>
             <a:r>
@@ -6445,13 +6477,13 @@
                 </a:solidFill>
                 <a:latin typeface="Calibri"/>
               </a:rPr>
-              <a:t>7  Service emits the Agent.Session trace → MLflow (first)</a:t>
+              <a:t>      the agent only issues execute_tool inside that session</a:t>
             </a:r>
           </a:p>
           <a:p>
             <a:pPr>
               <a:spcAft>
-                <a:spcPts val="100"/>
+                <a:spcPts val="0"/>
               </a:spcAft>
             </a:pPr>
             <a:r>
@@ -6461,13 +6493,13 @@
                 </a:solidFill>
                 <a:latin typeface="Calibri"/>
               </a:rPr>
-              <a:t>8a A2A agent → OTEL collector   ·   8b collector → MLflow</a:t>
+              <a:t>7  Service emits the Agent.Session trace → MLflow (first)</a:t>
             </a:r>
           </a:p>
           <a:p>
             <a:pPr>
               <a:spcAft>
-                <a:spcPts val="100"/>
+                <a:spcPts val="0"/>
               </a:spcAft>
             </a:pPr>
             <a:r>
@@ -6477,13 +6509,13 @@
                 </a:solidFill>
                 <a:latin typeface="Calibri"/>
               </a:rPr>
-              <a:t>      (optional workload spans — off by default)</a:t>
+              <a:t>8a A2A agent → OTEL collector   ·   8b collector → MLflow</a:t>
             </a:r>
           </a:p>
           <a:p>
             <a:pPr>
               <a:spcAft>
-                <a:spcPts val="100"/>
+                <a:spcPts val="0"/>
               </a:spcAft>
             </a:pPr>
             <a:r>
@@ -6493,13 +6525,29 @@
                 </a:solidFill>
                 <a:latin typeface="Calibri"/>
               </a:rPr>
-              <a:t>9  Service reads back Agent.Session traces (MLflow)</a:t>
+              <a:t>      (optional workload spans — off by default)</a:t>
             </a:r>
           </a:p>
           <a:p>
             <a:pPr>
               <a:spcAft>
-                <a:spcPts val="100"/>
+                <a:spcPts val="0"/>
+              </a:spcAft>
+            </a:pPr>
+            <a:r>
+              <a:rPr sz="1050" b="0" i="0">
+                <a:solidFill>
+                  <a:srgbClr val="1F2A37"/>
+                </a:solidFill>
+                <a:latin typeface="Calibri"/>
+              </a:rPr>
+              <a:t>9  Service reads back Agent.Session traces (MLflow)</a:t>
+            </a:r>
+          </a:p>
+          <a:p>
+            <a:pPr>
+              <a:spcAft>
+                <a:spcPts val="0"/>
               </a:spcAft>
             </a:pPr>
             <a:r>
@@ -7785,7 +7833,7 @@
         </p:nvSpPr>
         <p:spPr>
           <a:xfrm>
-            <a:off x="4681728" y="3118104"/>
+            <a:off x="5020056" y="3118104"/>
             <a:ext cx="237744" cy="237744"/>
           </a:xfrm>
           <a:prstGeom prst="ellipse">
@@ -8930,7 +8978,7 @@
                 </a:solidFill>
                 <a:latin typeface="Calibri"/>
               </a:rPr>
-              <a:t>+1 judge per action</a:t>
+              <a:t>+1 IBAC judge call per action</a:t>
             </a:r>
           </a:p>
         </p:txBody>
@@ -10924,7 +10972,39 @@
                 </a:solidFill>
                 <a:latin typeface="Calibri"/>
               </a:rPr>
-              <a:t>• authbridge_enabled → inject sidecar w/ cluster-default pipeline (layer-2)</a:t>
+              <a:t>• authbridge_enabled → inject the sidecar (layer-2)</a:t>
+            </a:r>
+          </a:p>
+          <a:p>
+            <a:pPr algn="l" lvl="1">
+              <a:spcAft>
+                <a:spcPts val="300"/>
+              </a:spcAft>
+            </a:pPr>
+            <a:r>
+              <a:rPr sz="1300" b="0" i="0">
+                <a:solidFill>
+                  <a:srgbClr val="1F2A37"/>
+                </a:solidFill>
+                <a:latin typeface="Calibri"/>
+              </a:rPr>
+              <a:t>• plugin_preset / plugins / on_error → AuthBridge layer-3 composition,</a:t>
+            </a:r>
+          </a:p>
+          <a:p>
+            <a:pPr algn="l" lvl="2">
+              <a:spcAft>
+                <a:spcPts val="300"/>
+              </a:spcAft>
+            </a:pPr>
+            <a:r>
+              <a:rPr sz="1200" b="0" i="0">
+                <a:solidFill>
+                  <a:srgbClr val="3A4654"/>
+                </a:solidFill>
+                <a:latin typeface="Calibri"/>
+              </a:rPr>
+              <a:t>     forwarded as pluginPreset/plugins/onError; the operator renders the ConfigMap</a:t>
             </a:r>
           </a:p>
           <a:p>
@@ -11098,7 +11178,7 @@
                 </a:solidFill>
                 <a:latin typeface="Calibri"/>
               </a:rPr>
-              <a:t>• AuthBridge layer-3 plugin composition / on_error —</a:t>
+              <a:t>• AuthBridge CLUSTER config — ibac judgeEndpoint / judgeModel</a:t>
             </a:r>
           </a:p>
           <a:p>
@@ -11114,7 +11194,7 @@
                 </a:solidFill>
                 <a:latin typeface="Calibri"/>
               </a:rPr>
-              <a:t>     needs a per-agent ConfigMap kubectl overlay; deploy returns 422</a:t>
+              <a:t>     live in the platform-config ConfigMap, not the agent API</a:t>
             </a:r>
           </a:p>
           <a:p>

--- a/docs/BenchmarkingService.pptx
+++ b/docs/BenchmarkingService.pptx
@@ -10940,7 +10940,7 @@
                 </a:solidFill>
                 <a:latin typeface="Calibri"/>
               </a:rPr>
-              <a:t>• Deploy MCP tool + A2A agent (with CPU/mem, image, env)</a:t>
+              <a:t>• Deploy MCP tool + A2A agent (CPU/mem, image, env)</a:t>
             </a:r>
           </a:p>
           <a:p>
@@ -10988,7 +10988,7 @@
                 </a:solidFill>
                 <a:latin typeface="Calibri"/>
               </a:rPr>
-              <a:t>• plugin_preset / plugins / on_error → AuthBridge layer-3 composition,</a:t>
+              <a:t>• plugin_preset / plugins / on_error → AuthBridge layer-3</a:t>
             </a:r>
           </a:p>
           <a:p>
@@ -10998,13 +10998,13 @@
               </a:spcAft>
             </a:pPr>
             <a:r>
-              <a:rPr sz="1200" b="0" i="0">
+              <a:rPr sz="1150" b="0" i="0">
                 <a:solidFill>
                   <a:srgbClr val="3A4654"/>
                 </a:solidFill>
                 <a:latin typeface="Calibri"/>
               </a:rPr>
-              <a:t>     forwarded as pluginPreset/plugins/onError; the operator renders the ConfigMap</a:t>
+              <a:t>→ pluginPreset/plugins/onError; operator renders ConfigMap</a:t>
             </a:r>
           </a:p>
           <a:p>
@@ -11052,7 +11052,23 @@
                 </a:solidFill>
                 <a:latin typeface="Calibri"/>
               </a:rPr>
-              <a:t>• Service-owned config: MLflow + S3 via PUT /config (benchmarker only)</a:t>
+              <a:t>• Service-owned config: MLflow + S3 via PUT /config</a:t>
+            </a:r>
+          </a:p>
+          <a:p>
+            <a:pPr algn="l" lvl="2">
+              <a:spcAft>
+                <a:spcPts val="300"/>
+              </a:spcAft>
+            </a:pPr>
+            <a:r>
+              <a:rPr sz="1150" b="0" i="0">
+                <a:solidFill>
+                  <a:srgbClr val="3A4654"/>
+                </a:solidFill>
+                <a:latin typeface="Calibri"/>
+              </a:rPr>
+              <a:t>benchmarker only</a:t>
             </a:r>
           </a:p>
         </p:txBody>
@@ -11146,7 +11162,7 @@
                 </a:solidFill>
                 <a:latin typeface="Calibri"/>
               </a:rPr>
-              <a:t>• Cluster Secrets (hf-secret, openai-secret) — operator provisions;</a:t>
+              <a:t>• Cluster Secrets (hf-secret, openai-secret)</a:t>
             </a:r>
           </a:p>
           <a:p>
@@ -11156,13 +11172,13 @@
               </a:spcAft>
             </a:pPr>
             <a:r>
-              <a:rPr sz="1200" b="0" i="0">
+              <a:rPr sz="1150" b="0" i="0">
                 <a:solidFill>
                   <a:srgbClr val="3A4654"/>
                 </a:solidFill>
                 <a:latin typeface="Calibri"/>
               </a:rPr>
-              <a:t>     run precheck returns 424 naming the missing secret</a:t>
+              <a:t>operator provisions; run precheck returns 424 naming it</a:t>
             </a:r>
           </a:p>
           <a:p>
@@ -11188,13 +11204,13 @@
               </a:spcAft>
             </a:pPr>
             <a:r>
-              <a:rPr sz="1200" b="0" i="0">
+              <a:rPr sz="1150" b="0" i="0">
                 <a:solidFill>
                   <a:srgbClr val="3A4654"/>
                 </a:solidFill>
                 <a:latin typeface="Calibri"/>
               </a:rPr>
-              <a:t>     live in the platform-config ConfigMap, not the agent API</a:t>
+              <a:t>in the platform-config ConfigMap, not the agent API</a:t>
             </a:r>
           </a:p>
           <a:p>
@@ -11242,7 +11258,23 @@
                 </a:solidFill>
                 <a:latin typeface="Calibri"/>
               </a:rPr>
-              <a:t>• Never silently ignore an un-enactable request — precheck (424) or reject (422) with an actionable reason.</a:t>
+              <a:t>• Never silently ignore an un-enactable request —</a:t>
+            </a:r>
+          </a:p>
+          <a:p>
+            <a:pPr algn="l" lvl="2">
+              <a:spcAft>
+                <a:spcPts val="300"/>
+              </a:spcAft>
+            </a:pPr>
+            <a:r>
+              <a:rPr sz="1150" b="0" i="0">
+                <a:solidFill>
+                  <a:srgbClr val="3A4654"/>
+                </a:solidFill>
+                <a:latin typeface="Calibri"/>
+              </a:rPr>
+              <a:t>precheck (424) or reject (422), with an actionable reason</a:t>
             </a:r>
           </a:p>
         </p:txBody>
@@ -11255,7 +11287,7 @@
         </p:nvSpPr>
         <p:spPr>
           <a:xfrm>
-            <a:off x="1463040" y="5943600"/>
+            <a:off x="1463040" y="5257800"/>
             <a:ext cx="9235440" cy="685800"/>
           </a:xfrm>
           <a:prstGeom prst="roundRect">

--- a/docs/BenchmarkingService.pptx
+++ b/docs/BenchmarkingService.pptx
@@ -3410,7 +3410,7 @@
         <p:spPr>
           <a:xfrm>
             <a:off x="411480" y="1207008"/>
-            <a:ext cx="11338560" cy="932688"/>
+            <a:ext cx="11338560" cy="914400"/>
           </a:xfrm>
           <a:prstGeom prst="roundRect">
             <a:avLst/>
@@ -3440,7 +3440,7 @@
           </a:fontRef>
         </p:style>
         <p:txBody>
-          <a:bodyPr rtlCol="0" anchor="t" wrap="square" tIns="76200" bIns="25400" lIns="127000"/>
+          <a:bodyPr rtlCol="0" anchor="t" wrap="square" tIns="76200" bIns="25400" lIns="177800" rIns="177800"/>
           <a:lstStyle/>
           <a:p>
             <a:pPr algn="l"/>
@@ -3451,7 +3451,7 @@
                 </a:solidFill>
                 <a:latin typeface="Calibri"/>
               </a:rPr>
-              <a:t>1.  `pass_rate` = evaluated_pass / total</a:t>
+              <a:t>1.  pass_rate = evaluated_pass / total</a:t>
             </a:r>
           </a:p>
           <a:p>
@@ -3476,8 +3476,8 @@
         </p:nvSpPr>
         <p:spPr>
           <a:xfrm>
-            <a:off x="411480" y="2231136"/>
-            <a:ext cx="11338560" cy="932688"/>
+            <a:off x="411480" y="2267712"/>
+            <a:ext cx="11338560" cy="914400"/>
           </a:xfrm>
           <a:prstGeom prst="roundRect">
             <a:avLst/>
@@ -3507,7 +3507,7 @@
           </a:fontRef>
         </p:style>
         <p:txBody>
-          <a:bodyPr rtlCol="0" anchor="t" wrap="square" tIns="76200" bIns="25400" lIns="127000"/>
+          <a:bodyPr rtlCol="0" anchor="t" wrap="square" tIns="76200" bIns="25400" lIns="177800" rIns="177800"/>
           <a:lstStyle/>
           <a:p>
             <a:pPr algn="l"/>
@@ -3518,7 +3518,7 @@
                 </a:solidFill>
                 <a:latin typeface="Calibri"/>
               </a:rPr>
-              <a:t>2.  The `llm` column overcounts real calls by one</a:t>
+              <a:t>2.  The llm column overcounts real calls by one</a:t>
             </a:r>
           </a:p>
           <a:p>
@@ -3530,7 +3530,7 @@
                 </a:solidFill>
                 <a:latin typeface="Calibri"/>
               </a:rPr>
-              <a:t>Every task issues an extra `max_tokens=1` capability probe, counted as a chat span. `llm=2` on gsm8k means ONE real call.</a:t>
+              <a:t>Every task issues an extra max_tokens=1 capability probe, counted as a chat span. llm=2 on gsm8k means ONE real call.</a:t>
             </a:r>
           </a:p>
         </p:txBody>
@@ -3543,8 +3543,8 @@
         </p:nvSpPr>
         <p:spPr>
           <a:xfrm>
-            <a:off x="411480" y="3255264"/>
-            <a:ext cx="11338560" cy="932688"/>
+            <a:off x="411480" y="3328416"/>
+            <a:ext cx="11338560" cy="914400"/>
           </a:xfrm>
           <a:prstGeom prst="roundRect">
             <a:avLst/>
@@ -3574,7 +3574,7 @@
           </a:fontRef>
         </p:style>
         <p:txBody>
-          <a:bodyPr rtlCol="0" anchor="t" wrap="square" tIns="76200" bIns="25400" lIns="127000"/>
+          <a:bodyPr rtlCol="0" anchor="t" wrap="square" tIns="76200" bIns="25400" lIns="177800" rIns="177800"/>
           <a:lstStyle/>
           <a:p>
             <a:pPr algn="l"/>
@@ -3585,7 +3585,7 @@
                 </a:solidFill>
                 <a:latin typeface="Calibri"/>
               </a:rPr>
-              <a:t>3.  Implausibly small tokens = lost telemetry, and `tokens == 0` will not catch it</a:t>
+              <a:t>3.  Implausibly small tokens = lost telemetry, and tokens == 0 will not catch it</a:t>
             </a:r>
           </a:p>
           <a:p>
@@ -3597,7 +3597,7 @@
                 </a:solidFill>
                 <a:latin typeface="Calibri"/>
               </a:rPr>
-              <a:t>When a usage-bearing span is lost, what survives is the probe — whose own usage is 0/0 on reasoning models but 8/1 on claude-sonnet-5 and 1/0 on gemini. Use the structural test: `llm &lt;= 1` with `tool &gt;= 2` is impossible.</a:t>
+              <a:t>When a usage-bearing span is lost, what survives is the probe — whose own usage is 0/0 on reasoning models but 8/1 on claude-sonnet-5 and 1/0 on gemini. Use the structural test: llm &lt;= 1 with tool &gt;= 2 is impossible.</a:t>
             </a:r>
           </a:p>
         </p:txBody>
@@ -3610,8 +3610,8 @@
         </p:nvSpPr>
         <p:spPr>
           <a:xfrm>
-            <a:off x="411480" y="4279392"/>
-            <a:ext cx="11338560" cy="932688"/>
+            <a:off x="411480" y="4389120"/>
+            <a:ext cx="11338560" cy="914400"/>
           </a:xfrm>
           <a:prstGeom prst="roundRect">
             <a:avLst/>
@@ -3641,7 +3641,7 @@
           </a:fontRef>
         </p:style>
         <p:txBody>
-          <a:bodyPr rtlCol="0" anchor="t" wrap="square" tIns="76200" bIns="25400" lIns="127000"/>
+          <a:bodyPr rtlCol="0" anchor="t" wrap="square" tIns="76200" bIns="25400" lIns="177800" rIns="177800"/>
           <a:lstStyle/>
           <a:p>
             <a:pPr algn="l"/>
@@ -3677,8 +3677,8 @@
         </p:nvSpPr>
         <p:spPr>
           <a:xfrm>
-            <a:off x="411480" y="5303520"/>
-            <a:ext cx="11338560" cy="932688"/>
+            <a:off x="411480" y="5449824"/>
+            <a:ext cx="11338560" cy="914400"/>
           </a:xfrm>
           <a:prstGeom prst="roundRect">
             <a:avLst/>
@@ -3708,7 +3708,7 @@
           </a:fontRef>
         </p:style>
         <p:txBody>
-          <a:bodyPr rtlCol="0" anchor="t" wrap="square" tIns="76200" bIns="25400" lIns="127000"/>
+          <a:bodyPr rtlCol="0" anchor="t" wrap="square" tIns="76200" bIns="25400" lIns="177800" rIns="177800"/>
           <a:lstStyle/>
           <a:p>
             <a:pPr algn="l"/>
@@ -3731,7 +3731,7 @@
                 </a:solidFill>
                 <a:latin typeface="Calibri"/>
               </a:rPr>
-              <a:t>A run takes the first `max_tasks` tasks, so the same `task_id` is the same task across runs and clusters, and a smaller run is a prefix of a larger one. That is what makes cross-platform comparison like-for-like — six legs matched to the byte.</a:t>
+              <a:t>A run takes the first max_tasks tasks, so the same task_id is the same task across runs and clusters, and a smaller run is a prefix of a larger one. That is what makes cross-platform comparison like-for-like — six legs matched to the byte.</a:t>
             </a:r>
           </a:p>
         </p:txBody>
@@ -12860,7 +12860,7 @@
         </p:nvGraphicFramePr>
         <p:xfrm>
           <a:off x="411480" y="1188720"/>
-          <a:ext cx="11338560" cy="4160520"/>
+          <a:ext cx="11338560" cy="3977639"/>
         </p:xfrm>
         <a:graphic>
           <a:graphicData uri="http://schemas.openxmlformats.org/drawingml/2006/table">
@@ -12869,12 +12869,12 @@
                 <a:tableStyleId>{5C22544A-7EE6-4342-B048-85BDC9FD1C3A}</a:tableStyleId>
               </a:tblPr>
               <a:tblGrid>
-                <a:gridCol w="2834640"/>
-                <a:gridCol w="2834640"/>
-                <a:gridCol w="2834640"/>
-                <a:gridCol w="2834640"/>
+                <a:gridCol w="2286000"/>
+                <a:gridCol w="3017520"/>
+                <a:gridCol w="3017520"/>
+                <a:gridCol w="3017520"/>
               </a:tblGrid>
-              <a:tr h="346710">
+              <a:tr h="331469">
                 <a:tc>
                   <a:txBody>
                     <a:bodyPr/>
@@ -12968,7 +12968,7 @@
                   </a:tcPr>
                 </a:tc>
               </a:tr>
-              <a:tr h="346710">
+              <a:tr h="331469">
                 <a:tc>
                   <a:txBody>
                     <a:bodyPr/>
@@ -13062,7 +13062,7 @@
                   </a:tcPr>
                 </a:tc>
               </a:tr>
-              <a:tr h="346710">
+              <a:tr h="331469">
                 <a:tc>
                   <a:txBody>
                     <a:bodyPr/>
@@ -13122,7 +13122,7 @@
                           </a:solidFill>
                           <a:latin typeface="Calibri"/>
                         </a:rPr>
-                        <a:t>60  (50 clean)</a:t>
+                        <a:t>60 (50 clean)</a:t>
                       </a:r>
                     </a:p>
                   </a:txBody>
@@ -13145,7 +13145,7 @@
                           </a:solidFill>
                           <a:latin typeface="Calibri"/>
                         </a:rPr>
-                        <a:t>40  (35 clean)</a:t>
+                        <a:t>40 (35 clean)</a:t>
                       </a:r>
                     </a:p>
                   </a:txBody>
@@ -13156,7 +13156,7 @@
                   </a:tcPr>
                 </a:tc>
               </a:tr>
-              <a:tr h="346710">
+              <a:tr h="331469">
                 <a:tc>
                   <a:txBody>
                     <a:bodyPr/>
@@ -13250,7 +13250,7 @@
                   </a:tcPr>
                 </a:tc>
               </a:tr>
-              <a:tr h="346710">
+              <a:tr h="331469">
                 <a:tc>
                   <a:txBody>
                     <a:bodyPr/>
@@ -13344,7 +13344,7 @@
                   </a:tcPr>
                 </a:tc>
               </a:tr>
-              <a:tr h="346710">
+              <a:tr h="331469">
                 <a:tc>
                   <a:txBody>
                     <a:bodyPr/>
@@ -13438,7 +13438,7 @@
                   </a:tcPr>
                 </a:tc>
               </a:tr>
-              <a:tr h="346710">
+              <a:tr h="331469">
                 <a:tc>
                   <a:txBody>
                     <a:bodyPr/>
@@ -13532,7 +13532,7 @@
                   </a:tcPr>
                 </a:tc>
               </a:tr>
-              <a:tr h="346710">
+              <a:tr h="331469">
                 <a:tc>
                   <a:txBody>
                     <a:bodyPr/>
@@ -13626,7 +13626,7 @@
                   </a:tcPr>
                 </a:tc>
               </a:tr>
-              <a:tr h="346710">
+              <a:tr h="331469">
                 <a:tc>
                   <a:txBody>
                     <a:bodyPr/>
@@ -13720,7 +13720,7 @@
                   </a:tcPr>
                 </a:tc>
               </a:tr>
-              <a:tr h="346710">
+              <a:tr h="331469">
                 <a:tc>
                   <a:txBody>
                     <a:bodyPr/>
@@ -13814,7 +13814,7 @@
                   </a:tcPr>
                 </a:tc>
               </a:tr>
-              <a:tr h="346710">
+              <a:tr h="331469">
                 <a:tc>
                   <a:txBody>
                     <a:bodyPr/>
@@ -13908,7 +13908,7 @@
                   </a:tcPr>
                 </a:tc>
               </a:tr>
-              <a:tr h="346710">
+              <a:tr h="331480">
                 <a:tc>
                   <a:txBody>
                     <a:bodyPr/>
@@ -14045,7 +14045,7 @@
           </a:fontRef>
         </p:style>
         <p:txBody>
-          <a:bodyPr rtlCol="0" anchor="ctr" wrap="square" tIns="25400" bIns="25400"/>
+          <a:bodyPr rtlCol="0" anchor="ctr" wrap="square" tIns="25400" bIns="25400" lIns="228600" rIns="228600"/>
           <a:lstStyle/>
           <a:p>
             <a:pPr algn="ctr"/>
@@ -14056,7 +14056,7 @@
                 </a:solidFill>
                 <a:latin typeface="Calibri"/>
               </a:rPr>
-              <a:t>The scale gap is the headline: a tau2 task costs ~240x the input tokens of a gsm8k task, an appworld task ~615x.  A 50-task gsm8k run is minutes; a 20-task appworld run is half an hour and millions of tokens.  Budget by benchmark, not by task count.</a:t>
+              <a:t>The scale gap is the headline: a tau2 task costs ~240x the input tokens of a gsm8k task, an appworld task ~615x. A 50-task gsm8k run is minutes; a 20-task appworld run is half an hour and millions of tokens. Budget by benchmark, not by task count.</a:t>
             </a:r>
           </a:p>
         </p:txBody>
@@ -14237,16 +14237,16 @@
           </a:fontRef>
         </p:style>
         <p:txBody>
-          <a:bodyPr rtlCol="0" anchor="t" wrap="square" lIns="114300" rIns="114300" tIns="101600"/>
+          <a:bodyPr rtlCol="0" anchor="t" wrap="square" lIns="127000" rIns="127000" tIns="381000"/>
           <a:lstStyle/>
           <a:p>
             <a:pPr algn="l">
               <a:spcAft>
-                <a:spcPts val="600"/>
+                <a:spcPts val="500"/>
               </a:spcAft>
             </a:pPr>
             <a:r>
-              <a:rPr sz="1050" b="0" i="0">
+              <a:rPr sz="1000" b="0" i="0">
                 <a:solidFill>
                   <a:srgbClr val="1F2A37"/>
                 </a:solidFill>
@@ -14258,11 +14258,11 @@
           <a:p>
             <a:pPr algn="l">
               <a:spcAft>
-                <a:spcPts val="600"/>
+                <a:spcPts val="500"/>
               </a:spcAft>
             </a:pPr>
             <a:r>
-              <a:rPr sz="1050" b="0" i="0">
+              <a:rPr sz="1000" b="0" i="0">
                 <a:solidFill>
                   <a:srgbClr val="1F2A37"/>
                 </a:solidFill>
@@ -14274,11 +14274,11 @@
           <a:p>
             <a:pPr algn="l">
               <a:spcAft>
-                <a:spcPts val="600"/>
+                <a:spcPts val="500"/>
               </a:spcAft>
             </a:pPr>
             <a:r>
-              <a:rPr sz="1050" b="0" i="0">
+              <a:rPr sz="1000" b="0" i="0">
                 <a:solidFill>
                   <a:srgbClr val="1F2A37"/>
                 </a:solidFill>
@@ -14290,11 +14290,11 @@
           <a:p>
             <a:pPr algn="l">
               <a:spcAft>
-                <a:spcPts val="600"/>
+                <a:spcPts val="500"/>
               </a:spcAft>
             </a:pPr>
             <a:r>
-              <a:rPr sz="1050" b="0" i="0">
+              <a:rPr sz="1000" b="0" i="0">
                 <a:solidFill>
                   <a:srgbClr val="1F2A37"/>
                 </a:solidFill>
@@ -14306,11 +14306,11 @@
           <a:p>
             <a:pPr algn="l">
               <a:spcAft>
-                <a:spcPts val="600"/>
+                <a:spcPts val="500"/>
               </a:spcAft>
             </a:pPr>
             <a:r>
-              <a:rPr sz="1050" b="0" i="0">
+              <a:rPr sz="1000" b="0" i="0">
                 <a:solidFill>
                   <a:srgbClr val="1F2A37"/>
                 </a:solidFill>
@@ -14322,11 +14322,11 @@
           <a:p>
             <a:pPr algn="l">
               <a:spcAft>
-                <a:spcPts val="600"/>
+                <a:spcPts val="500"/>
               </a:spcAft>
             </a:pPr>
             <a:r>
-              <a:rPr sz="1050" b="0" i="0">
+              <a:rPr sz="1000" b="0" i="0">
                 <a:solidFill>
                   <a:srgbClr val="1F2A37"/>
                 </a:solidFill>
@@ -14345,7 +14345,62 @@
         </p:nvSpPr>
         <p:spPr>
           <a:xfrm>
-            <a:off x="4251960" y="1188720"/>
+            <a:off x="411480" y="1188720"/>
+            <a:ext cx="3611880" cy="566928"/>
+          </a:xfrm>
+          <a:prstGeom prst="roundRect">
+            <a:avLst/>
+          </a:prstGeom>
+          <a:solidFill>
+            <a:srgbClr val="3D6E70"/>
+          </a:solidFill>
+          <a:ln w="12700">
+            <a:solidFill>
+              <a:srgbClr val="3D6E70"/>
+            </a:solidFill>
+          </a:ln>
+          <a:effectLst/>
+        </p:spPr>
+        <p:style>
+          <a:lnRef idx="1">
+            <a:schemeClr val="accent1"/>
+          </a:lnRef>
+          <a:fillRef idx="3">
+            <a:schemeClr val="accent1"/>
+          </a:fillRef>
+          <a:effectRef idx="2">
+            <a:schemeClr val="accent1"/>
+          </a:effectRef>
+          <a:fontRef idx="minor">
+            <a:schemeClr val="lt1"/>
+          </a:fontRef>
+        </p:style>
+        <p:txBody>
+          <a:bodyPr rtlCol="0" anchor="ctr" wrap="square" tIns="25400" bIns="25400"/>
+          <a:lstStyle/>
+          <a:p>
+            <a:pPr algn="ctr"/>
+            <a:r>
+              <a:rPr sz="1500" b="1" i="0">
+                <a:solidFill>
+                  <a:srgbClr val="FFFFFF"/>
+                </a:solidFill>
+                <a:latin typeface="Calibri"/>
+              </a:rPr>
+              <a:t>gsm8k — the canary</a:t>
+            </a:r>
+          </a:p>
+        </p:txBody>
+      </p:sp>
+      <p:sp>
+        <p:nvSpPr>
+          <p:cNvPr id="6" name="Rounded Rectangle 5"/>
+          <p:cNvSpPr/>
+          <p:nvPr/>
+        </p:nvSpPr>
+        <p:spPr>
+          <a:xfrm>
+            <a:off x="4270248" y="1188720"/>
             <a:ext cx="3703320" cy="566928"/>
           </a:xfrm>
           <a:prstGeom prst="roundRect">
@@ -14394,13 +14449,13 @@
       </p:sp>
       <p:sp>
         <p:nvSpPr>
-          <p:cNvPr id="6" name="Rounded Rectangle 5"/>
+          <p:cNvPr id="7" name="Rounded Rectangle 6"/>
           <p:cNvSpPr/>
           <p:nvPr/>
         </p:nvSpPr>
         <p:spPr>
           <a:xfrm>
-            <a:off x="4251960" y="1847088"/>
+            <a:off x="4270248" y="1847088"/>
             <a:ext cx="3703320" cy="3154680"/>
           </a:xfrm>
           <a:prstGeom prst="roundRect">
@@ -14431,16 +14486,16 @@
           </a:fontRef>
         </p:style>
         <p:txBody>
-          <a:bodyPr rtlCol="0" anchor="t" wrap="square" lIns="114300" rIns="114300" tIns="101600"/>
+          <a:bodyPr rtlCol="0" anchor="t" wrap="square" lIns="127000" rIns="127000" tIns="381000"/>
           <a:lstStyle/>
           <a:p>
             <a:pPr algn="l">
               <a:spcAft>
-                <a:spcPts val="600"/>
+                <a:spcPts val="500"/>
               </a:spcAft>
             </a:pPr>
             <a:r>
-              <a:rPr sz="1050" b="0" i="0">
+              <a:rPr sz="1000" b="0" i="0">
                 <a:solidFill>
                   <a:srgbClr val="1F2A37"/>
                 </a:solidFill>
@@ -14452,11 +14507,11 @@
           <a:p>
             <a:pPr algn="l">
               <a:spcAft>
-                <a:spcPts val="600"/>
+                <a:spcPts val="500"/>
               </a:spcAft>
             </a:pPr>
             <a:r>
-              <a:rPr sz="1050" b="0" i="0">
+              <a:rPr sz="1000" b="0" i="0">
                 <a:solidFill>
                   <a:srgbClr val="1F2A37"/>
                 </a:solidFill>
@@ -14468,27 +14523,27 @@
           <a:p>
             <a:pPr algn="l">
               <a:spcAft>
-                <a:spcPts val="600"/>
+                <a:spcPts val="500"/>
               </a:spcAft>
             </a:pPr>
             <a:r>
-              <a:rPr sz="1050" b="0" i="0">
+              <a:rPr sz="1000" b="0" i="0">
                 <a:solidFill>
                   <a:srgbClr val="1F2A37"/>
                 </a:solidFill>
                 <a:latin typeface="Calibri"/>
               </a:rPr>
-              <a:t>• Domain is `retail` (114 tasks) — the library default, never recorded in artifacts.</a:t>
+              <a:t>• Domain is retail (114 tasks) — the library default, never recorded in artifacts.</a:t>
             </a:r>
           </a:p>
           <a:p>
             <a:pPr algn="l">
               <a:spcAft>
-                <a:spcPts val="600"/>
+                <a:spcPts val="500"/>
               </a:spcAft>
             </a:pPr>
             <a:r>
-              <a:rPr sz="1050" b="0" i="0">
+              <a:rPr sz="1000" b="0" i="0">
                 <a:solidFill>
                   <a:srgbClr val="1F2A37"/>
                 </a:solidFill>
@@ -14500,11 +14555,11 @@
           <a:p>
             <a:pPr algn="l">
               <a:spcAft>
-                <a:spcPts val="600"/>
+                <a:spcPts val="500"/>
               </a:spcAft>
             </a:pPr>
             <a:r>
-              <a:rPr sz="1050" b="0" i="0">
+              <a:rPr sz="1000" b="0" i="0">
                 <a:solidFill>
                   <a:srgbClr val="1F2A37"/>
                 </a:solidFill>
@@ -14516,11 +14571,11 @@
           <a:p>
             <a:pPr algn="l">
               <a:spcAft>
-                <a:spcPts val="600"/>
+                <a:spcPts val="500"/>
               </a:spcAft>
             </a:pPr>
             <a:r>
-              <a:rPr sz="1050" b="0" i="0">
+              <a:rPr sz="1000" b="0" i="0">
                 <a:solidFill>
                   <a:srgbClr val="1F2A37"/>
                 </a:solidFill>
@@ -14533,13 +14588,68 @@
       </p:sp>
       <p:sp>
         <p:nvSpPr>
-          <p:cNvPr id="7" name="Rounded Rectangle 6"/>
+          <p:cNvPr id="8" name="Rounded Rectangle 7"/>
           <p:cNvSpPr/>
           <p:nvPr/>
         </p:nvSpPr>
         <p:spPr>
           <a:xfrm>
-            <a:off x="8092440" y="1188720"/>
+            <a:off x="4270248" y="1188720"/>
+            <a:ext cx="3611880" cy="566928"/>
+          </a:xfrm>
+          <a:prstGeom prst="roundRect">
+            <a:avLst/>
+          </a:prstGeom>
+          <a:solidFill>
+            <a:srgbClr val="8E44AD"/>
+          </a:solidFill>
+          <a:ln w="12700">
+            <a:solidFill>
+              <a:srgbClr val="8E44AD"/>
+            </a:solidFill>
+          </a:ln>
+          <a:effectLst/>
+        </p:spPr>
+        <p:style>
+          <a:lnRef idx="1">
+            <a:schemeClr val="accent1"/>
+          </a:lnRef>
+          <a:fillRef idx="3">
+            <a:schemeClr val="accent1"/>
+          </a:fillRef>
+          <a:effectRef idx="2">
+            <a:schemeClr val="accent1"/>
+          </a:effectRef>
+          <a:fontRef idx="minor">
+            <a:schemeClr val="lt1"/>
+          </a:fontRef>
+        </p:style>
+        <p:txBody>
+          <a:bodyPr rtlCol="0" anchor="ctr" wrap="square" tIns="25400" bIns="25400"/>
+          <a:lstStyle/>
+          <a:p>
+            <a:pPr algn="ctr"/>
+            <a:r>
+              <a:rPr sz="1500" b="1" i="0">
+                <a:solidFill>
+                  <a:srgbClr val="FFFFFF"/>
+                </a:solidFill>
+                <a:latin typeface="Calibri"/>
+              </a:rPr>
+              <a:t>tau2 — the discriminator</a:t>
+            </a:r>
+          </a:p>
+        </p:txBody>
+      </p:sp>
+      <p:sp>
+        <p:nvSpPr>
+          <p:cNvPr id="9" name="Rounded Rectangle 8"/>
+          <p:cNvSpPr/>
+          <p:nvPr/>
+        </p:nvSpPr>
+        <p:spPr>
+          <a:xfrm>
+            <a:off x="8129016" y="1188720"/>
             <a:ext cx="3703320" cy="566928"/>
           </a:xfrm>
           <a:prstGeom prst="roundRect">
@@ -14588,13 +14698,13 @@
       </p:sp>
       <p:sp>
         <p:nvSpPr>
-          <p:cNvPr id="8" name="Rounded Rectangle 7"/>
+          <p:cNvPr id="10" name="Rounded Rectangle 9"/>
           <p:cNvSpPr/>
           <p:nvPr/>
         </p:nvSpPr>
         <p:spPr>
           <a:xfrm>
-            <a:off x="8092440" y="1847088"/>
+            <a:off x="8129016" y="1847088"/>
             <a:ext cx="3703320" cy="3154680"/>
           </a:xfrm>
           <a:prstGeom prst="roundRect">
@@ -14625,16 +14735,16 @@
           </a:fontRef>
         </p:style>
         <p:txBody>
-          <a:bodyPr rtlCol="0" anchor="t" wrap="square" lIns="114300" rIns="114300" tIns="101600"/>
+          <a:bodyPr rtlCol="0" anchor="t" wrap="square" lIns="127000" rIns="127000" tIns="381000"/>
           <a:lstStyle/>
           <a:p>
             <a:pPr algn="l">
               <a:spcAft>
-                <a:spcPts val="600"/>
+                <a:spcPts val="500"/>
               </a:spcAft>
             </a:pPr>
             <a:r>
-              <a:rPr sz="1050" b="0" i="0">
+              <a:rPr sz="1000" b="0" i="0">
                 <a:solidFill>
                   <a:srgbClr val="1F2A37"/>
                 </a:solidFill>
@@ -14646,11 +14756,11 @@
           <a:p>
             <a:pPr algn="l">
               <a:spcAft>
-                <a:spcPts val="600"/>
+                <a:spcPts val="500"/>
               </a:spcAft>
             </a:pPr>
             <a:r>
-              <a:rPr sz="1050" b="0" i="0">
+              <a:rPr sz="1000" b="0" i="0">
                 <a:solidFill>
                   <a:srgbClr val="1F2A37"/>
                 </a:solidFill>
@@ -14662,11 +14772,11 @@
           <a:p>
             <a:pPr algn="l">
               <a:spcAft>
-                <a:spcPts val="600"/>
+                <a:spcPts val="500"/>
               </a:spcAft>
             </a:pPr>
             <a:r>
-              <a:rPr sz="1050" b="0" i="0">
+              <a:rPr sz="1000" b="0" i="0">
                 <a:solidFill>
                   <a:srgbClr val="1F2A37"/>
                 </a:solidFill>
@@ -14678,56 +14788,111 @@
           <a:p>
             <a:pPr algn="l">
               <a:spcAft>
-                <a:spcPts val="600"/>
+                <a:spcPts val="500"/>
               </a:spcAft>
             </a:pPr>
             <a:r>
-              <a:rPr sz="1050" b="0" i="0">
+              <a:rPr sz="1000" b="0" i="0">
                 <a:solidFill>
                   <a:srgbClr val="1F2A37"/>
                 </a:solidFill>
                 <a:latin typeface="Calibri"/>
               </a:rPr>
-              <a:t>• Pass rate 0.0 is the honest result, not a broken platform: runs complete, tokens record, the agent just does not finish the job.</a:t>
+              <a:t>• Pass rate 0.0 is honest, not broken: runs complete and tokens record — the agent just does not finish the job.</a:t>
             </a:r>
           </a:p>
           <a:p>
             <a:pPr algn="l">
               <a:spcAft>
-                <a:spcPts val="600"/>
+                <a:spcPts val="500"/>
               </a:spcAft>
             </a:pPr>
             <a:r>
-              <a:rPr sz="1050" b="0" i="0">
+              <a:rPr sz="1000" b="0" i="0">
                 <a:solidFill>
                   <a:srgbClr val="1F2A37"/>
                 </a:solidFill>
                 <a:latin typeface="Calibri"/>
               </a:rPr>
-              <a:t>• ~94% of tasks call `finish` — the agent believes it is done and the assertions disagree. A generic agent with no verification pass.</a:t>
+              <a:t>• ~94% of tasks call finish: it believes it is done and the assertions disagree. No verification pass.</a:t>
             </a:r>
           </a:p>
           <a:p>
             <a:pPr algn="l">
               <a:spcAft>
-                <a:spcPts val="600"/>
+                <a:spcPts val="500"/>
               </a:spcAft>
             </a:pPr>
             <a:r>
-              <a:rPr sz="1050" b="0" i="0">
+              <a:rPr sz="1000" b="0" i="0">
                 <a:solidFill>
                   <a:srgbClr val="1F2A37"/>
                 </a:solidFill>
                 <a:latin typeface="Calibri"/>
               </a:rPr>
               <a:t>• Its job here is pipeline stress: long contexts, big traces, real timeouts.</a:t>
+            </a:r>
+          </a:p>
+        </p:txBody>
+      </p:sp>
+      <p:sp>
+        <p:nvSpPr>
+          <p:cNvPr id="11" name="Rounded Rectangle 10"/>
+          <p:cNvSpPr/>
+          <p:nvPr/>
+        </p:nvSpPr>
+        <p:spPr>
+          <a:xfrm>
+            <a:off x="8129016" y="1188720"/>
+            <a:ext cx="3611880" cy="566928"/>
+          </a:xfrm>
+          <a:prstGeom prst="roundRect">
+            <a:avLst/>
+          </a:prstGeom>
+          <a:solidFill>
+            <a:srgbClr val="B55A2E"/>
+          </a:solidFill>
+          <a:ln w="12700">
+            <a:solidFill>
+              <a:srgbClr val="B55A2E"/>
+            </a:solidFill>
+          </a:ln>
+          <a:effectLst/>
+        </p:spPr>
+        <p:style>
+          <a:lnRef idx="1">
+            <a:schemeClr val="accent1"/>
+          </a:lnRef>
+          <a:fillRef idx="3">
+            <a:schemeClr val="accent1"/>
+          </a:fillRef>
+          <a:effectRef idx="2">
+            <a:schemeClr val="accent1"/>
+          </a:effectRef>
+          <a:fontRef idx="minor">
+            <a:schemeClr val="lt1"/>
+          </a:fontRef>
+        </p:style>
+        <p:txBody>
+          <a:bodyPr rtlCol="0" anchor="ctr" wrap="square" tIns="25400" bIns="25400"/>
+          <a:lstStyle/>
+          <a:p>
+            <a:pPr algn="ctr"/>
+            <a:r>
+              <a:rPr sz="1500" b="1" i="0">
+                <a:solidFill>
+                  <a:srgbClr val="FFFFFF"/>
+                </a:solidFill>
+                <a:latin typeface="Calibri"/>
+              </a:rPr>
+              <a:t>appworld — the stress test</a:t>
             </a:r>
           </a:p>
         </p:txBody>
       </p:sp>
       <p:graphicFrame>
         <p:nvGraphicFramePr>
-          <p:cNvPr id="9" name="Table 8"/>
+          <p:cNvPr id="12" name="Table 11"/>
           <p:cNvGraphicFramePr>
             <a:graphicFrameLocks noGrp="1"/>
           </p:cNvGraphicFramePr>

--- a/docs/BenchmarkingService.pptx
+++ b/docs/BenchmarkingService.pptx
@@ -3385,7 +3385,7 @@
                 </a:solidFill>
                 <a:latin typeface="Calibri"/>
               </a:rPr>
-              <a:t>Reading the Numbers — Five Things That Mislead</a:t>
+              <a:t>6.3  Reading the Numbers — Five Things That Mislead</a:t>
             </a:r>
           </a:p>
           <a:p>
@@ -3802,7 +3802,7 @@
                 </a:solidFill>
                 <a:latin typeface="Calibri"/>
               </a:rPr>
-              <a:t>What the Service Can &amp; Cannot Enact</a:t>
+              <a:t>7.  What the Service Can &amp; Cannot Enact</a:t>
             </a:r>
           </a:p>
           <a:p>
@@ -5176,7 +5176,7 @@
                 </a:solidFill>
                 <a:latin typeface="Calibri"/>
               </a:rPr>
-              <a:t>a difficulty ladder, what each stresses, and how to read the numbers</a:t>
+              <a:t>6.1 a difficulty ladder · 6.2 what each stresses · 6.3 how to read the numbers</a:t>
             </a:r>
           </a:p>
         </p:txBody>
@@ -5380,7 +5380,7 @@
                 </a:solidFill>
                 <a:latin typeface="Calibri"/>
               </a:rPr>
-              <a:t>Overview &amp; Key Design Decisions</a:t>
+              <a:t>1.  Overview &amp; Key Design Decisions</a:t>
             </a:r>
           </a:p>
         </p:txBody>
@@ -6261,7 +6261,7 @@
                 </a:solidFill>
                 <a:latin typeface="Calibri"/>
               </a:rPr>
-              <a:t>Architecture</a:t>
+              <a:t>2.  Architecture</a:t>
             </a:r>
           </a:p>
           <a:p>
@@ -8627,7 +8627,7 @@
                 </a:solidFill>
                 <a:latin typeface="Calibri"/>
               </a:rPr>
-              <a:t>Architecture with Workload Specific Components</a:t>
+              <a:t>3.  Architecture with Workload Specific Components</a:t>
             </a:r>
           </a:p>
           <a:p>
@@ -11332,7 +11332,7 @@
                 </a:solidFill>
                 <a:latin typeface="Calibri"/>
               </a:rPr>
-              <a:t>The Two-Token Auth Model</a:t>
+              <a:t>4.  The Two-Token Auth Model</a:t>
             </a:r>
           </a:p>
           <a:p>
@@ -11833,7 +11833,7 @@
                 </a:solidFill>
                 <a:latin typeface="Calibri"/>
               </a:rPr>
-              <a:t>Benchmark Catalog &amp; Run Lifecycle</a:t>
+              <a:t>5.  Benchmark Catalog &amp; Run Lifecycle</a:t>
             </a:r>
           </a:p>
         </p:txBody>
@@ -12834,7 +12834,7 @@
                 </a:solidFill>
                 <a:latin typeface="Calibri"/>
               </a:rPr>
-              <a:t>The Three Benchmarks — a Difficulty Ladder</a:t>
+              <a:t>6.1  The Three Benchmarks — a Difficulty Ladder</a:t>
             </a:r>
           </a:p>
           <a:p>
@@ -14127,7 +14127,7 @@
                 </a:solidFill>
                 <a:latin typeface="Calibri"/>
               </a:rPr>
-              <a:t>What Each Benchmark Stresses</a:t>
+              <a:t>6.2  What Each Benchmark Stresses</a:t>
             </a:r>
           </a:p>
           <a:p>

--- a/docs/BenchmarkingService.pptx
+++ b/docs/BenchmarkingService.pptx
@@ -4391,8 +4391,8 @@
         </p:nvSpPr>
         <p:spPr>
           <a:xfrm>
-            <a:off x="685800" y="1298448"/>
-            <a:ext cx="384048" cy="384048"/>
+            <a:off x="685800" y="1472184"/>
+            <a:ext cx="420624" cy="420624"/>
           </a:xfrm>
           <a:prstGeom prst="ellipse">
             <a:avLst/>
@@ -4427,7 +4427,7 @@
           <a:p>
             <a:pPr algn="ctr"/>
             <a:r>
-              <a:rPr sz="1300" b="1" i="0">
+              <a:rPr sz="1400" b="1" i="0">
                 <a:solidFill>
                   <a:srgbClr val="FFFFFF"/>
                 </a:solidFill>
@@ -4446,8 +4446,8 @@
         </p:nvSpPr>
         <p:spPr>
           <a:xfrm>
-            <a:off x="1280160" y="1234440"/>
-            <a:ext cx="10332720" cy="274320"/>
+            <a:off x="1280160" y="1417320"/>
+            <a:ext cx="4526280" cy="292608"/>
           </a:xfrm>
           <a:prstGeom prst="rect">
             <a:avLst/>
@@ -4466,7 +4466,7 @@
               </a:spcAft>
             </a:pPr>
             <a:r>
-              <a:rPr sz="1600" b="1" i="0">
+              <a:rPr sz="1700" b="1" i="0">
                 <a:solidFill>
                   <a:srgbClr val="1B3A5C"/>
                 </a:solidFill>
@@ -4485,8 +4485,8 @@
         </p:nvSpPr>
         <p:spPr>
           <a:xfrm>
-            <a:off x="1280160" y="1508760"/>
-            <a:ext cx="10332720" cy="256032"/>
+            <a:off x="1280160" y="1719072"/>
+            <a:ext cx="4526280" cy="457200"/>
           </a:xfrm>
           <a:prstGeom prst="rect">
             <a:avLst/>
@@ -4505,7 +4505,7 @@
               </a:spcAft>
             </a:pPr>
             <a:r>
-              <a:rPr sz="1200" b="0" i="0">
+              <a:rPr sz="1250" b="0" i="0">
                 <a:solidFill>
                   <a:srgbClr val="3A4654"/>
                 </a:solidFill>
@@ -4524,8 +4524,8 @@
         </p:nvSpPr>
         <p:spPr>
           <a:xfrm>
-            <a:off x="685800" y="1956816"/>
-            <a:ext cx="384048" cy="384048"/>
+            <a:off x="685800" y="2551176"/>
+            <a:ext cx="420624" cy="420624"/>
           </a:xfrm>
           <a:prstGeom prst="ellipse">
             <a:avLst/>
@@ -4560,7 +4560,7 @@
           <a:p>
             <a:pPr algn="ctr"/>
             <a:r>
-              <a:rPr sz="1300" b="1" i="0">
+              <a:rPr sz="1400" b="1" i="0">
                 <a:solidFill>
                   <a:srgbClr val="FFFFFF"/>
                 </a:solidFill>
@@ -4579,8 +4579,8 @@
         </p:nvSpPr>
         <p:spPr>
           <a:xfrm>
-            <a:off x="1280160" y="1892808"/>
-            <a:ext cx="10332720" cy="274320"/>
+            <a:off x="1280160" y="2496312"/>
+            <a:ext cx="4526280" cy="292608"/>
           </a:xfrm>
           <a:prstGeom prst="rect">
             <a:avLst/>
@@ -4599,7 +4599,7 @@
               </a:spcAft>
             </a:pPr>
             <a:r>
-              <a:rPr sz="1600" b="1" i="0">
+              <a:rPr sz="1700" b="1" i="0">
                 <a:solidFill>
                   <a:srgbClr val="1B3A5C"/>
                 </a:solidFill>
@@ -4618,8 +4618,8 @@
         </p:nvSpPr>
         <p:spPr>
           <a:xfrm>
-            <a:off x="1280160" y="2167128"/>
-            <a:ext cx="10332720" cy="256032"/>
+            <a:off x="1280160" y="2798064"/>
+            <a:ext cx="4526280" cy="457200"/>
           </a:xfrm>
           <a:prstGeom prst="rect">
             <a:avLst/>
@@ -4638,7 +4638,7 @@
               </a:spcAft>
             </a:pPr>
             <a:r>
-              <a:rPr sz="1200" b="0" i="0">
+              <a:rPr sz="1250" b="0" i="0">
                 <a:solidFill>
                   <a:srgbClr val="3A4654"/>
                 </a:solidFill>
@@ -4657,8 +4657,8 @@
         </p:nvSpPr>
         <p:spPr>
           <a:xfrm>
-            <a:off x="685800" y="2615184"/>
-            <a:ext cx="384048" cy="384048"/>
+            <a:off x="685800" y="3630168"/>
+            <a:ext cx="420624" cy="420624"/>
           </a:xfrm>
           <a:prstGeom prst="ellipse">
             <a:avLst/>
@@ -4693,7 +4693,7 @@
           <a:p>
             <a:pPr algn="ctr"/>
             <a:r>
-              <a:rPr sz="1300" b="1" i="0">
+              <a:rPr sz="1400" b="1" i="0">
                 <a:solidFill>
                   <a:srgbClr val="FFFFFF"/>
                 </a:solidFill>
@@ -4712,8 +4712,8 @@
         </p:nvSpPr>
         <p:spPr>
           <a:xfrm>
-            <a:off x="1280160" y="2551176"/>
-            <a:ext cx="10332720" cy="274320"/>
+            <a:off x="1280160" y="3575304"/>
+            <a:ext cx="4526280" cy="292608"/>
           </a:xfrm>
           <a:prstGeom prst="rect">
             <a:avLst/>
@@ -4732,7 +4732,7 @@
               </a:spcAft>
             </a:pPr>
             <a:r>
-              <a:rPr sz="1600" b="1" i="0">
+              <a:rPr sz="1700" b="1" i="0">
                 <a:solidFill>
                   <a:srgbClr val="1B3A5C"/>
                 </a:solidFill>
@@ -4751,8 +4751,8 @@
         </p:nvSpPr>
         <p:spPr>
           <a:xfrm>
-            <a:off x="1280160" y="2825496"/>
-            <a:ext cx="10332720" cy="256032"/>
+            <a:off x="1280160" y="3877056"/>
+            <a:ext cx="4526280" cy="457200"/>
           </a:xfrm>
           <a:prstGeom prst="rect">
             <a:avLst/>
@@ -4771,7 +4771,7 @@
               </a:spcAft>
             </a:pPr>
             <a:r>
-              <a:rPr sz="1200" b="0" i="0">
+              <a:rPr sz="1250" b="0" i="0">
                 <a:solidFill>
                   <a:srgbClr val="3A4654"/>
                 </a:solidFill>
@@ -4790,8 +4790,8 @@
         </p:nvSpPr>
         <p:spPr>
           <a:xfrm>
-            <a:off x="685800" y="3273552"/>
-            <a:ext cx="384048" cy="384048"/>
+            <a:off x="685800" y="4709160"/>
+            <a:ext cx="420624" cy="420624"/>
           </a:xfrm>
           <a:prstGeom prst="ellipse">
             <a:avLst/>
@@ -4826,7 +4826,7 @@
           <a:p>
             <a:pPr algn="ctr"/>
             <a:r>
-              <a:rPr sz="1300" b="1" i="0">
+              <a:rPr sz="1400" b="1" i="0">
                 <a:solidFill>
                   <a:srgbClr val="FFFFFF"/>
                 </a:solidFill>
@@ -4845,8 +4845,8 @@
         </p:nvSpPr>
         <p:spPr>
           <a:xfrm>
-            <a:off x="1280160" y="3209544"/>
-            <a:ext cx="10332720" cy="274320"/>
+            <a:off x="1280160" y="4654296"/>
+            <a:ext cx="4526280" cy="292608"/>
           </a:xfrm>
           <a:prstGeom prst="rect">
             <a:avLst/>
@@ -4865,7 +4865,7 @@
               </a:spcAft>
             </a:pPr>
             <a:r>
-              <a:rPr sz="1600" b="1" i="0">
+              <a:rPr sz="1700" b="1" i="0">
                 <a:solidFill>
                   <a:srgbClr val="1B3A5C"/>
                 </a:solidFill>
@@ -4884,8 +4884,8 @@
         </p:nvSpPr>
         <p:spPr>
           <a:xfrm>
-            <a:off x="1280160" y="3483864"/>
-            <a:ext cx="10332720" cy="256032"/>
+            <a:off x="1280160" y="4956048"/>
+            <a:ext cx="4526280" cy="457200"/>
           </a:xfrm>
           <a:prstGeom prst="rect">
             <a:avLst/>
@@ -4904,7 +4904,7 @@
               </a:spcAft>
             </a:pPr>
             <a:r>
-              <a:rPr sz="1200" b="0" i="0">
+              <a:rPr sz="1250" b="0" i="0">
                 <a:solidFill>
                   <a:srgbClr val="3A4654"/>
                 </a:solidFill>
@@ -4923,8 +4923,8 @@
         </p:nvSpPr>
         <p:spPr>
           <a:xfrm>
-            <a:off x="685800" y="3931920"/>
-            <a:ext cx="384048" cy="384048"/>
+            <a:off x="6492240" y="1472184"/>
+            <a:ext cx="420624" cy="420624"/>
           </a:xfrm>
           <a:prstGeom prst="ellipse">
             <a:avLst/>
@@ -4959,7 +4959,7 @@
           <a:p>
             <a:pPr algn="ctr"/>
             <a:r>
-              <a:rPr sz="1300" b="1" i="0">
+              <a:rPr sz="1400" b="1" i="0">
                 <a:solidFill>
                   <a:srgbClr val="FFFFFF"/>
                 </a:solidFill>
@@ -4978,8 +4978,8 @@
         </p:nvSpPr>
         <p:spPr>
           <a:xfrm>
-            <a:off x="1280160" y="3867912"/>
-            <a:ext cx="10332720" cy="274320"/>
+            <a:off x="7086600" y="1417320"/>
+            <a:ext cx="4663440" cy="292608"/>
           </a:xfrm>
           <a:prstGeom prst="rect">
             <a:avLst/>
@@ -4998,7 +4998,7 @@
               </a:spcAft>
             </a:pPr>
             <a:r>
-              <a:rPr sz="1600" b="1" i="0">
+              <a:rPr sz="1700" b="1" i="0">
                 <a:solidFill>
                   <a:srgbClr val="1B3A5C"/>
                 </a:solidFill>
@@ -5017,8 +5017,8 @@
         </p:nvSpPr>
         <p:spPr>
           <a:xfrm>
-            <a:off x="1280160" y="4142232"/>
-            <a:ext cx="10332720" cy="256032"/>
+            <a:off x="7086600" y="1719072"/>
+            <a:ext cx="4663440" cy="457200"/>
           </a:xfrm>
           <a:prstGeom prst="rect">
             <a:avLst/>
@@ -5037,7 +5037,7 @@
               </a:spcAft>
             </a:pPr>
             <a:r>
-              <a:rPr sz="1200" b="0" i="0">
+              <a:rPr sz="1250" b="0" i="0">
                 <a:solidFill>
                   <a:srgbClr val="3A4654"/>
                 </a:solidFill>
@@ -5056,8 +5056,8 @@
         </p:nvSpPr>
         <p:spPr>
           <a:xfrm>
-            <a:off x="685800" y="4590288"/>
-            <a:ext cx="384048" cy="384048"/>
+            <a:off x="6492240" y="2551176"/>
+            <a:ext cx="420624" cy="420624"/>
           </a:xfrm>
           <a:prstGeom prst="ellipse">
             <a:avLst/>
@@ -5092,7 +5092,7 @@
           <a:p>
             <a:pPr algn="ctr"/>
             <a:r>
-              <a:rPr sz="1300" b="1" i="0">
+              <a:rPr sz="1400" b="1" i="0">
                 <a:solidFill>
                   <a:srgbClr val="FFFFFF"/>
                 </a:solidFill>
@@ -5111,8 +5111,8 @@
         </p:nvSpPr>
         <p:spPr>
           <a:xfrm>
-            <a:off x="1280160" y="4526280"/>
-            <a:ext cx="10332720" cy="274320"/>
+            <a:off x="7086600" y="2496312"/>
+            <a:ext cx="4663440" cy="292608"/>
           </a:xfrm>
           <a:prstGeom prst="rect">
             <a:avLst/>
@@ -5131,7 +5131,7 @@
               </a:spcAft>
             </a:pPr>
             <a:r>
-              <a:rPr sz="1600" b="1" i="0">
+              <a:rPr sz="1700" b="1" i="0">
                 <a:solidFill>
                   <a:srgbClr val="1B3A5C"/>
                 </a:solidFill>
@@ -5150,8 +5150,8 @@
         </p:nvSpPr>
         <p:spPr>
           <a:xfrm>
-            <a:off x="1280160" y="4800600"/>
-            <a:ext cx="10332720" cy="256032"/>
+            <a:off x="7086600" y="2798064"/>
+            <a:ext cx="4663440" cy="457200"/>
           </a:xfrm>
           <a:prstGeom prst="rect">
             <a:avLst/>
@@ -5170,13 +5170,13 @@
               </a:spcAft>
             </a:pPr>
             <a:r>
-              <a:rPr sz="1200" b="0" i="0">
+              <a:rPr sz="1250" b="0" i="0">
                 <a:solidFill>
                   <a:srgbClr val="3A4654"/>
                 </a:solidFill>
                 <a:latin typeface="Calibri"/>
               </a:rPr>
-              <a:t>6.1 a difficulty ladder · 6.2 what each stresses · 6.3 how to read the numbers</a:t>
+              <a:t>6.1 the difficulty ladder · 6.2 what each stresses · 6.3 the traps</a:t>
             </a:r>
           </a:p>
         </p:txBody>
@@ -5189,8 +5189,8 @@
         </p:nvSpPr>
         <p:spPr>
           <a:xfrm>
-            <a:off x="685800" y="5248656"/>
-            <a:ext cx="384048" cy="384048"/>
+            <a:off x="6492240" y="3630168"/>
+            <a:ext cx="420624" cy="420624"/>
           </a:xfrm>
           <a:prstGeom prst="ellipse">
             <a:avLst/>
@@ -5225,7 +5225,7 @@
           <a:p>
             <a:pPr algn="ctr"/>
             <a:r>
-              <a:rPr sz="1300" b="1" i="0">
+              <a:rPr sz="1400" b="1" i="0">
                 <a:solidFill>
                   <a:srgbClr val="FFFFFF"/>
                 </a:solidFill>
@@ -5244,8 +5244,8 @@
         </p:nvSpPr>
         <p:spPr>
           <a:xfrm>
-            <a:off x="1280160" y="5184648"/>
-            <a:ext cx="10332720" cy="274320"/>
+            <a:off x="7086600" y="3575304"/>
+            <a:ext cx="4663440" cy="292608"/>
           </a:xfrm>
           <a:prstGeom prst="rect">
             <a:avLst/>
@@ -5264,7 +5264,7 @@
               </a:spcAft>
             </a:pPr>
             <a:r>
-              <a:rPr sz="1600" b="1" i="0">
+              <a:rPr sz="1700" b="1" i="0">
                 <a:solidFill>
                   <a:srgbClr val="1B3A5C"/>
                 </a:solidFill>
@@ -5283,8 +5283,8 @@
         </p:nvSpPr>
         <p:spPr>
           <a:xfrm>
-            <a:off x="1280160" y="5458968"/>
-            <a:ext cx="10332720" cy="256032"/>
+            <a:off x="7086600" y="3877056"/>
+            <a:ext cx="4663440" cy="457200"/>
           </a:xfrm>
           <a:prstGeom prst="rect">
             <a:avLst/>
@@ -5303,7 +5303,7 @@
               </a:spcAft>
             </a:pPr>
             <a:r>
-              <a:rPr sz="1200" b="0" i="0">
+              <a:rPr sz="1250" b="0" i="0">
                 <a:solidFill>
                   <a:srgbClr val="3A4654"/>
                 </a:solidFill>
@@ -5314,6 +5314,42 @@
           </a:p>
         </p:txBody>
       </p:sp>
+      <p:cxnSp>
+        <p:nvCxnSpPr>
+          <p:cNvPr id="24" name="Connector 23"/>
+          <p:cNvCxnSpPr/>
+          <p:nvPr/>
+        </p:nvCxnSpPr>
+        <p:spPr>
+          <a:xfrm>
+            <a:off x="6080760" y="1371600"/>
+            <a:ext cx="0" cy="3886200"/>
+          </a:xfrm>
+          <a:prstGeom prst="line">
+            <a:avLst/>
+          </a:prstGeom>
+          <a:ln w="12700">
+            <a:solidFill>
+              <a:srgbClr val="C7CED6"/>
+            </a:solidFill>
+          </a:ln>
+          <a:effectLst/>
+        </p:spPr>
+        <p:style>
+          <a:lnRef idx="2">
+            <a:schemeClr val="accent1"/>
+          </a:lnRef>
+          <a:fillRef idx="0">
+            <a:schemeClr val="accent1"/>
+          </a:fillRef>
+          <a:effectRef idx="1">
+            <a:schemeClr val="accent1"/>
+          </a:effectRef>
+          <a:fontRef idx="minor">
+            <a:schemeClr val="tx1"/>
+          </a:fontRef>
+        </p:style>
+      </p:cxnSp>
     </p:spTree>
   </p:cSld>
   <p:clrMapOvr>

--- a/docs/BenchmarkingService.pptx
+++ b/docs/BenchmarkingService.pptx
@@ -16,6 +16,10 @@
     <p:sldId id="264" r:id="rId15"/>
     <p:sldId id="265" r:id="rId16"/>
     <p:sldId id="266" r:id="rId17"/>
+    <p:sldId id="267" r:id="rId18"/>
+    <p:sldId id="268" r:id="rId19"/>
+    <p:sldId id="269" r:id="rId20"/>
+    <p:sldId id="270" r:id="rId21"/>
   </p:sldIdLst>
   <p:sldSz cx="12192000" cy="6858000" type="screen4x3"/>
   <p:notesSz cx="6858000" cy="9144000"/>
@@ -3802,7 +3806,7293 @@
                 </a:solidFill>
                 <a:latin typeface="Calibri"/>
               </a:rPr>
-              <a:t>7.  What the Service Can &amp; Cannot Enact</a:t>
+              <a:t>7.1  The Canonical 12-Run Matrix</a:t>
+            </a:r>
+          </a:p>
+          <a:p>
+            <a:r>
+              <a:rPr sz="1400" b="0" i="0">
+                <a:solidFill>
+                  <a:srgbClr val="C9D9EC"/>
+                </a:solidFill>
+                <a:latin typeface="Calibri"/>
+              </a:rPr>
+              <a:t>One fixed set of 12 request bodies — the same on every platform, every version</a:t>
+            </a:r>
+          </a:p>
+        </p:txBody>
+      </p:sp>
+      <p:graphicFrame>
+        <p:nvGraphicFramePr>
+          <p:cNvPr id="3" name="Table 2"/>
+          <p:cNvGraphicFramePr>
+            <a:graphicFrameLocks noGrp="1"/>
+          </p:cNvGraphicFramePr>
+          <p:nvPr/>
+        </p:nvGraphicFramePr>
+        <p:xfrm>
+          <a:off x="411480" y="1188720"/>
+          <a:ext cx="11338560" cy="3611880"/>
+        </p:xfrm>
+        <a:graphic>
+          <a:graphicData uri="http://schemas.openxmlformats.org/drawingml/2006/table">
+            <a:tbl>
+              <a:tblPr firstRow="1">
+                <a:tableStyleId>{5C22544A-7EE6-4342-B048-85BDC9FD1C3A}</a:tableStyleId>
+              </a:tblPr>
+              <a:tblGrid>
+                <a:gridCol w="640080"/>
+                <a:gridCol w="1554480"/>
+                <a:gridCol w="914400"/>
+                <a:gridCol w="1097280"/>
+                <a:gridCol w="7132320"/>
+              </a:tblGrid>
+              <a:tr h="277836">
+                <a:tc>
+                  <a:txBody>
+                    <a:bodyPr/>
+                    <a:lstStyle/>
+                    <a:p>
+                      <a:pPr algn="l"/>
+                      <a:r>
+                        <a:rPr sz="1050" b="1" i="0">
+                          <a:solidFill>
+                            <a:srgbClr val="FFFFFF"/>
+                          </a:solidFill>
+                          <a:latin typeface="Calibri"/>
+                        </a:rPr>
+                        <a:t>#</a:t>
+                      </a:r>
+                    </a:p>
+                  </a:txBody>
+                  <a:tcPr marL="63500" marR="63500" marT="12700" marB="12700" anchor="ctr">
+                    <a:solidFill>
+                      <a:srgbClr val="1B3A5C"/>
+                    </a:solidFill>
+                  </a:tcPr>
+                </a:tc>
+                <a:tc>
+                  <a:txBody>
+                    <a:bodyPr/>
+                    <a:lstStyle/>
+                    <a:p>
+                      <a:pPr algn="ctr"/>
+                      <a:r>
+                        <a:rPr sz="1050" b="1" i="0">
+                          <a:solidFill>
+                            <a:srgbClr val="FFFFFF"/>
+                          </a:solidFill>
+                          <a:latin typeface="Calibri"/>
+                        </a:rPr>
+                        <a:t>benchmark</a:t>
+                      </a:r>
+                    </a:p>
+                  </a:txBody>
+                  <a:tcPr marL="63500" marR="63500" marT="12700" marB="12700" anchor="ctr">
+                    <a:solidFill>
+                      <a:srgbClr val="1B3A5C"/>
+                    </a:solidFill>
+                  </a:tcPr>
+                </a:tc>
+                <a:tc>
+                  <a:txBody>
+                    <a:bodyPr/>
+                    <a:lstStyle/>
+                    <a:p>
+                      <a:pPr algn="ctr"/>
+                      <a:r>
+                        <a:rPr sz="1050" b="1" i="0">
+                          <a:solidFill>
+                            <a:srgbClr val="FFFFFF"/>
+                          </a:solidFill>
+                          <a:latin typeface="Calibri"/>
+                        </a:rPr>
+                        <a:t>tasks</a:t>
+                      </a:r>
+                    </a:p>
+                  </a:txBody>
+                  <a:tcPr marL="63500" marR="63500" marT="12700" marB="12700" anchor="ctr">
+                    <a:solidFill>
+                      <a:srgbClr val="1B3A5C"/>
+                    </a:solidFill>
+                  </a:tcPr>
+                </a:tc>
+                <a:tc>
+                  <a:txBody>
+                    <a:bodyPr/>
+                    <a:lstStyle/>
+                    <a:p>
+                      <a:pPr algn="ctr"/>
+                      <a:r>
+                        <a:rPr sz="1050" b="1" i="0">
+                          <a:solidFill>
+                            <a:srgbClr val="FFFFFF"/>
+                          </a:solidFill>
+                          <a:latin typeface="Calibri"/>
+                        </a:rPr>
+                        <a:t>parallel</a:t>
+                      </a:r>
+                    </a:p>
+                  </a:txBody>
+                  <a:tcPr marL="63500" marR="63500" marT="12700" marB="12700" anchor="ctr">
+                    <a:solidFill>
+                      <a:srgbClr val="1B3A5C"/>
+                    </a:solidFill>
+                  </a:tcPr>
+                </a:tc>
+                <a:tc>
+                  <a:txBody>
+                    <a:bodyPr/>
+                    <a:lstStyle/>
+                    <a:p>
+                      <a:pPr algn="ctr"/>
+                      <a:r>
+                        <a:rPr sz="1050" b="1" i="0">
+                          <a:solidFill>
+                            <a:srgbClr val="FFFFFF"/>
+                          </a:solidFill>
+                          <a:latin typeface="Calibri"/>
+                        </a:rPr>
+                        <a:t>what it varies</a:t>
+                      </a:r>
+                    </a:p>
+                  </a:txBody>
+                  <a:tcPr marL="63500" marR="63500" marT="12700" marB="12700" anchor="ctr">
+                    <a:solidFill>
+                      <a:srgbClr val="1B3A5C"/>
+                    </a:solidFill>
+                  </a:tcPr>
+                </a:tc>
+              </a:tr>
+              <a:tr h="277836">
+                <a:tc>
+                  <a:txBody>
+                    <a:bodyPr/>
+                    <a:lstStyle/>
+                    <a:p>
+                      <a:pPr algn="l"/>
+                      <a:r>
+                        <a:rPr sz="1050" b="0" i="0">
+                          <a:solidFill>
+                            <a:srgbClr val="1F2A37"/>
+                          </a:solidFill>
+                          <a:latin typeface="Calibri"/>
+                        </a:rPr>
+                        <a:t>1</a:t>
+                      </a:r>
+                    </a:p>
+                  </a:txBody>
+                  <a:tcPr marL="63500" marR="63500" marT="12700" marB="12700" anchor="ctr">
+                    <a:solidFill>
+                      <a:srgbClr val="FFFFFF"/>
+                    </a:solidFill>
+                  </a:tcPr>
+                </a:tc>
+                <a:tc>
+                  <a:txBody>
+                    <a:bodyPr/>
+                    <a:lstStyle/>
+                    <a:p>
+                      <a:pPr algn="ctr"/>
+                      <a:r>
+                        <a:rPr sz="1050" b="0" i="0">
+                          <a:solidFill>
+                            <a:srgbClr val="1F2A37"/>
+                          </a:solidFill>
+                          <a:latin typeface="Calibri"/>
+                        </a:rPr>
+                        <a:t>gsm8k</a:t>
+                      </a:r>
+                    </a:p>
+                  </a:txBody>
+                  <a:tcPr marL="63500" marR="63500" marT="12700" marB="12700" anchor="ctr">
+                    <a:solidFill>
+                      <a:srgbClr val="FFFFFF"/>
+                    </a:solidFill>
+                  </a:tcPr>
+                </a:tc>
+                <a:tc>
+                  <a:txBody>
+                    <a:bodyPr/>
+                    <a:lstStyle/>
+                    <a:p>
+                      <a:pPr algn="ctr"/>
+                      <a:r>
+                        <a:rPr sz="1050" b="0" i="0">
+                          <a:solidFill>
+                            <a:srgbClr val="1F2A37"/>
+                          </a:solidFill>
+                          <a:latin typeface="Calibri"/>
+                        </a:rPr>
+                        <a:t>1</a:t>
+                      </a:r>
+                    </a:p>
+                  </a:txBody>
+                  <a:tcPr marL="63500" marR="63500" marT="12700" marB="12700" anchor="ctr">
+                    <a:solidFill>
+                      <a:srgbClr val="FFFFFF"/>
+                    </a:solidFill>
+                  </a:tcPr>
+                </a:tc>
+                <a:tc>
+                  <a:txBody>
+                    <a:bodyPr/>
+                    <a:lstStyle/>
+                    <a:p>
+                      <a:pPr algn="ctr"/>
+                      <a:r>
+                        <a:rPr sz="1050" b="0" i="0">
+                          <a:solidFill>
+                            <a:srgbClr val="1F2A37"/>
+                          </a:solidFill>
+                          <a:latin typeface="Calibri"/>
+                        </a:rPr>
+                        <a:t>1</a:t>
+                      </a:r>
+                    </a:p>
+                  </a:txBody>
+                  <a:tcPr marL="63500" marR="63500" marT="12700" marB="12700" anchor="ctr">
+                    <a:solidFill>
+                      <a:srgbClr val="FFFFFF"/>
+                    </a:solidFill>
+                  </a:tcPr>
+                </a:tc>
+                <a:tc>
+                  <a:txBody>
+                    <a:bodyPr/>
+                    <a:lstStyle/>
+                    <a:p>
+                      <a:pPr algn="ctr"/>
+                      <a:r>
+                        <a:rPr sz="1050" b="0" i="0">
+                          <a:solidFill>
+                            <a:srgbClr val="1F2A37"/>
+                          </a:solidFill>
+                          <a:latin typeface="Calibri"/>
+                        </a:rPr>
+                        <a:t>baseline — the smoke test</a:t>
+                      </a:r>
+                    </a:p>
+                  </a:txBody>
+                  <a:tcPr marL="63500" marR="63500" marT="12700" marB="12700" anchor="ctr">
+                    <a:solidFill>
+                      <a:srgbClr val="FFFFFF"/>
+                    </a:solidFill>
+                  </a:tcPr>
+                </a:tc>
+              </a:tr>
+              <a:tr h="277836">
+                <a:tc>
+                  <a:txBody>
+                    <a:bodyPr/>
+                    <a:lstStyle/>
+                    <a:p>
+                      <a:pPr algn="l"/>
+                      <a:r>
+                        <a:rPr sz="1050" b="0" i="0">
+                          <a:solidFill>
+                            <a:srgbClr val="1F2A37"/>
+                          </a:solidFill>
+                          <a:latin typeface="Calibri"/>
+                        </a:rPr>
+                        <a:t>2</a:t>
+                      </a:r>
+                    </a:p>
+                  </a:txBody>
+                  <a:tcPr marL="63500" marR="63500" marT="12700" marB="12700" anchor="ctr">
+                    <a:solidFill>
+                      <a:srgbClr val="F4F6F8"/>
+                    </a:solidFill>
+                  </a:tcPr>
+                </a:tc>
+                <a:tc>
+                  <a:txBody>
+                    <a:bodyPr/>
+                    <a:lstStyle/>
+                    <a:p>
+                      <a:pPr algn="ctr"/>
+                      <a:r>
+                        <a:rPr sz="1050" b="0" i="0">
+                          <a:solidFill>
+                            <a:srgbClr val="1F2A37"/>
+                          </a:solidFill>
+                          <a:latin typeface="Calibri"/>
+                        </a:rPr>
+                        <a:t>gsm8k</a:t>
+                      </a:r>
+                    </a:p>
+                  </a:txBody>
+                  <a:tcPr marL="63500" marR="63500" marT="12700" marB="12700" anchor="ctr">
+                    <a:solidFill>
+                      <a:srgbClr val="F4F6F8"/>
+                    </a:solidFill>
+                  </a:tcPr>
+                </a:tc>
+                <a:tc>
+                  <a:txBody>
+                    <a:bodyPr/>
+                    <a:lstStyle/>
+                    <a:p>
+                      <a:pPr algn="ctr"/>
+                      <a:r>
+                        <a:rPr sz="1050" b="0" i="0">
+                          <a:solidFill>
+                            <a:srgbClr val="1F2A37"/>
+                          </a:solidFill>
+                          <a:latin typeface="Calibri"/>
+                        </a:rPr>
+                        <a:t>10</a:t>
+                      </a:r>
+                    </a:p>
+                  </a:txBody>
+                  <a:tcPr marL="63500" marR="63500" marT="12700" marB="12700" anchor="ctr">
+                    <a:solidFill>
+                      <a:srgbClr val="F4F6F8"/>
+                    </a:solidFill>
+                  </a:tcPr>
+                </a:tc>
+                <a:tc>
+                  <a:txBody>
+                    <a:bodyPr/>
+                    <a:lstStyle/>
+                    <a:p>
+                      <a:pPr algn="ctr"/>
+                      <a:r>
+                        <a:rPr sz="1050" b="0" i="0">
+                          <a:solidFill>
+                            <a:srgbClr val="1F2A37"/>
+                          </a:solidFill>
+                          <a:latin typeface="Calibri"/>
+                        </a:rPr>
+                        <a:t>1</a:t>
+                      </a:r>
+                    </a:p>
+                  </a:txBody>
+                  <a:tcPr marL="63500" marR="63500" marT="12700" marB="12700" anchor="ctr">
+                    <a:solidFill>
+                      <a:srgbClr val="F4F6F8"/>
+                    </a:solidFill>
+                  </a:tcPr>
+                </a:tc>
+                <a:tc>
+                  <a:txBody>
+                    <a:bodyPr/>
+                    <a:lstStyle/>
+                    <a:p>
+                      <a:pPr algn="ctr"/>
+                      <a:r>
+                        <a:rPr sz="1050" b="0" i="0">
+                          <a:solidFill>
+                            <a:srgbClr val="1F2A37"/>
+                          </a:solidFill>
+                          <a:latin typeface="Calibri"/>
+                        </a:rPr>
+                        <a:t>volume, still serial</a:t>
+                      </a:r>
+                    </a:p>
+                  </a:txBody>
+                  <a:tcPr marL="63500" marR="63500" marT="12700" marB="12700" anchor="ctr">
+                    <a:solidFill>
+                      <a:srgbClr val="F4F6F8"/>
+                    </a:solidFill>
+                  </a:tcPr>
+                </a:tc>
+              </a:tr>
+              <a:tr h="277836">
+                <a:tc>
+                  <a:txBody>
+                    <a:bodyPr/>
+                    <a:lstStyle/>
+                    <a:p>
+                      <a:pPr algn="l"/>
+                      <a:r>
+                        <a:rPr sz="1050" b="0" i="0">
+                          <a:solidFill>
+                            <a:srgbClr val="1F2A37"/>
+                          </a:solidFill>
+                          <a:latin typeface="Calibri"/>
+                        </a:rPr>
+                        <a:t>3</a:t>
+                      </a:r>
+                    </a:p>
+                  </a:txBody>
+                  <a:tcPr marL="63500" marR="63500" marT="12700" marB="12700" anchor="ctr">
+                    <a:solidFill>
+                      <a:srgbClr val="FFFFFF"/>
+                    </a:solidFill>
+                  </a:tcPr>
+                </a:tc>
+                <a:tc>
+                  <a:txBody>
+                    <a:bodyPr/>
+                    <a:lstStyle/>
+                    <a:p>
+                      <a:pPr algn="ctr"/>
+                      <a:r>
+                        <a:rPr sz="1050" b="0" i="0">
+                          <a:solidFill>
+                            <a:srgbClr val="1F2A37"/>
+                          </a:solidFill>
+                          <a:latin typeface="Calibri"/>
+                        </a:rPr>
+                        <a:t>gsm8k</a:t>
+                      </a:r>
+                    </a:p>
+                  </a:txBody>
+                  <a:tcPr marL="63500" marR="63500" marT="12700" marB="12700" anchor="ctr">
+                    <a:solidFill>
+                      <a:srgbClr val="FFFFFF"/>
+                    </a:solidFill>
+                  </a:tcPr>
+                </a:tc>
+                <a:tc>
+                  <a:txBody>
+                    <a:bodyPr/>
+                    <a:lstStyle/>
+                    <a:p>
+                      <a:pPr algn="ctr"/>
+                      <a:r>
+                        <a:rPr sz="1050" b="0" i="0">
+                          <a:solidFill>
+                            <a:srgbClr val="1F2A37"/>
+                          </a:solidFill>
+                          <a:latin typeface="Calibri"/>
+                        </a:rPr>
+                        <a:t>50</a:t>
+                      </a:r>
+                    </a:p>
+                  </a:txBody>
+                  <a:tcPr marL="63500" marR="63500" marT="12700" marB="12700" anchor="ctr">
+                    <a:solidFill>
+                      <a:srgbClr val="FFFFFF"/>
+                    </a:solidFill>
+                  </a:tcPr>
+                </a:tc>
+                <a:tc>
+                  <a:txBody>
+                    <a:bodyPr/>
+                    <a:lstStyle/>
+                    <a:p>
+                      <a:pPr algn="ctr"/>
+                      <a:r>
+                        <a:rPr sz="1050" b="0" i="0">
+                          <a:solidFill>
+                            <a:srgbClr val="1F2A37"/>
+                          </a:solidFill>
+                          <a:latin typeface="Calibri"/>
+                        </a:rPr>
+                        <a:t>4</a:t>
+                      </a:r>
+                    </a:p>
+                  </a:txBody>
+                  <a:tcPr marL="63500" marR="63500" marT="12700" marB="12700" anchor="ctr">
+                    <a:solidFill>
+                      <a:srgbClr val="FFFFFF"/>
+                    </a:solidFill>
+                  </a:tcPr>
+                </a:tc>
+                <a:tc>
+                  <a:txBody>
+                    <a:bodyPr/>
+                    <a:lstStyle/>
+                    <a:p>
+                      <a:pPr algn="ctr"/>
+                      <a:r>
+                        <a:rPr sz="1050" b="0" i="0">
+                          <a:solidFill>
+                            <a:srgbClr val="1F2A37"/>
+                          </a:solidFill>
+                          <a:latin typeface="Calibri"/>
+                        </a:rPr>
+                        <a:t>volume + concurrency</a:t>
+                      </a:r>
+                    </a:p>
+                  </a:txBody>
+                  <a:tcPr marL="63500" marR="63500" marT="12700" marB="12700" anchor="ctr">
+                    <a:solidFill>
+                      <a:srgbClr val="FFFFFF"/>
+                    </a:solidFill>
+                  </a:tcPr>
+                </a:tc>
+              </a:tr>
+              <a:tr h="277836">
+                <a:tc>
+                  <a:txBody>
+                    <a:bodyPr/>
+                    <a:lstStyle/>
+                    <a:p>
+                      <a:pPr algn="l"/>
+                      <a:r>
+                        <a:rPr sz="1050" b="0" i="0">
+                          <a:solidFill>
+                            <a:srgbClr val="1F2A37"/>
+                          </a:solidFill>
+                          <a:latin typeface="Calibri"/>
+                        </a:rPr>
+                        <a:t>4</a:t>
+                      </a:r>
+                    </a:p>
+                  </a:txBody>
+                  <a:tcPr marL="63500" marR="63500" marT="12700" marB="12700" anchor="ctr">
+                    <a:solidFill>
+                      <a:srgbClr val="F4F6F8"/>
+                    </a:solidFill>
+                  </a:tcPr>
+                </a:tc>
+                <a:tc>
+                  <a:txBody>
+                    <a:bodyPr/>
+                    <a:lstStyle/>
+                    <a:p>
+                      <a:pPr algn="ctr"/>
+                      <a:r>
+                        <a:rPr sz="1050" b="0" i="0">
+                          <a:solidFill>
+                            <a:srgbClr val="1F2A37"/>
+                          </a:solidFill>
+                          <a:latin typeface="Calibri"/>
+                        </a:rPr>
+                        <a:t>gsm8k</a:t>
+                      </a:r>
+                    </a:p>
+                  </a:txBody>
+                  <a:tcPr marL="63500" marR="63500" marT="12700" marB="12700" anchor="ctr">
+                    <a:solidFill>
+                      <a:srgbClr val="F4F6F8"/>
+                    </a:solidFill>
+                  </a:tcPr>
+                </a:tc>
+                <a:tc>
+                  <a:txBody>
+                    <a:bodyPr/>
+                    <a:lstStyle/>
+                    <a:p>
+                      <a:pPr algn="ctr"/>
+                      <a:r>
+                        <a:rPr sz="1050" b="0" i="0">
+                          <a:solidFill>
+                            <a:srgbClr val="1F2A37"/>
+                          </a:solidFill>
+                          <a:latin typeface="Calibri"/>
+                        </a:rPr>
+                        <a:t>5</a:t>
+                      </a:r>
+                    </a:p>
+                  </a:txBody>
+                  <a:tcPr marL="63500" marR="63500" marT="12700" marB="12700" anchor="ctr">
+                    <a:solidFill>
+                      <a:srgbClr val="F4F6F8"/>
+                    </a:solidFill>
+                  </a:tcPr>
+                </a:tc>
+                <a:tc>
+                  <a:txBody>
+                    <a:bodyPr/>
+                    <a:lstStyle/>
+                    <a:p>
+                      <a:pPr algn="ctr"/>
+                      <a:r>
+                        <a:rPr sz="1050" b="0" i="0">
+                          <a:solidFill>
+                            <a:srgbClr val="1F2A37"/>
+                          </a:solidFill>
+                          <a:latin typeface="Calibri"/>
+                        </a:rPr>
+                        <a:t>4</a:t>
+                      </a:r>
+                    </a:p>
+                  </a:txBody>
+                  <a:tcPr marL="63500" marR="63500" marT="12700" marB="12700" anchor="ctr">
+                    <a:solidFill>
+                      <a:srgbClr val="F4F6F8"/>
+                    </a:solidFill>
+                  </a:tcPr>
+                </a:tc>
+                <a:tc>
+                  <a:txBody>
+                    <a:bodyPr/>
+                    <a:lstStyle/>
+                    <a:p>
+                      <a:pPr algn="ctr"/>
+                      <a:r>
+                        <a:rPr sz="1050" b="0" i="0">
+                          <a:solidFill>
+                            <a:srgbClr val="1F2A37"/>
+                          </a:solidFill>
+                          <a:latin typeface="Calibri"/>
+                        </a:rPr>
+                        <a:t>model swap → Azure/gpt-4.1</a:t>
+                      </a:r>
+                    </a:p>
+                  </a:txBody>
+                  <a:tcPr marL="63500" marR="63500" marT="12700" marB="12700" anchor="ctr">
+                    <a:solidFill>
+                      <a:srgbClr val="F4F6F8"/>
+                    </a:solidFill>
+                  </a:tcPr>
+                </a:tc>
+              </a:tr>
+              <a:tr h="277836">
+                <a:tc>
+                  <a:txBody>
+                    <a:bodyPr/>
+                    <a:lstStyle/>
+                    <a:p>
+                      <a:pPr algn="l"/>
+                      <a:r>
+                        <a:rPr sz="1050" b="0" i="0">
+                          <a:solidFill>
+                            <a:srgbClr val="1F2A37"/>
+                          </a:solidFill>
+                          <a:latin typeface="Calibri"/>
+                        </a:rPr>
+                        <a:t>5</a:t>
+                      </a:r>
+                    </a:p>
+                  </a:txBody>
+                  <a:tcPr marL="63500" marR="63500" marT="12700" marB="12700" anchor="ctr">
+                    <a:solidFill>
+                      <a:srgbClr val="FFFFFF"/>
+                    </a:solidFill>
+                  </a:tcPr>
+                </a:tc>
+                <a:tc>
+                  <a:txBody>
+                    <a:bodyPr/>
+                    <a:lstStyle/>
+                    <a:p>
+                      <a:pPr algn="ctr"/>
+                      <a:r>
+                        <a:rPr sz="1050" b="0" i="0">
+                          <a:solidFill>
+                            <a:srgbClr val="1F2A37"/>
+                          </a:solidFill>
+                          <a:latin typeface="Calibri"/>
+                        </a:rPr>
+                        <a:t>gsm8k</a:t>
+                      </a:r>
+                    </a:p>
+                  </a:txBody>
+                  <a:tcPr marL="63500" marR="63500" marT="12700" marB="12700" anchor="ctr">
+                    <a:solidFill>
+                      <a:srgbClr val="FFFFFF"/>
+                    </a:solidFill>
+                  </a:tcPr>
+                </a:tc>
+                <a:tc>
+                  <a:txBody>
+                    <a:bodyPr/>
+                    <a:lstStyle/>
+                    <a:p>
+                      <a:pPr algn="ctr"/>
+                      <a:r>
+                        <a:rPr sz="1050" b="0" i="0">
+                          <a:solidFill>
+                            <a:srgbClr val="1F2A37"/>
+                          </a:solidFill>
+                          <a:latin typeface="Calibri"/>
+                        </a:rPr>
+                        <a:t>5</a:t>
+                      </a:r>
+                    </a:p>
+                  </a:txBody>
+                  <a:tcPr marL="63500" marR="63500" marT="12700" marB="12700" anchor="ctr">
+                    <a:solidFill>
+                      <a:srgbClr val="FFFFFF"/>
+                    </a:solidFill>
+                  </a:tcPr>
+                </a:tc>
+                <a:tc>
+                  <a:txBody>
+                    <a:bodyPr/>
+                    <a:lstStyle/>
+                    <a:p>
+                      <a:pPr algn="ctr"/>
+                      <a:r>
+                        <a:rPr sz="1050" b="0" i="0">
+                          <a:solidFill>
+                            <a:srgbClr val="1F2A37"/>
+                          </a:solidFill>
+                          <a:latin typeface="Calibri"/>
+                        </a:rPr>
+                        <a:t>4</a:t>
+                      </a:r>
+                    </a:p>
+                  </a:txBody>
+                  <a:tcPr marL="63500" marR="63500" marT="12700" marB="12700" anchor="ctr">
+                    <a:solidFill>
+                      <a:srgbClr val="FFFFFF"/>
+                    </a:solidFill>
+                  </a:tcPr>
+                </a:tc>
+                <a:tc>
+                  <a:txBody>
+                    <a:bodyPr/>
+                    <a:lstStyle/>
+                    <a:p>
+                      <a:pPr algn="ctr"/>
+                      <a:r>
+                        <a:rPr sz="1050" b="0" i="0">
+                          <a:solidFill>
+                            <a:srgbClr val="1F2A37"/>
+                          </a:solidFill>
+                          <a:latin typeface="Calibri"/>
+                        </a:rPr>
+                        <a:t>AuthBridge preset: auth-only</a:t>
+                      </a:r>
+                    </a:p>
+                  </a:txBody>
+                  <a:tcPr marL="63500" marR="63500" marT="12700" marB="12700" anchor="ctr">
+                    <a:solidFill>
+                      <a:srgbClr val="FFFFFF"/>
+                    </a:solidFill>
+                  </a:tcPr>
+                </a:tc>
+              </a:tr>
+              <a:tr h="277836">
+                <a:tc>
+                  <a:txBody>
+                    <a:bodyPr/>
+                    <a:lstStyle/>
+                    <a:p>
+                      <a:pPr algn="l"/>
+                      <a:r>
+                        <a:rPr sz="1050" b="0" i="0">
+                          <a:solidFill>
+                            <a:srgbClr val="1F2A37"/>
+                          </a:solidFill>
+                          <a:latin typeface="Calibri"/>
+                        </a:rPr>
+                        <a:t>6</a:t>
+                      </a:r>
+                    </a:p>
+                  </a:txBody>
+                  <a:tcPr marL="63500" marR="63500" marT="12700" marB="12700" anchor="ctr">
+                    <a:solidFill>
+                      <a:srgbClr val="F4F6F8"/>
+                    </a:solidFill>
+                  </a:tcPr>
+                </a:tc>
+                <a:tc>
+                  <a:txBody>
+                    <a:bodyPr/>
+                    <a:lstStyle/>
+                    <a:p>
+                      <a:pPr algn="ctr"/>
+                      <a:r>
+                        <a:rPr sz="1050" b="0" i="0">
+                          <a:solidFill>
+                            <a:srgbClr val="1F2A37"/>
+                          </a:solidFill>
+                          <a:latin typeface="Calibri"/>
+                        </a:rPr>
+                        <a:t>gsm8k</a:t>
+                      </a:r>
+                    </a:p>
+                  </a:txBody>
+                  <a:tcPr marL="63500" marR="63500" marT="12700" marB="12700" anchor="ctr">
+                    <a:solidFill>
+                      <a:srgbClr val="F4F6F8"/>
+                    </a:solidFill>
+                  </a:tcPr>
+                </a:tc>
+                <a:tc>
+                  <a:txBody>
+                    <a:bodyPr/>
+                    <a:lstStyle/>
+                    <a:p>
+                      <a:pPr algn="ctr"/>
+                      <a:r>
+                        <a:rPr sz="1050" b="0" i="0">
+                          <a:solidFill>
+                            <a:srgbClr val="1F2A37"/>
+                          </a:solidFill>
+                          <a:latin typeface="Calibri"/>
+                        </a:rPr>
+                        <a:t>5</a:t>
+                      </a:r>
+                    </a:p>
+                  </a:txBody>
+                  <a:tcPr marL="63500" marR="63500" marT="12700" marB="12700" anchor="ctr">
+                    <a:solidFill>
+                      <a:srgbClr val="F4F6F8"/>
+                    </a:solidFill>
+                  </a:tcPr>
+                </a:tc>
+                <a:tc>
+                  <a:txBody>
+                    <a:bodyPr/>
+                    <a:lstStyle/>
+                    <a:p>
+                      <a:pPr algn="ctr"/>
+                      <a:r>
+                        <a:rPr sz="1050" b="0" i="0">
+                          <a:solidFill>
+                            <a:srgbClr val="1F2A37"/>
+                          </a:solidFill>
+                          <a:latin typeface="Calibri"/>
+                        </a:rPr>
+                        <a:t>4</a:t>
+                      </a:r>
+                    </a:p>
+                  </a:txBody>
+                  <a:tcPr marL="63500" marR="63500" marT="12700" marB="12700" anchor="ctr">
+                    <a:solidFill>
+                      <a:srgbClr val="F4F6F8"/>
+                    </a:solidFill>
+                  </a:tcPr>
+                </a:tc>
+                <a:tc>
+                  <a:txBody>
+                    <a:bodyPr/>
+                    <a:lstStyle/>
+                    <a:p>
+                      <a:pPr algn="ctr"/>
+                      <a:r>
+                        <a:rPr sz="1050" b="0" i="0">
+                          <a:solidFill>
+                            <a:srgbClr val="1F2A37"/>
+                          </a:solidFill>
+                          <a:latin typeface="Calibri"/>
+                        </a:rPr>
+                        <a:t>AuthBridge preset: ibac-only</a:t>
+                      </a:r>
+                    </a:p>
+                  </a:txBody>
+                  <a:tcPr marL="63500" marR="63500" marT="12700" marB="12700" anchor="ctr">
+                    <a:solidFill>
+                      <a:srgbClr val="F4F6F8"/>
+                    </a:solidFill>
+                  </a:tcPr>
+                </a:tc>
+              </a:tr>
+              <a:tr h="277836">
+                <a:tc>
+                  <a:txBody>
+                    <a:bodyPr/>
+                    <a:lstStyle/>
+                    <a:p>
+                      <a:pPr algn="l"/>
+                      <a:r>
+                        <a:rPr sz="1050" b="0" i="0">
+                          <a:solidFill>
+                            <a:srgbClr val="1F2A37"/>
+                          </a:solidFill>
+                          <a:latin typeface="Calibri"/>
+                        </a:rPr>
+                        <a:t>7</a:t>
+                      </a:r>
+                    </a:p>
+                  </a:txBody>
+                  <a:tcPr marL="63500" marR="63500" marT="12700" marB="12700" anchor="ctr">
+                    <a:solidFill>
+                      <a:srgbClr val="FFFFFF"/>
+                    </a:solidFill>
+                  </a:tcPr>
+                </a:tc>
+                <a:tc>
+                  <a:txBody>
+                    <a:bodyPr/>
+                    <a:lstStyle/>
+                    <a:p>
+                      <a:pPr algn="ctr"/>
+                      <a:r>
+                        <a:rPr sz="1050" b="0" i="0">
+                          <a:solidFill>
+                            <a:srgbClr val="1F2A37"/>
+                          </a:solidFill>
+                          <a:latin typeface="Calibri"/>
+                        </a:rPr>
+                        <a:t>gsm8k</a:t>
+                      </a:r>
+                    </a:p>
+                  </a:txBody>
+                  <a:tcPr marL="63500" marR="63500" marT="12700" marB="12700" anchor="ctr">
+                    <a:solidFill>
+                      <a:srgbClr val="FFFFFF"/>
+                    </a:solidFill>
+                  </a:tcPr>
+                </a:tc>
+                <a:tc>
+                  <a:txBody>
+                    <a:bodyPr/>
+                    <a:lstStyle/>
+                    <a:p>
+                      <a:pPr algn="ctr"/>
+                      <a:r>
+                        <a:rPr sz="1050" b="0" i="0">
+                          <a:solidFill>
+                            <a:srgbClr val="1F2A37"/>
+                          </a:solidFill>
+                          <a:latin typeface="Calibri"/>
+                        </a:rPr>
+                        <a:t>5</a:t>
+                      </a:r>
+                    </a:p>
+                  </a:txBody>
+                  <a:tcPr marL="63500" marR="63500" marT="12700" marB="12700" anchor="ctr">
+                    <a:solidFill>
+                      <a:srgbClr val="FFFFFF"/>
+                    </a:solidFill>
+                  </a:tcPr>
+                </a:tc>
+                <a:tc>
+                  <a:txBody>
+                    <a:bodyPr/>
+                    <a:lstStyle/>
+                    <a:p>
+                      <a:pPr algn="ctr"/>
+                      <a:r>
+                        <a:rPr sz="1050" b="0" i="0">
+                          <a:solidFill>
+                            <a:srgbClr val="1F2A37"/>
+                          </a:solidFill>
+                          <a:latin typeface="Calibri"/>
+                        </a:rPr>
+                        <a:t>4</a:t>
+                      </a:r>
+                    </a:p>
+                  </a:txBody>
+                  <a:tcPr marL="63500" marR="63500" marT="12700" marB="12700" anchor="ctr">
+                    <a:solidFill>
+                      <a:srgbClr val="FFFFFF"/>
+                    </a:solidFill>
+                  </a:tcPr>
+                </a:tc>
+                <a:tc>
+                  <a:txBody>
+                    <a:bodyPr/>
+                    <a:lstStyle/>
+                    <a:p>
+                      <a:pPr algn="ctr"/>
+                      <a:r>
+                        <a:rPr sz="1050" b="0" i="0">
+                          <a:solidFill>
+                            <a:srgbClr val="1F2A37"/>
+                          </a:solidFill>
+                          <a:latin typeface="Calibri"/>
+                        </a:rPr>
+                        <a:t>AuthBridge preset: full (enforce)</a:t>
+                      </a:r>
+                    </a:p>
+                  </a:txBody>
+                  <a:tcPr marL="63500" marR="63500" marT="12700" marB="12700" anchor="ctr">
+                    <a:solidFill>
+                      <a:srgbClr val="FFFFFF"/>
+                    </a:solidFill>
+                  </a:tcPr>
+                </a:tc>
+              </a:tr>
+              <a:tr h="277836">
+                <a:tc>
+                  <a:txBody>
+                    <a:bodyPr/>
+                    <a:lstStyle/>
+                    <a:p>
+                      <a:pPr algn="l"/>
+                      <a:r>
+                        <a:rPr sz="1050" b="0" i="0">
+                          <a:solidFill>
+                            <a:srgbClr val="1F2A37"/>
+                          </a:solidFill>
+                          <a:latin typeface="Calibri"/>
+                        </a:rPr>
+                        <a:t>8</a:t>
+                      </a:r>
+                    </a:p>
+                  </a:txBody>
+                  <a:tcPr marL="63500" marR="63500" marT="12700" marB="12700" anchor="ctr">
+                    <a:solidFill>
+                      <a:srgbClr val="F4F6F8"/>
+                    </a:solidFill>
+                  </a:tcPr>
+                </a:tc>
+                <a:tc>
+                  <a:txBody>
+                    <a:bodyPr/>
+                    <a:lstStyle/>
+                    <a:p>
+                      <a:pPr algn="ctr"/>
+                      <a:r>
+                        <a:rPr sz="1050" b="0" i="0">
+                          <a:solidFill>
+                            <a:srgbClr val="1F2A37"/>
+                          </a:solidFill>
+                          <a:latin typeface="Calibri"/>
+                        </a:rPr>
+                        <a:t>gsm8k</a:t>
+                      </a:r>
+                    </a:p>
+                  </a:txBody>
+                  <a:tcPr marL="63500" marR="63500" marT="12700" marB="12700" anchor="ctr">
+                    <a:solidFill>
+                      <a:srgbClr val="F4F6F8"/>
+                    </a:solidFill>
+                  </a:tcPr>
+                </a:tc>
+                <a:tc>
+                  <a:txBody>
+                    <a:bodyPr/>
+                    <a:lstStyle/>
+                    <a:p>
+                      <a:pPr algn="ctr"/>
+                      <a:r>
+                        <a:rPr sz="1050" b="0" i="0">
+                          <a:solidFill>
+                            <a:srgbClr val="1F2A37"/>
+                          </a:solidFill>
+                          <a:latin typeface="Calibri"/>
+                        </a:rPr>
+                        <a:t>5</a:t>
+                      </a:r>
+                    </a:p>
+                  </a:txBody>
+                  <a:tcPr marL="63500" marR="63500" marT="12700" marB="12700" anchor="ctr">
+                    <a:solidFill>
+                      <a:srgbClr val="F4F6F8"/>
+                    </a:solidFill>
+                  </a:tcPr>
+                </a:tc>
+                <a:tc>
+                  <a:txBody>
+                    <a:bodyPr/>
+                    <a:lstStyle/>
+                    <a:p>
+                      <a:pPr algn="ctr"/>
+                      <a:r>
+                        <a:rPr sz="1050" b="0" i="0">
+                          <a:solidFill>
+                            <a:srgbClr val="1F2A37"/>
+                          </a:solidFill>
+                          <a:latin typeface="Calibri"/>
+                        </a:rPr>
+                        <a:t>4</a:t>
+                      </a:r>
+                    </a:p>
+                  </a:txBody>
+                  <a:tcPr marL="63500" marR="63500" marT="12700" marB="12700" anchor="ctr">
+                    <a:solidFill>
+                      <a:srgbClr val="F4F6F8"/>
+                    </a:solidFill>
+                  </a:tcPr>
+                </a:tc>
+                <a:tc>
+                  <a:txBody>
+                    <a:bodyPr/>
+                    <a:lstStyle/>
+                    <a:p>
+                      <a:pPr algn="ctr"/>
+                      <a:r>
+                        <a:rPr sz="1050" b="0" i="0">
+                          <a:solidFill>
+                            <a:srgbClr val="1F2A37"/>
+                          </a:solidFill>
+                          <a:latin typeface="Calibri"/>
+                        </a:rPr>
+                        <a:t>full + per-plugin override ibac:observe</a:t>
+                      </a:r>
+                    </a:p>
+                  </a:txBody>
+                  <a:tcPr marL="63500" marR="63500" marT="12700" marB="12700" anchor="ctr">
+                    <a:solidFill>
+                      <a:srgbClr val="F4F6F8"/>
+                    </a:solidFill>
+                  </a:tcPr>
+                </a:tc>
+              </a:tr>
+              <a:tr h="277836">
+                <a:tc>
+                  <a:txBody>
+                    <a:bodyPr/>
+                    <a:lstStyle/>
+                    <a:p>
+                      <a:pPr algn="l"/>
+                      <a:r>
+                        <a:rPr sz="1050" b="0" i="0">
+                          <a:solidFill>
+                            <a:srgbClr val="1F2A37"/>
+                          </a:solidFill>
+                          <a:latin typeface="Calibri"/>
+                        </a:rPr>
+                        <a:t>9</a:t>
+                      </a:r>
+                    </a:p>
+                  </a:txBody>
+                  <a:tcPr marL="63500" marR="63500" marT="12700" marB="12700" anchor="ctr">
+                    <a:solidFill>
+                      <a:srgbClr val="FFFFFF"/>
+                    </a:solidFill>
+                  </a:tcPr>
+                </a:tc>
+                <a:tc>
+                  <a:txBody>
+                    <a:bodyPr/>
+                    <a:lstStyle/>
+                    <a:p>
+                      <a:pPr algn="ctr"/>
+                      <a:r>
+                        <a:rPr sz="1050" b="0" i="0">
+                          <a:solidFill>
+                            <a:srgbClr val="1F2A37"/>
+                          </a:solidFill>
+                          <a:latin typeface="Calibri"/>
+                        </a:rPr>
+                        <a:t>tau2</a:t>
+                      </a:r>
+                    </a:p>
+                  </a:txBody>
+                  <a:tcPr marL="63500" marR="63500" marT="12700" marB="12700" anchor="ctr">
+                    <a:solidFill>
+                      <a:srgbClr val="FFFFFF"/>
+                    </a:solidFill>
+                  </a:tcPr>
+                </a:tc>
+                <a:tc>
+                  <a:txBody>
+                    <a:bodyPr/>
+                    <a:lstStyle/>
+                    <a:p>
+                      <a:pPr algn="ctr"/>
+                      <a:r>
+                        <a:rPr sz="1050" b="0" i="0">
+                          <a:solidFill>
+                            <a:srgbClr val="1F2A37"/>
+                          </a:solidFill>
+                          <a:latin typeface="Calibri"/>
+                        </a:rPr>
+                        <a:t>10</a:t>
+                      </a:r>
+                    </a:p>
+                  </a:txBody>
+                  <a:tcPr marL="63500" marR="63500" marT="12700" marB="12700" anchor="ctr">
+                    <a:solidFill>
+                      <a:srgbClr val="FFFFFF"/>
+                    </a:solidFill>
+                  </a:tcPr>
+                </a:tc>
+                <a:tc>
+                  <a:txBody>
+                    <a:bodyPr/>
+                    <a:lstStyle/>
+                    <a:p>
+                      <a:pPr algn="ctr"/>
+                      <a:r>
+                        <a:rPr sz="1050" b="0" i="0">
+                          <a:solidFill>
+                            <a:srgbClr val="1F2A37"/>
+                          </a:solidFill>
+                          <a:latin typeface="Calibri"/>
+                        </a:rPr>
+                        <a:t>1</a:t>
+                      </a:r>
+                    </a:p>
+                  </a:txBody>
+                  <a:tcPr marL="63500" marR="63500" marT="12700" marB="12700" anchor="ctr">
+                    <a:solidFill>
+                      <a:srgbClr val="FFFFFF"/>
+                    </a:solidFill>
+                  </a:tcPr>
+                </a:tc>
+                <a:tc>
+                  <a:txBody>
+                    <a:bodyPr/>
+                    <a:lstStyle/>
+                    <a:p>
+                      <a:pPr algn="ctr"/>
+                      <a:r>
+                        <a:rPr sz="1050" b="0" i="0">
+                          <a:solidFill>
+                            <a:srgbClr val="1F2A37"/>
+                          </a:solidFill>
+                          <a:latin typeface="Calibri"/>
+                        </a:rPr>
+                        <a:t>multi-turn + user simulator</a:t>
+                      </a:r>
+                    </a:p>
+                  </a:txBody>
+                  <a:tcPr marL="63500" marR="63500" marT="12700" marB="12700" anchor="ctr">
+                    <a:solidFill>
+                      <a:srgbClr val="FFFFFF"/>
+                    </a:solidFill>
+                  </a:tcPr>
+                </a:tc>
+              </a:tr>
+              <a:tr h="277836">
+                <a:tc>
+                  <a:txBody>
+                    <a:bodyPr/>
+                    <a:lstStyle/>
+                    <a:p>
+                      <a:pPr algn="l"/>
+                      <a:r>
+                        <a:rPr sz="1050" b="0" i="0">
+                          <a:solidFill>
+                            <a:srgbClr val="1F2A37"/>
+                          </a:solidFill>
+                          <a:latin typeface="Calibri"/>
+                        </a:rPr>
+                        <a:t>10</a:t>
+                      </a:r>
+                    </a:p>
+                  </a:txBody>
+                  <a:tcPr marL="63500" marR="63500" marT="12700" marB="12700" anchor="ctr">
+                    <a:solidFill>
+                      <a:srgbClr val="F4F6F8"/>
+                    </a:solidFill>
+                  </a:tcPr>
+                </a:tc>
+                <a:tc>
+                  <a:txBody>
+                    <a:bodyPr/>
+                    <a:lstStyle/>
+                    <a:p>
+                      <a:pPr algn="ctr"/>
+                      <a:r>
+                        <a:rPr sz="1050" b="0" i="0">
+                          <a:solidFill>
+                            <a:srgbClr val="1F2A37"/>
+                          </a:solidFill>
+                          <a:latin typeface="Calibri"/>
+                        </a:rPr>
+                        <a:t>tau2</a:t>
+                      </a:r>
+                    </a:p>
+                  </a:txBody>
+                  <a:tcPr marL="63500" marR="63500" marT="12700" marB="12700" anchor="ctr">
+                    <a:solidFill>
+                      <a:srgbClr val="F4F6F8"/>
+                    </a:solidFill>
+                  </a:tcPr>
+                </a:tc>
+                <a:tc>
+                  <a:txBody>
+                    <a:bodyPr/>
+                    <a:lstStyle/>
+                    <a:p>
+                      <a:pPr algn="ctr"/>
+                      <a:r>
+                        <a:rPr sz="1050" b="0" i="0">
+                          <a:solidFill>
+                            <a:srgbClr val="1F2A37"/>
+                          </a:solidFill>
+                          <a:latin typeface="Calibri"/>
+                        </a:rPr>
+                        <a:t>20</a:t>
+                      </a:r>
+                    </a:p>
+                  </a:txBody>
+                  <a:tcPr marL="63500" marR="63500" marT="12700" marB="12700" anchor="ctr">
+                    <a:solidFill>
+                      <a:srgbClr val="F4F6F8"/>
+                    </a:solidFill>
+                  </a:tcPr>
+                </a:tc>
+                <a:tc>
+                  <a:txBody>
+                    <a:bodyPr/>
+                    <a:lstStyle/>
+                    <a:p>
+                      <a:pPr algn="ctr"/>
+                      <a:r>
+                        <a:rPr sz="1050" b="0" i="0">
+                          <a:solidFill>
+                            <a:srgbClr val="1F2A37"/>
+                          </a:solidFill>
+                          <a:latin typeface="Calibri"/>
+                        </a:rPr>
+                        <a:t>4</a:t>
+                      </a:r>
+                    </a:p>
+                  </a:txBody>
+                  <a:tcPr marL="63500" marR="63500" marT="12700" marB="12700" anchor="ctr">
+                    <a:solidFill>
+                      <a:srgbClr val="F4F6F8"/>
+                    </a:solidFill>
+                  </a:tcPr>
+                </a:tc>
+                <a:tc>
+                  <a:txBody>
+                    <a:bodyPr/>
+                    <a:lstStyle/>
+                    <a:p>
+                      <a:pPr algn="ctr"/>
+                      <a:r>
+                        <a:rPr sz="1050" b="0" i="0">
+                          <a:solidFill>
+                            <a:srgbClr val="1F2A37"/>
+                          </a:solidFill>
+                          <a:latin typeface="Calibri"/>
+                        </a:rPr>
+                        <a:t>multi-turn under concurrency</a:t>
+                      </a:r>
+                    </a:p>
+                  </a:txBody>
+                  <a:tcPr marL="63500" marR="63500" marT="12700" marB="12700" anchor="ctr">
+                    <a:solidFill>
+                      <a:srgbClr val="F4F6F8"/>
+                    </a:solidFill>
+                  </a:tcPr>
+                </a:tc>
+              </a:tr>
+              <a:tr h="277836">
+                <a:tc>
+                  <a:txBody>
+                    <a:bodyPr/>
+                    <a:lstStyle/>
+                    <a:p>
+                      <a:pPr algn="l"/>
+                      <a:r>
+                        <a:rPr sz="1050" b="0" i="0">
+                          <a:solidFill>
+                            <a:srgbClr val="1F2A37"/>
+                          </a:solidFill>
+                          <a:latin typeface="Calibri"/>
+                        </a:rPr>
+                        <a:t>11</a:t>
+                      </a:r>
+                    </a:p>
+                  </a:txBody>
+                  <a:tcPr marL="63500" marR="63500" marT="12700" marB="12700" anchor="ctr">
+                    <a:solidFill>
+                      <a:srgbClr val="FFFFFF"/>
+                    </a:solidFill>
+                  </a:tcPr>
+                </a:tc>
+                <a:tc>
+                  <a:txBody>
+                    <a:bodyPr/>
+                    <a:lstStyle/>
+                    <a:p>
+                      <a:pPr algn="ctr"/>
+                      <a:r>
+                        <a:rPr sz="1050" b="0" i="0">
+                          <a:solidFill>
+                            <a:srgbClr val="1F2A37"/>
+                          </a:solidFill>
+                          <a:latin typeface="Calibri"/>
+                        </a:rPr>
+                        <a:t>appworld</a:t>
+                      </a:r>
+                    </a:p>
+                  </a:txBody>
+                  <a:tcPr marL="63500" marR="63500" marT="12700" marB="12700" anchor="ctr">
+                    <a:solidFill>
+                      <a:srgbClr val="FFFFFF"/>
+                    </a:solidFill>
+                  </a:tcPr>
+                </a:tc>
+                <a:tc>
+                  <a:txBody>
+                    <a:bodyPr/>
+                    <a:lstStyle/>
+                    <a:p>
+                      <a:pPr algn="ctr"/>
+                      <a:r>
+                        <a:rPr sz="1050" b="0" i="0">
+                          <a:solidFill>
+                            <a:srgbClr val="1F2A37"/>
+                          </a:solidFill>
+                          <a:latin typeface="Calibri"/>
+                        </a:rPr>
+                        <a:t>5</a:t>
+                      </a:r>
+                    </a:p>
+                  </a:txBody>
+                  <a:tcPr marL="63500" marR="63500" marT="12700" marB="12700" anchor="ctr">
+                    <a:solidFill>
+                      <a:srgbClr val="FFFFFF"/>
+                    </a:solidFill>
+                  </a:tcPr>
+                </a:tc>
+                <a:tc>
+                  <a:txBody>
+                    <a:bodyPr/>
+                    <a:lstStyle/>
+                    <a:p>
+                      <a:pPr algn="ctr"/>
+                      <a:r>
+                        <a:rPr sz="1050" b="0" i="0">
+                          <a:solidFill>
+                            <a:srgbClr val="1F2A37"/>
+                          </a:solidFill>
+                          <a:latin typeface="Calibri"/>
+                        </a:rPr>
+                        <a:t>1</a:t>
+                      </a:r>
+                    </a:p>
+                  </a:txBody>
+                  <a:tcPr marL="63500" marR="63500" marT="12700" marB="12700" anchor="ctr">
+                    <a:solidFill>
+                      <a:srgbClr val="FFFFFF"/>
+                    </a:solidFill>
+                  </a:tcPr>
+                </a:tc>
+                <a:tc>
+                  <a:txBody>
+                    <a:bodyPr/>
+                    <a:lstStyle/>
+                    <a:p>
+                      <a:pPr algn="ctr"/>
+                      <a:r>
+                        <a:rPr sz="1050" b="0" i="0">
+                          <a:solidFill>
+                            <a:srgbClr val="1F2A37"/>
+                          </a:solidFill>
+                          <a:latin typeface="Calibri"/>
+                        </a:rPr>
+                        <a:t>long-horizon, gemini-2.5-pro</a:t>
+                      </a:r>
+                    </a:p>
+                  </a:txBody>
+                  <a:tcPr marL="63500" marR="63500" marT="12700" marB="12700" anchor="ctr">
+                    <a:solidFill>
+                      <a:srgbClr val="FFFFFF"/>
+                    </a:solidFill>
+                  </a:tcPr>
+                </a:tc>
+              </a:tr>
+              <a:tr h="277848">
+                <a:tc>
+                  <a:txBody>
+                    <a:bodyPr/>
+                    <a:lstStyle/>
+                    <a:p>
+                      <a:pPr algn="l"/>
+                      <a:r>
+                        <a:rPr sz="1050" b="0" i="0">
+                          <a:solidFill>
+                            <a:srgbClr val="1F2A37"/>
+                          </a:solidFill>
+                          <a:latin typeface="Calibri"/>
+                        </a:rPr>
+                        <a:t>12</a:t>
+                      </a:r>
+                    </a:p>
+                  </a:txBody>
+                  <a:tcPr marL="63500" marR="63500" marT="12700" marB="12700" anchor="ctr">
+                    <a:solidFill>
+                      <a:srgbClr val="F4F6F8"/>
+                    </a:solidFill>
+                  </a:tcPr>
+                </a:tc>
+                <a:tc>
+                  <a:txBody>
+                    <a:bodyPr/>
+                    <a:lstStyle/>
+                    <a:p>
+                      <a:pPr algn="ctr"/>
+                      <a:r>
+                        <a:rPr sz="1050" b="0" i="0">
+                          <a:solidFill>
+                            <a:srgbClr val="1F2A37"/>
+                          </a:solidFill>
+                          <a:latin typeface="Calibri"/>
+                        </a:rPr>
+                        <a:t>appworld</a:t>
+                      </a:r>
+                    </a:p>
+                  </a:txBody>
+                  <a:tcPr marL="63500" marR="63500" marT="12700" marB="12700" anchor="ctr">
+                    <a:solidFill>
+                      <a:srgbClr val="F4F6F8"/>
+                    </a:solidFill>
+                  </a:tcPr>
+                </a:tc>
+                <a:tc>
+                  <a:txBody>
+                    <a:bodyPr/>
+                    <a:lstStyle/>
+                    <a:p>
+                      <a:pPr algn="ctr"/>
+                      <a:r>
+                        <a:rPr sz="1050" b="0" i="0">
+                          <a:solidFill>
+                            <a:srgbClr val="1F2A37"/>
+                          </a:solidFill>
+                          <a:latin typeface="Calibri"/>
+                        </a:rPr>
+                        <a:t>20</a:t>
+                      </a:r>
+                    </a:p>
+                  </a:txBody>
+                  <a:tcPr marL="63500" marR="63500" marT="12700" marB="12700" anchor="ctr">
+                    <a:solidFill>
+                      <a:srgbClr val="F4F6F8"/>
+                    </a:solidFill>
+                  </a:tcPr>
+                </a:tc>
+                <a:tc>
+                  <a:txBody>
+                    <a:bodyPr/>
+                    <a:lstStyle/>
+                    <a:p>
+                      <a:pPr algn="ctr"/>
+                      <a:r>
+                        <a:rPr sz="1050" b="0" i="0">
+                          <a:solidFill>
+                            <a:srgbClr val="1F2A37"/>
+                          </a:solidFill>
+                          <a:latin typeface="Calibri"/>
+                        </a:rPr>
+                        <a:t>4</a:t>
+                      </a:r>
+                    </a:p>
+                  </a:txBody>
+                  <a:tcPr marL="63500" marR="63500" marT="12700" marB="12700" anchor="ctr">
+                    <a:solidFill>
+                      <a:srgbClr val="F4F6F8"/>
+                    </a:solidFill>
+                  </a:tcPr>
+                </a:tc>
+                <a:tc>
+                  <a:txBody>
+                    <a:bodyPr/>
+                    <a:lstStyle/>
+                    <a:p>
+                      <a:pPr algn="ctr"/>
+                      <a:r>
+                        <a:rPr sz="1050" b="0" i="0">
+                          <a:solidFill>
+                            <a:srgbClr val="1F2A37"/>
+                          </a:solidFill>
+                          <a:latin typeface="Calibri"/>
+                        </a:rPr>
+                        <a:t>long-horizon under concurrency</a:t>
+                      </a:r>
+                    </a:p>
+                  </a:txBody>
+                  <a:tcPr marL="63500" marR="63500" marT="12700" marB="12700" anchor="ctr">
+                    <a:solidFill>
+                      <a:srgbClr val="F4F6F8"/>
+                    </a:solidFill>
+                  </a:tcPr>
+                </a:tc>
+              </a:tr>
+            </a:tbl>
+          </a:graphicData>
+        </a:graphic>
+      </p:graphicFrame>
+      <p:sp>
+        <p:nvSpPr>
+          <p:cNvPr id="4" name="Rounded Rectangle 3"/>
+          <p:cNvSpPr/>
+          <p:nvPr/>
+        </p:nvSpPr>
+        <p:spPr>
+          <a:xfrm>
+            <a:off x="411480" y="4983480"/>
+            <a:ext cx="11338560" cy="1417320"/>
+          </a:xfrm>
+          <a:prstGeom prst="roundRect">
+            <a:avLst/>
+          </a:prstGeom>
+          <a:solidFill>
+            <a:srgbClr val="EEEFF1"/>
+          </a:solidFill>
+          <a:ln w="12700">
+            <a:solidFill>
+              <a:srgbClr val="6B6B6B"/>
+            </a:solidFill>
+          </a:ln>
+          <a:effectLst/>
+        </p:spPr>
+        <p:style>
+          <a:lnRef idx="1">
+            <a:schemeClr val="accent1"/>
+          </a:lnRef>
+          <a:fillRef idx="3">
+            <a:schemeClr val="accent1"/>
+          </a:fillRef>
+          <a:effectRef idx="2">
+            <a:schemeClr val="accent1"/>
+          </a:effectRef>
+          <a:fontRef idx="minor">
+            <a:schemeClr val="lt1"/>
+          </a:fontRef>
+        </p:style>
+        <p:txBody>
+          <a:bodyPr rtlCol="0" anchor="ctr" wrap="square" tIns="25400" bIns="25400" lIns="228600" rIns="228600"/>
+          <a:lstStyle/>
+          <a:p>
+            <a:pPr algn="ctr"/>
+            <a:r>
+              <a:rPr sz="1200" b="0" i="0">
+                <a:solidFill>
+                  <a:srgbClr val="1F2A37"/>
+                </a:solidFill>
+                <a:latin typeface="Calibri"/>
+              </a:rPr>
+              <a:t>Why a FIXED matrix: task selection is deterministic, so the same leg run anywhere executes the same tasks in the same order. That is what makes a difference attributable to the platform rather than to the workload — and it is why every leg deploys fresh, since reusing a warm agent silently loses telemetry. Driven by one command (reference/run-12.py, ~1h55m); the three generated documents in results/ derive every number from the mirrored artifacts.</a:t>
+            </a:r>
+          </a:p>
+        </p:txBody>
+      </p:sp>
+    </p:spTree>
+  </p:cSld>
+  <p:clrMapOvr>
+    <a:masterClrMapping/>
+  </p:clrMapOvr>
+</p:sld>
+</file>
+
+<file path=ppt/slides/slide12.xml><?xml version="1.0" encoding="utf-8"?>
+<p:sld xmlns:a="http://schemas.openxmlformats.org/drawingml/2006/main" xmlns:p="http://schemas.openxmlformats.org/presentationml/2006/main" xmlns:r="http://schemas.openxmlformats.org/officeDocument/2006/relationships">
+  <p:cSld>
+    <p:spTree>
+      <p:nvGrpSpPr>
+        <p:cNvPr id="1" name=""/>
+        <p:cNvGrpSpPr/>
+        <p:nvPr/>
+      </p:nvGrpSpPr>
+      <p:grpSpPr/>
+      <p:sp>
+        <p:nvSpPr>
+          <p:cNvPr id="2" name="Rectangle 1"/>
+          <p:cNvSpPr/>
+          <p:nvPr/>
+        </p:nvSpPr>
+        <p:spPr>
+          <a:xfrm>
+            <a:off x="0" y="0"/>
+            <a:ext cx="12192000" cy="950000"/>
+          </a:xfrm>
+          <a:prstGeom prst="rect">
+            <a:avLst/>
+          </a:prstGeom>
+          <a:solidFill>
+            <a:srgbClr val="1B3A5C"/>
+          </a:solidFill>
+          <a:ln>
+            <a:noFill/>
+          </a:ln>
+          <a:effectLst/>
+        </p:spPr>
+        <p:style>
+          <a:lnRef idx="1">
+            <a:schemeClr val="accent1"/>
+          </a:lnRef>
+          <a:fillRef idx="3">
+            <a:schemeClr val="accent1"/>
+          </a:fillRef>
+          <a:effectRef idx="2">
+            <a:schemeClr val="accent1"/>
+          </a:effectRef>
+          <a:fontRef idx="minor">
+            <a:schemeClr val="lt1"/>
+          </a:fontRef>
+        </p:style>
+        <p:txBody>
+          <a:bodyPr rtlCol="0" anchor="ctr" lIns="355600"/>
+          <a:lstStyle/>
+          <a:p>
+            <a:pPr algn="ctr"/>
+            <a:r>
+              <a:rPr sz="2600" b="1" i="0">
+                <a:solidFill>
+                  <a:srgbClr val="FFFFFF"/>
+                </a:solidFill>
+                <a:latin typeface="Calibri"/>
+              </a:rPr>
+              <a:t>7.2  What the 12 Runs Measured</a:t>
+            </a:r>
+          </a:p>
+          <a:p>
+            <a:r>
+              <a:rPr sz="1400" b="0" i="0">
+                <a:solidFill>
+                  <a:srgbClr val="C9D9EC"/>
+                </a:solidFill>
+                <a:latin typeface="Calibri"/>
+              </a:rPr>
+              <a:t>v1.24 on OpenShift (Service on ykt3, workloads on ykt2) — 138 tasks, all 12 legs succeeded</a:t>
+            </a:r>
+          </a:p>
+        </p:txBody>
+      </p:sp>
+      <p:graphicFrame>
+        <p:nvGraphicFramePr>
+          <p:cNvPr id="3" name="Table 2"/>
+          <p:cNvGraphicFramePr>
+            <a:graphicFrameLocks noGrp="1"/>
+          </p:cNvGraphicFramePr>
+          <p:nvPr/>
+        </p:nvGraphicFramePr>
+        <p:xfrm>
+          <a:off x="411480" y="1188720"/>
+          <a:ext cx="5532120" cy="3794760"/>
+        </p:xfrm>
+        <a:graphic>
+          <a:graphicData uri="http://schemas.openxmlformats.org/drawingml/2006/table">
+            <a:tbl>
+              <a:tblPr firstRow="1">
+                <a:tableStyleId>{5C22544A-7EE6-4342-B048-85BDC9FD1C3A}</a:tableStyleId>
+              </a:tblPr>
+              <a:tblGrid>
+                <a:gridCol w="548640"/>
+                <a:gridCol w="1371600"/>
+                <a:gridCol w="914400"/>
+                <a:gridCol w="1051560"/>
+                <a:gridCol w="1645920"/>
+              </a:tblGrid>
+              <a:tr h="291904">
+                <a:tc>
+                  <a:txBody>
+                    <a:bodyPr/>
+                    <a:lstStyle/>
+                    <a:p>
+                      <a:pPr algn="l"/>
+                      <a:r>
+                        <a:rPr sz="1050" b="1" i="0">
+                          <a:solidFill>
+                            <a:srgbClr val="FFFFFF"/>
+                          </a:solidFill>
+                          <a:latin typeface="Calibri"/>
+                        </a:rPr>
+                        <a:t>#</a:t>
+                      </a:r>
+                    </a:p>
+                  </a:txBody>
+                  <a:tcPr marL="63500" marR="63500" marT="12700" marB="12700" anchor="ctr">
+                    <a:solidFill>
+                      <a:srgbClr val="1B3A5C"/>
+                    </a:solidFill>
+                  </a:tcPr>
+                </a:tc>
+                <a:tc>
+                  <a:txBody>
+                    <a:bodyPr/>
+                    <a:lstStyle/>
+                    <a:p>
+                      <a:pPr algn="ctr"/>
+                      <a:r>
+                        <a:rPr sz="1050" b="1" i="0">
+                          <a:solidFill>
+                            <a:srgbClr val="FFFFFF"/>
+                          </a:solidFill>
+                          <a:latin typeface="Calibri"/>
+                        </a:rPr>
+                        <a:t>bench</a:t>
+                      </a:r>
+                    </a:p>
+                  </a:txBody>
+                  <a:tcPr marL="63500" marR="63500" marT="12700" marB="12700" anchor="ctr">
+                    <a:solidFill>
+                      <a:srgbClr val="1B3A5C"/>
+                    </a:solidFill>
+                  </a:tcPr>
+                </a:tc>
+                <a:tc>
+                  <a:txBody>
+                    <a:bodyPr/>
+                    <a:lstStyle/>
+                    <a:p>
+                      <a:pPr algn="ctr"/>
+                      <a:r>
+                        <a:rPr sz="1050" b="1" i="0">
+                          <a:solidFill>
+                            <a:srgbClr val="FFFFFF"/>
+                          </a:solidFill>
+                          <a:latin typeface="Calibri"/>
+                        </a:rPr>
+                        <a:t>pass</a:t>
+                      </a:r>
+                    </a:p>
+                  </a:txBody>
+                  <a:tcPr marL="63500" marR="63500" marT="12700" marB="12700" anchor="ctr">
+                    <a:solidFill>
+                      <a:srgbClr val="1B3A5C"/>
+                    </a:solidFill>
+                  </a:tcPr>
+                </a:tc>
+                <a:tc>
+                  <a:txBody>
+                    <a:bodyPr/>
+                    <a:lstStyle/>
+                    <a:p>
+                      <a:pPr algn="ctr"/>
+                      <a:r>
+                        <a:rPr sz="1050" b="1" i="0">
+                          <a:solidFill>
+                            <a:srgbClr val="FFFFFF"/>
+                          </a:solidFill>
+                          <a:latin typeface="Calibri"/>
+                        </a:rPr>
+                        <a:t>wall</a:t>
+                      </a:r>
+                    </a:p>
+                  </a:txBody>
+                  <a:tcPr marL="63500" marR="63500" marT="12700" marB="12700" anchor="ctr">
+                    <a:solidFill>
+                      <a:srgbClr val="1B3A5C"/>
+                    </a:solidFill>
+                  </a:tcPr>
+                </a:tc>
+                <a:tc>
+                  <a:txBody>
+                    <a:bodyPr/>
+                    <a:lstStyle/>
+                    <a:p>
+                      <a:pPr algn="ctr"/>
+                      <a:r>
+                        <a:rPr sz="1050" b="1" i="0">
+                          <a:solidFill>
+                            <a:srgbClr val="FFFFFF"/>
+                          </a:solidFill>
+                          <a:latin typeface="Calibri"/>
+                        </a:rPr>
+                        <a:t>input tokens</a:t>
+                      </a:r>
+                    </a:p>
+                  </a:txBody>
+                  <a:tcPr marL="63500" marR="63500" marT="12700" marB="12700" anchor="ctr">
+                    <a:solidFill>
+                      <a:srgbClr val="1B3A5C"/>
+                    </a:solidFill>
+                  </a:tcPr>
+                </a:tc>
+              </a:tr>
+              <a:tr h="291904">
+                <a:tc>
+                  <a:txBody>
+                    <a:bodyPr/>
+                    <a:lstStyle/>
+                    <a:p>
+                      <a:pPr algn="l"/>
+                      <a:r>
+                        <a:rPr sz="1050" b="0" i="0">
+                          <a:solidFill>
+                            <a:srgbClr val="1F2A37"/>
+                          </a:solidFill>
+                          <a:latin typeface="Calibri"/>
+                        </a:rPr>
+                        <a:t>1</a:t>
+                      </a:r>
+                    </a:p>
+                  </a:txBody>
+                  <a:tcPr marL="63500" marR="63500" marT="12700" marB="12700" anchor="ctr">
+                    <a:solidFill>
+                      <a:srgbClr val="FFFFFF"/>
+                    </a:solidFill>
+                  </a:tcPr>
+                </a:tc>
+                <a:tc>
+                  <a:txBody>
+                    <a:bodyPr/>
+                    <a:lstStyle/>
+                    <a:p>
+                      <a:pPr algn="ctr"/>
+                      <a:r>
+                        <a:rPr sz="1050" b="0" i="0">
+                          <a:solidFill>
+                            <a:srgbClr val="1F2A37"/>
+                          </a:solidFill>
+                          <a:latin typeface="Calibri"/>
+                        </a:rPr>
+                        <a:t>gsm8k</a:t>
+                      </a:r>
+                    </a:p>
+                  </a:txBody>
+                  <a:tcPr marL="63500" marR="63500" marT="12700" marB="12700" anchor="ctr">
+                    <a:solidFill>
+                      <a:srgbClr val="FFFFFF"/>
+                    </a:solidFill>
+                  </a:tcPr>
+                </a:tc>
+                <a:tc>
+                  <a:txBody>
+                    <a:bodyPr/>
+                    <a:lstStyle/>
+                    <a:p>
+                      <a:pPr algn="ctr"/>
+                      <a:r>
+                        <a:rPr sz="1050" b="0" i="0">
+                          <a:solidFill>
+                            <a:srgbClr val="1F2A37"/>
+                          </a:solidFill>
+                          <a:latin typeface="Calibri"/>
+                        </a:rPr>
+                        <a:t>1.00</a:t>
+                      </a:r>
+                    </a:p>
+                  </a:txBody>
+                  <a:tcPr marL="63500" marR="63500" marT="12700" marB="12700" anchor="ctr">
+                    <a:solidFill>
+                      <a:srgbClr val="FFFFFF"/>
+                    </a:solidFill>
+                  </a:tcPr>
+                </a:tc>
+                <a:tc>
+                  <a:txBody>
+                    <a:bodyPr/>
+                    <a:lstStyle/>
+                    <a:p>
+                      <a:pPr algn="ctr"/>
+                      <a:r>
+                        <a:rPr sz="1050" b="0" i="0">
+                          <a:solidFill>
+                            <a:srgbClr val="1F2A37"/>
+                          </a:solidFill>
+                          <a:latin typeface="Calibri"/>
+                        </a:rPr>
+                        <a:t>9 s</a:t>
+                      </a:r>
+                    </a:p>
+                  </a:txBody>
+                  <a:tcPr marL="63500" marR="63500" marT="12700" marB="12700" anchor="ctr">
+                    <a:solidFill>
+                      <a:srgbClr val="FFFFFF"/>
+                    </a:solidFill>
+                  </a:tcPr>
+                </a:tc>
+                <a:tc>
+                  <a:txBody>
+                    <a:bodyPr/>
+                    <a:lstStyle/>
+                    <a:p>
+                      <a:pPr algn="ctr"/>
+                      <a:r>
+                        <a:rPr sz="1050" b="0" i="0">
+                          <a:solidFill>
+                            <a:srgbClr val="1F2A37"/>
+                          </a:solidFill>
+                          <a:latin typeface="Calibri"/>
+                        </a:rPr>
+                        <a:t>320</a:t>
+                      </a:r>
+                    </a:p>
+                  </a:txBody>
+                  <a:tcPr marL="63500" marR="63500" marT="12700" marB="12700" anchor="ctr">
+                    <a:solidFill>
+                      <a:srgbClr val="FFFFFF"/>
+                    </a:solidFill>
+                  </a:tcPr>
+                </a:tc>
+              </a:tr>
+              <a:tr h="291904">
+                <a:tc>
+                  <a:txBody>
+                    <a:bodyPr/>
+                    <a:lstStyle/>
+                    <a:p>
+                      <a:pPr algn="l"/>
+                      <a:r>
+                        <a:rPr sz="1050" b="0" i="0">
+                          <a:solidFill>
+                            <a:srgbClr val="1F2A37"/>
+                          </a:solidFill>
+                          <a:latin typeface="Calibri"/>
+                        </a:rPr>
+                        <a:t>2</a:t>
+                      </a:r>
+                    </a:p>
+                  </a:txBody>
+                  <a:tcPr marL="63500" marR="63500" marT="12700" marB="12700" anchor="ctr">
+                    <a:solidFill>
+                      <a:srgbClr val="F4F6F8"/>
+                    </a:solidFill>
+                  </a:tcPr>
+                </a:tc>
+                <a:tc>
+                  <a:txBody>
+                    <a:bodyPr/>
+                    <a:lstStyle/>
+                    <a:p>
+                      <a:pPr algn="ctr"/>
+                      <a:r>
+                        <a:rPr sz="1050" b="0" i="0">
+                          <a:solidFill>
+                            <a:srgbClr val="1F2A37"/>
+                          </a:solidFill>
+                          <a:latin typeface="Calibri"/>
+                        </a:rPr>
+                        <a:t>gsm8k</a:t>
+                      </a:r>
+                    </a:p>
+                  </a:txBody>
+                  <a:tcPr marL="63500" marR="63500" marT="12700" marB="12700" anchor="ctr">
+                    <a:solidFill>
+                      <a:srgbClr val="F4F6F8"/>
+                    </a:solidFill>
+                  </a:tcPr>
+                </a:tc>
+                <a:tc>
+                  <a:txBody>
+                    <a:bodyPr/>
+                    <a:lstStyle/>
+                    <a:p>
+                      <a:pPr algn="ctr"/>
+                      <a:r>
+                        <a:rPr sz="1050" b="0" i="0">
+                          <a:solidFill>
+                            <a:srgbClr val="1F2A37"/>
+                          </a:solidFill>
+                          <a:latin typeface="Calibri"/>
+                        </a:rPr>
+                        <a:t>1.00</a:t>
+                      </a:r>
+                    </a:p>
+                  </a:txBody>
+                  <a:tcPr marL="63500" marR="63500" marT="12700" marB="12700" anchor="ctr">
+                    <a:solidFill>
+                      <a:srgbClr val="F4F6F8"/>
+                    </a:solidFill>
+                  </a:tcPr>
+                </a:tc>
+                <a:tc>
+                  <a:txBody>
+                    <a:bodyPr/>
+                    <a:lstStyle/>
+                    <a:p>
+                      <a:pPr algn="ctr"/>
+                      <a:r>
+                        <a:rPr sz="1050" b="0" i="0">
+                          <a:solidFill>
+                            <a:srgbClr val="1F2A37"/>
+                          </a:solidFill>
+                          <a:latin typeface="Calibri"/>
+                        </a:rPr>
+                        <a:t>42 s</a:t>
+                      </a:r>
+                    </a:p>
+                  </a:txBody>
+                  <a:tcPr marL="63500" marR="63500" marT="12700" marB="12700" anchor="ctr">
+                    <a:solidFill>
+                      <a:srgbClr val="F4F6F8"/>
+                    </a:solidFill>
+                  </a:tcPr>
+                </a:tc>
+                <a:tc>
+                  <a:txBody>
+                    <a:bodyPr/>
+                    <a:lstStyle/>
+                    <a:p>
+                      <a:pPr algn="ctr"/>
+                      <a:r>
+                        <a:rPr sz="1050" b="0" i="0">
+                          <a:solidFill>
+                            <a:srgbClr val="1F2A37"/>
+                          </a:solidFill>
+                          <a:latin typeface="Calibri"/>
+                        </a:rPr>
+                        <a:t>3,166</a:t>
+                      </a:r>
+                    </a:p>
+                  </a:txBody>
+                  <a:tcPr marL="63500" marR="63500" marT="12700" marB="12700" anchor="ctr">
+                    <a:solidFill>
+                      <a:srgbClr val="F4F6F8"/>
+                    </a:solidFill>
+                  </a:tcPr>
+                </a:tc>
+              </a:tr>
+              <a:tr h="291904">
+                <a:tc>
+                  <a:txBody>
+                    <a:bodyPr/>
+                    <a:lstStyle/>
+                    <a:p>
+                      <a:pPr algn="l"/>
+                      <a:r>
+                        <a:rPr sz="1050" b="0" i="0">
+                          <a:solidFill>
+                            <a:srgbClr val="1F2A37"/>
+                          </a:solidFill>
+                          <a:latin typeface="Calibri"/>
+                        </a:rPr>
+                        <a:t>3</a:t>
+                      </a:r>
+                    </a:p>
+                  </a:txBody>
+                  <a:tcPr marL="63500" marR="63500" marT="12700" marB="12700" anchor="ctr">
+                    <a:solidFill>
+                      <a:srgbClr val="FFFFFF"/>
+                    </a:solidFill>
+                  </a:tcPr>
+                </a:tc>
+                <a:tc>
+                  <a:txBody>
+                    <a:bodyPr/>
+                    <a:lstStyle/>
+                    <a:p>
+                      <a:pPr algn="ctr"/>
+                      <a:r>
+                        <a:rPr sz="1050" b="0" i="0">
+                          <a:solidFill>
+                            <a:srgbClr val="1F2A37"/>
+                          </a:solidFill>
+                          <a:latin typeface="Calibri"/>
+                        </a:rPr>
+                        <a:t>gsm8k</a:t>
+                      </a:r>
+                    </a:p>
+                  </a:txBody>
+                  <a:tcPr marL="63500" marR="63500" marT="12700" marB="12700" anchor="ctr">
+                    <a:solidFill>
+                      <a:srgbClr val="FFFFFF"/>
+                    </a:solidFill>
+                  </a:tcPr>
+                </a:tc>
+                <a:tc>
+                  <a:txBody>
+                    <a:bodyPr/>
+                    <a:lstStyle/>
+                    <a:p>
+                      <a:pPr algn="ctr"/>
+                      <a:r>
+                        <a:rPr sz="1050" b="0" i="0">
+                          <a:solidFill>
+                            <a:srgbClr val="1F2A37"/>
+                          </a:solidFill>
+                          <a:latin typeface="Calibri"/>
+                        </a:rPr>
+                        <a:t>1.00</a:t>
+                      </a:r>
+                    </a:p>
+                  </a:txBody>
+                  <a:tcPr marL="63500" marR="63500" marT="12700" marB="12700" anchor="ctr">
+                    <a:solidFill>
+                      <a:srgbClr val="FFFFFF"/>
+                    </a:solidFill>
+                  </a:tcPr>
+                </a:tc>
+                <a:tc>
+                  <a:txBody>
+                    <a:bodyPr/>
+                    <a:lstStyle/>
+                    <a:p>
+                      <a:pPr algn="ctr"/>
+                      <a:r>
+                        <a:rPr sz="1050" b="0" i="0">
+                          <a:solidFill>
+                            <a:srgbClr val="1F2A37"/>
+                          </a:solidFill>
+                          <a:latin typeface="Calibri"/>
+                        </a:rPr>
+                        <a:t>97 s</a:t>
+                      </a:r>
+                    </a:p>
+                  </a:txBody>
+                  <a:tcPr marL="63500" marR="63500" marT="12700" marB="12700" anchor="ctr">
+                    <a:solidFill>
+                      <a:srgbClr val="FFFFFF"/>
+                    </a:solidFill>
+                  </a:tcPr>
+                </a:tc>
+                <a:tc>
+                  <a:txBody>
+                    <a:bodyPr/>
+                    <a:lstStyle/>
+                    <a:p>
+                      <a:pPr algn="ctr"/>
+                      <a:r>
+                        <a:rPr sz="1050" b="0" i="0">
+                          <a:solidFill>
+                            <a:srgbClr val="1F2A37"/>
+                          </a:solidFill>
+                          <a:latin typeface="Calibri"/>
+                        </a:rPr>
+                        <a:t>15,684</a:t>
+                      </a:r>
+                    </a:p>
+                  </a:txBody>
+                  <a:tcPr marL="63500" marR="63500" marT="12700" marB="12700" anchor="ctr">
+                    <a:solidFill>
+                      <a:srgbClr val="FFFFFF"/>
+                    </a:solidFill>
+                  </a:tcPr>
+                </a:tc>
+              </a:tr>
+              <a:tr h="291904">
+                <a:tc>
+                  <a:txBody>
+                    <a:bodyPr/>
+                    <a:lstStyle/>
+                    <a:p>
+                      <a:pPr algn="l"/>
+                      <a:r>
+                        <a:rPr sz="1050" b="0" i="0">
+                          <a:solidFill>
+                            <a:srgbClr val="1F2A37"/>
+                          </a:solidFill>
+                          <a:latin typeface="Calibri"/>
+                        </a:rPr>
+                        <a:t>4</a:t>
+                      </a:r>
+                    </a:p>
+                  </a:txBody>
+                  <a:tcPr marL="63500" marR="63500" marT="12700" marB="12700" anchor="ctr">
+                    <a:solidFill>
+                      <a:srgbClr val="F4F6F8"/>
+                    </a:solidFill>
+                  </a:tcPr>
+                </a:tc>
+                <a:tc>
+                  <a:txBody>
+                    <a:bodyPr/>
+                    <a:lstStyle/>
+                    <a:p>
+                      <a:pPr algn="ctr"/>
+                      <a:r>
+                        <a:rPr sz="1050" b="0" i="0">
+                          <a:solidFill>
+                            <a:srgbClr val="1F2A37"/>
+                          </a:solidFill>
+                          <a:latin typeface="Calibri"/>
+                        </a:rPr>
+                        <a:t>gsm8k</a:t>
+                      </a:r>
+                    </a:p>
+                  </a:txBody>
+                  <a:tcPr marL="63500" marR="63500" marT="12700" marB="12700" anchor="ctr">
+                    <a:solidFill>
+                      <a:srgbClr val="F4F6F8"/>
+                    </a:solidFill>
+                  </a:tcPr>
+                </a:tc>
+                <a:tc>
+                  <a:txBody>
+                    <a:bodyPr/>
+                    <a:lstStyle/>
+                    <a:p>
+                      <a:pPr algn="ctr"/>
+                      <a:r>
+                        <a:rPr sz="1050" b="0" i="0">
+                          <a:solidFill>
+                            <a:srgbClr val="1F2A37"/>
+                          </a:solidFill>
+                          <a:latin typeface="Calibri"/>
+                        </a:rPr>
+                        <a:t>0.80</a:t>
+                      </a:r>
+                    </a:p>
+                  </a:txBody>
+                  <a:tcPr marL="63500" marR="63500" marT="12700" marB="12700" anchor="ctr">
+                    <a:solidFill>
+                      <a:srgbClr val="F4F6F8"/>
+                    </a:solidFill>
+                  </a:tcPr>
+                </a:tc>
+                <a:tc>
+                  <a:txBody>
+                    <a:bodyPr/>
+                    <a:lstStyle/>
+                    <a:p>
+                      <a:pPr algn="ctr"/>
+                      <a:r>
+                        <a:rPr sz="1050" b="0" i="0">
+                          <a:solidFill>
+                            <a:srgbClr val="1F2A37"/>
+                          </a:solidFill>
+                          <a:latin typeface="Calibri"/>
+                        </a:rPr>
+                        <a:t>26 s</a:t>
+                      </a:r>
+                    </a:p>
+                  </a:txBody>
+                  <a:tcPr marL="63500" marR="63500" marT="12700" marB="12700" anchor="ctr">
+                    <a:solidFill>
+                      <a:srgbClr val="F4F6F8"/>
+                    </a:solidFill>
+                  </a:tcPr>
+                </a:tc>
+                <a:tc>
+                  <a:txBody>
+                    <a:bodyPr/>
+                    <a:lstStyle/>
+                    <a:p>
+                      <a:pPr algn="ctr"/>
+                      <a:r>
+                        <a:rPr sz="1050" b="0" i="0">
+                          <a:solidFill>
+                            <a:srgbClr val="1F2A37"/>
+                          </a:solidFill>
+                          <a:latin typeface="Calibri"/>
+                        </a:rPr>
+                        <a:t>3,613</a:t>
+                      </a:r>
+                    </a:p>
+                  </a:txBody>
+                  <a:tcPr marL="63500" marR="63500" marT="12700" marB="12700" anchor="ctr">
+                    <a:solidFill>
+                      <a:srgbClr val="F4F6F8"/>
+                    </a:solidFill>
+                  </a:tcPr>
+                </a:tc>
+              </a:tr>
+              <a:tr h="291904">
+                <a:tc>
+                  <a:txBody>
+                    <a:bodyPr/>
+                    <a:lstStyle/>
+                    <a:p>
+                      <a:pPr algn="l"/>
+                      <a:r>
+                        <a:rPr sz="1050" b="0" i="0">
+                          <a:solidFill>
+                            <a:srgbClr val="1F2A37"/>
+                          </a:solidFill>
+                          <a:latin typeface="Calibri"/>
+                        </a:rPr>
+                        <a:t>5</a:t>
+                      </a:r>
+                    </a:p>
+                  </a:txBody>
+                  <a:tcPr marL="63500" marR="63500" marT="12700" marB="12700" anchor="ctr">
+                    <a:solidFill>
+                      <a:srgbClr val="FFFFFF"/>
+                    </a:solidFill>
+                  </a:tcPr>
+                </a:tc>
+                <a:tc>
+                  <a:txBody>
+                    <a:bodyPr/>
+                    <a:lstStyle/>
+                    <a:p>
+                      <a:pPr algn="ctr"/>
+                      <a:r>
+                        <a:rPr sz="1050" b="0" i="0">
+                          <a:solidFill>
+                            <a:srgbClr val="1F2A37"/>
+                          </a:solidFill>
+                          <a:latin typeface="Calibri"/>
+                        </a:rPr>
+                        <a:t>gsm8k</a:t>
+                      </a:r>
+                    </a:p>
+                  </a:txBody>
+                  <a:tcPr marL="63500" marR="63500" marT="12700" marB="12700" anchor="ctr">
+                    <a:solidFill>
+                      <a:srgbClr val="FFFFFF"/>
+                    </a:solidFill>
+                  </a:tcPr>
+                </a:tc>
+                <a:tc>
+                  <a:txBody>
+                    <a:bodyPr/>
+                    <a:lstStyle/>
+                    <a:p>
+                      <a:pPr algn="ctr"/>
+                      <a:r>
+                        <a:rPr sz="1050" b="0" i="0">
+                          <a:solidFill>
+                            <a:srgbClr val="1F2A37"/>
+                          </a:solidFill>
+                          <a:latin typeface="Calibri"/>
+                        </a:rPr>
+                        <a:t>1.00</a:t>
+                      </a:r>
+                    </a:p>
+                  </a:txBody>
+                  <a:tcPr marL="63500" marR="63500" marT="12700" marB="12700" anchor="ctr">
+                    <a:solidFill>
+                      <a:srgbClr val="FFFFFF"/>
+                    </a:solidFill>
+                  </a:tcPr>
+                </a:tc>
+                <a:tc>
+                  <a:txBody>
+                    <a:bodyPr/>
+                    <a:lstStyle/>
+                    <a:p>
+                      <a:pPr algn="ctr"/>
+                      <a:r>
+                        <a:rPr sz="1050" b="0" i="0">
+                          <a:solidFill>
+                            <a:srgbClr val="1F2A37"/>
+                          </a:solidFill>
+                          <a:latin typeface="Calibri"/>
+                        </a:rPr>
+                        <a:t>31 s</a:t>
+                      </a:r>
+                    </a:p>
+                  </a:txBody>
+                  <a:tcPr marL="63500" marR="63500" marT="12700" marB="12700" anchor="ctr">
+                    <a:solidFill>
+                      <a:srgbClr val="FFFFFF"/>
+                    </a:solidFill>
+                  </a:tcPr>
+                </a:tc>
+                <a:tc>
+                  <a:txBody>
+                    <a:bodyPr/>
+                    <a:lstStyle/>
+                    <a:p>
+                      <a:pPr algn="ctr"/>
+                      <a:r>
+                        <a:rPr sz="1050" b="0" i="0">
+                          <a:solidFill>
+                            <a:srgbClr val="1F2A37"/>
+                          </a:solidFill>
+                          <a:latin typeface="Calibri"/>
+                        </a:rPr>
+                        <a:t>1,564</a:t>
+                      </a:r>
+                    </a:p>
+                  </a:txBody>
+                  <a:tcPr marL="63500" marR="63500" marT="12700" marB="12700" anchor="ctr">
+                    <a:solidFill>
+                      <a:srgbClr val="FFFFFF"/>
+                    </a:solidFill>
+                  </a:tcPr>
+                </a:tc>
+              </a:tr>
+              <a:tr h="291904">
+                <a:tc>
+                  <a:txBody>
+                    <a:bodyPr/>
+                    <a:lstStyle/>
+                    <a:p>
+                      <a:pPr algn="l"/>
+                      <a:r>
+                        <a:rPr sz="1050" b="0" i="0">
+                          <a:solidFill>
+                            <a:srgbClr val="1F2A37"/>
+                          </a:solidFill>
+                          <a:latin typeface="Calibri"/>
+                        </a:rPr>
+                        <a:t>6</a:t>
+                      </a:r>
+                    </a:p>
+                  </a:txBody>
+                  <a:tcPr marL="63500" marR="63500" marT="12700" marB="12700" anchor="ctr">
+                    <a:solidFill>
+                      <a:srgbClr val="F4F6F8"/>
+                    </a:solidFill>
+                  </a:tcPr>
+                </a:tc>
+                <a:tc>
+                  <a:txBody>
+                    <a:bodyPr/>
+                    <a:lstStyle/>
+                    <a:p>
+                      <a:pPr algn="ctr"/>
+                      <a:r>
+                        <a:rPr sz="1050" b="0" i="0">
+                          <a:solidFill>
+                            <a:srgbClr val="1F2A37"/>
+                          </a:solidFill>
+                          <a:latin typeface="Calibri"/>
+                        </a:rPr>
+                        <a:t>gsm8k</a:t>
+                      </a:r>
+                    </a:p>
+                  </a:txBody>
+                  <a:tcPr marL="63500" marR="63500" marT="12700" marB="12700" anchor="ctr">
+                    <a:solidFill>
+                      <a:srgbClr val="F4F6F8"/>
+                    </a:solidFill>
+                  </a:tcPr>
+                </a:tc>
+                <a:tc>
+                  <a:txBody>
+                    <a:bodyPr/>
+                    <a:lstStyle/>
+                    <a:p>
+                      <a:pPr algn="ctr"/>
+                      <a:r>
+                        <a:rPr sz="1050" b="0" i="0">
+                          <a:solidFill>
+                            <a:srgbClr val="1F2A37"/>
+                          </a:solidFill>
+                          <a:latin typeface="Calibri"/>
+                        </a:rPr>
+                        <a:t>1.00</a:t>
+                      </a:r>
+                    </a:p>
+                  </a:txBody>
+                  <a:tcPr marL="63500" marR="63500" marT="12700" marB="12700" anchor="ctr">
+                    <a:solidFill>
+                      <a:srgbClr val="F4F6F8"/>
+                    </a:solidFill>
+                  </a:tcPr>
+                </a:tc>
+                <a:tc>
+                  <a:txBody>
+                    <a:bodyPr/>
+                    <a:lstStyle/>
+                    <a:p>
+                      <a:pPr algn="ctr"/>
+                      <a:r>
+                        <a:rPr sz="1050" b="0" i="0">
+                          <a:solidFill>
+                            <a:srgbClr val="1F2A37"/>
+                          </a:solidFill>
+                          <a:latin typeface="Calibri"/>
+                        </a:rPr>
+                        <a:t>35 s</a:t>
+                      </a:r>
+                    </a:p>
+                  </a:txBody>
+                  <a:tcPr marL="63500" marR="63500" marT="12700" marB="12700" anchor="ctr">
+                    <a:solidFill>
+                      <a:srgbClr val="F4F6F8"/>
+                    </a:solidFill>
+                  </a:tcPr>
+                </a:tc>
+                <a:tc>
+                  <a:txBody>
+                    <a:bodyPr/>
+                    <a:lstStyle/>
+                    <a:p>
+                      <a:pPr algn="ctr"/>
+                      <a:r>
+                        <a:rPr sz="1050" b="0" i="0">
+                          <a:solidFill>
+                            <a:srgbClr val="1F2A37"/>
+                          </a:solidFill>
+                          <a:latin typeface="Calibri"/>
+                        </a:rPr>
+                        <a:t>1,564</a:t>
+                      </a:r>
+                    </a:p>
+                  </a:txBody>
+                  <a:tcPr marL="63500" marR="63500" marT="12700" marB="12700" anchor="ctr">
+                    <a:solidFill>
+                      <a:srgbClr val="F4F6F8"/>
+                    </a:solidFill>
+                  </a:tcPr>
+                </a:tc>
+              </a:tr>
+              <a:tr h="291904">
+                <a:tc>
+                  <a:txBody>
+                    <a:bodyPr/>
+                    <a:lstStyle/>
+                    <a:p>
+                      <a:pPr algn="l"/>
+                      <a:r>
+                        <a:rPr sz="1050" b="0" i="0">
+                          <a:solidFill>
+                            <a:srgbClr val="1F2A37"/>
+                          </a:solidFill>
+                          <a:latin typeface="Calibri"/>
+                        </a:rPr>
+                        <a:t>7</a:t>
+                      </a:r>
+                    </a:p>
+                  </a:txBody>
+                  <a:tcPr marL="63500" marR="63500" marT="12700" marB="12700" anchor="ctr">
+                    <a:solidFill>
+                      <a:srgbClr val="FFFFFF"/>
+                    </a:solidFill>
+                  </a:tcPr>
+                </a:tc>
+                <a:tc>
+                  <a:txBody>
+                    <a:bodyPr/>
+                    <a:lstStyle/>
+                    <a:p>
+                      <a:pPr algn="ctr"/>
+                      <a:r>
+                        <a:rPr sz="1050" b="0" i="0">
+                          <a:solidFill>
+                            <a:srgbClr val="1F2A37"/>
+                          </a:solidFill>
+                          <a:latin typeface="Calibri"/>
+                        </a:rPr>
+                        <a:t>gsm8k</a:t>
+                      </a:r>
+                    </a:p>
+                  </a:txBody>
+                  <a:tcPr marL="63500" marR="63500" marT="12700" marB="12700" anchor="ctr">
+                    <a:solidFill>
+                      <a:srgbClr val="FFFFFF"/>
+                    </a:solidFill>
+                  </a:tcPr>
+                </a:tc>
+                <a:tc>
+                  <a:txBody>
+                    <a:bodyPr/>
+                    <a:lstStyle/>
+                    <a:p>
+                      <a:pPr algn="ctr"/>
+                      <a:r>
+                        <a:rPr sz="1050" b="0" i="0">
+                          <a:solidFill>
+                            <a:srgbClr val="1F2A37"/>
+                          </a:solidFill>
+                          <a:latin typeface="Calibri"/>
+                        </a:rPr>
+                        <a:t>1.00</a:t>
+                      </a:r>
+                    </a:p>
+                  </a:txBody>
+                  <a:tcPr marL="63500" marR="63500" marT="12700" marB="12700" anchor="ctr">
+                    <a:solidFill>
+                      <a:srgbClr val="FFFFFF"/>
+                    </a:solidFill>
+                  </a:tcPr>
+                </a:tc>
+                <a:tc>
+                  <a:txBody>
+                    <a:bodyPr/>
+                    <a:lstStyle/>
+                    <a:p>
+                      <a:pPr algn="ctr"/>
+                      <a:r>
+                        <a:rPr sz="1050" b="0" i="0">
+                          <a:solidFill>
+                            <a:srgbClr val="1F2A37"/>
+                          </a:solidFill>
+                          <a:latin typeface="Calibri"/>
+                        </a:rPr>
+                        <a:t>32 s</a:t>
+                      </a:r>
+                    </a:p>
+                  </a:txBody>
+                  <a:tcPr marL="63500" marR="63500" marT="12700" marB="12700" anchor="ctr">
+                    <a:solidFill>
+                      <a:srgbClr val="FFFFFF"/>
+                    </a:solidFill>
+                  </a:tcPr>
+                </a:tc>
+                <a:tc>
+                  <a:txBody>
+                    <a:bodyPr/>
+                    <a:lstStyle/>
+                    <a:p>
+                      <a:pPr algn="ctr"/>
+                      <a:r>
+                        <a:rPr sz="1050" b="0" i="0">
+                          <a:solidFill>
+                            <a:srgbClr val="1F2A37"/>
+                          </a:solidFill>
+                          <a:latin typeface="Calibri"/>
+                        </a:rPr>
+                        <a:t>1,564</a:t>
+                      </a:r>
+                    </a:p>
+                  </a:txBody>
+                  <a:tcPr marL="63500" marR="63500" marT="12700" marB="12700" anchor="ctr">
+                    <a:solidFill>
+                      <a:srgbClr val="FFFFFF"/>
+                    </a:solidFill>
+                  </a:tcPr>
+                </a:tc>
+              </a:tr>
+              <a:tr h="291904">
+                <a:tc>
+                  <a:txBody>
+                    <a:bodyPr/>
+                    <a:lstStyle/>
+                    <a:p>
+                      <a:pPr algn="l"/>
+                      <a:r>
+                        <a:rPr sz="1050" b="0" i="0">
+                          <a:solidFill>
+                            <a:srgbClr val="1F2A37"/>
+                          </a:solidFill>
+                          <a:latin typeface="Calibri"/>
+                        </a:rPr>
+                        <a:t>8</a:t>
+                      </a:r>
+                    </a:p>
+                  </a:txBody>
+                  <a:tcPr marL="63500" marR="63500" marT="12700" marB="12700" anchor="ctr">
+                    <a:solidFill>
+                      <a:srgbClr val="F4F6F8"/>
+                    </a:solidFill>
+                  </a:tcPr>
+                </a:tc>
+                <a:tc>
+                  <a:txBody>
+                    <a:bodyPr/>
+                    <a:lstStyle/>
+                    <a:p>
+                      <a:pPr algn="ctr"/>
+                      <a:r>
+                        <a:rPr sz="1050" b="0" i="0">
+                          <a:solidFill>
+                            <a:srgbClr val="1F2A37"/>
+                          </a:solidFill>
+                          <a:latin typeface="Calibri"/>
+                        </a:rPr>
+                        <a:t>gsm8k</a:t>
+                      </a:r>
+                    </a:p>
+                  </a:txBody>
+                  <a:tcPr marL="63500" marR="63500" marT="12700" marB="12700" anchor="ctr">
+                    <a:solidFill>
+                      <a:srgbClr val="F4F6F8"/>
+                    </a:solidFill>
+                  </a:tcPr>
+                </a:tc>
+                <a:tc>
+                  <a:txBody>
+                    <a:bodyPr/>
+                    <a:lstStyle/>
+                    <a:p>
+                      <a:pPr algn="ctr"/>
+                      <a:r>
+                        <a:rPr sz="1050" b="0" i="0">
+                          <a:solidFill>
+                            <a:srgbClr val="1F2A37"/>
+                          </a:solidFill>
+                          <a:latin typeface="Calibri"/>
+                        </a:rPr>
+                        <a:t>1.00</a:t>
+                      </a:r>
+                    </a:p>
+                  </a:txBody>
+                  <a:tcPr marL="63500" marR="63500" marT="12700" marB="12700" anchor="ctr">
+                    <a:solidFill>
+                      <a:srgbClr val="F4F6F8"/>
+                    </a:solidFill>
+                  </a:tcPr>
+                </a:tc>
+                <a:tc>
+                  <a:txBody>
+                    <a:bodyPr/>
+                    <a:lstStyle/>
+                    <a:p>
+                      <a:pPr algn="ctr"/>
+                      <a:r>
+                        <a:rPr sz="1050" b="0" i="0">
+                          <a:solidFill>
+                            <a:srgbClr val="1F2A37"/>
+                          </a:solidFill>
+                          <a:latin typeface="Calibri"/>
+                        </a:rPr>
+                        <a:t>30 s</a:t>
+                      </a:r>
+                    </a:p>
+                  </a:txBody>
+                  <a:tcPr marL="63500" marR="63500" marT="12700" marB="12700" anchor="ctr">
+                    <a:solidFill>
+                      <a:srgbClr val="F4F6F8"/>
+                    </a:solidFill>
+                  </a:tcPr>
+                </a:tc>
+                <a:tc>
+                  <a:txBody>
+                    <a:bodyPr/>
+                    <a:lstStyle/>
+                    <a:p>
+                      <a:pPr algn="ctr"/>
+                      <a:r>
+                        <a:rPr sz="1050" b="0" i="0">
+                          <a:solidFill>
+                            <a:srgbClr val="1F2A37"/>
+                          </a:solidFill>
+                          <a:latin typeface="Calibri"/>
+                        </a:rPr>
+                        <a:t>1,564</a:t>
+                      </a:r>
+                    </a:p>
+                  </a:txBody>
+                  <a:tcPr marL="63500" marR="63500" marT="12700" marB="12700" anchor="ctr">
+                    <a:solidFill>
+                      <a:srgbClr val="F4F6F8"/>
+                    </a:solidFill>
+                  </a:tcPr>
+                </a:tc>
+              </a:tr>
+              <a:tr h="291904">
+                <a:tc>
+                  <a:txBody>
+                    <a:bodyPr/>
+                    <a:lstStyle/>
+                    <a:p>
+                      <a:pPr algn="l"/>
+                      <a:r>
+                        <a:rPr sz="1050" b="0" i="0">
+                          <a:solidFill>
+                            <a:srgbClr val="1F2A37"/>
+                          </a:solidFill>
+                          <a:latin typeface="Calibri"/>
+                        </a:rPr>
+                        <a:t>9</a:t>
+                      </a:r>
+                    </a:p>
+                  </a:txBody>
+                  <a:tcPr marL="63500" marR="63500" marT="12700" marB="12700" anchor="ctr">
+                    <a:solidFill>
+                      <a:srgbClr val="FFFFFF"/>
+                    </a:solidFill>
+                  </a:tcPr>
+                </a:tc>
+                <a:tc>
+                  <a:txBody>
+                    <a:bodyPr/>
+                    <a:lstStyle/>
+                    <a:p>
+                      <a:pPr algn="ctr"/>
+                      <a:r>
+                        <a:rPr sz="1050" b="0" i="0">
+                          <a:solidFill>
+                            <a:srgbClr val="1F2A37"/>
+                          </a:solidFill>
+                          <a:latin typeface="Calibri"/>
+                        </a:rPr>
+                        <a:t>tau2</a:t>
+                      </a:r>
+                    </a:p>
+                  </a:txBody>
+                  <a:tcPr marL="63500" marR="63500" marT="12700" marB="12700" anchor="ctr">
+                    <a:solidFill>
+                      <a:srgbClr val="FFFFFF"/>
+                    </a:solidFill>
+                  </a:tcPr>
+                </a:tc>
+                <a:tc>
+                  <a:txBody>
+                    <a:bodyPr/>
+                    <a:lstStyle/>
+                    <a:p>
+                      <a:pPr algn="ctr"/>
+                      <a:r>
+                        <a:rPr sz="1050" b="0" i="0">
+                          <a:solidFill>
+                            <a:srgbClr val="1F2A37"/>
+                          </a:solidFill>
+                          <a:latin typeface="Calibri"/>
+                        </a:rPr>
+                        <a:t>0.70</a:t>
+                      </a:r>
+                    </a:p>
+                  </a:txBody>
+                  <a:tcPr marL="63500" marR="63500" marT="12700" marB="12700" anchor="ctr">
+                    <a:solidFill>
+                      <a:srgbClr val="FFFFFF"/>
+                    </a:solidFill>
+                  </a:tcPr>
+                </a:tc>
+                <a:tc>
+                  <a:txBody>
+                    <a:bodyPr/>
+                    <a:lstStyle/>
+                    <a:p>
+                      <a:pPr algn="ctr"/>
+                      <a:r>
+                        <a:rPr sz="1050" b="0" i="0">
+                          <a:solidFill>
+                            <a:srgbClr val="1F2A37"/>
+                          </a:solidFill>
+                          <a:latin typeface="Calibri"/>
+                        </a:rPr>
+                        <a:t>780 s</a:t>
+                      </a:r>
+                    </a:p>
+                  </a:txBody>
+                  <a:tcPr marL="63500" marR="63500" marT="12700" marB="12700" anchor="ctr">
+                    <a:solidFill>
+                      <a:srgbClr val="FFFFFF"/>
+                    </a:solidFill>
+                  </a:tcPr>
+                </a:tc>
+                <a:tc>
+                  <a:txBody>
+                    <a:bodyPr/>
+                    <a:lstStyle/>
+                    <a:p>
+                      <a:pPr algn="ctr"/>
+                      <a:r>
+                        <a:rPr sz="1050" b="0" i="0">
+                          <a:solidFill>
+                            <a:srgbClr val="1F2A37"/>
+                          </a:solidFill>
+                          <a:latin typeface="Calibri"/>
+                        </a:rPr>
+                        <a:t>852,240</a:t>
+                      </a:r>
+                    </a:p>
+                  </a:txBody>
+                  <a:tcPr marL="63500" marR="63500" marT="12700" marB="12700" anchor="ctr">
+                    <a:solidFill>
+                      <a:srgbClr val="FFFFFF"/>
+                    </a:solidFill>
+                  </a:tcPr>
+                </a:tc>
+              </a:tr>
+              <a:tr h="291904">
+                <a:tc>
+                  <a:txBody>
+                    <a:bodyPr/>
+                    <a:lstStyle/>
+                    <a:p>
+                      <a:pPr algn="l"/>
+                      <a:r>
+                        <a:rPr sz="1050" b="0" i="0">
+                          <a:solidFill>
+                            <a:srgbClr val="1F2A37"/>
+                          </a:solidFill>
+                          <a:latin typeface="Calibri"/>
+                        </a:rPr>
+                        <a:t>10</a:t>
+                      </a:r>
+                    </a:p>
+                  </a:txBody>
+                  <a:tcPr marL="63500" marR="63500" marT="12700" marB="12700" anchor="ctr">
+                    <a:solidFill>
+                      <a:srgbClr val="F4F6F8"/>
+                    </a:solidFill>
+                  </a:tcPr>
+                </a:tc>
+                <a:tc>
+                  <a:txBody>
+                    <a:bodyPr/>
+                    <a:lstStyle/>
+                    <a:p>
+                      <a:pPr algn="ctr"/>
+                      <a:r>
+                        <a:rPr sz="1050" b="0" i="0">
+                          <a:solidFill>
+                            <a:srgbClr val="1F2A37"/>
+                          </a:solidFill>
+                          <a:latin typeface="Calibri"/>
+                        </a:rPr>
+                        <a:t>tau2</a:t>
+                      </a:r>
+                    </a:p>
+                  </a:txBody>
+                  <a:tcPr marL="63500" marR="63500" marT="12700" marB="12700" anchor="ctr">
+                    <a:solidFill>
+                      <a:srgbClr val="F4F6F8"/>
+                    </a:solidFill>
+                  </a:tcPr>
+                </a:tc>
+                <a:tc>
+                  <a:txBody>
+                    <a:bodyPr/>
+                    <a:lstStyle/>
+                    <a:p>
+                      <a:pPr algn="ctr"/>
+                      <a:r>
+                        <a:rPr sz="1050" b="0" i="0">
+                          <a:solidFill>
+                            <a:srgbClr val="1F2A37"/>
+                          </a:solidFill>
+                          <a:latin typeface="Calibri"/>
+                        </a:rPr>
+                        <a:t>0.85</a:t>
+                      </a:r>
+                    </a:p>
+                  </a:txBody>
+                  <a:tcPr marL="63500" marR="63500" marT="12700" marB="12700" anchor="ctr">
+                    <a:solidFill>
+                      <a:srgbClr val="F4F6F8"/>
+                    </a:solidFill>
+                  </a:tcPr>
+                </a:tc>
+                <a:tc>
+                  <a:txBody>
+                    <a:bodyPr/>
+                    <a:lstStyle/>
+                    <a:p>
+                      <a:pPr algn="ctr"/>
+                      <a:r>
+                        <a:rPr sz="1050" b="0" i="0">
+                          <a:solidFill>
+                            <a:srgbClr val="1F2A37"/>
+                          </a:solidFill>
+                          <a:latin typeface="Calibri"/>
+                        </a:rPr>
+                        <a:t>425 s</a:t>
+                      </a:r>
+                    </a:p>
+                  </a:txBody>
+                  <a:tcPr marL="63500" marR="63500" marT="12700" marB="12700" anchor="ctr">
+                    <a:solidFill>
+                      <a:srgbClr val="F4F6F8"/>
+                    </a:solidFill>
+                  </a:tcPr>
+                </a:tc>
+                <a:tc>
+                  <a:txBody>
+                    <a:bodyPr/>
+                    <a:lstStyle/>
+                    <a:p>
+                      <a:pPr algn="ctr"/>
+                      <a:r>
+                        <a:rPr sz="1050" b="0" i="0">
+                          <a:solidFill>
+                            <a:srgbClr val="1F2A37"/>
+                          </a:solidFill>
+                          <a:latin typeface="Calibri"/>
+                        </a:rPr>
+                        <a:t>1,550,718</a:t>
+                      </a:r>
+                    </a:p>
+                  </a:txBody>
+                  <a:tcPr marL="63500" marR="63500" marT="12700" marB="12700" anchor="ctr">
+                    <a:solidFill>
+                      <a:srgbClr val="F4F6F8"/>
+                    </a:solidFill>
+                  </a:tcPr>
+                </a:tc>
+              </a:tr>
+              <a:tr h="291904">
+                <a:tc>
+                  <a:txBody>
+                    <a:bodyPr/>
+                    <a:lstStyle/>
+                    <a:p>
+                      <a:pPr algn="l"/>
+                      <a:r>
+                        <a:rPr sz="1050" b="0" i="0">
+                          <a:solidFill>
+                            <a:srgbClr val="1F2A37"/>
+                          </a:solidFill>
+                          <a:latin typeface="Calibri"/>
+                        </a:rPr>
+                        <a:t>11</a:t>
+                      </a:r>
+                    </a:p>
+                  </a:txBody>
+                  <a:tcPr marL="63500" marR="63500" marT="12700" marB="12700" anchor="ctr">
+                    <a:solidFill>
+                      <a:srgbClr val="FFFFFF"/>
+                    </a:solidFill>
+                  </a:tcPr>
+                </a:tc>
+                <a:tc>
+                  <a:txBody>
+                    <a:bodyPr/>
+                    <a:lstStyle/>
+                    <a:p>
+                      <a:pPr algn="ctr"/>
+                      <a:r>
+                        <a:rPr sz="1050" b="0" i="0">
+                          <a:solidFill>
+                            <a:srgbClr val="1F2A37"/>
+                          </a:solidFill>
+                          <a:latin typeface="Calibri"/>
+                        </a:rPr>
+                        <a:t>appworld</a:t>
+                      </a:r>
+                    </a:p>
+                  </a:txBody>
+                  <a:tcPr marL="63500" marR="63500" marT="12700" marB="12700" anchor="ctr">
+                    <a:solidFill>
+                      <a:srgbClr val="FFFFFF"/>
+                    </a:solidFill>
+                  </a:tcPr>
+                </a:tc>
+                <a:tc>
+                  <a:txBody>
+                    <a:bodyPr/>
+                    <a:lstStyle/>
+                    <a:p>
+                      <a:pPr algn="ctr"/>
+                      <a:r>
+                        <a:rPr sz="1050" b="0" i="0">
+                          <a:solidFill>
+                            <a:srgbClr val="1F2A37"/>
+                          </a:solidFill>
+                          <a:latin typeface="Calibri"/>
+                        </a:rPr>
+                        <a:t>0.00</a:t>
+                      </a:r>
+                    </a:p>
+                  </a:txBody>
+                  <a:tcPr marL="63500" marR="63500" marT="12700" marB="12700" anchor="ctr">
+                    <a:solidFill>
+                      <a:srgbClr val="FFFFFF"/>
+                    </a:solidFill>
+                  </a:tcPr>
+                </a:tc>
+                <a:tc>
+                  <a:txBody>
+                    <a:bodyPr/>
+                    <a:lstStyle/>
+                    <a:p>
+                      <a:pPr algn="ctr"/>
+                      <a:r>
+                        <a:rPr sz="1050" b="0" i="0">
+                          <a:solidFill>
+                            <a:srgbClr val="1F2A37"/>
+                          </a:solidFill>
+                          <a:latin typeface="Calibri"/>
+                        </a:rPr>
+                        <a:t>2164 s</a:t>
+                      </a:r>
+                    </a:p>
+                  </a:txBody>
+                  <a:tcPr marL="63500" marR="63500" marT="12700" marB="12700" anchor="ctr">
+                    <a:solidFill>
+                      <a:srgbClr val="FFFFFF"/>
+                    </a:solidFill>
+                  </a:tcPr>
+                </a:tc>
+                <a:tc>
+                  <a:txBody>
+                    <a:bodyPr/>
+                    <a:lstStyle/>
+                    <a:p>
+                      <a:pPr algn="ctr"/>
+                      <a:r>
+                        <a:rPr sz="1050" b="0" i="0">
+                          <a:solidFill>
+                            <a:srgbClr val="1F2A37"/>
+                          </a:solidFill>
+                          <a:latin typeface="Calibri"/>
+                        </a:rPr>
+                        <a:t>1,988,986</a:t>
+                      </a:r>
+                    </a:p>
+                  </a:txBody>
+                  <a:tcPr marL="63500" marR="63500" marT="12700" marB="12700" anchor="ctr">
+                    <a:solidFill>
+                      <a:srgbClr val="FFFFFF"/>
+                    </a:solidFill>
+                  </a:tcPr>
+                </a:tc>
+              </a:tr>
+              <a:tr h="291912">
+                <a:tc>
+                  <a:txBody>
+                    <a:bodyPr/>
+                    <a:lstStyle/>
+                    <a:p>
+                      <a:pPr algn="l"/>
+                      <a:r>
+                        <a:rPr sz="1050" b="0" i="0">
+                          <a:solidFill>
+                            <a:srgbClr val="1F2A37"/>
+                          </a:solidFill>
+                          <a:latin typeface="Calibri"/>
+                        </a:rPr>
+                        <a:t>12</a:t>
+                      </a:r>
+                    </a:p>
+                  </a:txBody>
+                  <a:tcPr marL="63500" marR="63500" marT="12700" marB="12700" anchor="ctr">
+                    <a:solidFill>
+                      <a:srgbClr val="F4F6F8"/>
+                    </a:solidFill>
+                  </a:tcPr>
+                </a:tc>
+                <a:tc>
+                  <a:txBody>
+                    <a:bodyPr/>
+                    <a:lstStyle/>
+                    <a:p>
+                      <a:pPr algn="ctr"/>
+                      <a:r>
+                        <a:rPr sz="1050" b="0" i="0">
+                          <a:solidFill>
+                            <a:srgbClr val="1F2A37"/>
+                          </a:solidFill>
+                          <a:latin typeface="Calibri"/>
+                        </a:rPr>
+                        <a:t>appworld</a:t>
+                      </a:r>
+                    </a:p>
+                  </a:txBody>
+                  <a:tcPr marL="63500" marR="63500" marT="12700" marB="12700" anchor="ctr">
+                    <a:solidFill>
+                      <a:srgbClr val="F4F6F8"/>
+                    </a:solidFill>
+                  </a:tcPr>
+                </a:tc>
+                <a:tc>
+                  <a:txBody>
+                    <a:bodyPr/>
+                    <a:lstStyle/>
+                    <a:p>
+                      <a:pPr algn="ctr"/>
+                      <a:r>
+                        <a:rPr sz="1050" b="0" i="0">
+                          <a:solidFill>
+                            <a:srgbClr val="1F2A37"/>
+                          </a:solidFill>
+                          <a:latin typeface="Calibri"/>
+                        </a:rPr>
+                        <a:t>0.00</a:t>
+                      </a:r>
+                    </a:p>
+                  </a:txBody>
+                  <a:tcPr marL="63500" marR="63500" marT="12700" marB="12700" anchor="ctr">
+                    <a:solidFill>
+                      <a:srgbClr val="F4F6F8"/>
+                    </a:solidFill>
+                  </a:tcPr>
+                </a:tc>
+                <a:tc>
+                  <a:txBody>
+                    <a:bodyPr/>
+                    <a:lstStyle/>
+                    <a:p>
+                      <a:pPr algn="ctr"/>
+                      <a:r>
+                        <a:rPr sz="1050" b="0" i="0">
+                          <a:solidFill>
+                            <a:srgbClr val="1F2A37"/>
+                          </a:solidFill>
+                          <a:latin typeface="Calibri"/>
+                        </a:rPr>
+                        <a:t>1769 s</a:t>
+                      </a:r>
+                    </a:p>
+                  </a:txBody>
+                  <a:tcPr marL="63500" marR="63500" marT="12700" marB="12700" anchor="ctr">
+                    <a:solidFill>
+                      <a:srgbClr val="F4F6F8"/>
+                    </a:solidFill>
+                  </a:tcPr>
+                </a:tc>
+                <a:tc>
+                  <a:txBody>
+                    <a:bodyPr/>
+                    <a:lstStyle/>
+                    <a:p>
+                      <a:pPr algn="ctr"/>
+                      <a:r>
+                        <a:rPr sz="1050" b="0" i="0">
+                          <a:solidFill>
+                            <a:srgbClr val="1F2A37"/>
+                          </a:solidFill>
+                          <a:latin typeface="Calibri"/>
+                        </a:rPr>
+                        <a:t>4,009,033</a:t>
+                      </a:r>
+                    </a:p>
+                  </a:txBody>
+                  <a:tcPr marL="63500" marR="63500" marT="12700" marB="12700" anchor="ctr">
+                    <a:solidFill>
+                      <a:srgbClr val="F4F6F8"/>
+                    </a:solidFill>
+                  </a:tcPr>
+                </a:tc>
+              </a:tr>
+            </a:tbl>
+          </a:graphicData>
+        </a:graphic>
+      </p:graphicFrame>
+      <p:sp>
+        <p:nvSpPr>
+          <p:cNvPr id="4" name="Rounded Rectangle 3"/>
+          <p:cNvSpPr/>
+          <p:nvPr/>
+        </p:nvSpPr>
+        <p:spPr>
+          <a:xfrm>
+            <a:off x="6172200" y="1188720"/>
+            <a:ext cx="5577840" cy="731520"/>
+          </a:xfrm>
+          <a:prstGeom prst="roundRect">
+            <a:avLst/>
+          </a:prstGeom>
+          <a:solidFill>
+            <a:srgbClr val="E8F1FB"/>
+          </a:solidFill>
+          <a:ln w="12700">
+            <a:solidFill>
+              <a:srgbClr val="2E6FB5"/>
+            </a:solidFill>
+          </a:ln>
+          <a:effectLst/>
+        </p:spPr>
+        <p:style>
+          <a:lnRef idx="1">
+            <a:schemeClr val="accent1"/>
+          </a:lnRef>
+          <a:fillRef idx="3">
+            <a:schemeClr val="accent1"/>
+          </a:fillRef>
+          <a:effectRef idx="2">
+            <a:schemeClr val="accent1"/>
+          </a:effectRef>
+          <a:fontRef idx="minor">
+            <a:schemeClr val="lt1"/>
+          </a:fontRef>
+        </p:style>
+        <p:txBody>
+          <a:bodyPr rtlCol="0" anchor="t" wrap="square" tIns="63500" bIns="25400" lIns="127000"/>
+          <a:lstStyle/>
+          <a:p>
+            <a:pPr algn="l"/>
+            <a:r>
+              <a:rPr sz="1200" b="1" i="0">
+                <a:solidFill>
+                  <a:srgbClr val="1F2A37"/>
+                </a:solidFill>
+                <a:latin typeface="Calibri"/>
+              </a:rPr>
+              <a:t>All eight gsm8k legs pass</a:t>
+            </a:r>
+          </a:p>
+          <a:p>
+            <a:pPr algn="l"/>
+            <a:r>
+              <a:rPr sz="1000" b="0" i="0">
+                <a:solidFill>
+                  <a:srgbClr val="3A4654"/>
+                </a:solidFill>
+                <a:latin typeface="Calibri"/>
+              </a:rPr>
+              <a:t>1.00 everywhere except #4, where ONE task of five fails on the gpt-4.1 swap. The four AuthBridge presets do not change the result — only the latency.</a:t>
+            </a:r>
+          </a:p>
+        </p:txBody>
+      </p:sp>
+      <p:sp>
+        <p:nvSpPr>
+          <p:cNvPr id="5" name="Rounded Rectangle 4"/>
+          <p:cNvSpPr/>
+          <p:nvPr/>
+        </p:nvSpPr>
+        <p:spPr>
+          <a:xfrm>
+            <a:off x="6172200" y="1975104"/>
+            <a:ext cx="5577840" cy="731520"/>
+          </a:xfrm>
+          <a:prstGeom prst="roundRect">
+            <a:avLst/>
+          </a:prstGeom>
+          <a:solidFill>
+            <a:srgbClr val="E8F1FB"/>
+          </a:solidFill>
+          <a:ln w="12700">
+            <a:solidFill>
+              <a:srgbClr val="2E6FB5"/>
+            </a:solidFill>
+          </a:ln>
+          <a:effectLst/>
+        </p:spPr>
+        <p:style>
+          <a:lnRef idx="1">
+            <a:schemeClr val="accent1"/>
+          </a:lnRef>
+          <a:fillRef idx="3">
+            <a:schemeClr val="accent1"/>
+          </a:fillRef>
+          <a:effectRef idx="2">
+            <a:schemeClr val="accent1"/>
+          </a:effectRef>
+          <a:fontRef idx="minor">
+            <a:schemeClr val="lt1"/>
+          </a:fontRef>
+        </p:style>
+        <p:txBody>
+          <a:bodyPr rtlCol="0" anchor="t" wrap="square" tIns="63500" bIns="25400" lIns="127000"/>
+          <a:lstStyle/>
+          <a:p>
+            <a:pPr algn="l"/>
+            <a:r>
+              <a:rPr sz="1200" b="1" i="0">
+                <a:solidFill>
+                  <a:srgbClr val="1F2A37"/>
+                </a:solidFill>
+                <a:latin typeface="Calibri"/>
+              </a:rPr>
+              <a:t>tau2 is the only leg that moves</a:t>
+            </a:r>
+          </a:p>
+          <a:p>
+            <a:pPr algn="l"/>
+            <a:r>
+              <a:rPr sz="1000" b="0" i="0">
+                <a:solidFill>
+                  <a:srgbClr val="3A4654"/>
+                </a:solidFill>
+                <a:latin typeface="Calibri"/>
+              </a:rPr>
+              <a:t>0.70 and 0.85. Across six samples of the same 10 tasks, four flip: at n=10 one task is worth 0.10, so this cannot resolve less than that.</a:t>
+            </a:r>
+          </a:p>
+        </p:txBody>
+      </p:sp>
+      <p:sp>
+        <p:nvSpPr>
+          <p:cNvPr id="6" name="Rounded Rectangle 5"/>
+          <p:cNvSpPr/>
+          <p:nvPr/>
+        </p:nvSpPr>
+        <p:spPr>
+          <a:xfrm>
+            <a:off x="6172200" y="2761488"/>
+            <a:ext cx="5577840" cy="731520"/>
+          </a:xfrm>
+          <a:prstGeom prst="roundRect">
+            <a:avLst/>
+          </a:prstGeom>
+          <a:solidFill>
+            <a:srgbClr val="E8F1FB"/>
+          </a:solidFill>
+          <a:ln w="12700">
+            <a:solidFill>
+              <a:srgbClr val="2E6FB5"/>
+            </a:solidFill>
+          </a:ln>
+          <a:effectLst/>
+        </p:spPr>
+        <p:style>
+          <a:lnRef idx="1">
+            <a:schemeClr val="accent1"/>
+          </a:lnRef>
+          <a:fillRef idx="3">
+            <a:schemeClr val="accent1"/>
+          </a:fillRef>
+          <a:effectRef idx="2">
+            <a:schemeClr val="accent1"/>
+          </a:effectRef>
+          <a:fontRef idx="minor">
+            <a:schemeClr val="lt1"/>
+          </a:fontRef>
+        </p:style>
+        <p:txBody>
+          <a:bodyPr rtlCol="0" anchor="t" wrap="square" tIns="63500" bIns="25400" lIns="127000"/>
+          <a:lstStyle/>
+          <a:p>
+            <a:pPr algn="l"/>
+            <a:r>
+              <a:rPr sz="1200" b="1" i="0">
+                <a:solidFill>
+                  <a:srgbClr val="1F2A37"/>
+                </a:solidFill>
+                <a:latin typeface="Calibri"/>
+              </a:rPr>
+              <a:t>appworld 0.00 is the honest result</a:t>
+            </a:r>
+          </a:p>
+          <a:p>
+            <a:pPr algn="l"/>
+            <a:r>
+              <a:rPr sz="1000" b="0" i="0">
+                <a:solidFill>
+                  <a:srgbClr val="3A4654"/>
+                </a:solidFill>
+                <a:latin typeface="Calibri"/>
+              </a:rPr>
+              <a:t>Runs complete, tokens record, evaluation says the goal was not met. ~94% of tasks self-declare finish.</a:t>
+            </a:r>
+          </a:p>
+        </p:txBody>
+      </p:sp>
+      <p:sp>
+        <p:nvSpPr>
+          <p:cNvPr id="7" name="Rounded Rectangle 6"/>
+          <p:cNvSpPr/>
+          <p:nvPr/>
+        </p:nvSpPr>
+        <p:spPr>
+          <a:xfrm>
+            <a:off x="6172200" y="3547872"/>
+            <a:ext cx="5577840" cy="731520"/>
+          </a:xfrm>
+          <a:prstGeom prst="roundRect">
+            <a:avLst/>
+          </a:prstGeom>
+          <a:solidFill>
+            <a:srgbClr val="E8F1FB"/>
+          </a:solidFill>
+          <a:ln w="12700">
+            <a:solidFill>
+              <a:srgbClr val="2E6FB5"/>
+            </a:solidFill>
+          </a:ln>
+          <a:effectLst/>
+        </p:spPr>
+        <p:style>
+          <a:lnRef idx="1">
+            <a:schemeClr val="accent1"/>
+          </a:lnRef>
+          <a:fillRef idx="3">
+            <a:schemeClr val="accent1"/>
+          </a:fillRef>
+          <a:effectRef idx="2">
+            <a:schemeClr val="accent1"/>
+          </a:effectRef>
+          <a:fontRef idx="minor">
+            <a:schemeClr val="lt1"/>
+          </a:fontRef>
+        </p:style>
+        <p:txBody>
+          <a:bodyPr rtlCol="0" anchor="t" wrap="square" tIns="63500" bIns="25400" lIns="127000"/>
+          <a:lstStyle/>
+          <a:p>
+            <a:pPr algn="l"/>
+            <a:r>
+              <a:rPr sz="1200" b="1" i="0">
+                <a:solidFill>
+                  <a:srgbClr val="1F2A37"/>
+                </a:solidFill>
+                <a:latin typeface="Calibri"/>
+              </a:rPr>
+              <a:t>Token attribution complete: 0 of 138 rows lost</a:t>
+            </a:r>
+          </a:p>
+          <a:p>
+            <a:pPr algn="l"/>
+            <a:r>
+              <a:rPr sz="1000" b="0" i="0">
+                <a:solidFill>
+                  <a:srgbClr val="3A4654"/>
+                </a:solidFill>
+                <a:latin typeface="Calibri"/>
+              </a:rPr>
+              <a:t>The previous matrix had 15 damaged rows that a tokens == 0 check reported as clean. Fresh deploy per leg, plus a structural detector.</a:t>
+            </a:r>
+          </a:p>
+        </p:txBody>
+      </p:sp>
+      <p:sp>
+        <p:nvSpPr>
+          <p:cNvPr id="8" name="Rounded Rectangle 7"/>
+          <p:cNvSpPr/>
+          <p:nvPr/>
+        </p:nvSpPr>
+        <p:spPr>
+          <a:xfrm>
+            <a:off x="6172200" y="4334256"/>
+            <a:ext cx="5577840" cy="731520"/>
+          </a:xfrm>
+          <a:prstGeom prst="roundRect">
+            <a:avLst/>
+          </a:prstGeom>
+          <a:solidFill>
+            <a:srgbClr val="E8F1FB"/>
+          </a:solidFill>
+          <a:ln w="12700">
+            <a:solidFill>
+              <a:srgbClr val="2E6FB5"/>
+            </a:solidFill>
+          </a:ln>
+          <a:effectLst/>
+        </p:spPr>
+        <p:style>
+          <a:lnRef idx="1">
+            <a:schemeClr val="accent1"/>
+          </a:lnRef>
+          <a:fillRef idx="3">
+            <a:schemeClr val="accent1"/>
+          </a:fillRef>
+          <a:effectRef idx="2">
+            <a:schemeClr val="accent1"/>
+          </a:effectRef>
+          <a:fontRef idx="minor">
+            <a:schemeClr val="lt1"/>
+          </a:fontRef>
+        </p:style>
+        <p:txBody>
+          <a:bodyPr rtlCol="0" anchor="t" wrap="square" tIns="63500" bIns="25400" lIns="127000"/>
+          <a:lstStyle/>
+          <a:p>
+            <a:pPr algn="l"/>
+            <a:r>
+              <a:rPr sz="1200" b="1" i="0">
+                <a:solidFill>
+                  <a:srgbClr val="1F2A37"/>
+                </a:solidFill>
+                <a:latin typeface="Calibri"/>
+              </a:rPr>
+              <a:t>8.4M input / 674k output tokens</a:t>
+            </a:r>
+          </a:p>
+          <a:p>
+            <a:pPr algn="l"/>
+            <a:r>
+              <a:rPr sz="1000" b="0" i="0">
+                <a:solidFill>
+                  <a:srgbClr val="3A4654"/>
+                </a:solidFill>
+                <a:latin typeface="Calibri"/>
+              </a:rPr>
+              <a:t>over 5,438 s of wall time — appworld alone is 71% of the input, on 25 of 138 tasks.</a:t>
+            </a:r>
+          </a:p>
+        </p:txBody>
+      </p:sp>
+    </p:spTree>
+  </p:cSld>
+  <p:clrMapOvr>
+    <a:masterClrMapping/>
+  </p:clrMapOvr>
+</p:sld>
+</file>
+
+<file path=ppt/slides/slide13.xml><?xml version="1.0" encoding="utf-8"?>
+<p:sld xmlns:a="http://schemas.openxmlformats.org/drawingml/2006/main" xmlns:p="http://schemas.openxmlformats.org/presentationml/2006/main" xmlns:r="http://schemas.openxmlformats.org/officeDocument/2006/relationships">
+  <p:cSld>
+    <p:spTree>
+      <p:nvGrpSpPr>
+        <p:cNvPr id="1" name=""/>
+        <p:cNvGrpSpPr/>
+        <p:nvPr/>
+      </p:nvGrpSpPr>
+      <p:grpSpPr/>
+      <p:sp>
+        <p:nvSpPr>
+          <p:cNvPr id="2" name="Rectangle 1"/>
+          <p:cNvSpPr/>
+          <p:nvPr/>
+        </p:nvSpPr>
+        <p:spPr>
+          <a:xfrm>
+            <a:off x="0" y="0"/>
+            <a:ext cx="12192000" cy="950000"/>
+          </a:xfrm>
+          <a:prstGeom prst="rect">
+            <a:avLst/>
+          </a:prstGeom>
+          <a:solidFill>
+            <a:srgbClr val="1B3A5C"/>
+          </a:solidFill>
+          <a:ln>
+            <a:noFill/>
+          </a:ln>
+          <a:effectLst/>
+        </p:spPr>
+        <p:style>
+          <a:lnRef idx="1">
+            <a:schemeClr val="accent1"/>
+          </a:lnRef>
+          <a:fillRef idx="3">
+            <a:schemeClr val="accent1"/>
+          </a:fillRef>
+          <a:effectRef idx="2">
+            <a:schemeClr val="accent1"/>
+          </a:effectRef>
+          <a:fontRef idx="minor">
+            <a:schemeClr val="lt1"/>
+          </a:fontRef>
+        </p:style>
+        <p:txBody>
+          <a:bodyPr rtlCol="0" anchor="ctr" lIns="355600"/>
+          <a:lstStyle/>
+          <a:p>
+            <a:pPr algn="ctr"/>
+            <a:r>
+              <a:rPr sz="2600" b="1" i="0">
+                <a:solidFill>
+                  <a:srgbClr val="FFFFFF"/>
+                </a:solidFill>
+                <a:latin typeface="Calibri"/>
+              </a:rPr>
+              <a:t>8.1  OpenShift vs KinD — Like-for-Like</a:t>
+            </a:r>
+          </a:p>
+          <a:p>
+            <a:r>
+              <a:rPr sz="1400" b="0" i="0">
+                <a:solidFill>
+                  <a:srgbClr val="C9D9EC"/>
+                </a:solidFill>
+                <a:latin typeface="Calibri"/>
+              </a:rPr>
+              <a:t>Same 12 request bodies, same Service version, verified-identical instance config</a:t>
+            </a:r>
+          </a:p>
+        </p:txBody>
+      </p:sp>
+      <p:graphicFrame>
+        <p:nvGraphicFramePr>
+          <p:cNvPr id="3" name="Table 2"/>
+          <p:cNvGraphicFramePr>
+            <a:graphicFrameLocks noGrp="1"/>
+          </p:cNvGraphicFramePr>
+          <p:nvPr/>
+        </p:nvGraphicFramePr>
+        <p:xfrm>
+          <a:off x="411480" y="1188720"/>
+          <a:ext cx="6903720" cy="3840480"/>
+        </p:xfrm>
+        <a:graphic>
+          <a:graphicData uri="http://schemas.openxmlformats.org/drawingml/2006/table">
+            <a:tbl>
+              <a:tblPr firstRow="1">
+                <a:tableStyleId>{5C22544A-7EE6-4342-B048-85BDC9FD1C3A}</a:tableStyleId>
+              </a:tblPr>
+              <a:tblGrid>
+                <a:gridCol w="502920"/>
+                <a:gridCol w="1143000"/>
+                <a:gridCol w="868680"/>
+                <a:gridCol w="914400"/>
+                <a:gridCol w="1234440"/>
+                <a:gridCol w="1234440"/>
+                <a:gridCol w="1005840"/>
+              </a:tblGrid>
+              <a:tr h="295421">
+                <a:tc>
+                  <a:txBody>
+                    <a:bodyPr/>
+                    <a:lstStyle/>
+                    <a:p>
+                      <a:pPr algn="l"/>
+                      <a:r>
+                        <a:rPr sz="1000" b="1" i="0">
+                          <a:solidFill>
+                            <a:srgbClr val="FFFFFF"/>
+                          </a:solidFill>
+                          <a:latin typeface="Calibri"/>
+                        </a:rPr>
+                        <a:t>#</a:t>
+                      </a:r>
+                    </a:p>
+                  </a:txBody>
+                  <a:tcPr marL="63500" marR="63500" marT="12700" marB="12700" anchor="ctr">
+                    <a:solidFill>
+                      <a:srgbClr val="1B3A5C"/>
+                    </a:solidFill>
+                  </a:tcPr>
+                </a:tc>
+                <a:tc>
+                  <a:txBody>
+                    <a:bodyPr/>
+                    <a:lstStyle/>
+                    <a:p>
+                      <a:pPr algn="ctr"/>
+                      <a:r>
+                        <a:rPr sz="1000" b="1" i="0">
+                          <a:solidFill>
+                            <a:srgbClr val="FFFFFF"/>
+                          </a:solidFill>
+                          <a:latin typeface="Calibri"/>
+                        </a:rPr>
+                        <a:t>bench</a:t>
+                      </a:r>
+                    </a:p>
+                  </a:txBody>
+                  <a:tcPr marL="63500" marR="63500" marT="12700" marB="12700" anchor="ctr">
+                    <a:solidFill>
+                      <a:srgbClr val="1B3A5C"/>
+                    </a:solidFill>
+                  </a:tcPr>
+                </a:tc>
+                <a:tc>
+                  <a:txBody>
+                    <a:bodyPr/>
+                    <a:lstStyle/>
+                    <a:p>
+                      <a:pPr algn="ctr"/>
+                      <a:r>
+                        <a:rPr sz="1000" b="1" i="0">
+                          <a:solidFill>
+                            <a:srgbClr val="FFFFFF"/>
+                          </a:solidFill>
+                          <a:latin typeface="Calibri"/>
+                        </a:rPr>
+                        <a:t>pass OCP</a:t>
+                      </a:r>
+                    </a:p>
+                  </a:txBody>
+                  <a:tcPr marL="63500" marR="63500" marT="12700" marB="12700" anchor="ctr">
+                    <a:solidFill>
+                      <a:srgbClr val="1B3A5C"/>
+                    </a:solidFill>
+                  </a:tcPr>
+                </a:tc>
+                <a:tc>
+                  <a:txBody>
+                    <a:bodyPr/>
+                    <a:lstStyle/>
+                    <a:p>
+                      <a:pPr algn="ctr"/>
+                      <a:r>
+                        <a:rPr sz="1000" b="1" i="0">
+                          <a:solidFill>
+                            <a:srgbClr val="FFFFFF"/>
+                          </a:solidFill>
+                          <a:latin typeface="Calibri"/>
+                        </a:rPr>
+                        <a:t>pass KinD</a:t>
+                      </a:r>
+                    </a:p>
+                  </a:txBody>
+                  <a:tcPr marL="63500" marR="63500" marT="12700" marB="12700" anchor="ctr">
+                    <a:solidFill>
+                      <a:srgbClr val="1B3A5C"/>
+                    </a:solidFill>
+                  </a:tcPr>
+                </a:tc>
+                <a:tc>
+                  <a:txBody>
+                    <a:bodyPr/>
+                    <a:lstStyle/>
+                    <a:p>
+                      <a:pPr algn="ctr"/>
+                      <a:r>
+                        <a:rPr sz="1000" b="1" i="0">
+                          <a:solidFill>
+                            <a:srgbClr val="FFFFFF"/>
+                          </a:solidFill>
+                          <a:latin typeface="Calibri"/>
+                        </a:rPr>
+                        <a:t>in OCP</a:t>
+                      </a:r>
+                    </a:p>
+                  </a:txBody>
+                  <a:tcPr marL="63500" marR="63500" marT="12700" marB="12700" anchor="ctr">
+                    <a:solidFill>
+                      <a:srgbClr val="1B3A5C"/>
+                    </a:solidFill>
+                  </a:tcPr>
+                </a:tc>
+                <a:tc>
+                  <a:txBody>
+                    <a:bodyPr/>
+                    <a:lstStyle/>
+                    <a:p>
+                      <a:pPr algn="ctr"/>
+                      <a:r>
+                        <a:rPr sz="1000" b="1" i="0">
+                          <a:solidFill>
+                            <a:srgbClr val="FFFFFF"/>
+                          </a:solidFill>
+                          <a:latin typeface="Calibri"/>
+                        </a:rPr>
+                        <a:t>in KinD</a:t>
+                      </a:r>
+                    </a:p>
+                  </a:txBody>
+                  <a:tcPr marL="63500" marR="63500" marT="12700" marB="12700" anchor="ctr">
+                    <a:solidFill>
+                      <a:srgbClr val="1B3A5C"/>
+                    </a:solidFill>
+                  </a:tcPr>
+                </a:tc>
+                <a:tc>
+                  <a:txBody>
+                    <a:bodyPr/>
+                    <a:lstStyle/>
+                    <a:p>
+                      <a:pPr algn="ctr"/>
+                      <a:r>
+                        <a:rPr sz="1000" b="1" i="0">
+                          <a:solidFill>
+                            <a:srgbClr val="FFFFFF"/>
+                          </a:solidFill>
+                          <a:latin typeface="Calibri"/>
+                        </a:rPr>
+                        <a:t/>
+                      </a:r>
+                    </a:p>
+                  </a:txBody>
+                  <a:tcPr marL="63500" marR="63500" marT="12700" marB="12700" anchor="ctr">
+                    <a:solidFill>
+                      <a:srgbClr val="1B3A5C"/>
+                    </a:solidFill>
+                  </a:tcPr>
+                </a:tc>
+              </a:tr>
+              <a:tr h="295421">
+                <a:tc>
+                  <a:txBody>
+                    <a:bodyPr/>
+                    <a:lstStyle/>
+                    <a:p>
+                      <a:pPr algn="l"/>
+                      <a:r>
+                        <a:rPr sz="1000" b="0" i="0">
+                          <a:solidFill>
+                            <a:srgbClr val="1F2A37"/>
+                          </a:solidFill>
+                          <a:latin typeface="Calibri"/>
+                        </a:rPr>
+                        <a:t>1</a:t>
+                      </a:r>
+                    </a:p>
+                  </a:txBody>
+                  <a:tcPr marL="63500" marR="63500" marT="12700" marB="12700" anchor="ctr">
+                    <a:solidFill>
+                      <a:srgbClr val="FFFFFF"/>
+                    </a:solidFill>
+                  </a:tcPr>
+                </a:tc>
+                <a:tc>
+                  <a:txBody>
+                    <a:bodyPr/>
+                    <a:lstStyle/>
+                    <a:p>
+                      <a:pPr algn="ctr"/>
+                      <a:r>
+                        <a:rPr sz="1000" b="0" i="0">
+                          <a:solidFill>
+                            <a:srgbClr val="1F2A37"/>
+                          </a:solidFill>
+                          <a:latin typeface="Calibri"/>
+                        </a:rPr>
+                        <a:t>gsm8k</a:t>
+                      </a:r>
+                    </a:p>
+                  </a:txBody>
+                  <a:tcPr marL="63500" marR="63500" marT="12700" marB="12700" anchor="ctr">
+                    <a:solidFill>
+                      <a:srgbClr val="FFFFFF"/>
+                    </a:solidFill>
+                  </a:tcPr>
+                </a:tc>
+                <a:tc>
+                  <a:txBody>
+                    <a:bodyPr/>
+                    <a:lstStyle/>
+                    <a:p>
+                      <a:pPr algn="ctr"/>
+                      <a:r>
+                        <a:rPr sz="1000" b="0" i="0">
+                          <a:solidFill>
+                            <a:srgbClr val="1F2A37"/>
+                          </a:solidFill>
+                          <a:latin typeface="Calibri"/>
+                        </a:rPr>
+                        <a:t>1.00</a:t>
+                      </a:r>
+                    </a:p>
+                  </a:txBody>
+                  <a:tcPr marL="63500" marR="63500" marT="12700" marB="12700" anchor="ctr">
+                    <a:solidFill>
+                      <a:srgbClr val="FFFFFF"/>
+                    </a:solidFill>
+                  </a:tcPr>
+                </a:tc>
+                <a:tc>
+                  <a:txBody>
+                    <a:bodyPr/>
+                    <a:lstStyle/>
+                    <a:p>
+                      <a:pPr algn="ctr"/>
+                      <a:r>
+                        <a:rPr sz="1000" b="0" i="0">
+                          <a:solidFill>
+                            <a:srgbClr val="1F2A37"/>
+                          </a:solidFill>
+                          <a:latin typeface="Calibri"/>
+                        </a:rPr>
+                        <a:t>1.00</a:t>
+                      </a:r>
+                    </a:p>
+                  </a:txBody>
+                  <a:tcPr marL="63500" marR="63500" marT="12700" marB="12700" anchor="ctr">
+                    <a:solidFill>
+                      <a:srgbClr val="FFFFFF"/>
+                    </a:solidFill>
+                  </a:tcPr>
+                </a:tc>
+                <a:tc>
+                  <a:txBody>
+                    <a:bodyPr/>
+                    <a:lstStyle/>
+                    <a:p>
+                      <a:pPr algn="ctr"/>
+                      <a:r>
+                        <a:rPr sz="1000" b="0" i="0">
+                          <a:solidFill>
+                            <a:srgbClr val="1F2A37"/>
+                          </a:solidFill>
+                          <a:latin typeface="Calibri"/>
+                        </a:rPr>
+                        <a:t>320</a:t>
+                      </a:r>
+                    </a:p>
+                  </a:txBody>
+                  <a:tcPr marL="63500" marR="63500" marT="12700" marB="12700" anchor="ctr">
+                    <a:solidFill>
+                      <a:srgbClr val="FFFFFF"/>
+                    </a:solidFill>
+                  </a:tcPr>
+                </a:tc>
+                <a:tc>
+                  <a:txBody>
+                    <a:bodyPr/>
+                    <a:lstStyle/>
+                    <a:p>
+                      <a:pPr algn="ctr"/>
+                      <a:r>
+                        <a:rPr sz="1000" b="0" i="0">
+                          <a:solidFill>
+                            <a:srgbClr val="1F2A37"/>
+                          </a:solidFill>
+                          <a:latin typeface="Calibri"/>
+                        </a:rPr>
+                        <a:t>320</a:t>
+                      </a:r>
+                    </a:p>
+                  </a:txBody>
+                  <a:tcPr marL="63500" marR="63500" marT="12700" marB="12700" anchor="ctr">
+                    <a:solidFill>
+                      <a:srgbClr val="FFFFFF"/>
+                    </a:solidFill>
+                  </a:tcPr>
+                </a:tc>
+                <a:tc>
+                  <a:txBody>
+                    <a:bodyPr/>
+                    <a:lstStyle/>
+                    <a:p>
+                      <a:pPr algn="ctr"/>
+                      <a:r>
+                        <a:rPr sz="1000" b="0" i="0">
+                          <a:solidFill>
+                            <a:srgbClr val="1F2A37"/>
+                          </a:solidFill>
+                          <a:latin typeface="Calibri"/>
+                        </a:rPr>
+                        <a:t>identical</a:t>
+                      </a:r>
+                    </a:p>
+                  </a:txBody>
+                  <a:tcPr marL="63500" marR="63500" marT="12700" marB="12700" anchor="ctr">
+                    <a:solidFill>
+                      <a:srgbClr val="FFFFFF"/>
+                    </a:solidFill>
+                  </a:tcPr>
+                </a:tc>
+              </a:tr>
+              <a:tr h="295421">
+                <a:tc>
+                  <a:txBody>
+                    <a:bodyPr/>
+                    <a:lstStyle/>
+                    <a:p>
+                      <a:pPr algn="l"/>
+                      <a:r>
+                        <a:rPr sz="1000" b="0" i="0">
+                          <a:solidFill>
+                            <a:srgbClr val="1F2A37"/>
+                          </a:solidFill>
+                          <a:latin typeface="Calibri"/>
+                        </a:rPr>
+                        <a:t>2</a:t>
+                      </a:r>
+                    </a:p>
+                  </a:txBody>
+                  <a:tcPr marL="63500" marR="63500" marT="12700" marB="12700" anchor="ctr">
+                    <a:solidFill>
+                      <a:srgbClr val="F4F6F8"/>
+                    </a:solidFill>
+                  </a:tcPr>
+                </a:tc>
+                <a:tc>
+                  <a:txBody>
+                    <a:bodyPr/>
+                    <a:lstStyle/>
+                    <a:p>
+                      <a:pPr algn="ctr"/>
+                      <a:r>
+                        <a:rPr sz="1000" b="0" i="0">
+                          <a:solidFill>
+                            <a:srgbClr val="1F2A37"/>
+                          </a:solidFill>
+                          <a:latin typeface="Calibri"/>
+                        </a:rPr>
+                        <a:t>gsm8k</a:t>
+                      </a:r>
+                    </a:p>
+                  </a:txBody>
+                  <a:tcPr marL="63500" marR="63500" marT="12700" marB="12700" anchor="ctr">
+                    <a:solidFill>
+                      <a:srgbClr val="F4F6F8"/>
+                    </a:solidFill>
+                  </a:tcPr>
+                </a:tc>
+                <a:tc>
+                  <a:txBody>
+                    <a:bodyPr/>
+                    <a:lstStyle/>
+                    <a:p>
+                      <a:pPr algn="ctr"/>
+                      <a:r>
+                        <a:rPr sz="1000" b="0" i="0">
+                          <a:solidFill>
+                            <a:srgbClr val="1F2A37"/>
+                          </a:solidFill>
+                          <a:latin typeface="Calibri"/>
+                        </a:rPr>
+                        <a:t>1.00</a:t>
+                      </a:r>
+                    </a:p>
+                  </a:txBody>
+                  <a:tcPr marL="63500" marR="63500" marT="12700" marB="12700" anchor="ctr">
+                    <a:solidFill>
+                      <a:srgbClr val="F4F6F8"/>
+                    </a:solidFill>
+                  </a:tcPr>
+                </a:tc>
+                <a:tc>
+                  <a:txBody>
+                    <a:bodyPr/>
+                    <a:lstStyle/>
+                    <a:p>
+                      <a:pPr algn="ctr"/>
+                      <a:r>
+                        <a:rPr sz="1000" b="0" i="0">
+                          <a:solidFill>
+                            <a:srgbClr val="1F2A37"/>
+                          </a:solidFill>
+                          <a:latin typeface="Calibri"/>
+                        </a:rPr>
+                        <a:t>1.00</a:t>
+                      </a:r>
+                    </a:p>
+                  </a:txBody>
+                  <a:tcPr marL="63500" marR="63500" marT="12700" marB="12700" anchor="ctr">
+                    <a:solidFill>
+                      <a:srgbClr val="F4F6F8"/>
+                    </a:solidFill>
+                  </a:tcPr>
+                </a:tc>
+                <a:tc>
+                  <a:txBody>
+                    <a:bodyPr/>
+                    <a:lstStyle/>
+                    <a:p>
+                      <a:pPr algn="ctr"/>
+                      <a:r>
+                        <a:rPr sz="1000" b="0" i="0">
+                          <a:solidFill>
+                            <a:srgbClr val="1F2A37"/>
+                          </a:solidFill>
+                          <a:latin typeface="Calibri"/>
+                        </a:rPr>
+                        <a:t>3,166</a:t>
+                      </a:r>
+                    </a:p>
+                  </a:txBody>
+                  <a:tcPr marL="63500" marR="63500" marT="12700" marB="12700" anchor="ctr">
+                    <a:solidFill>
+                      <a:srgbClr val="F4F6F8"/>
+                    </a:solidFill>
+                  </a:tcPr>
+                </a:tc>
+                <a:tc>
+                  <a:txBody>
+                    <a:bodyPr/>
+                    <a:lstStyle/>
+                    <a:p>
+                      <a:pPr algn="ctr"/>
+                      <a:r>
+                        <a:rPr sz="1000" b="0" i="0">
+                          <a:solidFill>
+                            <a:srgbClr val="1F2A37"/>
+                          </a:solidFill>
+                          <a:latin typeface="Calibri"/>
+                        </a:rPr>
+                        <a:t>3,166</a:t>
+                      </a:r>
+                    </a:p>
+                  </a:txBody>
+                  <a:tcPr marL="63500" marR="63500" marT="12700" marB="12700" anchor="ctr">
+                    <a:solidFill>
+                      <a:srgbClr val="F4F6F8"/>
+                    </a:solidFill>
+                  </a:tcPr>
+                </a:tc>
+                <a:tc>
+                  <a:txBody>
+                    <a:bodyPr/>
+                    <a:lstStyle/>
+                    <a:p>
+                      <a:pPr algn="ctr"/>
+                      <a:r>
+                        <a:rPr sz="1000" b="0" i="0">
+                          <a:solidFill>
+                            <a:srgbClr val="1F2A37"/>
+                          </a:solidFill>
+                          <a:latin typeface="Calibri"/>
+                        </a:rPr>
+                        <a:t>identical</a:t>
+                      </a:r>
+                    </a:p>
+                  </a:txBody>
+                  <a:tcPr marL="63500" marR="63500" marT="12700" marB="12700" anchor="ctr">
+                    <a:solidFill>
+                      <a:srgbClr val="F4F6F8"/>
+                    </a:solidFill>
+                  </a:tcPr>
+                </a:tc>
+              </a:tr>
+              <a:tr h="295421">
+                <a:tc>
+                  <a:txBody>
+                    <a:bodyPr/>
+                    <a:lstStyle/>
+                    <a:p>
+                      <a:pPr algn="l"/>
+                      <a:r>
+                        <a:rPr sz="1000" b="0" i="0">
+                          <a:solidFill>
+                            <a:srgbClr val="1F2A37"/>
+                          </a:solidFill>
+                          <a:latin typeface="Calibri"/>
+                        </a:rPr>
+                        <a:t>3</a:t>
+                      </a:r>
+                    </a:p>
+                  </a:txBody>
+                  <a:tcPr marL="63500" marR="63500" marT="12700" marB="12700" anchor="ctr">
+                    <a:solidFill>
+                      <a:srgbClr val="FFFFFF"/>
+                    </a:solidFill>
+                  </a:tcPr>
+                </a:tc>
+                <a:tc>
+                  <a:txBody>
+                    <a:bodyPr/>
+                    <a:lstStyle/>
+                    <a:p>
+                      <a:pPr algn="ctr"/>
+                      <a:r>
+                        <a:rPr sz="1000" b="0" i="0">
+                          <a:solidFill>
+                            <a:srgbClr val="1F2A37"/>
+                          </a:solidFill>
+                          <a:latin typeface="Calibri"/>
+                        </a:rPr>
+                        <a:t>gsm8k</a:t>
+                      </a:r>
+                    </a:p>
+                  </a:txBody>
+                  <a:tcPr marL="63500" marR="63500" marT="12700" marB="12700" anchor="ctr">
+                    <a:solidFill>
+                      <a:srgbClr val="FFFFFF"/>
+                    </a:solidFill>
+                  </a:tcPr>
+                </a:tc>
+                <a:tc>
+                  <a:txBody>
+                    <a:bodyPr/>
+                    <a:lstStyle/>
+                    <a:p>
+                      <a:pPr algn="ctr"/>
+                      <a:r>
+                        <a:rPr sz="1000" b="0" i="0">
+                          <a:solidFill>
+                            <a:srgbClr val="1F2A37"/>
+                          </a:solidFill>
+                          <a:latin typeface="Calibri"/>
+                        </a:rPr>
+                        <a:t>1.00</a:t>
+                      </a:r>
+                    </a:p>
+                  </a:txBody>
+                  <a:tcPr marL="63500" marR="63500" marT="12700" marB="12700" anchor="ctr">
+                    <a:solidFill>
+                      <a:srgbClr val="FFFFFF"/>
+                    </a:solidFill>
+                  </a:tcPr>
+                </a:tc>
+                <a:tc>
+                  <a:txBody>
+                    <a:bodyPr/>
+                    <a:lstStyle/>
+                    <a:p>
+                      <a:pPr algn="ctr"/>
+                      <a:r>
+                        <a:rPr sz="1000" b="0" i="0">
+                          <a:solidFill>
+                            <a:srgbClr val="1F2A37"/>
+                          </a:solidFill>
+                          <a:latin typeface="Calibri"/>
+                        </a:rPr>
+                        <a:t>1.00</a:t>
+                      </a:r>
+                    </a:p>
+                  </a:txBody>
+                  <a:tcPr marL="63500" marR="63500" marT="12700" marB="12700" anchor="ctr">
+                    <a:solidFill>
+                      <a:srgbClr val="FFFFFF"/>
+                    </a:solidFill>
+                  </a:tcPr>
+                </a:tc>
+                <a:tc>
+                  <a:txBody>
+                    <a:bodyPr/>
+                    <a:lstStyle/>
+                    <a:p>
+                      <a:pPr algn="ctr"/>
+                      <a:r>
+                        <a:rPr sz="1000" b="0" i="0">
+                          <a:solidFill>
+                            <a:srgbClr val="1F2A37"/>
+                          </a:solidFill>
+                          <a:latin typeface="Calibri"/>
+                        </a:rPr>
+                        <a:t>15,684</a:t>
+                      </a:r>
+                    </a:p>
+                  </a:txBody>
+                  <a:tcPr marL="63500" marR="63500" marT="12700" marB="12700" anchor="ctr">
+                    <a:solidFill>
+                      <a:srgbClr val="FFFFFF"/>
+                    </a:solidFill>
+                  </a:tcPr>
+                </a:tc>
+                <a:tc>
+                  <a:txBody>
+                    <a:bodyPr/>
+                    <a:lstStyle/>
+                    <a:p>
+                      <a:pPr algn="ctr"/>
+                      <a:r>
+                        <a:rPr sz="1000" b="0" i="0">
+                          <a:solidFill>
+                            <a:srgbClr val="1F2A37"/>
+                          </a:solidFill>
+                          <a:latin typeface="Calibri"/>
+                        </a:rPr>
+                        <a:t>15,684</a:t>
+                      </a:r>
+                    </a:p>
+                  </a:txBody>
+                  <a:tcPr marL="63500" marR="63500" marT="12700" marB="12700" anchor="ctr">
+                    <a:solidFill>
+                      <a:srgbClr val="FFFFFF"/>
+                    </a:solidFill>
+                  </a:tcPr>
+                </a:tc>
+                <a:tc>
+                  <a:txBody>
+                    <a:bodyPr/>
+                    <a:lstStyle/>
+                    <a:p>
+                      <a:pPr algn="ctr"/>
+                      <a:r>
+                        <a:rPr sz="1000" b="0" i="0">
+                          <a:solidFill>
+                            <a:srgbClr val="1F2A37"/>
+                          </a:solidFill>
+                          <a:latin typeface="Calibri"/>
+                        </a:rPr>
+                        <a:t>identical</a:t>
+                      </a:r>
+                    </a:p>
+                  </a:txBody>
+                  <a:tcPr marL="63500" marR="63500" marT="12700" marB="12700" anchor="ctr">
+                    <a:solidFill>
+                      <a:srgbClr val="FFFFFF"/>
+                    </a:solidFill>
+                  </a:tcPr>
+                </a:tc>
+              </a:tr>
+              <a:tr h="295421">
+                <a:tc>
+                  <a:txBody>
+                    <a:bodyPr/>
+                    <a:lstStyle/>
+                    <a:p>
+                      <a:pPr algn="l"/>
+                      <a:r>
+                        <a:rPr sz="1000" b="0" i="0">
+                          <a:solidFill>
+                            <a:srgbClr val="1F2A37"/>
+                          </a:solidFill>
+                          <a:latin typeface="Calibri"/>
+                        </a:rPr>
+                        <a:t>4</a:t>
+                      </a:r>
+                    </a:p>
+                  </a:txBody>
+                  <a:tcPr marL="63500" marR="63500" marT="12700" marB="12700" anchor="ctr">
+                    <a:solidFill>
+                      <a:srgbClr val="F4F6F8"/>
+                    </a:solidFill>
+                  </a:tcPr>
+                </a:tc>
+                <a:tc>
+                  <a:txBody>
+                    <a:bodyPr/>
+                    <a:lstStyle/>
+                    <a:p>
+                      <a:pPr algn="ctr"/>
+                      <a:r>
+                        <a:rPr sz="1000" b="0" i="0">
+                          <a:solidFill>
+                            <a:srgbClr val="1F2A37"/>
+                          </a:solidFill>
+                          <a:latin typeface="Calibri"/>
+                        </a:rPr>
+                        <a:t>gsm8k</a:t>
+                      </a:r>
+                    </a:p>
+                  </a:txBody>
+                  <a:tcPr marL="63500" marR="63500" marT="12700" marB="12700" anchor="ctr">
+                    <a:solidFill>
+                      <a:srgbClr val="F4F6F8"/>
+                    </a:solidFill>
+                  </a:tcPr>
+                </a:tc>
+                <a:tc>
+                  <a:txBody>
+                    <a:bodyPr/>
+                    <a:lstStyle/>
+                    <a:p>
+                      <a:pPr algn="ctr"/>
+                      <a:r>
+                        <a:rPr sz="1000" b="0" i="0">
+                          <a:solidFill>
+                            <a:srgbClr val="1F2A37"/>
+                          </a:solidFill>
+                          <a:latin typeface="Calibri"/>
+                        </a:rPr>
+                        <a:t>0.80</a:t>
+                      </a:r>
+                    </a:p>
+                  </a:txBody>
+                  <a:tcPr marL="63500" marR="63500" marT="12700" marB="12700" anchor="ctr">
+                    <a:solidFill>
+                      <a:srgbClr val="F4F6F8"/>
+                    </a:solidFill>
+                  </a:tcPr>
+                </a:tc>
+                <a:tc>
+                  <a:txBody>
+                    <a:bodyPr/>
+                    <a:lstStyle/>
+                    <a:p>
+                      <a:pPr algn="ctr"/>
+                      <a:r>
+                        <a:rPr sz="1000" b="0" i="0">
+                          <a:solidFill>
+                            <a:srgbClr val="1F2A37"/>
+                          </a:solidFill>
+                          <a:latin typeface="Calibri"/>
+                        </a:rPr>
+                        <a:t>0.80</a:t>
+                      </a:r>
+                    </a:p>
+                  </a:txBody>
+                  <a:tcPr marL="63500" marR="63500" marT="12700" marB="12700" anchor="ctr">
+                    <a:solidFill>
+                      <a:srgbClr val="F4F6F8"/>
+                    </a:solidFill>
+                  </a:tcPr>
+                </a:tc>
+                <a:tc>
+                  <a:txBody>
+                    <a:bodyPr/>
+                    <a:lstStyle/>
+                    <a:p>
+                      <a:pPr algn="ctr"/>
+                      <a:r>
+                        <a:rPr sz="1000" b="0" i="0">
+                          <a:solidFill>
+                            <a:srgbClr val="1F2A37"/>
+                          </a:solidFill>
+                          <a:latin typeface="Calibri"/>
+                        </a:rPr>
+                        <a:t>3,613</a:t>
+                      </a:r>
+                    </a:p>
+                  </a:txBody>
+                  <a:tcPr marL="63500" marR="63500" marT="12700" marB="12700" anchor="ctr">
+                    <a:solidFill>
+                      <a:srgbClr val="F4F6F8"/>
+                    </a:solidFill>
+                  </a:tcPr>
+                </a:tc>
+                <a:tc>
+                  <a:txBody>
+                    <a:bodyPr/>
+                    <a:lstStyle/>
+                    <a:p>
+                      <a:pPr algn="ctr"/>
+                      <a:r>
+                        <a:rPr sz="1000" b="0" i="0">
+                          <a:solidFill>
+                            <a:srgbClr val="1F2A37"/>
+                          </a:solidFill>
+                          <a:latin typeface="Calibri"/>
+                        </a:rPr>
+                        <a:t>4,184</a:t>
+                      </a:r>
+                    </a:p>
+                  </a:txBody>
+                  <a:tcPr marL="63500" marR="63500" marT="12700" marB="12700" anchor="ctr">
+                    <a:solidFill>
+                      <a:srgbClr val="F4F6F8"/>
+                    </a:solidFill>
+                  </a:tcPr>
+                </a:tc>
+                <a:tc>
+                  <a:txBody>
+                    <a:bodyPr/>
+                    <a:lstStyle/>
+                    <a:p>
+                      <a:pPr algn="ctr"/>
+                      <a:r>
+                        <a:rPr sz="1000" b="0" i="0">
+                          <a:solidFill>
+                            <a:srgbClr val="1F2A37"/>
+                          </a:solidFill>
+                          <a:latin typeface="Calibri"/>
+                        </a:rPr>
+                        <a:t/>
+                      </a:r>
+                    </a:p>
+                  </a:txBody>
+                  <a:tcPr marL="63500" marR="63500" marT="12700" marB="12700" anchor="ctr">
+                    <a:solidFill>
+                      <a:srgbClr val="F4F6F8"/>
+                    </a:solidFill>
+                  </a:tcPr>
+                </a:tc>
+              </a:tr>
+              <a:tr h="295421">
+                <a:tc>
+                  <a:txBody>
+                    <a:bodyPr/>
+                    <a:lstStyle/>
+                    <a:p>
+                      <a:pPr algn="l"/>
+                      <a:r>
+                        <a:rPr sz="1000" b="0" i="0">
+                          <a:solidFill>
+                            <a:srgbClr val="1F2A37"/>
+                          </a:solidFill>
+                          <a:latin typeface="Calibri"/>
+                        </a:rPr>
+                        <a:t>5</a:t>
+                      </a:r>
+                    </a:p>
+                  </a:txBody>
+                  <a:tcPr marL="63500" marR="63500" marT="12700" marB="12700" anchor="ctr">
+                    <a:solidFill>
+                      <a:srgbClr val="FFFFFF"/>
+                    </a:solidFill>
+                  </a:tcPr>
+                </a:tc>
+                <a:tc>
+                  <a:txBody>
+                    <a:bodyPr/>
+                    <a:lstStyle/>
+                    <a:p>
+                      <a:pPr algn="ctr"/>
+                      <a:r>
+                        <a:rPr sz="1000" b="0" i="0">
+                          <a:solidFill>
+                            <a:srgbClr val="1F2A37"/>
+                          </a:solidFill>
+                          <a:latin typeface="Calibri"/>
+                        </a:rPr>
+                        <a:t>gsm8k</a:t>
+                      </a:r>
+                    </a:p>
+                  </a:txBody>
+                  <a:tcPr marL="63500" marR="63500" marT="12700" marB="12700" anchor="ctr">
+                    <a:solidFill>
+                      <a:srgbClr val="FFFFFF"/>
+                    </a:solidFill>
+                  </a:tcPr>
+                </a:tc>
+                <a:tc>
+                  <a:txBody>
+                    <a:bodyPr/>
+                    <a:lstStyle/>
+                    <a:p>
+                      <a:pPr algn="ctr"/>
+                      <a:r>
+                        <a:rPr sz="1000" b="0" i="0">
+                          <a:solidFill>
+                            <a:srgbClr val="1F2A37"/>
+                          </a:solidFill>
+                          <a:latin typeface="Calibri"/>
+                        </a:rPr>
+                        <a:t>1.00</a:t>
+                      </a:r>
+                    </a:p>
+                  </a:txBody>
+                  <a:tcPr marL="63500" marR="63500" marT="12700" marB="12700" anchor="ctr">
+                    <a:solidFill>
+                      <a:srgbClr val="FFFFFF"/>
+                    </a:solidFill>
+                  </a:tcPr>
+                </a:tc>
+                <a:tc>
+                  <a:txBody>
+                    <a:bodyPr/>
+                    <a:lstStyle/>
+                    <a:p>
+                      <a:pPr algn="ctr"/>
+                      <a:r>
+                        <a:rPr sz="1000" b="0" i="0">
+                          <a:solidFill>
+                            <a:srgbClr val="1F2A37"/>
+                          </a:solidFill>
+                          <a:latin typeface="Calibri"/>
+                        </a:rPr>
+                        <a:t>1.00</a:t>
+                      </a:r>
+                    </a:p>
+                  </a:txBody>
+                  <a:tcPr marL="63500" marR="63500" marT="12700" marB="12700" anchor="ctr">
+                    <a:solidFill>
+                      <a:srgbClr val="FFFFFF"/>
+                    </a:solidFill>
+                  </a:tcPr>
+                </a:tc>
+                <a:tc>
+                  <a:txBody>
+                    <a:bodyPr/>
+                    <a:lstStyle/>
+                    <a:p>
+                      <a:pPr algn="ctr"/>
+                      <a:r>
+                        <a:rPr sz="1000" b="0" i="0">
+                          <a:solidFill>
+                            <a:srgbClr val="1F2A37"/>
+                          </a:solidFill>
+                          <a:latin typeface="Calibri"/>
+                        </a:rPr>
+                        <a:t>1,564</a:t>
+                      </a:r>
+                    </a:p>
+                  </a:txBody>
+                  <a:tcPr marL="63500" marR="63500" marT="12700" marB="12700" anchor="ctr">
+                    <a:solidFill>
+                      <a:srgbClr val="FFFFFF"/>
+                    </a:solidFill>
+                  </a:tcPr>
+                </a:tc>
+                <a:tc>
+                  <a:txBody>
+                    <a:bodyPr/>
+                    <a:lstStyle/>
+                    <a:p>
+                      <a:pPr algn="ctr"/>
+                      <a:r>
+                        <a:rPr sz="1000" b="0" i="0">
+                          <a:solidFill>
+                            <a:srgbClr val="1F2A37"/>
+                          </a:solidFill>
+                          <a:latin typeface="Calibri"/>
+                        </a:rPr>
+                        <a:t>1,564</a:t>
+                      </a:r>
+                    </a:p>
+                  </a:txBody>
+                  <a:tcPr marL="63500" marR="63500" marT="12700" marB="12700" anchor="ctr">
+                    <a:solidFill>
+                      <a:srgbClr val="FFFFFF"/>
+                    </a:solidFill>
+                  </a:tcPr>
+                </a:tc>
+                <a:tc>
+                  <a:txBody>
+                    <a:bodyPr/>
+                    <a:lstStyle/>
+                    <a:p>
+                      <a:pPr algn="ctr"/>
+                      <a:r>
+                        <a:rPr sz="1000" b="0" i="0">
+                          <a:solidFill>
+                            <a:srgbClr val="1F2A37"/>
+                          </a:solidFill>
+                          <a:latin typeface="Calibri"/>
+                        </a:rPr>
+                        <a:t>identical</a:t>
+                      </a:r>
+                    </a:p>
+                  </a:txBody>
+                  <a:tcPr marL="63500" marR="63500" marT="12700" marB="12700" anchor="ctr">
+                    <a:solidFill>
+                      <a:srgbClr val="FFFFFF"/>
+                    </a:solidFill>
+                  </a:tcPr>
+                </a:tc>
+              </a:tr>
+              <a:tr h="295421">
+                <a:tc>
+                  <a:txBody>
+                    <a:bodyPr/>
+                    <a:lstStyle/>
+                    <a:p>
+                      <a:pPr algn="l"/>
+                      <a:r>
+                        <a:rPr sz="1000" b="0" i="0">
+                          <a:solidFill>
+                            <a:srgbClr val="1F2A37"/>
+                          </a:solidFill>
+                          <a:latin typeface="Calibri"/>
+                        </a:rPr>
+                        <a:t>6</a:t>
+                      </a:r>
+                    </a:p>
+                  </a:txBody>
+                  <a:tcPr marL="63500" marR="63500" marT="12700" marB="12700" anchor="ctr">
+                    <a:solidFill>
+                      <a:srgbClr val="F4F6F8"/>
+                    </a:solidFill>
+                  </a:tcPr>
+                </a:tc>
+                <a:tc>
+                  <a:txBody>
+                    <a:bodyPr/>
+                    <a:lstStyle/>
+                    <a:p>
+                      <a:pPr algn="ctr"/>
+                      <a:r>
+                        <a:rPr sz="1000" b="0" i="0">
+                          <a:solidFill>
+                            <a:srgbClr val="1F2A37"/>
+                          </a:solidFill>
+                          <a:latin typeface="Calibri"/>
+                        </a:rPr>
+                        <a:t>gsm8k</a:t>
+                      </a:r>
+                    </a:p>
+                  </a:txBody>
+                  <a:tcPr marL="63500" marR="63500" marT="12700" marB="12700" anchor="ctr">
+                    <a:solidFill>
+                      <a:srgbClr val="F4F6F8"/>
+                    </a:solidFill>
+                  </a:tcPr>
+                </a:tc>
+                <a:tc>
+                  <a:txBody>
+                    <a:bodyPr/>
+                    <a:lstStyle/>
+                    <a:p>
+                      <a:pPr algn="ctr"/>
+                      <a:r>
+                        <a:rPr sz="1000" b="0" i="0">
+                          <a:solidFill>
+                            <a:srgbClr val="1F2A37"/>
+                          </a:solidFill>
+                          <a:latin typeface="Calibri"/>
+                        </a:rPr>
+                        <a:t>1.00</a:t>
+                      </a:r>
+                    </a:p>
+                  </a:txBody>
+                  <a:tcPr marL="63500" marR="63500" marT="12700" marB="12700" anchor="ctr">
+                    <a:solidFill>
+                      <a:srgbClr val="F4F6F8"/>
+                    </a:solidFill>
+                  </a:tcPr>
+                </a:tc>
+                <a:tc>
+                  <a:txBody>
+                    <a:bodyPr/>
+                    <a:lstStyle/>
+                    <a:p>
+                      <a:pPr algn="ctr"/>
+                      <a:r>
+                        <a:rPr sz="1000" b="0" i="0">
+                          <a:solidFill>
+                            <a:srgbClr val="1F2A37"/>
+                          </a:solidFill>
+                          <a:latin typeface="Calibri"/>
+                        </a:rPr>
+                        <a:t>1.00</a:t>
+                      </a:r>
+                    </a:p>
+                  </a:txBody>
+                  <a:tcPr marL="63500" marR="63500" marT="12700" marB="12700" anchor="ctr">
+                    <a:solidFill>
+                      <a:srgbClr val="F4F6F8"/>
+                    </a:solidFill>
+                  </a:tcPr>
+                </a:tc>
+                <a:tc>
+                  <a:txBody>
+                    <a:bodyPr/>
+                    <a:lstStyle/>
+                    <a:p>
+                      <a:pPr algn="ctr"/>
+                      <a:r>
+                        <a:rPr sz="1000" b="0" i="0">
+                          <a:solidFill>
+                            <a:srgbClr val="1F2A37"/>
+                          </a:solidFill>
+                          <a:latin typeface="Calibri"/>
+                        </a:rPr>
+                        <a:t>1,564</a:t>
+                      </a:r>
+                    </a:p>
+                  </a:txBody>
+                  <a:tcPr marL="63500" marR="63500" marT="12700" marB="12700" anchor="ctr">
+                    <a:solidFill>
+                      <a:srgbClr val="F4F6F8"/>
+                    </a:solidFill>
+                  </a:tcPr>
+                </a:tc>
+                <a:tc>
+                  <a:txBody>
+                    <a:bodyPr/>
+                    <a:lstStyle/>
+                    <a:p>
+                      <a:pPr algn="ctr"/>
+                      <a:r>
+                        <a:rPr sz="1000" b="0" i="0">
+                          <a:solidFill>
+                            <a:srgbClr val="1F2A37"/>
+                          </a:solidFill>
+                          <a:latin typeface="Calibri"/>
+                        </a:rPr>
+                        <a:t>1,564</a:t>
+                      </a:r>
+                    </a:p>
+                  </a:txBody>
+                  <a:tcPr marL="63500" marR="63500" marT="12700" marB="12700" anchor="ctr">
+                    <a:solidFill>
+                      <a:srgbClr val="F4F6F8"/>
+                    </a:solidFill>
+                  </a:tcPr>
+                </a:tc>
+                <a:tc>
+                  <a:txBody>
+                    <a:bodyPr/>
+                    <a:lstStyle/>
+                    <a:p>
+                      <a:pPr algn="ctr"/>
+                      <a:r>
+                        <a:rPr sz="1000" b="0" i="0">
+                          <a:solidFill>
+                            <a:srgbClr val="1F2A37"/>
+                          </a:solidFill>
+                          <a:latin typeface="Calibri"/>
+                        </a:rPr>
+                        <a:t>identical</a:t>
+                      </a:r>
+                    </a:p>
+                  </a:txBody>
+                  <a:tcPr marL="63500" marR="63500" marT="12700" marB="12700" anchor="ctr">
+                    <a:solidFill>
+                      <a:srgbClr val="F4F6F8"/>
+                    </a:solidFill>
+                  </a:tcPr>
+                </a:tc>
+              </a:tr>
+              <a:tr h="295421">
+                <a:tc>
+                  <a:txBody>
+                    <a:bodyPr/>
+                    <a:lstStyle/>
+                    <a:p>
+                      <a:pPr algn="l"/>
+                      <a:r>
+                        <a:rPr sz="1000" b="0" i="0">
+                          <a:solidFill>
+                            <a:srgbClr val="1F2A37"/>
+                          </a:solidFill>
+                          <a:latin typeface="Calibri"/>
+                        </a:rPr>
+                        <a:t>7</a:t>
+                      </a:r>
+                    </a:p>
+                  </a:txBody>
+                  <a:tcPr marL="63500" marR="63500" marT="12700" marB="12700" anchor="ctr">
+                    <a:solidFill>
+                      <a:srgbClr val="FFFFFF"/>
+                    </a:solidFill>
+                  </a:tcPr>
+                </a:tc>
+                <a:tc>
+                  <a:txBody>
+                    <a:bodyPr/>
+                    <a:lstStyle/>
+                    <a:p>
+                      <a:pPr algn="ctr"/>
+                      <a:r>
+                        <a:rPr sz="1000" b="0" i="0">
+                          <a:solidFill>
+                            <a:srgbClr val="1F2A37"/>
+                          </a:solidFill>
+                          <a:latin typeface="Calibri"/>
+                        </a:rPr>
+                        <a:t>gsm8k</a:t>
+                      </a:r>
+                    </a:p>
+                  </a:txBody>
+                  <a:tcPr marL="63500" marR="63500" marT="12700" marB="12700" anchor="ctr">
+                    <a:solidFill>
+                      <a:srgbClr val="FFFFFF"/>
+                    </a:solidFill>
+                  </a:tcPr>
+                </a:tc>
+                <a:tc>
+                  <a:txBody>
+                    <a:bodyPr/>
+                    <a:lstStyle/>
+                    <a:p>
+                      <a:pPr algn="ctr"/>
+                      <a:r>
+                        <a:rPr sz="1000" b="0" i="0">
+                          <a:solidFill>
+                            <a:srgbClr val="1F2A37"/>
+                          </a:solidFill>
+                          <a:latin typeface="Calibri"/>
+                        </a:rPr>
+                        <a:t>1.00</a:t>
+                      </a:r>
+                    </a:p>
+                  </a:txBody>
+                  <a:tcPr marL="63500" marR="63500" marT="12700" marB="12700" anchor="ctr">
+                    <a:solidFill>
+                      <a:srgbClr val="FFFFFF"/>
+                    </a:solidFill>
+                  </a:tcPr>
+                </a:tc>
+                <a:tc>
+                  <a:txBody>
+                    <a:bodyPr/>
+                    <a:lstStyle/>
+                    <a:p>
+                      <a:pPr algn="ctr"/>
+                      <a:r>
+                        <a:rPr sz="1000" b="0" i="0">
+                          <a:solidFill>
+                            <a:srgbClr val="1F2A37"/>
+                          </a:solidFill>
+                          <a:latin typeface="Calibri"/>
+                        </a:rPr>
+                        <a:t>1.00</a:t>
+                      </a:r>
+                    </a:p>
+                  </a:txBody>
+                  <a:tcPr marL="63500" marR="63500" marT="12700" marB="12700" anchor="ctr">
+                    <a:solidFill>
+                      <a:srgbClr val="FFFFFF"/>
+                    </a:solidFill>
+                  </a:tcPr>
+                </a:tc>
+                <a:tc>
+                  <a:txBody>
+                    <a:bodyPr/>
+                    <a:lstStyle/>
+                    <a:p>
+                      <a:pPr algn="ctr"/>
+                      <a:r>
+                        <a:rPr sz="1000" b="0" i="0">
+                          <a:solidFill>
+                            <a:srgbClr val="1F2A37"/>
+                          </a:solidFill>
+                          <a:latin typeface="Calibri"/>
+                        </a:rPr>
+                        <a:t>1,564</a:t>
+                      </a:r>
+                    </a:p>
+                  </a:txBody>
+                  <a:tcPr marL="63500" marR="63500" marT="12700" marB="12700" anchor="ctr">
+                    <a:solidFill>
+                      <a:srgbClr val="FFFFFF"/>
+                    </a:solidFill>
+                  </a:tcPr>
+                </a:tc>
+                <a:tc>
+                  <a:txBody>
+                    <a:bodyPr/>
+                    <a:lstStyle/>
+                    <a:p>
+                      <a:pPr algn="ctr"/>
+                      <a:r>
+                        <a:rPr sz="1000" b="0" i="0">
+                          <a:solidFill>
+                            <a:srgbClr val="1F2A37"/>
+                          </a:solidFill>
+                          <a:latin typeface="Calibri"/>
+                        </a:rPr>
+                        <a:t>1,564</a:t>
+                      </a:r>
+                    </a:p>
+                  </a:txBody>
+                  <a:tcPr marL="63500" marR="63500" marT="12700" marB="12700" anchor="ctr">
+                    <a:solidFill>
+                      <a:srgbClr val="FFFFFF"/>
+                    </a:solidFill>
+                  </a:tcPr>
+                </a:tc>
+                <a:tc>
+                  <a:txBody>
+                    <a:bodyPr/>
+                    <a:lstStyle/>
+                    <a:p>
+                      <a:pPr algn="ctr"/>
+                      <a:r>
+                        <a:rPr sz="1000" b="0" i="0">
+                          <a:solidFill>
+                            <a:srgbClr val="1F2A37"/>
+                          </a:solidFill>
+                          <a:latin typeface="Calibri"/>
+                        </a:rPr>
+                        <a:t>identical</a:t>
+                      </a:r>
+                    </a:p>
+                  </a:txBody>
+                  <a:tcPr marL="63500" marR="63500" marT="12700" marB="12700" anchor="ctr">
+                    <a:solidFill>
+                      <a:srgbClr val="FFFFFF"/>
+                    </a:solidFill>
+                  </a:tcPr>
+                </a:tc>
+              </a:tr>
+              <a:tr h="295421">
+                <a:tc>
+                  <a:txBody>
+                    <a:bodyPr/>
+                    <a:lstStyle/>
+                    <a:p>
+                      <a:pPr algn="l"/>
+                      <a:r>
+                        <a:rPr sz="1000" b="0" i="0">
+                          <a:solidFill>
+                            <a:srgbClr val="1F2A37"/>
+                          </a:solidFill>
+                          <a:latin typeface="Calibri"/>
+                        </a:rPr>
+                        <a:t>8</a:t>
+                      </a:r>
+                    </a:p>
+                  </a:txBody>
+                  <a:tcPr marL="63500" marR="63500" marT="12700" marB="12700" anchor="ctr">
+                    <a:solidFill>
+                      <a:srgbClr val="F4F6F8"/>
+                    </a:solidFill>
+                  </a:tcPr>
+                </a:tc>
+                <a:tc>
+                  <a:txBody>
+                    <a:bodyPr/>
+                    <a:lstStyle/>
+                    <a:p>
+                      <a:pPr algn="ctr"/>
+                      <a:r>
+                        <a:rPr sz="1000" b="0" i="0">
+                          <a:solidFill>
+                            <a:srgbClr val="1F2A37"/>
+                          </a:solidFill>
+                          <a:latin typeface="Calibri"/>
+                        </a:rPr>
+                        <a:t>gsm8k</a:t>
+                      </a:r>
+                    </a:p>
+                  </a:txBody>
+                  <a:tcPr marL="63500" marR="63500" marT="12700" marB="12700" anchor="ctr">
+                    <a:solidFill>
+                      <a:srgbClr val="F4F6F8"/>
+                    </a:solidFill>
+                  </a:tcPr>
+                </a:tc>
+                <a:tc>
+                  <a:txBody>
+                    <a:bodyPr/>
+                    <a:lstStyle/>
+                    <a:p>
+                      <a:pPr algn="ctr"/>
+                      <a:r>
+                        <a:rPr sz="1000" b="0" i="0">
+                          <a:solidFill>
+                            <a:srgbClr val="1F2A37"/>
+                          </a:solidFill>
+                          <a:latin typeface="Calibri"/>
+                        </a:rPr>
+                        <a:t>1.00</a:t>
+                      </a:r>
+                    </a:p>
+                  </a:txBody>
+                  <a:tcPr marL="63500" marR="63500" marT="12700" marB="12700" anchor="ctr">
+                    <a:solidFill>
+                      <a:srgbClr val="F4F6F8"/>
+                    </a:solidFill>
+                  </a:tcPr>
+                </a:tc>
+                <a:tc>
+                  <a:txBody>
+                    <a:bodyPr/>
+                    <a:lstStyle/>
+                    <a:p>
+                      <a:pPr algn="ctr"/>
+                      <a:r>
+                        <a:rPr sz="1000" b="0" i="0">
+                          <a:solidFill>
+                            <a:srgbClr val="1F2A37"/>
+                          </a:solidFill>
+                          <a:latin typeface="Calibri"/>
+                        </a:rPr>
+                        <a:t>1.00</a:t>
+                      </a:r>
+                    </a:p>
+                  </a:txBody>
+                  <a:tcPr marL="63500" marR="63500" marT="12700" marB="12700" anchor="ctr">
+                    <a:solidFill>
+                      <a:srgbClr val="F4F6F8"/>
+                    </a:solidFill>
+                  </a:tcPr>
+                </a:tc>
+                <a:tc>
+                  <a:txBody>
+                    <a:bodyPr/>
+                    <a:lstStyle/>
+                    <a:p>
+                      <a:pPr algn="ctr"/>
+                      <a:r>
+                        <a:rPr sz="1000" b="0" i="0">
+                          <a:solidFill>
+                            <a:srgbClr val="1F2A37"/>
+                          </a:solidFill>
+                          <a:latin typeface="Calibri"/>
+                        </a:rPr>
+                        <a:t>1,564</a:t>
+                      </a:r>
+                    </a:p>
+                  </a:txBody>
+                  <a:tcPr marL="63500" marR="63500" marT="12700" marB="12700" anchor="ctr">
+                    <a:solidFill>
+                      <a:srgbClr val="F4F6F8"/>
+                    </a:solidFill>
+                  </a:tcPr>
+                </a:tc>
+                <a:tc>
+                  <a:txBody>
+                    <a:bodyPr/>
+                    <a:lstStyle/>
+                    <a:p>
+                      <a:pPr algn="ctr"/>
+                      <a:r>
+                        <a:rPr sz="1000" b="0" i="0">
+                          <a:solidFill>
+                            <a:srgbClr val="1F2A37"/>
+                          </a:solidFill>
+                          <a:latin typeface="Calibri"/>
+                        </a:rPr>
+                        <a:t>1,564</a:t>
+                      </a:r>
+                    </a:p>
+                  </a:txBody>
+                  <a:tcPr marL="63500" marR="63500" marT="12700" marB="12700" anchor="ctr">
+                    <a:solidFill>
+                      <a:srgbClr val="F4F6F8"/>
+                    </a:solidFill>
+                  </a:tcPr>
+                </a:tc>
+                <a:tc>
+                  <a:txBody>
+                    <a:bodyPr/>
+                    <a:lstStyle/>
+                    <a:p>
+                      <a:pPr algn="ctr"/>
+                      <a:r>
+                        <a:rPr sz="1000" b="0" i="0">
+                          <a:solidFill>
+                            <a:srgbClr val="1F2A37"/>
+                          </a:solidFill>
+                          <a:latin typeface="Calibri"/>
+                        </a:rPr>
+                        <a:t>identical</a:t>
+                      </a:r>
+                    </a:p>
+                  </a:txBody>
+                  <a:tcPr marL="63500" marR="63500" marT="12700" marB="12700" anchor="ctr">
+                    <a:solidFill>
+                      <a:srgbClr val="F4F6F8"/>
+                    </a:solidFill>
+                  </a:tcPr>
+                </a:tc>
+              </a:tr>
+              <a:tr h="295421">
+                <a:tc>
+                  <a:txBody>
+                    <a:bodyPr/>
+                    <a:lstStyle/>
+                    <a:p>
+                      <a:pPr algn="l"/>
+                      <a:r>
+                        <a:rPr sz="1000" b="0" i="0">
+                          <a:solidFill>
+                            <a:srgbClr val="1F2A37"/>
+                          </a:solidFill>
+                          <a:latin typeface="Calibri"/>
+                        </a:rPr>
+                        <a:t>9</a:t>
+                      </a:r>
+                    </a:p>
+                  </a:txBody>
+                  <a:tcPr marL="63500" marR="63500" marT="12700" marB="12700" anchor="ctr">
+                    <a:solidFill>
+                      <a:srgbClr val="FFFFFF"/>
+                    </a:solidFill>
+                  </a:tcPr>
+                </a:tc>
+                <a:tc>
+                  <a:txBody>
+                    <a:bodyPr/>
+                    <a:lstStyle/>
+                    <a:p>
+                      <a:pPr algn="ctr"/>
+                      <a:r>
+                        <a:rPr sz="1000" b="0" i="0">
+                          <a:solidFill>
+                            <a:srgbClr val="1F2A37"/>
+                          </a:solidFill>
+                          <a:latin typeface="Calibri"/>
+                        </a:rPr>
+                        <a:t>tau2</a:t>
+                      </a:r>
+                    </a:p>
+                  </a:txBody>
+                  <a:tcPr marL="63500" marR="63500" marT="12700" marB="12700" anchor="ctr">
+                    <a:solidFill>
+                      <a:srgbClr val="FFFFFF"/>
+                    </a:solidFill>
+                  </a:tcPr>
+                </a:tc>
+                <a:tc>
+                  <a:txBody>
+                    <a:bodyPr/>
+                    <a:lstStyle/>
+                    <a:p>
+                      <a:pPr algn="ctr"/>
+                      <a:r>
+                        <a:rPr sz="1000" b="0" i="0">
+                          <a:solidFill>
+                            <a:srgbClr val="1F2A37"/>
+                          </a:solidFill>
+                          <a:latin typeface="Calibri"/>
+                        </a:rPr>
+                        <a:t>0.70</a:t>
+                      </a:r>
+                    </a:p>
+                  </a:txBody>
+                  <a:tcPr marL="63500" marR="63500" marT="12700" marB="12700" anchor="ctr">
+                    <a:solidFill>
+                      <a:srgbClr val="FFFFFF"/>
+                    </a:solidFill>
+                  </a:tcPr>
+                </a:tc>
+                <a:tc>
+                  <a:txBody>
+                    <a:bodyPr/>
+                    <a:lstStyle/>
+                    <a:p>
+                      <a:pPr algn="ctr"/>
+                      <a:r>
+                        <a:rPr sz="1000" b="0" i="0">
+                          <a:solidFill>
+                            <a:srgbClr val="1F2A37"/>
+                          </a:solidFill>
+                          <a:latin typeface="Calibri"/>
+                        </a:rPr>
+                        <a:t>0.70</a:t>
+                      </a:r>
+                    </a:p>
+                  </a:txBody>
+                  <a:tcPr marL="63500" marR="63500" marT="12700" marB="12700" anchor="ctr">
+                    <a:solidFill>
+                      <a:srgbClr val="FFFFFF"/>
+                    </a:solidFill>
+                  </a:tcPr>
+                </a:tc>
+                <a:tc>
+                  <a:txBody>
+                    <a:bodyPr/>
+                    <a:lstStyle/>
+                    <a:p>
+                      <a:pPr algn="ctr"/>
+                      <a:r>
+                        <a:rPr sz="1000" b="0" i="0">
+                          <a:solidFill>
+                            <a:srgbClr val="1F2A37"/>
+                          </a:solidFill>
+                          <a:latin typeface="Calibri"/>
+                        </a:rPr>
+                        <a:t>852,240</a:t>
+                      </a:r>
+                    </a:p>
+                  </a:txBody>
+                  <a:tcPr marL="63500" marR="63500" marT="12700" marB="12700" anchor="ctr">
+                    <a:solidFill>
+                      <a:srgbClr val="FFFFFF"/>
+                    </a:solidFill>
+                  </a:tcPr>
+                </a:tc>
+                <a:tc>
+                  <a:txBody>
+                    <a:bodyPr/>
+                    <a:lstStyle/>
+                    <a:p>
+                      <a:pPr algn="ctr"/>
+                      <a:r>
+                        <a:rPr sz="1000" b="0" i="0">
+                          <a:solidFill>
+                            <a:srgbClr val="1F2A37"/>
+                          </a:solidFill>
+                          <a:latin typeface="Calibri"/>
+                        </a:rPr>
+                        <a:t>847,530</a:t>
+                      </a:r>
+                    </a:p>
+                  </a:txBody>
+                  <a:tcPr marL="63500" marR="63500" marT="12700" marB="12700" anchor="ctr">
+                    <a:solidFill>
+                      <a:srgbClr val="FFFFFF"/>
+                    </a:solidFill>
+                  </a:tcPr>
+                </a:tc>
+                <a:tc>
+                  <a:txBody>
+                    <a:bodyPr/>
+                    <a:lstStyle/>
+                    <a:p>
+                      <a:pPr algn="ctr"/>
+                      <a:r>
+                        <a:rPr sz="1000" b="0" i="0">
+                          <a:solidFill>
+                            <a:srgbClr val="1F2A37"/>
+                          </a:solidFill>
+                          <a:latin typeface="Calibri"/>
+                        </a:rPr>
+                        <a:t/>
+                      </a:r>
+                    </a:p>
+                  </a:txBody>
+                  <a:tcPr marL="63500" marR="63500" marT="12700" marB="12700" anchor="ctr">
+                    <a:solidFill>
+                      <a:srgbClr val="FFFFFF"/>
+                    </a:solidFill>
+                  </a:tcPr>
+                </a:tc>
+              </a:tr>
+              <a:tr h="295421">
+                <a:tc>
+                  <a:txBody>
+                    <a:bodyPr/>
+                    <a:lstStyle/>
+                    <a:p>
+                      <a:pPr algn="l"/>
+                      <a:r>
+                        <a:rPr sz="1000" b="0" i="0">
+                          <a:solidFill>
+                            <a:srgbClr val="1F2A37"/>
+                          </a:solidFill>
+                          <a:latin typeface="Calibri"/>
+                        </a:rPr>
+                        <a:t>10</a:t>
+                      </a:r>
+                    </a:p>
+                  </a:txBody>
+                  <a:tcPr marL="63500" marR="63500" marT="12700" marB="12700" anchor="ctr">
+                    <a:solidFill>
+                      <a:srgbClr val="F4F6F8"/>
+                    </a:solidFill>
+                  </a:tcPr>
+                </a:tc>
+                <a:tc>
+                  <a:txBody>
+                    <a:bodyPr/>
+                    <a:lstStyle/>
+                    <a:p>
+                      <a:pPr algn="ctr"/>
+                      <a:r>
+                        <a:rPr sz="1000" b="0" i="0">
+                          <a:solidFill>
+                            <a:srgbClr val="1F2A37"/>
+                          </a:solidFill>
+                          <a:latin typeface="Calibri"/>
+                        </a:rPr>
+                        <a:t>tau2</a:t>
+                      </a:r>
+                    </a:p>
+                  </a:txBody>
+                  <a:tcPr marL="63500" marR="63500" marT="12700" marB="12700" anchor="ctr">
+                    <a:solidFill>
+                      <a:srgbClr val="F4F6F8"/>
+                    </a:solidFill>
+                  </a:tcPr>
+                </a:tc>
+                <a:tc>
+                  <a:txBody>
+                    <a:bodyPr/>
+                    <a:lstStyle/>
+                    <a:p>
+                      <a:pPr algn="ctr"/>
+                      <a:r>
+                        <a:rPr sz="1000" b="0" i="0">
+                          <a:solidFill>
+                            <a:srgbClr val="1F2A37"/>
+                          </a:solidFill>
+                          <a:latin typeface="Calibri"/>
+                        </a:rPr>
+                        <a:t>0.85</a:t>
+                      </a:r>
+                    </a:p>
+                  </a:txBody>
+                  <a:tcPr marL="63500" marR="63500" marT="12700" marB="12700" anchor="ctr">
+                    <a:solidFill>
+                      <a:srgbClr val="F4F6F8"/>
+                    </a:solidFill>
+                  </a:tcPr>
+                </a:tc>
+                <a:tc>
+                  <a:txBody>
+                    <a:bodyPr/>
+                    <a:lstStyle/>
+                    <a:p>
+                      <a:pPr algn="ctr"/>
+                      <a:r>
+                        <a:rPr sz="1000" b="0" i="0">
+                          <a:solidFill>
+                            <a:srgbClr val="1F2A37"/>
+                          </a:solidFill>
+                          <a:latin typeface="Calibri"/>
+                        </a:rPr>
+                        <a:t>0.80</a:t>
+                      </a:r>
+                    </a:p>
+                  </a:txBody>
+                  <a:tcPr marL="63500" marR="63500" marT="12700" marB="12700" anchor="ctr">
+                    <a:solidFill>
+                      <a:srgbClr val="F4F6F8"/>
+                    </a:solidFill>
+                  </a:tcPr>
+                </a:tc>
+                <a:tc>
+                  <a:txBody>
+                    <a:bodyPr/>
+                    <a:lstStyle/>
+                    <a:p>
+                      <a:pPr algn="ctr"/>
+                      <a:r>
+                        <a:rPr sz="1000" b="0" i="0">
+                          <a:solidFill>
+                            <a:srgbClr val="1F2A37"/>
+                          </a:solidFill>
+                          <a:latin typeface="Calibri"/>
+                        </a:rPr>
+                        <a:t>1,550,718</a:t>
+                      </a:r>
+                    </a:p>
+                  </a:txBody>
+                  <a:tcPr marL="63500" marR="63500" marT="12700" marB="12700" anchor="ctr">
+                    <a:solidFill>
+                      <a:srgbClr val="F4F6F8"/>
+                    </a:solidFill>
+                  </a:tcPr>
+                </a:tc>
+                <a:tc>
+                  <a:txBody>
+                    <a:bodyPr/>
+                    <a:lstStyle/>
+                    <a:p>
+                      <a:pPr algn="ctr"/>
+                      <a:r>
+                        <a:rPr sz="1000" b="0" i="0">
+                          <a:solidFill>
+                            <a:srgbClr val="1F2A37"/>
+                          </a:solidFill>
+                          <a:latin typeface="Calibri"/>
+                        </a:rPr>
+                        <a:t>1,552,641</a:t>
+                      </a:r>
+                    </a:p>
+                  </a:txBody>
+                  <a:tcPr marL="63500" marR="63500" marT="12700" marB="12700" anchor="ctr">
+                    <a:solidFill>
+                      <a:srgbClr val="F4F6F8"/>
+                    </a:solidFill>
+                  </a:tcPr>
+                </a:tc>
+                <a:tc>
+                  <a:txBody>
+                    <a:bodyPr/>
+                    <a:lstStyle/>
+                    <a:p>
+                      <a:pPr algn="ctr"/>
+                      <a:r>
+                        <a:rPr sz="1000" b="0" i="0">
+                          <a:solidFill>
+                            <a:srgbClr val="1F2A37"/>
+                          </a:solidFill>
+                          <a:latin typeface="Calibri"/>
+                        </a:rPr>
+                        <a:t/>
+                      </a:r>
+                    </a:p>
+                  </a:txBody>
+                  <a:tcPr marL="63500" marR="63500" marT="12700" marB="12700" anchor="ctr">
+                    <a:solidFill>
+                      <a:srgbClr val="F4F6F8"/>
+                    </a:solidFill>
+                  </a:tcPr>
+                </a:tc>
+              </a:tr>
+              <a:tr h="295421">
+                <a:tc>
+                  <a:txBody>
+                    <a:bodyPr/>
+                    <a:lstStyle/>
+                    <a:p>
+                      <a:pPr algn="l"/>
+                      <a:r>
+                        <a:rPr sz="1000" b="0" i="0">
+                          <a:solidFill>
+                            <a:srgbClr val="1F2A37"/>
+                          </a:solidFill>
+                          <a:latin typeface="Calibri"/>
+                        </a:rPr>
+                        <a:t>11</a:t>
+                      </a:r>
+                    </a:p>
+                  </a:txBody>
+                  <a:tcPr marL="63500" marR="63500" marT="12700" marB="12700" anchor="ctr">
+                    <a:solidFill>
+                      <a:srgbClr val="FFFFFF"/>
+                    </a:solidFill>
+                  </a:tcPr>
+                </a:tc>
+                <a:tc>
+                  <a:txBody>
+                    <a:bodyPr/>
+                    <a:lstStyle/>
+                    <a:p>
+                      <a:pPr algn="ctr"/>
+                      <a:r>
+                        <a:rPr sz="1000" b="0" i="0">
+                          <a:solidFill>
+                            <a:srgbClr val="1F2A37"/>
+                          </a:solidFill>
+                          <a:latin typeface="Calibri"/>
+                        </a:rPr>
+                        <a:t>appworld</a:t>
+                      </a:r>
+                    </a:p>
+                  </a:txBody>
+                  <a:tcPr marL="63500" marR="63500" marT="12700" marB="12700" anchor="ctr">
+                    <a:solidFill>
+                      <a:srgbClr val="FFFFFF"/>
+                    </a:solidFill>
+                  </a:tcPr>
+                </a:tc>
+                <a:tc>
+                  <a:txBody>
+                    <a:bodyPr/>
+                    <a:lstStyle/>
+                    <a:p>
+                      <a:pPr algn="ctr"/>
+                      <a:r>
+                        <a:rPr sz="1000" b="0" i="0">
+                          <a:solidFill>
+                            <a:srgbClr val="1F2A37"/>
+                          </a:solidFill>
+                          <a:latin typeface="Calibri"/>
+                        </a:rPr>
+                        <a:t>0.00</a:t>
+                      </a:r>
+                    </a:p>
+                  </a:txBody>
+                  <a:tcPr marL="63500" marR="63500" marT="12700" marB="12700" anchor="ctr">
+                    <a:solidFill>
+                      <a:srgbClr val="FFFFFF"/>
+                    </a:solidFill>
+                  </a:tcPr>
+                </a:tc>
+                <a:tc>
+                  <a:txBody>
+                    <a:bodyPr/>
+                    <a:lstStyle/>
+                    <a:p>
+                      <a:pPr algn="ctr"/>
+                      <a:r>
+                        <a:rPr sz="1000" b="0" i="0">
+                          <a:solidFill>
+                            <a:srgbClr val="1F2A37"/>
+                          </a:solidFill>
+                          <a:latin typeface="Calibri"/>
+                        </a:rPr>
+                        <a:t>0.00</a:t>
+                      </a:r>
+                    </a:p>
+                  </a:txBody>
+                  <a:tcPr marL="63500" marR="63500" marT="12700" marB="12700" anchor="ctr">
+                    <a:solidFill>
+                      <a:srgbClr val="FFFFFF"/>
+                    </a:solidFill>
+                  </a:tcPr>
+                </a:tc>
+                <a:tc>
+                  <a:txBody>
+                    <a:bodyPr/>
+                    <a:lstStyle/>
+                    <a:p>
+                      <a:pPr algn="ctr"/>
+                      <a:r>
+                        <a:rPr sz="1000" b="0" i="0">
+                          <a:solidFill>
+                            <a:srgbClr val="1F2A37"/>
+                          </a:solidFill>
+                          <a:latin typeface="Calibri"/>
+                        </a:rPr>
+                        <a:t>1,988,986</a:t>
+                      </a:r>
+                    </a:p>
+                  </a:txBody>
+                  <a:tcPr marL="63500" marR="63500" marT="12700" marB="12700" anchor="ctr">
+                    <a:solidFill>
+                      <a:srgbClr val="FFFFFF"/>
+                    </a:solidFill>
+                  </a:tcPr>
+                </a:tc>
+                <a:tc>
+                  <a:txBody>
+                    <a:bodyPr/>
+                    <a:lstStyle/>
+                    <a:p>
+                      <a:pPr algn="ctr"/>
+                      <a:r>
+                        <a:rPr sz="1000" b="0" i="0">
+                          <a:solidFill>
+                            <a:srgbClr val="1F2A37"/>
+                          </a:solidFill>
+                          <a:latin typeface="Calibri"/>
+                        </a:rPr>
+                        <a:t>1,150,541</a:t>
+                      </a:r>
+                    </a:p>
+                  </a:txBody>
+                  <a:tcPr marL="63500" marR="63500" marT="12700" marB="12700" anchor="ctr">
+                    <a:solidFill>
+                      <a:srgbClr val="FFFFFF"/>
+                    </a:solidFill>
+                  </a:tcPr>
+                </a:tc>
+                <a:tc>
+                  <a:txBody>
+                    <a:bodyPr/>
+                    <a:lstStyle/>
+                    <a:p>
+                      <a:pPr algn="ctr"/>
+                      <a:r>
+                        <a:rPr sz="1000" b="0" i="0">
+                          <a:solidFill>
+                            <a:srgbClr val="1F2A37"/>
+                          </a:solidFill>
+                          <a:latin typeface="Calibri"/>
+                        </a:rPr>
+                        <a:t/>
+                      </a:r>
+                    </a:p>
+                  </a:txBody>
+                  <a:tcPr marL="63500" marR="63500" marT="12700" marB="12700" anchor="ctr">
+                    <a:solidFill>
+                      <a:srgbClr val="FFFFFF"/>
+                    </a:solidFill>
+                  </a:tcPr>
+                </a:tc>
+              </a:tr>
+              <a:tr h="295428">
+                <a:tc>
+                  <a:txBody>
+                    <a:bodyPr/>
+                    <a:lstStyle/>
+                    <a:p>
+                      <a:pPr algn="l"/>
+                      <a:r>
+                        <a:rPr sz="1000" b="0" i="0">
+                          <a:solidFill>
+                            <a:srgbClr val="1F2A37"/>
+                          </a:solidFill>
+                          <a:latin typeface="Calibri"/>
+                        </a:rPr>
+                        <a:t>12</a:t>
+                      </a:r>
+                    </a:p>
+                  </a:txBody>
+                  <a:tcPr marL="63500" marR="63500" marT="12700" marB="12700" anchor="ctr">
+                    <a:solidFill>
+                      <a:srgbClr val="F4F6F8"/>
+                    </a:solidFill>
+                  </a:tcPr>
+                </a:tc>
+                <a:tc>
+                  <a:txBody>
+                    <a:bodyPr/>
+                    <a:lstStyle/>
+                    <a:p>
+                      <a:pPr algn="ctr"/>
+                      <a:r>
+                        <a:rPr sz="1000" b="0" i="0">
+                          <a:solidFill>
+                            <a:srgbClr val="1F2A37"/>
+                          </a:solidFill>
+                          <a:latin typeface="Calibri"/>
+                        </a:rPr>
+                        <a:t>appworld</a:t>
+                      </a:r>
+                    </a:p>
+                  </a:txBody>
+                  <a:tcPr marL="63500" marR="63500" marT="12700" marB="12700" anchor="ctr">
+                    <a:solidFill>
+                      <a:srgbClr val="F4F6F8"/>
+                    </a:solidFill>
+                  </a:tcPr>
+                </a:tc>
+                <a:tc>
+                  <a:txBody>
+                    <a:bodyPr/>
+                    <a:lstStyle/>
+                    <a:p>
+                      <a:pPr algn="ctr"/>
+                      <a:r>
+                        <a:rPr sz="1000" b="0" i="0">
+                          <a:solidFill>
+                            <a:srgbClr val="1F2A37"/>
+                          </a:solidFill>
+                          <a:latin typeface="Calibri"/>
+                        </a:rPr>
+                        <a:t>0.00</a:t>
+                      </a:r>
+                    </a:p>
+                  </a:txBody>
+                  <a:tcPr marL="63500" marR="63500" marT="12700" marB="12700" anchor="ctr">
+                    <a:solidFill>
+                      <a:srgbClr val="F4F6F8"/>
+                    </a:solidFill>
+                  </a:tcPr>
+                </a:tc>
+                <a:tc>
+                  <a:txBody>
+                    <a:bodyPr/>
+                    <a:lstStyle/>
+                    <a:p>
+                      <a:pPr algn="ctr"/>
+                      <a:r>
+                        <a:rPr sz="1000" b="0" i="0">
+                          <a:solidFill>
+                            <a:srgbClr val="1F2A37"/>
+                          </a:solidFill>
+                          <a:latin typeface="Calibri"/>
+                        </a:rPr>
+                        <a:t>0.00</a:t>
+                      </a:r>
+                    </a:p>
+                  </a:txBody>
+                  <a:tcPr marL="63500" marR="63500" marT="12700" marB="12700" anchor="ctr">
+                    <a:solidFill>
+                      <a:srgbClr val="F4F6F8"/>
+                    </a:solidFill>
+                  </a:tcPr>
+                </a:tc>
+                <a:tc>
+                  <a:txBody>
+                    <a:bodyPr/>
+                    <a:lstStyle/>
+                    <a:p>
+                      <a:pPr algn="ctr"/>
+                      <a:r>
+                        <a:rPr sz="1000" b="0" i="0">
+                          <a:solidFill>
+                            <a:srgbClr val="1F2A37"/>
+                          </a:solidFill>
+                          <a:latin typeface="Calibri"/>
+                        </a:rPr>
+                        <a:t>4,009,033</a:t>
+                      </a:r>
+                    </a:p>
+                  </a:txBody>
+                  <a:tcPr marL="63500" marR="63500" marT="12700" marB="12700" anchor="ctr">
+                    <a:solidFill>
+                      <a:srgbClr val="F4F6F8"/>
+                    </a:solidFill>
+                  </a:tcPr>
+                </a:tc>
+                <a:tc>
+                  <a:txBody>
+                    <a:bodyPr/>
+                    <a:lstStyle/>
+                    <a:p>
+                      <a:pPr algn="ctr"/>
+                      <a:r>
+                        <a:rPr sz="1000" b="0" i="0">
+                          <a:solidFill>
+                            <a:srgbClr val="1F2A37"/>
+                          </a:solidFill>
+                          <a:latin typeface="Calibri"/>
+                        </a:rPr>
+                        <a:t>3,646,292</a:t>
+                      </a:r>
+                    </a:p>
+                  </a:txBody>
+                  <a:tcPr marL="63500" marR="63500" marT="12700" marB="12700" anchor="ctr">
+                    <a:solidFill>
+                      <a:srgbClr val="F4F6F8"/>
+                    </a:solidFill>
+                  </a:tcPr>
+                </a:tc>
+                <a:tc>
+                  <a:txBody>
+                    <a:bodyPr/>
+                    <a:lstStyle/>
+                    <a:p>
+                      <a:pPr algn="ctr"/>
+                      <a:r>
+                        <a:rPr sz="1000" b="0" i="0">
+                          <a:solidFill>
+                            <a:srgbClr val="1F2A37"/>
+                          </a:solidFill>
+                          <a:latin typeface="Calibri"/>
+                        </a:rPr>
+                        <a:t/>
+                      </a:r>
+                    </a:p>
+                  </a:txBody>
+                  <a:tcPr marL="63500" marR="63500" marT="12700" marB="12700" anchor="ctr">
+                    <a:solidFill>
+                      <a:srgbClr val="F4F6F8"/>
+                    </a:solidFill>
+                  </a:tcPr>
+                </a:tc>
+              </a:tr>
+            </a:tbl>
+          </a:graphicData>
+        </a:graphic>
+      </p:graphicFrame>
+      <p:sp>
+        <p:nvSpPr>
+          <p:cNvPr id="4" name="Rounded Rectangle 3"/>
+          <p:cNvSpPr/>
+          <p:nvPr/>
+        </p:nvSpPr>
+        <p:spPr>
+          <a:xfrm>
+            <a:off x="7543800" y="1188720"/>
+            <a:ext cx="4206240" cy="731520"/>
+          </a:xfrm>
+          <a:prstGeom prst="roundRect">
+            <a:avLst/>
+          </a:prstGeom>
+          <a:solidFill>
+            <a:srgbClr val="E4F0F0"/>
+          </a:solidFill>
+          <a:ln w="12700">
+            <a:solidFill>
+              <a:srgbClr val="3D6E70"/>
+            </a:solidFill>
+          </a:ln>
+          <a:effectLst/>
+        </p:spPr>
+        <p:style>
+          <a:lnRef idx="1">
+            <a:schemeClr val="accent1"/>
+          </a:lnRef>
+          <a:fillRef idx="3">
+            <a:schemeClr val="accent1"/>
+          </a:fillRef>
+          <a:effectRef idx="2">
+            <a:schemeClr val="accent1"/>
+          </a:effectRef>
+          <a:fontRef idx="minor">
+            <a:schemeClr val="lt1"/>
+          </a:fontRef>
+        </p:style>
+        <p:txBody>
+          <a:bodyPr rtlCol="0" anchor="t" wrap="square" tIns="63500" bIns="25400" lIns="127000"/>
+          <a:lstStyle/>
+          <a:p>
+            <a:pPr algn="l"/>
+            <a:r>
+              <a:rPr sz="1150" b="1" i="0">
+                <a:solidFill>
+                  <a:srgbClr val="1F2A37"/>
+                </a:solidFill>
+                <a:latin typeface="Calibri"/>
+              </a:rPr>
+              <a:t>11 of 12 pass rates identical</a:t>
+            </a:r>
+          </a:p>
+          <a:p>
+            <a:pPr algn="l"/>
+            <a:r>
+              <a:rPr sz="950" b="0" i="0">
+                <a:solidFill>
+                  <a:srgbClr val="3A4654"/>
+                </a:solidFill>
+                <a:latin typeface="Calibri"/>
+              </a:rPr>
+              <a:t>Only #10 differs, by one task of twenty (0.85 vs 0.80) — and tau2 is the leg we know flips run to run on either platform.</a:t>
+            </a:r>
+          </a:p>
+        </p:txBody>
+      </p:sp>
+      <p:sp>
+        <p:nvSpPr>
+          <p:cNvPr id="5" name="Rounded Rectangle 4"/>
+          <p:cNvSpPr/>
+          <p:nvPr/>
+        </p:nvSpPr>
+        <p:spPr>
+          <a:xfrm>
+            <a:off x="7543800" y="1975104"/>
+            <a:ext cx="4206240" cy="731520"/>
+          </a:xfrm>
+          <a:prstGeom prst="roundRect">
+            <a:avLst/>
+          </a:prstGeom>
+          <a:solidFill>
+            <a:srgbClr val="E4F0F0"/>
+          </a:solidFill>
+          <a:ln w="12700">
+            <a:solidFill>
+              <a:srgbClr val="3D6E70"/>
+            </a:solidFill>
+          </a:ln>
+          <a:effectLst/>
+        </p:spPr>
+        <p:style>
+          <a:lnRef idx="1">
+            <a:schemeClr val="accent1"/>
+          </a:lnRef>
+          <a:fillRef idx="3">
+            <a:schemeClr val="accent1"/>
+          </a:fillRef>
+          <a:effectRef idx="2">
+            <a:schemeClr val="accent1"/>
+          </a:effectRef>
+          <a:fontRef idx="minor">
+            <a:schemeClr val="lt1"/>
+          </a:fontRef>
+        </p:style>
+        <p:txBody>
+          <a:bodyPr rtlCol="0" anchor="t" wrap="square" tIns="63500" bIns="25400" lIns="127000"/>
+          <a:lstStyle/>
+          <a:p>
+            <a:pPr algn="l"/>
+            <a:r>
+              <a:rPr sz="1150" b="1" i="0">
+                <a:solidFill>
+                  <a:srgbClr val="1F2A37"/>
+                </a:solidFill>
+                <a:latin typeface="Calibri"/>
+              </a:rPr>
+              <a:t>7 legs byte-identical on input tokens</a:t>
+            </a:r>
+          </a:p>
+          <a:p>
+            <a:pPr algn="l"/>
+            <a:r>
+              <a:rPr sz="950" b="0" i="0">
+                <a:solidFill>
+                  <a:srgbClr val="3A4654"/>
+                </a:solidFill>
+                <a:latin typeface="Calibri"/>
+              </a:rPr>
+              <a:t>320 / 3,166 / 15,684 / 1,564 x4. Deterministic task selection plus the same model means identical work — the strongest available proof this is a like-for-like comparison, not merely a similar one.</a:t>
+            </a:r>
+          </a:p>
+        </p:txBody>
+      </p:sp>
+      <p:sp>
+        <p:nvSpPr>
+          <p:cNvPr id="6" name="Rounded Rectangle 5"/>
+          <p:cNvSpPr/>
+          <p:nvPr/>
+        </p:nvSpPr>
+        <p:spPr>
+          <a:xfrm>
+            <a:off x="7543800" y="2761488"/>
+            <a:ext cx="4206240" cy="731520"/>
+          </a:xfrm>
+          <a:prstGeom prst="roundRect">
+            <a:avLst/>
+          </a:prstGeom>
+          <a:solidFill>
+            <a:srgbClr val="E4F0F0"/>
+          </a:solidFill>
+          <a:ln w="12700">
+            <a:solidFill>
+              <a:srgbClr val="3D6E70"/>
+            </a:solidFill>
+          </a:ln>
+          <a:effectLst/>
+        </p:spPr>
+        <p:style>
+          <a:lnRef idx="1">
+            <a:schemeClr val="accent1"/>
+          </a:lnRef>
+          <a:fillRef idx="3">
+            <a:schemeClr val="accent1"/>
+          </a:fillRef>
+          <a:effectRef idx="2">
+            <a:schemeClr val="accent1"/>
+          </a:effectRef>
+          <a:fontRef idx="minor">
+            <a:schemeClr val="lt1"/>
+          </a:fontRef>
+        </p:style>
+        <p:txBody>
+          <a:bodyPr rtlCol="0" anchor="t" wrap="square" tIns="63500" bIns="25400" lIns="127000"/>
+          <a:lstStyle/>
+          <a:p>
+            <a:pPr algn="l"/>
+            <a:r>
+              <a:rPr sz="1150" b="1" i="0">
+                <a:solidFill>
+                  <a:srgbClr val="1F2A37"/>
+                </a:solidFill>
+                <a:latin typeface="Calibri"/>
+              </a:rPr>
+              <a:t>Wall time is a dead heat</a:t>
+            </a:r>
+          </a:p>
+          <a:p>
+            <a:pPr algn="l"/>
+            <a:r>
+              <a:rPr sz="950" b="0" i="0">
+                <a:solidFill>
+                  <a:srgbClr val="3A4654"/>
+                </a:solidFill>
+                <a:latin typeface="Calibri"/>
+              </a:rPr>
+              <a:t>5,438 s on OpenShift vs 5,429 s on a single KinD node — 0.2% apart in total, though individual legs differ by up to 8x.</a:t>
+            </a:r>
+          </a:p>
+        </p:txBody>
+      </p:sp>
+      <p:sp>
+        <p:nvSpPr>
+          <p:cNvPr id="7" name="Rounded Rectangle 6"/>
+          <p:cNvSpPr/>
+          <p:nvPr/>
+        </p:nvSpPr>
+        <p:spPr>
+          <a:xfrm>
+            <a:off x="7543800" y="3547872"/>
+            <a:ext cx="4206240" cy="731520"/>
+          </a:xfrm>
+          <a:prstGeom prst="roundRect">
+            <a:avLst/>
+          </a:prstGeom>
+          <a:solidFill>
+            <a:srgbClr val="E4F0F0"/>
+          </a:solidFill>
+          <a:ln w="12700">
+            <a:solidFill>
+              <a:srgbClr val="3D6E70"/>
+            </a:solidFill>
+          </a:ln>
+          <a:effectLst/>
+        </p:spPr>
+        <p:style>
+          <a:lnRef idx="1">
+            <a:schemeClr val="accent1"/>
+          </a:lnRef>
+          <a:fillRef idx="3">
+            <a:schemeClr val="accent1"/>
+          </a:fillRef>
+          <a:effectRef idx="2">
+            <a:schemeClr val="accent1"/>
+          </a:effectRef>
+          <a:fontRef idx="minor">
+            <a:schemeClr val="lt1"/>
+          </a:fontRef>
+        </p:style>
+        <p:txBody>
+          <a:bodyPr rtlCol="0" anchor="t" wrap="square" tIns="63500" bIns="25400" lIns="127000"/>
+          <a:lstStyle/>
+          <a:p>
+            <a:pPr algn="l"/>
+            <a:r>
+              <a:rPr sz="1150" b="1" i="0">
+                <a:solidFill>
+                  <a:srgbClr val="1F2A37"/>
+                </a:solidFill>
+                <a:latin typeface="Calibri"/>
+              </a:rPr>
+              <a:t>0 lost-attribution rows on both sides</a:t>
+            </a:r>
+          </a:p>
+          <a:p>
+            <a:pPr algn="l"/>
+            <a:r>
+              <a:rPr sz="950" b="0" i="0">
+                <a:solidFill>
+                  <a:srgbClr val="3A4654"/>
+                </a:solidFill>
+                <a:latin typeface="Calibri"/>
+              </a:rPr>
+              <a:t>138 OCP tasks, 135 KinD tasks.</a:t>
+            </a:r>
+          </a:p>
+        </p:txBody>
+      </p:sp>
+      <p:sp>
+        <p:nvSpPr>
+          <p:cNvPr id="8" name="Rounded Rectangle 7"/>
+          <p:cNvSpPr/>
+          <p:nvPr/>
+        </p:nvSpPr>
+        <p:spPr>
+          <a:xfrm>
+            <a:off x="7543800" y="4334256"/>
+            <a:ext cx="4206240" cy="731520"/>
+          </a:xfrm>
+          <a:prstGeom prst="roundRect">
+            <a:avLst/>
+          </a:prstGeom>
+          <a:solidFill>
+            <a:srgbClr val="E4F0F0"/>
+          </a:solidFill>
+          <a:ln w="12700">
+            <a:solidFill>
+              <a:srgbClr val="3D6E70"/>
+            </a:solidFill>
+          </a:ln>
+          <a:effectLst/>
+        </p:spPr>
+        <p:style>
+          <a:lnRef idx="1">
+            <a:schemeClr val="accent1"/>
+          </a:lnRef>
+          <a:fillRef idx="3">
+            <a:schemeClr val="accent1"/>
+          </a:fillRef>
+          <a:effectRef idx="2">
+            <a:schemeClr val="accent1"/>
+          </a:effectRef>
+          <a:fontRef idx="minor">
+            <a:schemeClr val="lt1"/>
+          </a:fontRef>
+        </p:style>
+        <p:txBody>
+          <a:bodyPr rtlCol="0" anchor="t" wrap="square" tIns="63500" bIns="25400" lIns="127000"/>
+          <a:lstStyle/>
+          <a:p>
+            <a:pPr algn="l"/>
+            <a:r>
+              <a:rPr sz="1150" b="1" i="0">
+                <a:solidFill>
+                  <a:srgbClr val="1F2A37"/>
+                </a:solidFill>
+                <a:latin typeface="Calibri"/>
+              </a:rPr>
+              <a:t>So the platform is not the variable</a:t>
+            </a:r>
+          </a:p>
+          <a:p>
+            <a:pPr algn="l"/>
+            <a:r>
+              <a:rPr sz="950" b="0" i="0">
+                <a:solidFill>
+                  <a:srgbClr val="3A4654"/>
+                </a:solidFill>
+                <a:latin typeface="Calibri"/>
+              </a:rPr>
+              <a:t>Where the two differ it traces to episode nondeterminism (tau2), small samples (#4 = one task), or appworld task timeouts — not to OpenShift vs KinD.</a:t>
+            </a:r>
+          </a:p>
+        </p:txBody>
+      </p:sp>
+    </p:spTree>
+  </p:cSld>
+  <p:clrMapOvr>
+    <a:masterClrMapping/>
+  </p:clrMapOvr>
+</p:sld>
+</file>
+
+<file path=ppt/slides/slide14.xml><?xml version="1.0" encoding="utf-8"?>
+<p:sld xmlns:a="http://schemas.openxmlformats.org/drawingml/2006/main" xmlns:p="http://schemas.openxmlformats.org/presentationml/2006/main" xmlns:r="http://schemas.openxmlformats.org/officeDocument/2006/relationships">
+  <p:cSld>
+    <p:spTree>
+      <p:nvGrpSpPr>
+        <p:cNvPr id="1" name=""/>
+        <p:cNvGrpSpPr/>
+        <p:nvPr/>
+      </p:nvGrpSpPr>
+      <p:grpSpPr/>
+      <p:sp>
+        <p:nvSpPr>
+          <p:cNvPr id="2" name="Rectangle 1"/>
+          <p:cNvSpPr/>
+          <p:nvPr/>
+        </p:nvSpPr>
+        <p:spPr>
+          <a:xfrm>
+            <a:off x="0" y="0"/>
+            <a:ext cx="12192000" cy="950000"/>
+          </a:xfrm>
+          <a:prstGeom prst="rect">
+            <a:avLst/>
+          </a:prstGeom>
+          <a:solidFill>
+            <a:srgbClr val="1B3A5C"/>
+          </a:solidFill>
+          <a:ln>
+            <a:noFill/>
+          </a:ln>
+          <a:effectLst/>
+        </p:spPr>
+        <p:style>
+          <a:lnRef idx="1">
+            <a:schemeClr val="accent1"/>
+          </a:lnRef>
+          <a:fillRef idx="3">
+            <a:schemeClr val="accent1"/>
+          </a:fillRef>
+          <a:effectRef idx="2">
+            <a:schemeClr val="accent1"/>
+          </a:effectRef>
+          <a:fontRef idx="minor">
+            <a:schemeClr val="lt1"/>
+          </a:fontRef>
+        </p:style>
+        <p:txBody>
+          <a:bodyPr rtlCol="0" anchor="ctr" lIns="355600"/>
+          <a:lstStyle/>
+          <a:p>
+            <a:pPr algn="ctr"/>
+            <a:r>
+              <a:rPr sz="2600" b="1" i="0">
+                <a:solidFill>
+                  <a:srgbClr val="FFFFFF"/>
+                </a:solidFill>
+                <a:latin typeface="Calibri"/>
+              </a:rPr>
+              <a:t>8.2  What AuthBridge Costs</a:t>
+            </a:r>
+          </a:p>
+          <a:p>
+            <a:r>
+              <a:rPr sz="1400" b="0" i="0">
+                <a:solidFill>
+                  <a:srgbClr val="C9D9EC"/>
+                </a:solidFill>
+                <a:latin typeface="Calibri"/>
+              </a:rPr>
+              <a:t>Legs #3 and #5–8 ran byte-identical work, so latency differences are the plugin config</a:t>
+            </a:r>
+          </a:p>
+        </p:txBody>
+      </p:sp>
+      <p:graphicFrame>
+        <p:nvGraphicFramePr>
+          <p:cNvPr id="3" name="Table 2"/>
+          <p:cNvGraphicFramePr>
+            <a:graphicFrameLocks noGrp="1"/>
+          </p:cNvGraphicFramePr>
+          <p:nvPr/>
+        </p:nvGraphicFramePr>
+        <p:xfrm>
+          <a:off x="411480" y="1188720"/>
+          <a:ext cx="5806440" cy="1737360"/>
+        </p:xfrm>
+        <a:graphic>
+          <a:graphicData uri="http://schemas.openxmlformats.org/drawingml/2006/table">
+            <a:tbl>
+              <a:tblPr firstRow="1">
+                <a:tableStyleId>{5C22544A-7EE6-4342-B048-85BDC9FD1C3A}</a:tableStyleId>
+              </a:tblPr>
+              <a:tblGrid>
+                <a:gridCol w="2377440"/>
+                <a:gridCol w="1691640"/>
+                <a:gridCol w="1737360"/>
+              </a:tblGrid>
+              <a:tr h="434340">
+                <a:tc>
+                  <a:txBody>
+                    <a:bodyPr/>
+                    <a:lstStyle/>
+                    <a:p>
+                      <a:pPr algn="l"/>
+                      <a:r>
+                        <a:rPr sz="1050" b="1" i="0">
+                          <a:solidFill>
+                            <a:srgbClr val="FFFFFF"/>
+                          </a:solidFill>
+                          <a:latin typeface="Calibri"/>
+                        </a:rPr>
+                        <a:t>component</a:t>
+                      </a:r>
+                    </a:p>
+                  </a:txBody>
+                  <a:tcPr marL="63500" marR="63500" marT="12700" marB="12700" anchor="ctr">
+                    <a:solidFill>
+                      <a:srgbClr val="1B3A5C"/>
+                    </a:solidFill>
+                  </a:tcPr>
+                </a:tc>
+                <a:tc>
+                  <a:txBody>
+                    <a:bodyPr/>
+                    <a:lstStyle/>
+                    <a:p>
+                      <a:pPr algn="ctr"/>
+                      <a:r>
+                        <a:rPr sz="1050" b="1" i="0">
+                          <a:solidFill>
+                            <a:srgbClr val="FFFFFF"/>
+                          </a:solidFill>
+                          <a:latin typeface="Calibri"/>
+                        </a:rPr>
+                        <a:t>cost</a:t>
+                      </a:r>
+                    </a:p>
+                  </a:txBody>
+                  <a:tcPr marL="63500" marR="63500" marT="12700" marB="12700" anchor="ctr">
+                    <a:solidFill>
+                      <a:srgbClr val="1B3A5C"/>
+                    </a:solidFill>
+                  </a:tcPr>
+                </a:tc>
+                <a:tc>
+                  <a:txBody>
+                    <a:bodyPr/>
+                    <a:lstStyle/>
+                    <a:p>
+                      <a:pPr algn="ctr"/>
+                      <a:r>
+                        <a:rPr sz="1050" b="1" i="0">
+                          <a:solidFill>
+                            <a:srgbClr val="FFFFFF"/>
+                          </a:solidFill>
+                          <a:latin typeface="Calibri"/>
+                        </a:rPr>
+                        <a:t>measured from</a:t>
+                      </a:r>
+                    </a:p>
+                  </a:txBody>
+                  <a:tcPr marL="63500" marR="63500" marT="12700" marB="12700" anchor="ctr">
+                    <a:solidFill>
+                      <a:srgbClr val="1B3A5C"/>
+                    </a:solidFill>
+                  </a:tcPr>
+                </a:tc>
+              </a:tr>
+              <a:tr h="434340">
+                <a:tc>
+                  <a:txBody>
+                    <a:bodyPr/>
+                    <a:lstStyle/>
+                    <a:p>
+                      <a:pPr algn="l"/>
+                      <a:r>
+                        <a:rPr sz="1050" b="1" i="0">
+                          <a:solidFill>
+                            <a:srgbClr val="1F2A37"/>
+                          </a:solidFill>
+                          <a:latin typeface="Calibri"/>
+                        </a:rPr>
+                        <a:t>Sidecar present at all</a:t>
+                      </a:r>
+                    </a:p>
+                  </a:txBody>
+                  <a:tcPr marL="63500" marR="63500" marT="12700" marB="12700" anchor="ctr">
+                    <a:solidFill>
+                      <a:srgbClr val="FFFFFF"/>
+                    </a:solidFill>
+                  </a:tcPr>
+                </a:tc>
+                <a:tc>
+                  <a:txBody>
+                    <a:bodyPr/>
+                    <a:lstStyle/>
+                    <a:p>
+                      <a:pPr algn="ctr"/>
+                      <a:r>
+                        <a:rPr sz="1050" b="0" i="0">
+                          <a:solidFill>
+                            <a:srgbClr val="1F2A37"/>
+                          </a:solidFill>
+                          <a:latin typeface="Calibri"/>
+                        </a:rPr>
+                        <a:t>~+9.5 s / task (OCP)</a:t>
+                      </a:r>
+                    </a:p>
+                  </a:txBody>
+                  <a:tcPr marL="63500" marR="63500" marT="12700" marB="12700" anchor="ctr">
+                    <a:solidFill>
+                      <a:srgbClr val="FFFFFF"/>
+                    </a:solidFill>
+                  </a:tcPr>
+                </a:tc>
+                <a:tc>
+                  <a:txBody>
+                    <a:bodyPr/>
+                    <a:lstStyle/>
+                    <a:p>
+                      <a:pPr algn="ctr"/>
+                      <a:r>
+                        <a:rPr sz="1050" b="0" i="0">
+                          <a:solidFill>
+                            <a:srgbClr val="1F2A37"/>
+                          </a:solidFill>
+                          <a:latin typeface="Calibri"/>
+                        </a:rPr>
+                        <a:t>flat across all four presets</a:t>
+                      </a:r>
+                    </a:p>
+                  </a:txBody>
+                  <a:tcPr marL="63500" marR="63500" marT="12700" marB="12700" anchor="ctr">
+                    <a:solidFill>
+                      <a:srgbClr val="FFFFFF"/>
+                    </a:solidFill>
+                  </a:tcPr>
+                </a:tc>
+              </a:tr>
+              <a:tr h="434340">
+                <a:tc>
+                  <a:txBody>
+                    <a:bodyPr/>
+                    <a:lstStyle/>
+                    <a:p>
+                      <a:pPr algn="l"/>
+                      <a:r>
+                        <a:rPr sz="1050" b="1" i="0">
+                          <a:solidFill>
+                            <a:srgbClr val="1F2A37"/>
+                          </a:solidFill>
+                          <a:latin typeface="Calibri"/>
+                        </a:rPr>
+                        <a:t>Tool call, sidecar but unjudged</a:t>
+                      </a:r>
+                    </a:p>
+                  </a:txBody>
+                  <a:tcPr marL="63500" marR="63500" marT="12700" marB="12700" anchor="ctr">
+                    <a:solidFill>
+                      <a:srgbClr val="F4F6F8"/>
+                    </a:solidFill>
+                  </a:tcPr>
+                </a:tc>
+                <a:tc>
+                  <a:txBody>
+                    <a:bodyPr/>
+                    <a:lstStyle/>
+                    <a:p>
+                      <a:pPr algn="ctr"/>
+                      <a:r>
+                        <a:rPr sz="1050" b="0" i="0">
+                          <a:solidFill>
+                            <a:srgbClr val="1F2A37"/>
+                          </a:solidFill>
+                          <a:latin typeface="Calibri"/>
+                        </a:rPr>
+                        <a:t>+0.50 s</a:t>
+                      </a:r>
+                    </a:p>
+                  </a:txBody>
+                  <a:tcPr marL="63500" marR="63500" marT="12700" marB="12700" anchor="ctr">
+                    <a:solidFill>
+                      <a:srgbClr val="F4F6F8"/>
+                    </a:solidFill>
+                  </a:tcPr>
+                </a:tc>
+                <a:tc>
+                  <a:txBody>
+                    <a:bodyPr/>
+                    <a:lstStyle/>
+                    <a:p>
+                      <a:pPr algn="ctr"/>
+                      <a:r>
+                        <a:rPr sz="1050" b="0" i="0">
+                          <a:solidFill>
+                            <a:srgbClr val="1F2A37"/>
+                          </a:solidFill>
+                          <a:latin typeface="Calibri"/>
+                        </a:rPr>
+                        <a:t>auth-only</a:t>
+                      </a:r>
+                    </a:p>
+                  </a:txBody>
+                  <a:tcPr marL="63500" marR="63500" marT="12700" marB="12700" anchor="ctr">
+                    <a:solidFill>
+                      <a:srgbClr val="F4F6F8"/>
+                    </a:solidFill>
+                  </a:tcPr>
+                </a:tc>
+              </a:tr>
+              <a:tr h="434340">
+                <a:tc>
+                  <a:txBody>
+                    <a:bodyPr/>
+                    <a:lstStyle/>
+                    <a:p>
+                      <a:pPr algn="l"/>
+                      <a:r>
+                        <a:rPr sz="1050" b="1" i="0">
+                          <a:solidFill>
+                            <a:srgbClr val="1F2A37"/>
+                          </a:solidFill>
+                          <a:latin typeface="Calibri"/>
+                        </a:rPr>
+                        <a:t>Tool call, judged</a:t>
+                      </a:r>
+                    </a:p>
+                  </a:txBody>
+                  <a:tcPr marL="63500" marR="63500" marT="12700" marB="12700" anchor="ctr">
+                    <a:solidFill>
+                      <a:srgbClr val="FFFFFF"/>
+                    </a:solidFill>
+                  </a:tcPr>
+                </a:tc>
+                <a:tc>
+                  <a:txBody>
+                    <a:bodyPr/>
+                    <a:lstStyle/>
+                    <a:p>
+                      <a:pPr algn="ctr"/>
+                      <a:r>
+                        <a:rPr sz="1050" b="0" i="0">
+                          <a:solidFill>
+                            <a:srgbClr val="1F2A37"/>
+                          </a:solidFill>
+                          <a:latin typeface="Calibri"/>
+                        </a:rPr>
+                        <a:t>+1.96 s on top</a:t>
+                      </a:r>
+                    </a:p>
+                  </a:txBody>
+                  <a:tcPr marL="63500" marR="63500" marT="12700" marB="12700" anchor="ctr">
+                    <a:solidFill>
+                      <a:srgbClr val="FFFFFF"/>
+                    </a:solidFill>
+                  </a:tcPr>
+                </a:tc>
+                <a:tc>
+                  <a:txBody>
+                    <a:bodyPr/>
+                    <a:lstStyle/>
+                    <a:p>
+                      <a:pPr algn="ctr"/>
+                      <a:r>
+                        <a:rPr sz="1050" b="0" i="0">
+                          <a:solidFill>
+                            <a:srgbClr val="1F2A37"/>
+                          </a:solidFill>
+                          <a:latin typeface="Calibri"/>
+                        </a:rPr>
+                        <a:t>full + observe (all 5 judged)</a:t>
+                      </a:r>
+                    </a:p>
+                  </a:txBody>
+                  <a:tcPr marL="63500" marR="63500" marT="12700" marB="12700" anchor="ctr">
+                    <a:solidFill>
+                      <a:srgbClr val="FFFFFF"/>
+                    </a:solidFill>
+                  </a:tcPr>
+                </a:tc>
+              </a:tr>
+            </a:tbl>
+          </a:graphicData>
+        </a:graphic>
+      </p:graphicFrame>
+      <p:graphicFrame>
+        <p:nvGraphicFramePr>
+          <p:cNvPr id="4" name="Table 3"/>
+          <p:cNvGraphicFramePr>
+            <a:graphicFrameLocks noGrp="1"/>
+          </p:cNvGraphicFramePr>
+          <p:nvPr/>
+        </p:nvGraphicFramePr>
+        <p:xfrm>
+          <a:off x="411480" y="3246120"/>
+          <a:ext cx="5806440" cy="1737360"/>
+        </p:xfrm>
+        <a:graphic>
+          <a:graphicData uri="http://schemas.openxmlformats.org/drawingml/2006/table">
+            <a:tbl>
+              <a:tblPr firstRow="1">
+                <a:tableStyleId>{5C22544A-7EE6-4342-B048-85BDC9FD1C3A}</a:tableStyleId>
+              </a:tblPr>
+              <a:tblGrid>
+                <a:gridCol w="2377440"/>
+                <a:gridCol w="1143000"/>
+                <a:gridCol w="1143000"/>
+                <a:gridCol w="1143000"/>
+              </a:tblGrid>
+              <a:tr h="434340">
+                <a:tc>
+                  <a:txBody>
+                    <a:bodyPr/>
+                    <a:lstStyle/>
+                    <a:p>
+                      <a:pPr algn="l"/>
+                      <a:r>
+                        <a:rPr sz="1050" b="1" i="0">
+                          <a:solidFill>
+                            <a:srgbClr val="FFFFFF"/>
+                          </a:solidFill>
+                          <a:latin typeface="Calibri"/>
+                        </a:rPr>
+                        <a:t/>
+                      </a:r>
+                    </a:p>
+                  </a:txBody>
+                  <a:tcPr marL="63500" marR="63500" marT="12700" marB="12700" anchor="ctr">
+                    <a:solidFill>
+                      <a:srgbClr val="1B3A5C"/>
+                    </a:solidFill>
+                  </a:tcPr>
+                </a:tc>
+                <a:tc>
+                  <a:txBody>
+                    <a:bodyPr/>
+                    <a:lstStyle/>
+                    <a:p>
+                      <a:pPr algn="ctr"/>
+                      <a:r>
+                        <a:rPr sz="1050" b="1" i="0">
+                          <a:solidFill>
+                            <a:srgbClr val="FFFFFF"/>
+                          </a:solidFill>
+                          <a:latin typeface="Calibri"/>
+                        </a:rPr>
+                        <a:t>OCP</a:t>
+                      </a:r>
+                    </a:p>
+                  </a:txBody>
+                  <a:tcPr marL="63500" marR="63500" marT="12700" marB="12700" anchor="ctr">
+                    <a:solidFill>
+                      <a:srgbClr val="1B3A5C"/>
+                    </a:solidFill>
+                  </a:tcPr>
+                </a:tc>
+                <a:tc>
+                  <a:txBody>
+                    <a:bodyPr/>
+                    <a:lstStyle/>
+                    <a:p>
+                      <a:pPr algn="ctr"/>
+                      <a:r>
+                        <a:rPr sz="1050" b="1" i="0">
+                          <a:solidFill>
+                            <a:srgbClr val="FFFFFF"/>
+                          </a:solidFill>
+                          <a:latin typeface="Calibri"/>
+                        </a:rPr>
+                        <a:t>KinD</a:t>
+                      </a:r>
+                    </a:p>
+                  </a:txBody>
+                  <a:tcPr marL="63500" marR="63500" marT="12700" marB="12700" anchor="ctr">
+                    <a:solidFill>
+                      <a:srgbClr val="1B3A5C"/>
+                    </a:solidFill>
+                  </a:tcPr>
+                </a:tc>
+                <a:tc>
+                  <a:txBody>
+                    <a:bodyPr/>
+                    <a:lstStyle/>
+                    <a:p>
+                      <a:pPr algn="ctr"/>
+                      <a:r>
+                        <a:rPr sz="1050" b="1" i="0">
+                          <a:solidFill>
+                            <a:srgbClr val="FFFFFF"/>
+                          </a:solidFill>
+                          <a:latin typeface="Calibri"/>
+                        </a:rPr>
+                        <a:t>ratio</a:t>
+                      </a:r>
+                    </a:p>
+                  </a:txBody>
+                  <a:tcPr marL="63500" marR="63500" marT="12700" marB="12700" anchor="ctr">
+                    <a:solidFill>
+                      <a:srgbClr val="1B3A5C"/>
+                    </a:solidFill>
+                  </a:tcPr>
+                </a:tc>
+              </a:tr>
+              <a:tr h="434340">
+                <a:tc>
+                  <a:txBody>
+                    <a:bodyPr/>
+                    <a:lstStyle/>
+                    <a:p>
+                      <a:pPr algn="l"/>
+                      <a:r>
+                        <a:rPr sz="1050" b="1" i="0">
+                          <a:solidFill>
+                            <a:srgbClr val="1F2A37"/>
+                          </a:solidFill>
+                          <a:latin typeface="Calibri"/>
+                        </a:rPr>
+                        <a:t>connect_mcp with sidecar</a:t>
+                      </a:r>
+                    </a:p>
+                  </a:txBody>
+                  <a:tcPr marL="63500" marR="63500" marT="12700" marB="12700" anchor="ctr">
+                    <a:solidFill>
+                      <a:srgbClr val="FFFFFF"/>
+                    </a:solidFill>
+                  </a:tcPr>
+                </a:tc>
+                <a:tc>
+                  <a:txBody>
+                    <a:bodyPr/>
+                    <a:lstStyle/>
+                    <a:p>
+                      <a:pPr algn="ctr"/>
+                      <a:r>
+                        <a:rPr sz="1050" b="0" i="0">
+                          <a:solidFill>
+                            <a:srgbClr val="1F2A37"/>
+                          </a:solidFill>
+                          <a:latin typeface="Calibri"/>
+                        </a:rPr>
+                        <a:t>3131 ms</a:t>
+                      </a:r>
+                    </a:p>
+                  </a:txBody>
+                  <a:tcPr marL="63500" marR="63500" marT="12700" marB="12700" anchor="ctr">
+                    <a:solidFill>
+                      <a:srgbClr val="FFFFFF"/>
+                    </a:solidFill>
+                  </a:tcPr>
+                </a:tc>
+                <a:tc>
+                  <a:txBody>
+                    <a:bodyPr/>
+                    <a:lstStyle/>
+                    <a:p>
+                      <a:pPr algn="ctr"/>
+                      <a:r>
+                        <a:rPr sz="1050" b="0" i="0">
+                          <a:solidFill>
+                            <a:srgbClr val="1F2A37"/>
+                          </a:solidFill>
+                          <a:latin typeface="Calibri"/>
+                        </a:rPr>
+                        <a:t>168 ms</a:t>
+                      </a:r>
+                    </a:p>
+                  </a:txBody>
+                  <a:tcPr marL="63500" marR="63500" marT="12700" marB="12700" anchor="ctr">
+                    <a:solidFill>
+                      <a:srgbClr val="FFFFFF"/>
+                    </a:solidFill>
+                  </a:tcPr>
+                </a:tc>
+                <a:tc>
+                  <a:txBody>
+                    <a:bodyPr/>
+                    <a:lstStyle/>
+                    <a:p>
+                      <a:pPr algn="ctr"/>
+                      <a:r>
+                        <a:rPr sz="1050" b="0" i="0">
+                          <a:solidFill>
+                            <a:srgbClr val="1F2A37"/>
+                          </a:solidFill>
+                          <a:latin typeface="Calibri"/>
+                        </a:rPr>
+                        <a:t>18.6x</a:t>
+                      </a:r>
+                    </a:p>
+                  </a:txBody>
+                  <a:tcPr marL="63500" marR="63500" marT="12700" marB="12700" anchor="ctr">
+                    <a:solidFill>
+                      <a:srgbClr val="FFFFFF"/>
+                    </a:solidFill>
+                  </a:tcPr>
+                </a:tc>
+              </a:tr>
+              <a:tr h="434340">
+                <a:tc>
+                  <a:txBody>
+                    <a:bodyPr/>
+                    <a:lstStyle/>
+                    <a:p>
+                      <a:pPr algn="l"/>
+                      <a:r>
+                        <a:rPr sz="1050" b="1" i="0">
+                          <a:solidFill>
+                            <a:srgbClr val="1F2A37"/>
+                          </a:solidFill>
+                          <a:latin typeface="Calibri"/>
+                        </a:rPr>
+                        <a:t>tool call, unjudged</a:t>
+                      </a:r>
+                    </a:p>
+                  </a:txBody>
+                  <a:tcPr marL="63500" marR="63500" marT="12700" marB="12700" anchor="ctr">
+                    <a:solidFill>
+                      <a:srgbClr val="F4F6F8"/>
+                    </a:solidFill>
+                  </a:tcPr>
+                </a:tc>
+                <a:tc>
+                  <a:txBody>
+                    <a:bodyPr/>
+                    <a:lstStyle/>
+                    <a:p>
+                      <a:pPr algn="ctr"/>
+                      <a:r>
+                        <a:rPr sz="1050" b="0" i="0">
+                          <a:solidFill>
+                            <a:srgbClr val="1F2A37"/>
+                          </a:solidFill>
+                          <a:latin typeface="Calibri"/>
+                        </a:rPr>
+                        <a:t>545 ms</a:t>
+                      </a:r>
+                    </a:p>
+                  </a:txBody>
+                  <a:tcPr marL="63500" marR="63500" marT="12700" marB="12700" anchor="ctr">
+                    <a:solidFill>
+                      <a:srgbClr val="F4F6F8"/>
+                    </a:solidFill>
+                  </a:tcPr>
+                </a:tc>
+                <a:tc>
+                  <a:txBody>
+                    <a:bodyPr/>
+                    <a:lstStyle/>
+                    <a:p>
+                      <a:pPr algn="ctr"/>
+                      <a:r>
+                        <a:rPr sz="1050" b="0" i="0">
+                          <a:solidFill>
+                            <a:srgbClr val="1F2A37"/>
+                          </a:solidFill>
+                          <a:latin typeface="Calibri"/>
+                        </a:rPr>
+                        <a:t>13 ms</a:t>
+                      </a:r>
+                    </a:p>
+                  </a:txBody>
+                  <a:tcPr marL="63500" marR="63500" marT="12700" marB="12700" anchor="ctr">
+                    <a:solidFill>
+                      <a:srgbClr val="F4F6F8"/>
+                    </a:solidFill>
+                  </a:tcPr>
+                </a:tc>
+                <a:tc>
+                  <a:txBody>
+                    <a:bodyPr/>
+                    <a:lstStyle/>
+                    <a:p>
+                      <a:pPr algn="ctr"/>
+                      <a:r>
+                        <a:rPr sz="1050" b="0" i="0">
+                          <a:solidFill>
+                            <a:srgbClr val="1F2A37"/>
+                          </a:solidFill>
+                          <a:latin typeface="Calibri"/>
+                        </a:rPr>
+                        <a:t>41.1x</a:t>
+                      </a:r>
+                    </a:p>
+                  </a:txBody>
+                  <a:tcPr marL="63500" marR="63500" marT="12700" marB="12700" anchor="ctr">
+                    <a:solidFill>
+                      <a:srgbClr val="F4F6F8"/>
+                    </a:solidFill>
+                  </a:tcPr>
+                </a:tc>
+              </a:tr>
+              <a:tr h="434340">
+                <a:tc>
+                  <a:txBody>
+                    <a:bodyPr/>
+                    <a:lstStyle/>
+                    <a:p>
+                      <a:pPr algn="l"/>
+                      <a:r>
+                        <a:rPr sz="1050" b="1" i="0">
+                          <a:solidFill>
+                            <a:srgbClr val="1F2A37"/>
+                          </a:solidFill>
+                          <a:latin typeface="Calibri"/>
+                        </a:rPr>
+                        <a:t>tool call, judged</a:t>
+                      </a:r>
+                    </a:p>
+                  </a:txBody>
+                  <a:tcPr marL="63500" marR="63500" marT="12700" marB="12700" anchor="ctr">
+                    <a:solidFill>
+                      <a:srgbClr val="FFFFFF"/>
+                    </a:solidFill>
+                  </a:tcPr>
+                </a:tc>
+                <a:tc>
+                  <a:txBody>
+                    <a:bodyPr/>
+                    <a:lstStyle/>
+                    <a:p>
+                      <a:pPr algn="ctr"/>
+                      <a:r>
+                        <a:rPr sz="1050" b="0" i="0">
+                          <a:solidFill>
+                            <a:srgbClr val="1F2A37"/>
+                          </a:solidFill>
+                          <a:latin typeface="Calibri"/>
+                        </a:rPr>
+                        <a:t>2507 ms</a:t>
+                      </a:r>
+                    </a:p>
+                  </a:txBody>
+                  <a:tcPr marL="63500" marR="63500" marT="12700" marB="12700" anchor="ctr">
+                    <a:solidFill>
+                      <a:srgbClr val="FFFFFF"/>
+                    </a:solidFill>
+                  </a:tcPr>
+                </a:tc>
+                <a:tc>
+                  <a:txBody>
+                    <a:bodyPr/>
+                    <a:lstStyle/>
+                    <a:p>
+                      <a:pPr algn="ctr"/>
+                      <a:r>
+                        <a:rPr sz="1050" b="0" i="0">
+                          <a:solidFill>
+                            <a:srgbClr val="1F2A37"/>
+                          </a:solidFill>
+                          <a:latin typeface="Calibri"/>
+                        </a:rPr>
+                        <a:t>1167 ms</a:t>
+                      </a:r>
+                    </a:p>
+                  </a:txBody>
+                  <a:tcPr marL="63500" marR="63500" marT="12700" marB="12700" anchor="ctr">
+                    <a:solidFill>
+                      <a:srgbClr val="FFFFFF"/>
+                    </a:solidFill>
+                  </a:tcPr>
+                </a:tc>
+                <a:tc>
+                  <a:txBody>
+                    <a:bodyPr/>
+                    <a:lstStyle/>
+                    <a:p>
+                      <a:pPr algn="ctr"/>
+                      <a:r>
+                        <a:rPr sz="1050" b="0" i="0">
+                          <a:solidFill>
+                            <a:srgbClr val="1F2A37"/>
+                          </a:solidFill>
+                          <a:latin typeface="Calibri"/>
+                        </a:rPr>
+                        <a:t>2.1x</a:t>
+                      </a:r>
+                    </a:p>
+                  </a:txBody>
+                  <a:tcPr marL="63500" marR="63500" marT="12700" marB="12700" anchor="ctr">
+                    <a:solidFill>
+                      <a:srgbClr val="FFFFFF"/>
+                    </a:solidFill>
+                  </a:tcPr>
+                </a:tc>
+              </a:tr>
+            </a:tbl>
+          </a:graphicData>
+        </a:graphic>
+      </p:graphicFrame>
+      <p:sp>
+        <p:nvSpPr>
+          <p:cNvPr id="5" name="Rounded Rectangle 4"/>
+          <p:cNvSpPr/>
+          <p:nvPr/>
+        </p:nvSpPr>
+        <p:spPr>
+          <a:xfrm>
+            <a:off x="6446520" y="1188720"/>
+            <a:ext cx="5303520" cy="1188720"/>
+          </a:xfrm>
+          <a:prstGeom prst="roundRect">
+            <a:avLst/>
+          </a:prstGeom>
+          <a:solidFill>
+            <a:srgbClr val="F1E8F6"/>
+          </a:solidFill>
+          <a:ln w="12700">
+            <a:solidFill>
+              <a:srgbClr val="8E44AD"/>
+            </a:solidFill>
+          </a:ln>
+          <a:effectLst/>
+        </p:spPr>
+        <p:style>
+          <a:lnRef idx="1">
+            <a:schemeClr val="accent1"/>
+          </a:lnRef>
+          <a:fillRef idx="3">
+            <a:schemeClr val="accent1"/>
+          </a:fillRef>
+          <a:effectRef idx="2">
+            <a:schemeClr val="accent1"/>
+          </a:effectRef>
+          <a:fontRef idx="minor">
+            <a:schemeClr val="lt1"/>
+          </a:fontRef>
+        </p:style>
+        <p:txBody>
+          <a:bodyPr rtlCol="0" anchor="t" wrap="square" tIns="63500" bIns="25400" lIns="127000"/>
+          <a:lstStyle/>
+          <a:p>
+            <a:pPr algn="l"/>
+            <a:r>
+              <a:rPr sz="1150" b="1" i="0">
+                <a:solidFill>
+                  <a:srgbClr val="1F2A37"/>
+                </a:solidFill>
+                <a:latin typeface="Calibri"/>
+              </a:rPr>
+              <a:t>The judge is itself an LLM call</a:t>
+            </a:r>
+          </a:p>
+          <a:p>
+            <a:pPr algn="l"/>
+            <a:r>
+              <a:rPr sz="950" b="0" i="0">
+                <a:solidFill>
+                  <a:srgbClr val="3A4654"/>
+                </a:solidFill>
+                <a:latin typeface="Calibri"/>
+              </a:rPr>
+              <a:t>The sidecar POSTs to a chat-completions endpoint per authorized action, which is why it costs seconds and why its latency is so variable.</a:t>
+            </a:r>
+          </a:p>
+        </p:txBody>
+      </p:sp>
+      <p:sp>
+        <p:nvSpPr>
+          <p:cNvPr id="6" name="Rounded Rectangle 5"/>
+          <p:cNvSpPr/>
+          <p:nvPr/>
+        </p:nvSpPr>
+        <p:spPr>
+          <a:xfrm>
+            <a:off x="6446520" y="2432304"/>
+            <a:ext cx="5303520" cy="1188720"/>
+          </a:xfrm>
+          <a:prstGeom prst="roundRect">
+            <a:avLst/>
+          </a:prstGeom>
+          <a:solidFill>
+            <a:srgbClr val="F1E8F6"/>
+          </a:solidFill>
+          <a:ln w="12700">
+            <a:solidFill>
+              <a:srgbClr val="8E44AD"/>
+            </a:solidFill>
+          </a:ln>
+          <a:effectLst/>
+        </p:spPr>
+        <p:style>
+          <a:lnRef idx="1">
+            <a:schemeClr val="accent1"/>
+          </a:lnRef>
+          <a:fillRef idx="3">
+            <a:schemeClr val="accent1"/>
+          </a:fillRef>
+          <a:effectRef idx="2">
+            <a:schemeClr val="accent1"/>
+          </a:effectRef>
+          <a:fontRef idx="minor">
+            <a:schemeClr val="lt1"/>
+          </a:fontRef>
+        </p:style>
+        <p:txBody>
+          <a:bodyPr rtlCol="0" anchor="t" wrap="square" tIns="63500" bIns="25400" lIns="127000"/>
+          <a:lstStyle/>
+          <a:p>
+            <a:pPr algn="l"/>
+            <a:r>
+              <a:rPr sz="1150" b="1" i="0">
+                <a:solidFill>
+                  <a:srgbClr val="1F2A37"/>
+                </a:solidFill>
+                <a:latin typeface="Calibri"/>
+              </a:rPr>
+              <a:t>Most of the OCP figure is topology, not plugins</a:t>
+            </a:r>
+          </a:p>
+          <a:p>
+            <a:pPr algn="l"/>
+            <a:r>
+              <a:rPr sz="950" b="0" i="0">
+                <a:solidFill>
+                  <a:srgbClr val="3A4654"/>
+                </a:solidFill>
+                <a:latin typeface="Calibri"/>
+              </a:rPr>
+              <a:t>The judged-call cost is comparable across platforms (2.1x) because it is dominated by a shared external gateway. The fixed cost is 8x apart because this OCP matrix is cross-cluster — token exchange over external routes. Do NOT quote +9.5 s as “the cost of AuthBridge”; the single-node figures (~+1.2 s fixed, ~+1.1 s per judged call) are the better estimate.</a:t>
+            </a:r>
+          </a:p>
+        </p:txBody>
+      </p:sp>
+      <p:sp>
+        <p:nvSpPr>
+          <p:cNvPr id="7" name="Rounded Rectangle 6"/>
+          <p:cNvSpPr/>
+          <p:nvPr/>
+        </p:nvSpPr>
+        <p:spPr>
+          <a:xfrm>
+            <a:off x="6446520" y="3675888"/>
+            <a:ext cx="5303520" cy="1188720"/>
+          </a:xfrm>
+          <a:prstGeom prst="roundRect">
+            <a:avLst/>
+          </a:prstGeom>
+          <a:solidFill>
+            <a:srgbClr val="F1E8F6"/>
+          </a:solidFill>
+          <a:ln w="12700">
+            <a:solidFill>
+              <a:srgbClr val="8E44AD"/>
+            </a:solidFill>
+          </a:ln>
+          <a:effectLst/>
+        </p:spPr>
+        <p:style>
+          <a:lnRef idx="1">
+            <a:schemeClr val="accent1"/>
+          </a:lnRef>
+          <a:fillRef idx="3">
+            <a:schemeClr val="accent1"/>
+          </a:fillRef>
+          <a:effectRef idx="2">
+            <a:schemeClr val="accent1"/>
+          </a:effectRef>
+          <a:fontRef idx="minor">
+            <a:schemeClr val="lt1"/>
+          </a:fontRef>
+        </p:style>
+        <p:txBody>
+          <a:bodyPr rtlCol="0" anchor="t" wrap="square" tIns="63500" bIns="25400" lIns="127000"/>
+          <a:lstStyle/>
+          <a:p>
+            <a:pPr algn="l"/>
+            <a:r>
+              <a:rPr sz="1150" b="1" i="0">
+                <a:solidFill>
+                  <a:srgbClr val="1F2A37"/>
+                </a:solidFill>
+                <a:latin typeface="Calibri"/>
+              </a:rPr>
+              <a:t>Presets cannot be ranked from these numbers</a:t>
+            </a:r>
+          </a:p>
+          <a:p>
+            <a:pPr algn="l"/>
+            <a:r>
+              <a:rPr sz="950" b="0" i="0">
+                <a:solidFill>
+                  <a:srgbClr val="3A4654"/>
+                </a:solidFill>
+                <a:latin typeface="Calibri"/>
+              </a:rPr>
+              <a:t>Only 1 of 6 IBAC legs authorized all of its tool calls: OCP judged 4/5, 3/5, 5/5 and KinD 3/5, 4/5, 3/5. A leg that judged fewer calls shows a lower median — a mixture, not a saving. Whether that is decision caching under concurrency or a fail-open gap is still OPEN; the test is one ibac-only leg at parallelism 1.</a:t>
+            </a:r>
+          </a:p>
+        </p:txBody>
+      </p:sp>
+      <p:sp>
+        <p:nvSpPr>
+          <p:cNvPr id="8" name="Rounded Rectangle 7"/>
+          <p:cNvSpPr/>
+          <p:nvPr/>
+        </p:nvSpPr>
+        <p:spPr>
+          <a:xfrm>
+            <a:off x="6446520" y="4919472"/>
+            <a:ext cx="5303520" cy="1188720"/>
+          </a:xfrm>
+          <a:prstGeom prst="roundRect">
+            <a:avLst/>
+          </a:prstGeom>
+          <a:solidFill>
+            <a:srgbClr val="F1E8F6"/>
+          </a:solidFill>
+          <a:ln w="12700">
+            <a:solidFill>
+              <a:srgbClr val="8E44AD"/>
+            </a:solidFill>
+          </a:ln>
+          <a:effectLst/>
+        </p:spPr>
+        <p:style>
+          <a:lnRef idx="1">
+            <a:schemeClr val="accent1"/>
+          </a:lnRef>
+          <a:fillRef idx="3">
+            <a:schemeClr val="accent1"/>
+          </a:fillRef>
+          <a:effectRef idx="2">
+            <a:schemeClr val="accent1"/>
+          </a:effectRef>
+          <a:fontRef idx="minor">
+            <a:schemeClr val="lt1"/>
+          </a:fontRef>
+        </p:style>
+        <p:txBody>
+          <a:bodyPr rtlCol="0" anchor="t" wrap="square" tIns="63500" bIns="25400" lIns="127000"/>
+          <a:lstStyle/>
+          <a:p>
+            <a:pPr algn="l"/>
+            <a:r>
+              <a:rPr sz="1150" b="1" i="0">
+                <a:solidFill>
+                  <a:srgbClr val="1F2A37"/>
+                </a:solidFill>
+                <a:latin typeface="Calibri"/>
+              </a:rPr>
+              <a:t>Latency only</a:t>
+            </a:r>
+          </a:p>
+          <a:p>
+            <a:pPr algn="l"/>
+            <a:r>
+              <a:rPr sz="950" b="0" i="0">
+                <a:solidFill>
+                  <a:srgbClr val="3A4654"/>
+                </a:solidFill>
+                <a:latin typeface="Calibri"/>
+              </a:rPr>
+              <a:t>The sidecar's CPU and memory cost is unmeasured — every infra field in these runs is 0.0.</a:t>
+            </a:r>
+          </a:p>
+        </p:txBody>
+      </p:sp>
+    </p:spTree>
+  </p:cSld>
+  <p:clrMapOvr>
+    <a:masterClrMapping/>
+  </p:clrMapOvr>
+</p:sld>
+</file>
+
+<file path=ppt/slides/slide15.xml><?xml version="1.0" encoding="utf-8"?>
+<p:sld xmlns:a="http://schemas.openxmlformats.org/drawingml/2006/main" xmlns:p="http://schemas.openxmlformats.org/presentationml/2006/main" xmlns:r="http://schemas.openxmlformats.org/officeDocument/2006/relationships">
+  <p:cSld>
+    <p:spTree>
+      <p:nvGrpSpPr>
+        <p:cNvPr id="1" name=""/>
+        <p:cNvGrpSpPr/>
+        <p:nvPr/>
+      </p:nvGrpSpPr>
+      <p:grpSpPr/>
+      <p:sp>
+        <p:nvSpPr>
+          <p:cNvPr id="2" name="Rectangle 1"/>
+          <p:cNvSpPr/>
+          <p:nvPr/>
+        </p:nvSpPr>
+        <p:spPr>
+          <a:xfrm>
+            <a:off x="0" y="0"/>
+            <a:ext cx="12192000" cy="950000"/>
+          </a:xfrm>
+          <a:prstGeom prst="rect">
+            <a:avLst/>
+          </a:prstGeom>
+          <a:solidFill>
+            <a:srgbClr val="1B3A5C"/>
+          </a:solidFill>
+          <a:ln>
+            <a:noFill/>
+          </a:ln>
+          <a:effectLst/>
+        </p:spPr>
+        <p:style>
+          <a:lnRef idx="1">
+            <a:schemeClr val="accent1"/>
+          </a:lnRef>
+          <a:fillRef idx="3">
+            <a:schemeClr val="accent1"/>
+          </a:fillRef>
+          <a:effectRef idx="2">
+            <a:schemeClr val="accent1"/>
+          </a:effectRef>
+          <a:fontRef idx="minor">
+            <a:schemeClr val="lt1"/>
+          </a:fontRef>
+        </p:style>
+        <p:txBody>
+          <a:bodyPr rtlCol="0" anchor="ctr" lIns="355600"/>
+          <a:lstStyle/>
+          <a:p>
+            <a:pPr algn="ctr"/>
+            <a:r>
+              <a:rPr sz="2600" b="1" i="0">
+                <a:solidFill>
+                  <a:srgbClr val="FFFFFF"/>
+                </a:solidFill>
+                <a:latin typeface="Calibri"/>
+              </a:rPr>
+              <a:t>9.  What the Service Can &amp; Cannot Enact</a:t>
             </a:r>
           </a:p>
           <a:p>
@@ -4391,7 +11681,7 @@
         </p:nvSpPr>
         <p:spPr>
           <a:xfrm>
-            <a:off x="685800" y="1472184"/>
+            <a:off x="685800" y="1380744"/>
             <a:ext cx="420624" cy="420624"/>
           </a:xfrm>
           <a:prstGeom prst="ellipse">
@@ -4446,7 +11736,7 @@
         </p:nvSpPr>
         <p:spPr>
           <a:xfrm>
-            <a:off x="1280160" y="1417320"/>
+            <a:off x="1280160" y="1325880"/>
             <a:ext cx="4526280" cy="292608"/>
           </a:xfrm>
           <a:prstGeom prst="rect">
@@ -4485,7 +11775,7 @@
         </p:nvSpPr>
         <p:spPr>
           <a:xfrm>
-            <a:off x="1280160" y="1719072"/>
+            <a:off x="1280160" y="1627632"/>
             <a:ext cx="4526280" cy="457200"/>
           </a:xfrm>
           <a:prstGeom prst="rect">
@@ -4524,7 +11814,7 @@
         </p:nvSpPr>
         <p:spPr>
           <a:xfrm>
-            <a:off x="685800" y="2551176"/>
+            <a:off x="685800" y="2350008"/>
             <a:ext cx="420624" cy="420624"/>
           </a:xfrm>
           <a:prstGeom prst="ellipse">
@@ -4579,7 +11869,7 @@
         </p:nvSpPr>
         <p:spPr>
           <a:xfrm>
-            <a:off x="1280160" y="2496312"/>
+            <a:off x="1280160" y="2295144"/>
             <a:ext cx="4526280" cy="292608"/>
           </a:xfrm>
           <a:prstGeom prst="rect">
@@ -4618,7 +11908,7 @@
         </p:nvSpPr>
         <p:spPr>
           <a:xfrm>
-            <a:off x="1280160" y="2798064"/>
+            <a:off x="1280160" y="2596896"/>
             <a:ext cx="4526280" cy="457200"/>
           </a:xfrm>
           <a:prstGeom prst="rect">
@@ -4657,7 +11947,7 @@
         </p:nvSpPr>
         <p:spPr>
           <a:xfrm>
-            <a:off x="685800" y="3630168"/>
+            <a:off x="685800" y="3319272"/>
             <a:ext cx="420624" cy="420624"/>
           </a:xfrm>
           <a:prstGeom prst="ellipse">
@@ -4712,7 +12002,7 @@
         </p:nvSpPr>
         <p:spPr>
           <a:xfrm>
-            <a:off x="1280160" y="3575304"/>
+            <a:off x="1280160" y="3264408"/>
             <a:ext cx="4526280" cy="292608"/>
           </a:xfrm>
           <a:prstGeom prst="rect">
@@ -4751,7 +12041,7 @@
         </p:nvSpPr>
         <p:spPr>
           <a:xfrm>
-            <a:off x="1280160" y="3877056"/>
+            <a:off x="1280160" y="3566160"/>
             <a:ext cx="4526280" cy="457200"/>
           </a:xfrm>
           <a:prstGeom prst="rect">
@@ -4790,7 +12080,7 @@
         </p:nvSpPr>
         <p:spPr>
           <a:xfrm>
-            <a:off x="685800" y="4709160"/>
+            <a:off x="685800" y="4288536"/>
             <a:ext cx="420624" cy="420624"/>
           </a:xfrm>
           <a:prstGeom prst="ellipse">
@@ -4845,7 +12135,7 @@
         </p:nvSpPr>
         <p:spPr>
           <a:xfrm>
-            <a:off x="1280160" y="4654296"/>
+            <a:off x="1280160" y="4233672"/>
             <a:ext cx="4526280" cy="292608"/>
           </a:xfrm>
           <a:prstGeom prst="rect">
@@ -4884,7 +12174,7 @@
         </p:nvSpPr>
         <p:spPr>
           <a:xfrm>
-            <a:off x="1280160" y="4956048"/>
+            <a:off x="1280160" y="4535424"/>
             <a:ext cx="4526280" cy="457200"/>
           </a:xfrm>
           <a:prstGeom prst="rect">
@@ -4923,7 +12213,7 @@
         </p:nvSpPr>
         <p:spPr>
           <a:xfrm>
-            <a:off x="6492240" y="1472184"/>
+            <a:off x="685800" y="5257800"/>
             <a:ext cx="420624" cy="420624"/>
           </a:xfrm>
           <a:prstGeom prst="ellipse">
@@ -4978,8 +12268,8 @@
         </p:nvSpPr>
         <p:spPr>
           <a:xfrm>
-            <a:off x="7086600" y="1417320"/>
-            <a:ext cx="4663440" cy="292608"/>
+            <a:off x="1280160" y="5202936"/>
+            <a:ext cx="4526280" cy="292608"/>
           </a:xfrm>
           <a:prstGeom prst="rect">
             <a:avLst/>
@@ -5017,8 +12307,8 @@
         </p:nvSpPr>
         <p:spPr>
           <a:xfrm>
-            <a:off x="7086600" y="1719072"/>
-            <a:ext cx="4663440" cy="457200"/>
+            <a:off x="1280160" y="5504688"/>
+            <a:ext cx="4526280" cy="457200"/>
           </a:xfrm>
           <a:prstGeom prst="rect">
             <a:avLst/>
@@ -5056,7 +12346,7 @@
         </p:nvSpPr>
         <p:spPr>
           <a:xfrm>
-            <a:off x="6492240" y="2551176"/>
+            <a:off x="6492240" y="1380744"/>
             <a:ext cx="420624" cy="420624"/>
           </a:xfrm>
           <a:prstGeom prst="ellipse">
@@ -5111,7 +12401,7 @@
         </p:nvSpPr>
         <p:spPr>
           <a:xfrm>
-            <a:off x="7086600" y="2496312"/>
+            <a:off x="7086600" y="1325880"/>
             <a:ext cx="4663440" cy="292608"/>
           </a:xfrm>
           <a:prstGeom prst="rect">
@@ -5150,7 +12440,7 @@
         </p:nvSpPr>
         <p:spPr>
           <a:xfrm>
-            <a:off x="7086600" y="2798064"/>
+            <a:off x="7086600" y="1627632"/>
             <a:ext cx="4663440" cy="457200"/>
           </a:xfrm>
           <a:prstGeom prst="rect">
@@ -5189,7 +12479,7 @@
         </p:nvSpPr>
         <p:spPr>
           <a:xfrm>
-            <a:off x="6492240" y="3630168"/>
+            <a:off x="6492240" y="2350008"/>
             <a:ext cx="420624" cy="420624"/>
           </a:xfrm>
           <a:prstGeom prst="ellipse">
@@ -5244,7 +12534,7 @@
         </p:nvSpPr>
         <p:spPr>
           <a:xfrm>
-            <a:off x="7086600" y="3575304"/>
+            <a:off x="7086600" y="2295144"/>
             <a:ext cx="4663440" cy="292608"/>
           </a:xfrm>
           <a:prstGeom prst="rect">
@@ -5270,7 +12560,7 @@
                 </a:solidFill>
                 <a:latin typeface="Calibri"/>
               </a:rPr>
-              <a:t>What the Service can &amp; cannot enact</a:t>
+              <a:t>The canonical 12-run matrix</a:t>
             </a:r>
           </a:p>
         </p:txBody>
@@ -5283,7 +12573,7 @@
         </p:nvSpPr>
         <p:spPr>
           <a:xfrm>
-            <a:off x="7086600" y="3877056"/>
+            <a:off x="7086600" y="2596896"/>
             <a:ext cx="4663440" cy="457200"/>
           </a:xfrm>
           <a:prstGeom prst="rect">
@@ -5309,6 +12599,272 @@
                 </a:solidFill>
                 <a:latin typeface="Calibri"/>
               </a:rPr>
+              <a:t>7.1 what the 12 runs parameterize · 7.2 what they measured</a:t>
+            </a:r>
+          </a:p>
+        </p:txBody>
+      </p:sp>
+      <p:sp>
+        <p:nvSpPr>
+          <p:cNvPr id="24" name="Oval 23"/>
+          <p:cNvSpPr/>
+          <p:nvPr/>
+        </p:nvSpPr>
+        <p:spPr>
+          <a:xfrm>
+            <a:off x="6492240" y="3319272"/>
+            <a:ext cx="420624" cy="420624"/>
+          </a:xfrm>
+          <a:prstGeom prst="ellipse">
+            <a:avLst/>
+          </a:prstGeom>
+          <a:solidFill>
+            <a:srgbClr val="E87A1E"/>
+          </a:solidFill>
+          <a:ln w="15875">
+            <a:solidFill>
+              <a:srgbClr val="FFFFFF"/>
+            </a:solidFill>
+          </a:ln>
+          <a:effectLst/>
+        </p:spPr>
+        <p:style>
+          <a:lnRef idx="1">
+            <a:schemeClr val="accent1"/>
+          </a:lnRef>
+          <a:fillRef idx="3">
+            <a:schemeClr val="accent1"/>
+          </a:fillRef>
+          <a:effectRef idx="2">
+            <a:schemeClr val="accent1"/>
+          </a:effectRef>
+          <a:fontRef idx="minor">
+            <a:schemeClr val="lt1"/>
+          </a:fontRef>
+        </p:style>
+        <p:txBody>
+          <a:bodyPr rtlCol="0" anchor="ctr" lIns="0" rIns="0" tIns="0" bIns="0"/>
+          <a:lstStyle/>
+          <a:p>
+            <a:pPr algn="ctr"/>
+            <a:r>
+              <a:rPr sz="1400" b="1" i="0">
+                <a:solidFill>
+                  <a:srgbClr val="FFFFFF"/>
+                </a:solidFill>
+                <a:latin typeface="Calibri"/>
+              </a:rPr>
+              <a:t>8</a:t>
+            </a:r>
+          </a:p>
+        </p:txBody>
+      </p:sp>
+      <p:sp>
+        <p:nvSpPr>
+          <p:cNvPr id="25" name="TextBox 24"/>
+          <p:cNvSpPr txBox="1"/>
+          <p:nvPr/>
+        </p:nvSpPr>
+        <p:spPr>
+          <a:xfrm>
+            <a:off x="7086600" y="3264408"/>
+            <a:ext cx="4663440" cy="292608"/>
+          </a:xfrm>
+          <a:prstGeom prst="rect">
+            <a:avLst/>
+          </a:prstGeom>
+          <a:noFill/>
+        </p:spPr>
+        <p:txBody>
+          <a:bodyPr wrap="square" anchor="t">
+            <a:spAutoFit/>
+          </a:bodyPr>
+          <a:lstStyle/>
+          <a:p>
+            <a:pPr algn="l">
+              <a:spcAft>
+                <a:spcPts val="300"/>
+              </a:spcAft>
+            </a:pPr>
+            <a:r>
+              <a:rPr sz="1700" b="1" i="0">
+                <a:solidFill>
+                  <a:srgbClr val="1B3A5C"/>
+                </a:solidFill>
+                <a:latin typeface="Calibri"/>
+              </a:rPr>
+              <a:t>Cross-platform &amp; plugin overhead</a:t>
+            </a:r>
+          </a:p>
+        </p:txBody>
+      </p:sp>
+      <p:sp>
+        <p:nvSpPr>
+          <p:cNvPr id="26" name="TextBox 25"/>
+          <p:cNvSpPr txBox="1"/>
+          <p:nvPr/>
+        </p:nvSpPr>
+        <p:spPr>
+          <a:xfrm>
+            <a:off x="7086600" y="3566160"/>
+            <a:ext cx="4663440" cy="457200"/>
+          </a:xfrm>
+          <a:prstGeom prst="rect">
+            <a:avLst/>
+          </a:prstGeom>
+          <a:noFill/>
+        </p:spPr>
+        <p:txBody>
+          <a:bodyPr wrap="square" anchor="t">
+            <a:spAutoFit/>
+          </a:bodyPr>
+          <a:lstStyle/>
+          <a:p>
+            <a:pPr algn="l">
+              <a:spcAft>
+                <a:spcPts val="300"/>
+              </a:spcAft>
+            </a:pPr>
+            <a:r>
+              <a:rPr sz="1250" b="0" i="0">
+                <a:solidFill>
+                  <a:srgbClr val="3A4654"/>
+                </a:solidFill>
+                <a:latin typeface="Calibri"/>
+              </a:rPr>
+              <a:t>8.1 OpenShift vs KinD, like-for-like · 8.2 what AuthBridge costs</a:t>
+            </a:r>
+          </a:p>
+        </p:txBody>
+      </p:sp>
+      <p:sp>
+        <p:nvSpPr>
+          <p:cNvPr id="27" name="Oval 26"/>
+          <p:cNvSpPr/>
+          <p:nvPr/>
+        </p:nvSpPr>
+        <p:spPr>
+          <a:xfrm>
+            <a:off x="6492240" y="4288536"/>
+            <a:ext cx="420624" cy="420624"/>
+          </a:xfrm>
+          <a:prstGeom prst="ellipse">
+            <a:avLst/>
+          </a:prstGeom>
+          <a:solidFill>
+            <a:srgbClr val="E87A1E"/>
+          </a:solidFill>
+          <a:ln w="15875">
+            <a:solidFill>
+              <a:srgbClr val="FFFFFF"/>
+            </a:solidFill>
+          </a:ln>
+          <a:effectLst/>
+        </p:spPr>
+        <p:style>
+          <a:lnRef idx="1">
+            <a:schemeClr val="accent1"/>
+          </a:lnRef>
+          <a:fillRef idx="3">
+            <a:schemeClr val="accent1"/>
+          </a:fillRef>
+          <a:effectRef idx="2">
+            <a:schemeClr val="accent1"/>
+          </a:effectRef>
+          <a:fontRef idx="minor">
+            <a:schemeClr val="lt1"/>
+          </a:fontRef>
+        </p:style>
+        <p:txBody>
+          <a:bodyPr rtlCol="0" anchor="ctr" lIns="0" rIns="0" tIns="0" bIns="0"/>
+          <a:lstStyle/>
+          <a:p>
+            <a:pPr algn="ctr"/>
+            <a:r>
+              <a:rPr sz="1400" b="1" i="0">
+                <a:solidFill>
+                  <a:srgbClr val="FFFFFF"/>
+                </a:solidFill>
+                <a:latin typeface="Calibri"/>
+              </a:rPr>
+              <a:t>9</a:t>
+            </a:r>
+          </a:p>
+        </p:txBody>
+      </p:sp>
+      <p:sp>
+        <p:nvSpPr>
+          <p:cNvPr id="28" name="TextBox 27"/>
+          <p:cNvSpPr txBox="1"/>
+          <p:nvPr/>
+        </p:nvSpPr>
+        <p:spPr>
+          <a:xfrm>
+            <a:off x="7086600" y="4233672"/>
+            <a:ext cx="4663440" cy="292608"/>
+          </a:xfrm>
+          <a:prstGeom prst="rect">
+            <a:avLst/>
+          </a:prstGeom>
+          <a:noFill/>
+        </p:spPr>
+        <p:txBody>
+          <a:bodyPr wrap="square" anchor="t">
+            <a:spAutoFit/>
+          </a:bodyPr>
+          <a:lstStyle/>
+          <a:p>
+            <a:pPr algn="l">
+              <a:spcAft>
+                <a:spcPts val="300"/>
+              </a:spcAft>
+            </a:pPr>
+            <a:r>
+              <a:rPr sz="1700" b="1" i="0">
+                <a:solidFill>
+                  <a:srgbClr val="1B3A5C"/>
+                </a:solidFill>
+                <a:latin typeface="Calibri"/>
+              </a:rPr>
+              <a:t>What the Service can &amp; cannot enact</a:t>
+            </a:r>
+          </a:p>
+        </p:txBody>
+      </p:sp>
+      <p:sp>
+        <p:nvSpPr>
+          <p:cNvPr id="29" name="TextBox 28"/>
+          <p:cNvSpPr txBox="1"/>
+          <p:nvPr/>
+        </p:nvSpPr>
+        <p:spPr>
+          <a:xfrm>
+            <a:off x="7086600" y="4535424"/>
+            <a:ext cx="4663440" cy="457200"/>
+          </a:xfrm>
+          <a:prstGeom prst="rect">
+            <a:avLst/>
+          </a:prstGeom>
+          <a:noFill/>
+        </p:spPr>
+        <p:txBody>
+          <a:bodyPr wrap="square" anchor="t">
+            <a:spAutoFit/>
+          </a:bodyPr>
+          <a:lstStyle/>
+          <a:p>
+            <a:pPr algn="l">
+              <a:spcAft>
+                <a:spcPts val="300"/>
+              </a:spcAft>
+            </a:pPr>
+            <a:r>
+              <a:rPr sz="1250" b="0" i="0">
+                <a:solidFill>
+                  <a:srgbClr val="3A4654"/>
+                </a:solidFill>
+                <a:latin typeface="Calibri"/>
+              </a:rPr>
               <a:t>the HTTP-only boundary, made explicit</a:t>
             </a:r>
           </a:p>
@@ -5316,14 +12872,14 @@
       </p:sp>
       <p:cxnSp>
         <p:nvCxnSpPr>
-          <p:cNvPr id="24" name="Connector 23"/>
+          <p:cNvPr id="30" name="Connector 29"/>
           <p:cNvCxnSpPr/>
           <p:nvPr/>
         </p:nvCxnSpPr>
         <p:spPr>
           <a:xfrm>
-            <a:off x="6080760" y="1371600"/>
-            <a:ext cx="0" cy="3886200"/>
+            <a:off x="6080760" y="1280160"/>
+            <a:ext cx="0" cy="4251960"/>
           </a:xfrm>
           <a:prstGeom prst="line">
             <a:avLst/>

--- a/docs/BenchmarkingService.pptx
+++ b/docs/BenchmarkingService.pptx
@@ -15151,18 +15151,6 @@
               <a:t>Benchmarking Client</a:t>
             </a:r>
           </a:p>
-          <a:p>
-            <a:pPr algn="ctr"/>
-            <a:r>
-              <a:rPr sz="1050" b="0" i="0">
-                <a:solidFill>
-                  <a:srgbClr val="E6F0E6"/>
-                </a:solidFill>
-                <a:latin typeface="Calibri"/>
-              </a:rPr>
-              <a:t>off-cluster (host / CI)</a:t>
-            </a:r>
-          </a:p>
         </p:txBody>
       </p:sp>
       <p:sp>
@@ -15332,7 +15320,7 @@
         <p:spPr>
           <a:xfrm>
             <a:off x="1691640" y="4343400"/>
-            <a:ext cx="1234440" cy="868680"/>
+            <a:ext cx="1417320" cy="868680"/>
           </a:xfrm>
           <a:prstGeom prst="roundRect">
             <a:avLst/>
@@ -15367,25 +15355,13 @@
           <a:p>
             <a:pPr algn="ctr"/>
             <a:r>
-              <a:rPr sz="1300" b="1" i="0">
+              <a:rPr sz="1150" b="1" i="0">
                 <a:solidFill>
                   <a:srgbClr val="FFFFFF"/>
                 </a:solidFill>
                 <a:latin typeface="Calibri"/>
               </a:rPr>
-              <a:t>MLflow</a:t>
-            </a:r>
-          </a:p>
-          <a:p>
-            <a:pPr algn="ctr"/>
-            <a:r>
-              <a:rPr sz="1000" b="0" i="0">
-                <a:solidFill>
-                  <a:srgbClr val="EEEFF1"/>
-                </a:solidFill>
-                <a:latin typeface="Calibri"/>
-              </a:rPr>
-              <a:t>traces</a:t>
+              <a:t>Experiment Tracker</a:t>
             </a:r>
           </a:p>
         </p:txBody>
@@ -15608,25 +15584,13 @@
           <a:p>
             <a:pPr algn="ctr"/>
             <a:r>
-              <a:rPr sz="1250" b="1" i="0">
+              <a:rPr sz="1200" b="1" i="0">
                 <a:solidFill>
                   <a:srgbClr val="FFFFFF"/>
                 </a:solidFill>
                 <a:latin typeface="Calibri"/>
               </a:rPr>
-              <a:t>Benchmark workload deployment helper</a:t>
-            </a:r>
-          </a:p>
-          <a:p>
-            <a:pPr algn="ctr"/>
-            <a:r>
-              <a:rPr sz="950" b="0" i="0">
-                <a:solidFill>
-                  <a:srgbClr val="F1E8F6"/>
-                </a:solidFill>
-                <a:latin typeface="Calibri"/>
-              </a:rPr>
-              <a:t>creates the MCP tool + A2A agent</a:t>
+              <a:t>Deployment helper for harnessed benchmark workload</a:t>
             </a:r>
           </a:p>
         </p:txBody>
@@ -15681,7 +15645,7 @@
                 </a:solidFill>
                 <a:latin typeface="Calibri"/>
               </a:rPr>
-              <a:t>Benchmark Workload</a:t>
+              <a:t>Harnessed benchmark workload</a:t>
             </a:r>
           </a:p>
         </p:txBody>
@@ -15736,19 +15700,7 @@
                 </a:solidFill>
                 <a:latin typeface="Calibri"/>
               </a:rPr>
-              <a:t>OTEL collector</a:t>
-            </a:r>
-          </a:p>
-          <a:p>
-            <a:pPr algn="ctr"/>
-            <a:r>
-              <a:rPr sz="950" b="0" i="0">
-                <a:solidFill>
-                  <a:srgbClr val="E4F0F0"/>
-                </a:solidFill>
-                <a:latin typeface="Calibri"/>
-              </a:rPr>
-              <a:t>workload spans → MLflow</a:t>
+              <a:t>Telemetry Collector</a:t>
             </a:r>
           </a:p>
         </p:txBody>
@@ -16314,8 +16266,8 @@
         </p:nvCxnSpPr>
         <p:spPr>
           <a:xfrm flipH="1">
-            <a:off x="2926080" y="4636008"/>
-            <a:ext cx="2697480" cy="155448"/>
+            <a:off x="3127248" y="4636008"/>
+            <a:ext cx="2496312" cy="137160"/>
           </a:xfrm>
           <a:prstGeom prst="line">
             <a:avLst/>
@@ -16352,7 +16304,7 @@
         </p:nvSpPr>
         <p:spPr>
           <a:xfrm>
-            <a:off x="4096512" y="4558284"/>
+            <a:off x="4215384" y="4549140"/>
             <a:ext cx="310896" cy="310896"/>
           </a:xfrm>
           <a:prstGeom prst="ellipse">
@@ -16695,7 +16647,7 @@
                 </a:solidFill>
                 <a:latin typeface="Calibri"/>
               </a:rPr>
-              <a:t>3  helper → Benchmark Workload:  MCP tool + A2A agent</a:t>
+              <a:t>3  helper → harnessed workload:  MCP tool + A2A agent</a:t>
             </a:r>
           </a:p>
           <a:p>
@@ -16711,7 +16663,7 @@
                 </a:solidFill>
                 <a:latin typeface="Calibri"/>
               </a:rPr>
-              <a:t>4  Service → Benchmark Workload:  run the benchmark</a:t>
+              <a:t>4  Service → harnessed workload:  run the benchmark</a:t>
             </a:r>
           </a:p>
         </p:txBody>
@@ -16750,7 +16702,7 @@
                 </a:solidFill>
                 <a:latin typeface="Calibri"/>
               </a:rPr>
-              <a:t>5  Service → MLflow:  emit the per-task trace</a:t>
+              <a:t>5  Service → Experiment Tracker:  emit the per-task trace</a:t>
             </a:r>
           </a:p>
           <a:p>
@@ -16766,7 +16718,7 @@
                 </a:solidFill>
                 <a:latin typeface="Calibri"/>
               </a:rPr>
-              <a:t>6a Workload → OTEL collector  ·  6b collector → MLflow</a:t>
+              <a:t>6a workload → Telemetry Collector  ·  6b collector → Tracker</a:t>
             </a:r>
           </a:p>
           <a:p>
@@ -16782,7 +16734,7 @@
                 </a:solidFill>
                 <a:latin typeface="Calibri"/>
               </a:rPr>
-              <a:t>7  MLflow → Service:  read the records back</a:t>
+              <a:t>7  Experiment Tracker → Service:  read the records back</a:t>
             </a:r>
           </a:p>
           <a:p>

--- a/docs/BenchmarkingService.pptx
+++ b/docs/BenchmarkingService.pptx
@@ -15253,7 +15253,7 @@
         <p:spPr>
           <a:xfrm>
             <a:off x="365760" y="4343400"/>
-            <a:ext cx="1234440" cy="868680"/>
+            <a:ext cx="1325880" cy="868680"/>
           </a:xfrm>
           <a:prstGeom prst="roundRect">
             <a:avLst/>
@@ -15288,25 +15288,13 @@
           <a:p>
             <a:pPr algn="ctr"/>
             <a:r>
-              <a:rPr sz="1300" b="1" i="0">
+              <a:rPr sz="950" b="1" i="0">
                 <a:solidFill>
                   <a:srgbClr val="FFFFFF"/>
                 </a:solidFill>
                 <a:latin typeface="Calibri"/>
               </a:rPr>
-              <a:t>S3</a:t>
-            </a:r>
-          </a:p>
-          <a:p>
-            <a:pPr algn="ctr"/>
-            <a:r>
-              <a:rPr sz="1000" b="0" i="0">
-                <a:solidFill>
-                  <a:srgbClr val="EEEFF1"/>
-                </a:solidFill>
-                <a:latin typeface="Calibri"/>
-              </a:rPr>
-              <a:t>shared sink</a:t>
+              <a:t>Shared store of benchmark run results</a:t>
             </a:r>
           </a:p>
         </p:txBody>
@@ -15319,8 +15307,8 @@
         </p:nvSpPr>
         <p:spPr>
           <a:xfrm>
-            <a:off x="1691640" y="4343400"/>
-            <a:ext cx="1417320" cy="868680"/>
+            <a:off x="1783080" y="4343400"/>
+            <a:ext cx="1325880" cy="868680"/>
           </a:xfrm>
           <a:prstGeom prst="roundRect">
             <a:avLst/>
@@ -15355,7 +15343,7 @@
           <a:p>
             <a:pPr algn="ctr"/>
             <a:r>
-              <a:rPr sz="1150" b="1" i="0">
+              <a:rPr sz="1100" b="1" i="0">
                 <a:solidFill>
                   <a:srgbClr val="FFFFFF"/>
                 </a:solidFill>
@@ -16081,7 +16069,7 @@
         </p:nvCxnSpPr>
         <p:spPr>
           <a:xfrm>
-            <a:off x="1965960" y="3931920"/>
+            <a:off x="2148840" y="3931920"/>
             <a:ext cx="0" cy="411480"/>
           </a:xfrm>
           <a:prstGeom prst="line">
@@ -16118,7 +16106,7 @@
         </p:nvSpPr>
         <p:spPr>
           <a:xfrm>
-            <a:off x="1847088" y="4014215"/>
+            <a:off x="2029968" y="4014215"/>
             <a:ext cx="237744" cy="237744"/>
           </a:xfrm>
           <a:prstGeom prst="ellipse">
@@ -16266,8 +16254,8 @@
         </p:nvCxnSpPr>
         <p:spPr>
           <a:xfrm flipH="1">
-            <a:off x="3127248" y="4636008"/>
-            <a:ext cx="2496312" cy="137160"/>
+            <a:off x="3108960" y="4636008"/>
+            <a:ext cx="2514600" cy="137160"/>
           </a:xfrm>
           <a:prstGeom prst="line">
             <a:avLst/>
@@ -16359,7 +16347,7 @@
         </p:nvCxnSpPr>
         <p:spPr>
           <a:xfrm flipV="1">
-            <a:off x="2651760" y="3931920"/>
+            <a:off x="2788920" y="3931920"/>
             <a:ext cx="0" cy="411480"/>
           </a:xfrm>
           <a:prstGeom prst="line">
@@ -16396,7 +16384,7 @@
         </p:nvSpPr>
         <p:spPr>
           <a:xfrm>
-            <a:off x="2532888" y="4014215"/>
+            <a:off x="2670048" y="4014215"/>
             <a:ext cx="237744" cy="237744"/>
           </a:xfrm>
           <a:prstGeom prst="ellipse">
@@ -16451,7 +16439,7 @@
         </p:nvCxnSpPr>
         <p:spPr>
           <a:xfrm>
-            <a:off x="1005840" y="3931920"/>
+            <a:off x="960120" y="3931920"/>
             <a:ext cx="0" cy="411480"/>
           </a:xfrm>
           <a:prstGeom prst="line">
@@ -16488,7 +16476,7 @@
         </p:nvSpPr>
         <p:spPr>
           <a:xfrm>
-            <a:off x="685800" y="4014215"/>
+            <a:off x="640080" y="4014215"/>
             <a:ext cx="237744" cy="237744"/>
           </a:xfrm>
           <a:prstGeom prst="ellipse">
@@ -16750,7 +16738,7 @@
                 </a:solidFill>
                 <a:latin typeface="Calibri"/>
               </a:rPr>
-              <a:t>8  Service → S3:  export the run's artifacts</a:t>
+              <a:t>8  Service → shared store:  export the run's artifacts</a:t>
             </a:r>
           </a:p>
         </p:txBody>

--- a/docs/BenchmarkingService.pptx
+++ b/docs/BenchmarkingService.pptx
@@ -16603,7 +16603,7 @@
                 </a:solidFill>
                 <a:latin typeface="Calibri"/>
               </a:rPr>
-              <a:t>1  Client → Service:  one bearer token, one hostname</a:t>
+              <a:t>1  Client → Service</a:t>
             </a:r>
           </a:p>
           <a:p>
@@ -16619,7 +16619,7 @@
                 </a:solidFill>
                 <a:latin typeface="Calibri"/>
               </a:rPr>
-              <a:t>2  Service → deployment helper:  create the workload</a:t>
+              <a:t>2  Service → deployment helper:  create the harnessed workload</a:t>
             </a:r>
           </a:p>
           <a:p>
@@ -16635,7 +16635,7 @@
                 </a:solidFill>
                 <a:latin typeface="Calibri"/>
               </a:rPr>
-              <a:t>3  helper → harnessed workload:  MCP tool + A2A agent</a:t>
+              <a:t>3  helper → harnessed workload</a:t>
             </a:r>
           </a:p>
           <a:p>
@@ -16651,7 +16651,7 @@
                 </a:solidFill>
                 <a:latin typeface="Calibri"/>
               </a:rPr>
-              <a:t>4  Service → harnessed workload:  run the benchmark</a:t>
+              <a:t>4  Service → harnessed workload:  run and monitor benchmark execution</a:t>
             </a:r>
           </a:p>
         </p:txBody>
@@ -16690,7 +16690,7 @@
                 </a:solidFill>
                 <a:latin typeface="Calibri"/>
               </a:rPr>
-              <a:t>5  Service → Experiment Tracker:  emit the per-task trace</a:t>
+              <a:t>5  Service → Experiment Tracker:  emit the trace</a:t>
             </a:r>
           </a:p>
           <a:p>

--- a/docs/BenchmarkingService.pptx
+++ b/docs/BenchmarkingService.pptx
@@ -15170,7 +15170,7 @@
           <a:solidFill>
             <a:srgbClr val="2E6FB5"/>
           </a:solidFill>
-          <a:ln>
+          <a:ln w="12700">
             <a:solidFill>
               <a:srgbClr val="2E6FB5"/>
             </a:solidFill>
@@ -15192,7 +15192,7 @@
           </a:fontRef>
         </p:style>
         <p:txBody>
-          <a:bodyPr rtlCol="0" anchor="t" wrap="square" lIns="101600" tIns="88900"/>
+          <a:bodyPr rtlCol="0" anchor="ctr" wrap="square" tIns="25400" bIns="25400"/>
           <a:lstStyle/>
           <a:p>
             <a:pPr algn="ctr"/>
@@ -15204,42 +15204,6 @@
                 <a:latin typeface="Calibri"/>
               </a:rPr>
               <a:t>Benchmarking Service</a:t>
-            </a:r>
-          </a:p>
-          <a:p>
-            <a:pPr algn="l" lvl="1"/>
-            <a:r>
-              <a:rPr sz="1100" b="0" i="0">
-                <a:solidFill>
-                  <a:srgbClr val="FFFFFF"/>
-                </a:solidFill>
-                <a:latin typeface="Calibri"/>
-              </a:rPr>
-              <a:t>• deploy the workload</a:t>
-            </a:r>
-          </a:p>
-          <a:p>
-            <a:pPr algn="l" lvl="1"/>
-            <a:r>
-              <a:rPr sz="1100" b="0" i="0">
-                <a:solidFill>
-                  <a:srgbClr val="FFFFFF"/>
-                </a:solidFill>
-                <a:latin typeface="Calibri"/>
-              </a:rPr>
-              <a:t>• run the benchmark</a:t>
-            </a:r>
-          </a:p>
-          <a:p>
-            <a:pPr algn="l" lvl="1"/>
-            <a:r>
-              <a:rPr sz="1100" b="0" i="0">
-                <a:solidFill>
-                  <a:srgbClr val="FFFFFF"/>
-                </a:solidFill>
-                <a:latin typeface="Calibri"/>
-              </a:rPr>
-              <a:t>• read + export results</a:t>
             </a:r>
           </a:p>
         </p:txBody>
